--- a/output/wordlabs-hood-suffix-3day.pptx
+++ b/output/wordlabs-hood-suffix-3day.pptx
@@ -6040,7 +6040,7 @@
                 <a:ea typeface="Calibri" pitchFamily="34" charset="-122"/>
                 <a:cs typeface="Calibri" pitchFamily="34" charset="-120"/>
               </a:rPr>
-              <a:t>She missed the freedom of </a:t>
+              <a:t>During his </a:t>
             </a:r>
             <a:pPr algn="l" indent="0" marL="0">
               <a:buNone/>
@@ -6071,7 +6071,7 @@
                 <a:ea typeface="Calibri" pitchFamily="34" charset="-122"/>
                 <a:cs typeface="Calibri" pitchFamily="34" charset="-120"/>
               </a:rPr>
-              <a:t>, but she loved the responsibilities of </a:t>
+              <a:t>, he dreamed of living in a friendly </a:t>
             </a:r>
             <a:pPr algn="l" indent="0" marL="0">
               <a:buNone/>
@@ -6088,7 +6088,7 @@
                 <a:ea typeface="Calibri" pitchFamily="34" charset="-122"/>
                 <a:cs typeface="Calibri" pitchFamily="34" charset="-120"/>
               </a:rPr>
-              <a:t>parenthood</a:t>
+              <a:t>neighbourhood</a:t>
             </a:r>
             <a:pPr algn="l" indent="0" marL="0">
               <a:buNone/>
@@ -6385,7 +6385,7 @@
                 <a:ea typeface="Trebuchet MS" pitchFamily="34" charset="-122"/>
                 <a:cs typeface="Trebuchet MS" pitchFamily="34" charset="-120"/>
               </a:rPr>
-              <a:t>parenthood</a:t>
+              <a:t>neighbourhood</a:t>
             </a:r>
             <a:endParaRPr lang="en-US" sz="1400" dirty="0"/>
           </a:p>
@@ -11324,7 +11324,7 @@
                 <a:ea typeface="Trebuchet MS" pitchFamily="34" charset="-122"/>
                 <a:cs typeface="Trebuchet MS" pitchFamily="34" charset="-120"/>
               </a:rPr>
-              <a:t>parenthood</a:t>
+              <a:t>neighbourhood</a:t>
             </a:r>
             <a:endParaRPr lang="en-US" sz="2800" dirty="0"/>
           </a:p>
@@ -12151,7 +12151,7 @@
                 <a:ea typeface="Trebuchet MS" pitchFamily="34" charset="-122"/>
                 <a:cs typeface="Trebuchet MS" pitchFamily="34" charset="-120"/>
               </a:rPr>
-              <a:t>parenthood</a:t>
+              <a:t>neighbourhood</a:t>
             </a:r>
             <a:endParaRPr lang="en-US" sz="2800" dirty="0"/>
           </a:p>
@@ -12290,7 +12290,7 @@
                 <a:ea typeface="Trebuchet MS" pitchFamily="34" charset="-122"/>
                 <a:cs typeface="Trebuchet MS" pitchFamily="34" charset="-120"/>
               </a:rPr>
-              <a:t>parent</a:t>
+              <a:t>neighbour</a:t>
             </a:r>
             <a:endParaRPr lang="en-US" sz="1300" dirty="0"/>
           </a:p>
@@ -12329,7 +12329,7 @@
                 <a:ea typeface="Calibri" pitchFamily="34" charset="-122"/>
                 <a:cs typeface="Calibri" pitchFamily="34" charset="-120"/>
               </a:rPr>
-              <a:t>mother or father</a:t>
+              <a:t>person living nearby</a:t>
             </a:r>
             <a:endParaRPr lang="en-US" sz="850" dirty="0"/>
           </a:p>
@@ -13136,7 +13136,7 @@
                 <a:ea typeface="Trebuchet MS" pitchFamily="34" charset="-122"/>
                 <a:cs typeface="Trebuchet MS" pitchFamily="34" charset="-120"/>
               </a:rPr>
-              <a:t>parenthood</a:t>
+              <a:t>neighbourhood</a:t>
             </a:r>
             <a:endParaRPr lang="en-US" sz="2800" dirty="0"/>
           </a:p>
@@ -13275,7 +13275,7 @@
                 <a:ea typeface="Trebuchet MS" pitchFamily="34" charset="-122"/>
                 <a:cs typeface="Trebuchet MS" pitchFamily="34" charset="-120"/>
               </a:rPr>
-              <a:t>parent</a:t>
+              <a:t>neighbour</a:t>
             </a:r>
             <a:endParaRPr lang="en-US" sz="1300" dirty="0"/>
           </a:p>
@@ -13314,7 +13314,7 @@
                 <a:ea typeface="Calibri" pitchFamily="34" charset="-122"/>
                 <a:cs typeface="Calibri" pitchFamily="34" charset="-120"/>
               </a:rPr>
-              <a:t>mother or father</a:t>
+              <a:t>person living nearby</a:t>
             </a:r>
             <a:endParaRPr lang="en-US" sz="850" dirty="0"/>
           </a:p>
@@ -13585,7 +13585,7 @@
                 <a:ea typeface="Trebuchet MS" pitchFamily="34" charset="-122"/>
                 <a:cs typeface="Trebuchet MS" pitchFamily="34" charset="-120"/>
               </a:rPr>
-              <a:t>par</a:t>
+              <a:t>neigh</a:t>
             </a:r>
             <a:endParaRPr lang="en-US" sz="1400" dirty="0"/>
           </a:p>
@@ -13690,7 +13690,7 @@
                 <a:ea typeface="Trebuchet MS" pitchFamily="34" charset="-122"/>
                 <a:cs typeface="Trebuchet MS" pitchFamily="34" charset="-120"/>
               </a:rPr>
-              <a:t>ent</a:t>
+              <a:t>bour</a:t>
             </a:r>
             <a:endParaRPr lang="en-US" sz="1400" dirty="0"/>
           </a:p>
@@ -14623,7 +14623,7 @@
                 <a:ea typeface="Trebuchet MS" pitchFamily="34" charset="-122"/>
                 <a:cs typeface="Trebuchet MS" pitchFamily="34" charset="-120"/>
               </a:rPr>
-              <a:t>parenthood</a:t>
+              <a:t>neighbourhood</a:t>
             </a:r>
             <a:endParaRPr lang="en-US" sz="2800" dirty="0"/>
           </a:p>
@@ -14762,7 +14762,7 @@
                 <a:ea typeface="Trebuchet MS" pitchFamily="34" charset="-122"/>
                 <a:cs typeface="Trebuchet MS" pitchFamily="34" charset="-120"/>
               </a:rPr>
-              <a:t>parent</a:t>
+              <a:t>neighbour</a:t>
             </a:r>
             <a:endParaRPr lang="en-US" sz="1300" dirty="0"/>
           </a:p>
@@ -14801,7 +14801,7 @@
                 <a:ea typeface="Calibri" pitchFamily="34" charset="-122"/>
                 <a:cs typeface="Calibri" pitchFamily="34" charset="-120"/>
               </a:rPr>
-              <a:t>mother or father</a:t>
+              <a:t>person living nearby</a:t>
             </a:r>
             <a:endParaRPr lang="en-US" sz="850" dirty="0"/>
           </a:p>
@@ -15072,7 +15072,7 @@
                 <a:ea typeface="Trebuchet MS" pitchFamily="34" charset="-122"/>
                 <a:cs typeface="Trebuchet MS" pitchFamily="34" charset="-120"/>
               </a:rPr>
-              <a:t>par</a:t>
+              <a:t>neigh</a:t>
             </a:r>
             <a:endParaRPr lang="en-US" sz="1400" dirty="0"/>
           </a:p>
@@ -15177,7 +15177,7 @@
                 <a:ea typeface="Trebuchet MS" pitchFamily="34" charset="-122"/>
                 <a:cs typeface="Trebuchet MS" pitchFamily="34" charset="-120"/>
               </a:rPr>
-              <a:t>ent</a:t>
+              <a:t>bour</a:t>
             </a:r>
             <a:endParaRPr lang="en-US" sz="1400" dirty="0"/>
           </a:p>
@@ -15363,11 +15363,11 @@
         <p:spPr>
           <a:xfrm>
             <a:off x="1874520" y="4096512"/>
-            <a:ext cx="6903720" cy="658368"/>
+            <a:ext cx="6903720" cy="804672"/>
           </a:xfrm>
           <a:prstGeom prst="rect">
             <a:avLst>
-              <a:gd name="adj" fmla="val 8333"/>
+              <a:gd name="adj" fmla="val 6818"/>
             </a:avLst>
           </a:prstGeom>
           <a:solidFill>
@@ -15389,12 +15389,12 @@
         </p:nvSpPr>
         <p:spPr>
           <a:xfrm>
-            <a:off x="2023872" y="4169664"/>
-            <a:ext cx="685800" cy="475488"/>
+            <a:off x="2124837" y="4169664"/>
+            <a:ext cx="685800" cy="384048"/>
           </a:xfrm>
           <a:prstGeom prst="rect">
             <a:avLst>
-              <a:gd name="adj" fmla="val 7692"/>
+              <a:gd name="adj" fmla="val 9524"/>
             </a:avLst>
           </a:prstGeom>
           <a:solidFill>
@@ -15416,8 +15416,8 @@
         </p:nvSpPr>
         <p:spPr>
           <a:xfrm>
-            <a:off x="2023872" y="4169664"/>
-            <a:ext cx="685800" cy="475488"/>
+            <a:off x="2124837" y="4169664"/>
+            <a:ext cx="685800" cy="384048"/>
           </a:xfrm>
           <a:prstGeom prst="rect">
             <a:avLst/>
@@ -15441,7 +15441,7 @@
                 <a:ea typeface="Trebuchet MS" pitchFamily="34" charset="-122"/>
                 <a:cs typeface="Trebuchet MS" pitchFamily="34" charset="-120"/>
               </a:rPr>
-              <a:t>p</a:t>
+              <a:t>n</a:t>
             </a:r>
             <a:endParaRPr lang="en-US" sz="900" dirty="0"/>
           </a:p>
@@ -15455,12 +15455,12 @@
         </p:nvSpPr>
         <p:spPr>
           <a:xfrm>
-            <a:off x="2831592" y="4169664"/>
-            <a:ext cx="685800" cy="475488"/>
+            <a:off x="3033522" y="4169664"/>
+            <a:ext cx="685800" cy="384048"/>
           </a:xfrm>
           <a:prstGeom prst="rect">
             <a:avLst>
-              <a:gd name="adj" fmla="val 7692"/>
+              <a:gd name="adj" fmla="val 9524"/>
             </a:avLst>
           </a:prstGeom>
           <a:solidFill>
@@ -15482,8 +15482,8 @@
         </p:nvSpPr>
         <p:spPr>
           <a:xfrm>
-            <a:off x="2831592" y="4169664"/>
-            <a:ext cx="685800" cy="475488"/>
+            <a:off x="3033522" y="4169664"/>
+            <a:ext cx="685800" cy="384048"/>
           </a:xfrm>
           <a:prstGeom prst="rect">
             <a:avLst/>
@@ -15507,7 +15507,7 @@
                 <a:ea typeface="Trebuchet MS" pitchFamily="34" charset="-122"/>
                 <a:cs typeface="Trebuchet MS" pitchFamily="34" charset="-120"/>
               </a:rPr>
-              <a:t>ar</a:t>
+              <a:t>eigh</a:t>
             </a:r>
             <a:endParaRPr lang="en-US" sz="900" dirty="0"/>
           </a:p>
@@ -15515,18 +15515,57 @@
       </p:sp>
       <p:sp>
         <p:nvSpPr>
-          <p:cNvPr id="40" name="Shape 38"/>
-          <p:cNvSpPr/>
-          <p:nvPr/>
-        </p:nvSpPr>
-        <p:spPr>
-          <a:xfrm>
-            <a:off x="3639312" y="4169664"/>
-            <a:ext cx="685800" cy="475488"/>
+          <p:cNvPr id="40" name="Text 38"/>
+          <p:cNvSpPr/>
+          <p:nvPr/>
+        </p:nvSpPr>
+        <p:spPr>
+          <a:xfrm>
+            <a:off x="3033522" y="4572000"/>
+            <a:ext cx="685800" cy="219456"/>
+          </a:xfrm>
+          <a:prstGeom prst="rect">
+            <a:avLst/>
+          </a:prstGeom>
+          <a:noFill/>
+          <a:ln/>
+        </p:spPr>
+        <p:txBody>
+          <a:bodyPr wrap="square" lIns="0" tIns="0" rIns="0" bIns="0" rtlCol="0" anchor="t"/>
+          <a:lstStyle/>
+          <a:p>
+            <a:pPr algn="ctr" indent="0" marL="0">
+              <a:buNone/>
+            </a:pPr>
+            <a:r>
+              <a:rPr lang="en-US" sz="750" i="1" dirty="0">
+                <a:solidFill>
+                  <a:srgbClr val="94A3B8"/>
+                </a:solidFill>
+                <a:latin typeface="Calibri" pitchFamily="34" charset="0"/>
+                <a:ea typeface="Calibri" pitchFamily="34" charset="-122"/>
+                <a:cs typeface="Calibri" pitchFamily="34" charset="-120"/>
+              </a:rPr>
+              <a:t>/ay/</a:t>
+            </a:r>
+            <a:endParaRPr lang="en-US" sz="750" dirty="0"/>
+          </a:p>
+        </p:txBody>
+      </p:sp>
+      <p:sp>
+        <p:nvSpPr>
+          <p:cNvPr id="41" name="Shape 39"/>
+          <p:cNvSpPr/>
+          <p:nvPr/>
+        </p:nvSpPr>
+        <p:spPr>
+          <a:xfrm>
+            <a:off x="3942207" y="4169664"/>
+            <a:ext cx="685800" cy="384048"/>
           </a:xfrm>
           <a:prstGeom prst="rect">
             <a:avLst>
-              <a:gd name="adj" fmla="val 7692"/>
+              <a:gd name="adj" fmla="val 9524"/>
             </a:avLst>
           </a:prstGeom>
           <a:solidFill>
@@ -15542,14 +15581,14 @@
       </p:sp>
       <p:sp>
         <p:nvSpPr>
-          <p:cNvPr id="41" name="Text 39"/>
-          <p:cNvSpPr/>
-          <p:nvPr/>
-        </p:nvSpPr>
-        <p:spPr>
-          <a:xfrm>
-            <a:off x="3639312" y="4169664"/>
-            <a:ext cx="685800" cy="475488"/>
+          <p:cNvPr id="42" name="Text 40"/>
+          <p:cNvSpPr/>
+          <p:nvPr/>
+        </p:nvSpPr>
+        <p:spPr>
+          <a:xfrm>
+            <a:off x="3942207" y="4169664"/>
+            <a:ext cx="685800" cy="384048"/>
           </a:xfrm>
           <a:prstGeom prst="rect">
             <a:avLst/>
@@ -15573,7 +15612,7 @@
                 <a:ea typeface="Trebuchet MS" pitchFamily="34" charset="-122"/>
                 <a:cs typeface="Trebuchet MS" pitchFamily="34" charset="-120"/>
               </a:rPr>
-              <a:t>e</a:t>
+              <a:t>b</a:t>
             </a:r>
             <a:endParaRPr lang="en-US" sz="900" dirty="0"/>
           </a:p>
@@ -15581,18 +15620,18 @@
       </p:sp>
       <p:sp>
         <p:nvSpPr>
-          <p:cNvPr id="42" name="Shape 40"/>
-          <p:cNvSpPr/>
-          <p:nvPr/>
-        </p:nvSpPr>
-        <p:spPr>
-          <a:xfrm>
-            <a:off x="4447032" y="4169664"/>
-            <a:ext cx="685800" cy="475488"/>
+          <p:cNvPr id="43" name="Shape 41"/>
+          <p:cNvSpPr/>
+          <p:nvPr/>
+        </p:nvSpPr>
+        <p:spPr>
+          <a:xfrm>
+            <a:off x="4850892" y="4169664"/>
+            <a:ext cx="685800" cy="384048"/>
           </a:xfrm>
           <a:prstGeom prst="rect">
             <a:avLst>
-              <a:gd name="adj" fmla="val 7692"/>
+              <a:gd name="adj" fmla="val 9524"/>
             </a:avLst>
           </a:prstGeom>
           <a:solidFill>
@@ -15608,14 +15647,14 @@
       </p:sp>
       <p:sp>
         <p:nvSpPr>
-          <p:cNvPr id="43" name="Text 41"/>
-          <p:cNvSpPr/>
-          <p:nvPr/>
-        </p:nvSpPr>
-        <p:spPr>
-          <a:xfrm>
-            <a:off x="4447032" y="4169664"/>
-            <a:ext cx="685800" cy="475488"/>
+          <p:cNvPr id="44" name="Text 42"/>
+          <p:cNvSpPr/>
+          <p:nvPr/>
+        </p:nvSpPr>
+        <p:spPr>
+          <a:xfrm>
+            <a:off x="4850892" y="4169664"/>
+            <a:ext cx="685800" cy="384048"/>
           </a:xfrm>
           <a:prstGeom prst="rect">
             <a:avLst/>
@@ -15639,7 +15678,7 @@
                 <a:ea typeface="Trebuchet MS" pitchFamily="34" charset="-122"/>
                 <a:cs typeface="Trebuchet MS" pitchFamily="34" charset="-120"/>
               </a:rPr>
-              <a:t>n</a:t>
+              <a:t>our</a:t>
             </a:r>
             <a:endParaRPr lang="en-US" sz="900" dirty="0"/>
           </a:p>
@@ -15647,18 +15686,57 @@
       </p:sp>
       <p:sp>
         <p:nvSpPr>
-          <p:cNvPr id="44" name="Shape 42"/>
-          <p:cNvSpPr/>
-          <p:nvPr/>
-        </p:nvSpPr>
-        <p:spPr>
-          <a:xfrm>
-            <a:off x="5254752" y="4169664"/>
-            <a:ext cx="685800" cy="475488"/>
+          <p:cNvPr id="45" name="Text 43"/>
+          <p:cNvSpPr/>
+          <p:nvPr/>
+        </p:nvSpPr>
+        <p:spPr>
+          <a:xfrm>
+            <a:off x="4850892" y="4572000"/>
+            <a:ext cx="685800" cy="219456"/>
+          </a:xfrm>
+          <a:prstGeom prst="rect">
+            <a:avLst/>
+          </a:prstGeom>
+          <a:noFill/>
+          <a:ln/>
+        </p:spPr>
+        <p:txBody>
+          <a:bodyPr wrap="square" lIns="0" tIns="0" rIns="0" bIns="0" rtlCol="0" anchor="t"/>
+          <a:lstStyle/>
+          <a:p>
+            <a:pPr algn="ctr" indent="0" marL="0">
+              <a:buNone/>
+            </a:pPr>
+            <a:r>
+              <a:rPr lang="en-US" sz="750" i="1" dirty="0">
+                <a:solidFill>
+                  <a:srgbClr val="94A3B8"/>
+                </a:solidFill>
+                <a:latin typeface="Calibri" pitchFamily="34" charset="0"/>
+                <a:ea typeface="Calibri" pitchFamily="34" charset="-122"/>
+                <a:cs typeface="Calibri" pitchFamily="34" charset="-120"/>
+              </a:rPr>
+              <a:t>/er/</a:t>
+            </a:r>
+            <a:endParaRPr lang="en-US" sz="750" dirty="0"/>
+          </a:p>
+        </p:txBody>
+      </p:sp>
+      <p:sp>
+        <p:nvSpPr>
+          <p:cNvPr id="46" name="Shape 44"/>
+          <p:cNvSpPr/>
+          <p:nvPr/>
+        </p:nvSpPr>
+        <p:spPr>
+          <a:xfrm>
+            <a:off x="5759577" y="4169664"/>
+            <a:ext cx="685800" cy="384048"/>
           </a:xfrm>
           <a:prstGeom prst="rect">
             <a:avLst>
-              <a:gd name="adj" fmla="val 7692"/>
+              <a:gd name="adj" fmla="val 9524"/>
             </a:avLst>
           </a:prstGeom>
           <a:solidFill>
@@ -15674,14 +15752,14 @@
       </p:sp>
       <p:sp>
         <p:nvSpPr>
-          <p:cNvPr id="45" name="Text 43"/>
-          <p:cNvSpPr/>
-          <p:nvPr/>
-        </p:nvSpPr>
-        <p:spPr>
-          <a:xfrm>
-            <a:off x="5254752" y="4169664"/>
-            <a:ext cx="685800" cy="475488"/>
+          <p:cNvPr id="47" name="Text 45"/>
+          <p:cNvSpPr/>
+          <p:nvPr/>
+        </p:nvSpPr>
+        <p:spPr>
+          <a:xfrm>
+            <a:off x="5759577" y="4169664"/>
+            <a:ext cx="685800" cy="384048"/>
           </a:xfrm>
           <a:prstGeom prst="rect">
             <a:avLst/>
@@ -15705,7 +15783,7 @@
                 <a:ea typeface="Trebuchet MS" pitchFamily="34" charset="-122"/>
                 <a:cs typeface="Trebuchet MS" pitchFamily="34" charset="-120"/>
               </a:rPr>
-              <a:t>t</a:t>
+              <a:t>h</a:t>
             </a:r>
             <a:endParaRPr lang="en-US" sz="900" dirty="0"/>
           </a:p>
@@ -15713,18 +15791,18 @@
       </p:sp>
       <p:sp>
         <p:nvSpPr>
-          <p:cNvPr id="46" name="Shape 44"/>
-          <p:cNvSpPr/>
-          <p:nvPr/>
-        </p:nvSpPr>
-        <p:spPr>
-          <a:xfrm>
-            <a:off x="6062472" y="4169664"/>
-            <a:ext cx="685800" cy="475488"/>
+          <p:cNvPr id="48" name="Shape 46"/>
+          <p:cNvSpPr/>
+          <p:nvPr/>
+        </p:nvSpPr>
+        <p:spPr>
+          <a:xfrm>
+            <a:off x="6668262" y="4169664"/>
+            <a:ext cx="685800" cy="384048"/>
           </a:xfrm>
           <a:prstGeom prst="rect">
             <a:avLst>
-              <a:gd name="adj" fmla="val 7692"/>
+              <a:gd name="adj" fmla="val 9524"/>
             </a:avLst>
           </a:prstGeom>
           <a:solidFill>
@@ -15740,14 +15818,14 @@
       </p:sp>
       <p:sp>
         <p:nvSpPr>
-          <p:cNvPr id="47" name="Text 45"/>
-          <p:cNvSpPr/>
-          <p:nvPr/>
-        </p:nvSpPr>
-        <p:spPr>
-          <a:xfrm>
-            <a:off x="6062472" y="4169664"/>
-            <a:ext cx="685800" cy="475488"/>
+          <p:cNvPr id="49" name="Text 47"/>
+          <p:cNvSpPr/>
+          <p:nvPr/>
+        </p:nvSpPr>
+        <p:spPr>
+          <a:xfrm>
+            <a:off x="6668262" y="4169664"/>
+            <a:ext cx="685800" cy="384048"/>
           </a:xfrm>
           <a:prstGeom prst="rect">
             <a:avLst/>
@@ -15771,7 +15849,7 @@
                 <a:ea typeface="Trebuchet MS" pitchFamily="34" charset="-122"/>
                 <a:cs typeface="Trebuchet MS" pitchFamily="34" charset="-120"/>
               </a:rPr>
-              <a:t>h</a:t>
+              <a:t>oo</a:t>
             </a:r>
             <a:endParaRPr lang="en-US" sz="900" dirty="0"/>
           </a:p>
@@ -15779,18 +15857,18 @@
       </p:sp>
       <p:sp>
         <p:nvSpPr>
-          <p:cNvPr id="48" name="Shape 46"/>
-          <p:cNvSpPr/>
-          <p:nvPr/>
-        </p:nvSpPr>
-        <p:spPr>
-          <a:xfrm>
-            <a:off x="6870192" y="4169664"/>
-            <a:ext cx="685800" cy="475488"/>
+          <p:cNvPr id="50" name="Shape 48"/>
+          <p:cNvSpPr/>
+          <p:nvPr/>
+        </p:nvSpPr>
+        <p:spPr>
+          <a:xfrm>
+            <a:off x="7576947" y="4169664"/>
+            <a:ext cx="685800" cy="384048"/>
           </a:xfrm>
           <a:prstGeom prst="rect">
             <a:avLst>
-              <a:gd name="adj" fmla="val 7692"/>
+              <a:gd name="adj" fmla="val 9524"/>
             </a:avLst>
           </a:prstGeom>
           <a:solidFill>
@@ -15806,80 +15884,14 @@
       </p:sp>
       <p:sp>
         <p:nvSpPr>
-          <p:cNvPr id="49" name="Text 47"/>
-          <p:cNvSpPr/>
-          <p:nvPr/>
-        </p:nvSpPr>
-        <p:spPr>
-          <a:xfrm>
-            <a:off x="6870192" y="4169664"/>
-            <a:ext cx="685800" cy="475488"/>
-          </a:xfrm>
-          <a:prstGeom prst="rect">
-            <a:avLst/>
-          </a:prstGeom>
-          <a:noFill/>
-          <a:ln/>
-        </p:spPr>
-        <p:txBody>
-          <a:bodyPr wrap="square" lIns="0" tIns="0" rIns="0" bIns="0" rtlCol="0" anchor="ctr"/>
-          <a:lstStyle/>
-          <a:p>
-            <a:pPr algn="ctr" indent="0" marL="0">
-              <a:buNone/>
-            </a:pPr>
-            <a:r>
-              <a:rPr lang="en-US" sz="900" b="1" dirty="0">
-                <a:solidFill>
-                  <a:srgbClr val="9D174D"/>
-                </a:solidFill>
-                <a:latin typeface="Trebuchet MS" pitchFamily="34" charset="0"/>
-                <a:ea typeface="Trebuchet MS" pitchFamily="34" charset="-122"/>
-                <a:cs typeface="Trebuchet MS" pitchFamily="34" charset="-120"/>
-              </a:rPr>
-              <a:t>oo</a:t>
-            </a:r>
-            <a:endParaRPr lang="en-US" sz="900" dirty="0"/>
-          </a:p>
-        </p:txBody>
-      </p:sp>
-      <p:sp>
-        <p:nvSpPr>
-          <p:cNvPr id="50" name="Shape 48"/>
-          <p:cNvSpPr/>
-          <p:nvPr/>
-        </p:nvSpPr>
-        <p:spPr>
-          <a:xfrm>
-            <a:off x="7677912" y="4169664"/>
-            <a:ext cx="685800" cy="475488"/>
-          </a:xfrm>
-          <a:prstGeom prst="rect">
-            <a:avLst>
-              <a:gd name="adj" fmla="val 7692"/>
-            </a:avLst>
-          </a:prstGeom>
-          <a:solidFill>
-            <a:srgbClr val="FFFFFF"/>
-          </a:solidFill>
-          <a:ln w="12700">
-            <a:solidFill>
-              <a:srgbClr val="DB2777"/>
-            </a:solidFill>
-            <a:prstDash val="solid"/>
-          </a:ln>
-        </p:spPr>
-      </p:sp>
-      <p:sp>
-        <p:nvSpPr>
           <p:cNvPr id="51" name="Text 49"/>
           <p:cNvSpPr/>
           <p:nvPr/>
         </p:nvSpPr>
         <p:spPr>
           <a:xfrm>
-            <a:off x="7677912" y="4169664"/>
-            <a:ext cx="685800" cy="475488"/>
+            <a:off x="7576947" y="4169664"/>
+            <a:ext cx="685800" cy="384048"/>
           </a:xfrm>
           <a:prstGeom prst="rect">
             <a:avLst/>
@@ -17229,7 +17241,7 @@
                 <a:ea typeface="Calibri" pitchFamily="34" charset="-122"/>
                 <a:cs typeface="Calibri" pitchFamily="34" charset="-120"/>
               </a:rPr>
-              <a:t>In our </a:t>
+              <a:t>In </a:t>
             </a:r>
             <a:pPr algn="l" indent="0" marL="0">
               <a:buNone/>
@@ -17246,7 +17258,7 @@
                 <a:ea typeface="Calibri" pitchFamily="34" charset="-122"/>
                 <a:cs typeface="Calibri" pitchFamily="34" charset="-120"/>
               </a:rPr>
-              <a:t>neighbourhood</a:t>
+              <a:t>adulthood</a:t>
             </a:r>
             <a:pPr algn="l" indent="0" marL="0">
               <a:buNone/>
@@ -17260,7 +17272,7 @@
                 <a:ea typeface="Calibri" pitchFamily="34" charset="-122"/>
                 <a:cs typeface="Calibri" pitchFamily="34" charset="-120"/>
               </a:rPr>
-              <a:t>, the spirit of </a:t>
+              <a:t>, she appreciated the </a:t>
             </a:r>
             <a:pPr algn="l" indent="0" marL="0">
               <a:buNone/>
@@ -17291,7 +17303,7 @@
                 <a:ea typeface="Calibri" pitchFamily="34" charset="-122"/>
                 <a:cs typeface="Calibri" pitchFamily="34" charset="-120"/>
               </a:rPr>
-              <a:t> helped everyone through the difficulties of </a:t>
+              <a:t> of her team and was proud of her </a:t>
             </a:r>
             <a:pPr algn="l" indent="0" marL="0">
               <a:buNone/>
@@ -17308,7 +17320,7 @@
                 <a:ea typeface="Calibri" pitchFamily="34" charset="-122"/>
                 <a:cs typeface="Calibri" pitchFamily="34" charset="-120"/>
               </a:rPr>
-              <a:t>adulthood</a:t>
+              <a:t>motherhood</a:t>
             </a:r>
             <a:pPr algn="l" indent="0" marL="0">
               <a:buNone/>
@@ -17477,7 +17489,7 @@
                 <a:ea typeface="Trebuchet MS" pitchFamily="34" charset="-122"/>
                 <a:cs typeface="Trebuchet MS" pitchFamily="34" charset="-120"/>
               </a:rPr>
-              <a:t>neighbourhood</a:t>
+              <a:t>adulthood</a:t>
             </a:r>
             <a:endParaRPr lang="en-US" sz="1400" dirty="0"/>
           </a:p>
@@ -17733,7 +17745,7 @@
                 <a:ea typeface="Trebuchet MS" pitchFamily="34" charset="-122"/>
                 <a:cs typeface="Trebuchet MS" pitchFamily="34" charset="-120"/>
               </a:rPr>
-              <a:t>adulthood</a:t>
+              <a:t>motherhood</a:t>
             </a:r>
             <a:endParaRPr lang="en-US" sz="1400" dirty="0"/>
           </a:p>
@@ -18203,7 +18215,7 @@
                 <a:ea typeface="Trebuchet MS" pitchFamily="34" charset="-122"/>
                 <a:cs typeface="Trebuchet MS" pitchFamily="34" charset="-120"/>
               </a:rPr>
-              <a:t>neighbourhood</a:t>
+              <a:t>adulthood</a:t>
             </a:r>
             <a:endParaRPr lang="en-US" sz="2800" dirty="0"/>
           </a:p>
@@ -19030,7 +19042,7 @@
                 <a:ea typeface="Trebuchet MS" pitchFamily="34" charset="-122"/>
                 <a:cs typeface="Trebuchet MS" pitchFamily="34" charset="-120"/>
               </a:rPr>
-              <a:t>neighbourhood</a:t>
+              <a:t>adulthood</a:t>
             </a:r>
             <a:endParaRPr lang="en-US" sz="2800" dirty="0"/>
           </a:p>
@@ -19169,7 +19181,7 @@
                 <a:ea typeface="Trebuchet MS" pitchFamily="34" charset="-122"/>
                 <a:cs typeface="Trebuchet MS" pitchFamily="34" charset="-120"/>
               </a:rPr>
-              <a:t>neighbour</a:t>
+              <a:t>adult</a:t>
             </a:r>
             <a:endParaRPr lang="en-US" sz="1300" dirty="0"/>
           </a:p>
@@ -19208,7 +19220,7 @@
                 <a:ea typeface="Calibri" pitchFamily="34" charset="-122"/>
                 <a:cs typeface="Calibri" pitchFamily="34" charset="-120"/>
               </a:rPr>
-              <a:t>person living nearby</a:t>
+              <a:t>fully grown person</a:t>
             </a:r>
             <a:endParaRPr lang="en-US" sz="850" dirty="0"/>
           </a:p>
@@ -19320,7 +19332,7 @@
                 <a:ea typeface="Calibri" pitchFamily="34" charset="-122"/>
                 <a:cs typeface="Calibri" pitchFamily="34" charset="-120"/>
               </a:rPr>
-              <a:t>state, place, or group</a:t>
+              <a:t>state or condition of</a:t>
             </a:r>
             <a:endParaRPr lang="en-US" sz="850" dirty="0"/>
           </a:p>
@@ -20015,7 +20027,7 @@
                 <a:ea typeface="Trebuchet MS" pitchFamily="34" charset="-122"/>
                 <a:cs typeface="Trebuchet MS" pitchFamily="34" charset="-120"/>
               </a:rPr>
-              <a:t>neighbourhood</a:t>
+              <a:t>adulthood</a:t>
             </a:r>
             <a:endParaRPr lang="en-US" sz="2800" dirty="0"/>
           </a:p>
@@ -20154,7 +20166,7 @@
                 <a:ea typeface="Trebuchet MS" pitchFamily="34" charset="-122"/>
                 <a:cs typeface="Trebuchet MS" pitchFamily="34" charset="-120"/>
               </a:rPr>
-              <a:t>neighbour</a:t>
+              <a:t>adult</a:t>
             </a:r>
             <a:endParaRPr lang="en-US" sz="1300" dirty="0"/>
           </a:p>
@@ -20193,7 +20205,7 @@
                 <a:ea typeface="Calibri" pitchFamily="34" charset="-122"/>
                 <a:cs typeface="Calibri" pitchFamily="34" charset="-120"/>
               </a:rPr>
-              <a:t>person living nearby</a:t>
+              <a:t>fully grown person</a:t>
             </a:r>
             <a:endParaRPr lang="en-US" sz="850" dirty="0"/>
           </a:p>
@@ -20305,7 +20317,7 @@
                 <a:ea typeface="Calibri" pitchFamily="34" charset="-122"/>
                 <a:cs typeface="Calibri" pitchFamily="34" charset="-120"/>
               </a:rPr>
-              <a:t>state, place, or group</a:t>
+              <a:t>state or condition of</a:t>
             </a:r>
             <a:endParaRPr lang="en-US" sz="850" dirty="0"/>
           </a:p>
@@ -20464,7 +20476,7 @@
                 <a:ea typeface="Trebuchet MS" pitchFamily="34" charset="-122"/>
                 <a:cs typeface="Trebuchet MS" pitchFamily="34" charset="-120"/>
               </a:rPr>
-              <a:t>neigh</a:t>
+              <a:t>a</a:t>
             </a:r>
             <a:endParaRPr lang="en-US" sz="1400" dirty="0"/>
           </a:p>
@@ -20569,7 +20581,7 @@
                 <a:ea typeface="Trebuchet MS" pitchFamily="34" charset="-122"/>
                 <a:cs typeface="Trebuchet MS" pitchFamily="34" charset="-120"/>
               </a:rPr>
-              <a:t>bour</a:t>
+              <a:t>dult</a:t>
             </a:r>
             <a:endParaRPr lang="en-US" sz="1400" dirty="0"/>
           </a:p>
@@ -21237,7 +21249,7 @@
                 <a:ea typeface="Trebuchet MS" pitchFamily="34" charset="-122"/>
                 <a:cs typeface="Trebuchet MS" pitchFamily="34" charset="-120"/>
               </a:rPr>
-              <a:t>neighbourhood</a:t>
+              <a:t>adulthood</a:t>
             </a:r>
             <a:endParaRPr lang="en-US" sz="2800" dirty="0"/>
           </a:p>
@@ -21376,7 +21388,7 @@
                 <a:ea typeface="Trebuchet MS" pitchFamily="34" charset="-122"/>
                 <a:cs typeface="Trebuchet MS" pitchFamily="34" charset="-120"/>
               </a:rPr>
-              <a:t>neighbour</a:t>
+              <a:t>adult</a:t>
             </a:r>
             <a:endParaRPr lang="en-US" sz="1300" dirty="0"/>
           </a:p>
@@ -21415,7 +21427,7 @@
                 <a:ea typeface="Calibri" pitchFamily="34" charset="-122"/>
                 <a:cs typeface="Calibri" pitchFamily="34" charset="-120"/>
               </a:rPr>
-              <a:t>person living nearby</a:t>
+              <a:t>fully grown person</a:t>
             </a:r>
             <a:endParaRPr lang="en-US" sz="850" dirty="0"/>
           </a:p>
@@ -21527,7 +21539,7 @@
                 <a:ea typeface="Calibri" pitchFamily="34" charset="-122"/>
                 <a:cs typeface="Calibri" pitchFamily="34" charset="-120"/>
               </a:rPr>
-              <a:t>state, place, or group</a:t>
+              <a:t>state or condition of</a:t>
             </a:r>
             <a:endParaRPr lang="en-US" sz="850" dirty="0"/>
           </a:p>
@@ -21686,7 +21698,7 @@
                 <a:ea typeface="Trebuchet MS" pitchFamily="34" charset="-122"/>
                 <a:cs typeface="Trebuchet MS" pitchFamily="34" charset="-120"/>
               </a:rPr>
-              <a:t>neigh</a:t>
+              <a:t>a</a:t>
             </a:r>
             <a:endParaRPr lang="en-US" sz="1400" dirty="0"/>
           </a:p>
@@ -21791,7 +21803,7 @@
                 <a:ea typeface="Trebuchet MS" pitchFamily="34" charset="-122"/>
                 <a:cs typeface="Trebuchet MS" pitchFamily="34" charset="-120"/>
               </a:rPr>
-              <a:t>bour</a:t>
+              <a:t>dult</a:t>
             </a:r>
             <a:endParaRPr lang="en-US" sz="1400" dirty="0"/>
           </a:p>
@@ -21977,11 +21989,11 @@
         <p:spPr>
           <a:xfrm>
             <a:off x="1874520" y="4096512"/>
-            <a:ext cx="6903720" cy="804672"/>
+            <a:ext cx="6903720" cy="658368"/>
           </a:xfrm>
           <a:prstGeom prst="rect">
             <a:avLst>
-              <a:gd name="adj" fmla="val 6818"/>
+              <a:gd name="adj" fmla="val 8333"/>
             </a:avLst>
           </a:prstGeom>
           <a:solidFill>
@@ -22004,11 +22016,11 @@
         <p:spPr>
           <a:xfrm>
             <a:off x="2023872" y="4169664"/>
-            <a:ext cx="685800" cy="384048"/>
+            <a:ext cx="685800" cy="475488"/>
           </a:xfrm>
           <a:prstGeom prst="rect">
             <a:avLst>
-              <a:gd name="adj" fmla="val 9524"/>
+              <a:gd name="adj" fmla="val 7692"/>
             </a:avLst>
           </a:prstGeom>
           <a:solidFill>
@@ -22031,7 +22043,7 @@
         <p:spPr>
           <a:xfrm>
             <a:off x="2023872" y="4169664"/>
-            <a:ext cx="685800" cy="384048"/>
+            <a:ext cx="685800" cy="475488"/>
           </a:xfrm>
           <a:prstGeom prst="rect">
             <a:avLst/>
@@ -22055,7 +22067,7 @@
                 <a:ea typeface="Trebuchet MS" pitchFamily="34" charset="-122"/>
                 <a:cs typeface="Trebuchet MS" pitchFamily="34" charset="-120"/>
               </a:rPr>
-              <a:t>n</a:t>
+              <a:t>a</a:t>
             </a:r>
             <a:endParaRPr lang="en-US" sz="900" dirty="0"/>
           </a:p>
@@ -22070,11 +22082,11 @@
         <p:spPr>
           <a:xfrm>
             <a:off x="2831592" y="4169664"/>
-            <a:ext cx="685800" cy="384048"/>
+            <a:ext cx="685800" cy="475488"/>
           </a:xfrm>
           <a:prstGeom prst="rect">
             <a:avLst>
-              <a:gd name="adj" fmla="val 9524"/>
+              <a:gd name="adj" fmla="val 7692"/>
             </a:avLst>
           </a:prstGeom>
           <a:solidFill>
@@ -22097,7 +22109,7 @@
         <p:spPr>
           <a:xfrm>
             <a:off x="2831592" y="4169664"/>
-            <a:ext cx="685800" cy="384048"/>
+            <a:ext cx="685800" cy="475488"/>
           </a:xfrm>
           <a:prstGeom prst="rect">
             <a:avLst/>
@@ -22121,7 +22133,7 @@
                 <a:ea typeface="Trebuchet MS" pitchFamily="34" charset="-122"/>
                 <a:cs typeface="Trebuchet MS" pitchFamily="34" charset="-120"/>
               </a:rPr>
-              <a:t>ei</a:t>
+              <a:t>d</a:t>
             </a:r>
             <a:endParaRPr lang="en-US" sz="900" dirty="0"/>
           </a:p>
@@ -22129,57 +22141,18 @@
       </p:sp>
       <p:sp>
         <p:nvSpPr>
-          <p:cNvPr id="40" name="Text 38"/>
-          <p:cNvSpPr/>
-          <p:nvPr/>
-        </p:nvSpPr>
-        <p:spPr>
-          <a:xfrm>
-            <a:off x="2831592" y="4572000"/>
-            <a:ext cx="685800" cy="219456"/>
-          </a:xfrm>
-          <a:prstGeom prst="rect">
-            <a:avLst/>
-          </a:prstGeom>
-          <a:noFill/>
-          <a:ln/>
-        </p:spPr>
-        <p:txBody>
-          <a:bodyPr wrap="square" lIns="0" tIns="0" rIns="0" bIns="0" rtlCol="0" anchor="t"/>
-          <a:lstStyle/>
-          <a:p>
-            <a:pPr algn="ctr" indent="0" marL="0">
-              <a:buNone/>
-            </a:pPr>
-            <a:r>
-              <a:rPr lang="en-US" sz="750" i="1" dirty="0">
-                <a:solidFill>
-                  <a:srgbClr val="94A3B8"/>
-                </a:solidFill>
-                <a:latin typeface="Calibri" pitchFamily="34" charset="0"/>
-                <a:ea typeface="Calibri" pitchFamily="34" charset="-122"/>
-                <a:cs typeface="Calibri" pitchFamily="34" charset="-120"/>
-              </a:rPr>
-              <a:t>/ay/</a:t>
-            </a:r>
-            <a:endParaRPr lang="en-US" sz="750" dirty="0"/>
-          </a:p>
-        </p:txBody>
-      </p:sp>
-      <p:sp>
-        <p:nvSpPr>
-          <p:cNvPr id="41" name="Shape 39"/>
+          <p:cNvPr id="40" name="Shape 38"/>
           <p:cNvSpPr/>
           <p:nvPr/>
         </p:nvSpPr>
         <p:spPr>
           <a:xfrm>
             <a:off x="3639312" y="4169664"/>
-            <a:ext cx="685800" cy="384048"/>
+            <a:ext cx="685800" cy="475488"/>
           </a:xfrm>
           <a:prstGeom prst="rect">
             <a:avLst>
-              <a:gd name="adj" fmla="val 9524"/>
+              <a:gd name="adj" fmla="val 7692"/>
             </a:avLst>
           </a:prstGeom>
           <a:solidFill>
@@ -22195,14 +22168,14 @@
       </p:sp>
       <p:sp>
         <p:nvSpPr>
-          <p:cNvPr id="42" name="Text 40"/>
+          <p:cNvPr id="41" name="Text 39"/>
           <p:cNvSpPr/>
           <p:nvPr/>
         </p:nvSpPr>
         <p:spPr>
           <a:xfrm>
             <a:off x="3639312" y="4169664"/>
-            <a:ext cx="685800" cy="384048"/>
+            <a:ext cx="685800" cy="475488"/>
           </a:xfrm>
           <a:prstGeom prst="rect">
             <a:avLst/>
@@ -22226,7 +22199,7 @@
                 <a:ea typeface="Trebuchet MS" pitchFamily="34" charset="-122"/>
                 <a:cs typeface="Trebuchet MS" pitchFamily="34" charset="-120"/>
               </a:rPr>
-              <a:t>gh</a:t>
+              <a:t>u</a:t>
             </a:r>
             <a:endParaRPr lang="en-US" sz="900" dirty="0"/>
           </a:p>
@@ -22234,80 +22207,41 @@
       </p:sp>
       <p:sp>
         <p:nvSpPr>
+          <p:cNvPr id="42" name="Shape 40"/>
+          <p:cNvSpPr/>
+          <p:nvPr/>
+        </p:nvSpPr>
+        <p:spPr>
+          <a:xfrm>
+            <a:off x="4447032" y="4169664"/>
+            <a:ext cx="685800" cy="475488"/>
+          </a:xfrm>
+          <a:prstGeom prst="rect">
+            <a:avLst>
+              <a:gd name="adj" fmla="val 7692"/>
+            </a:avLst>
+          </a:prstGeom>
+          <a:solidFill>
+            <a:srgbClr val="FFFFFF"/>
+          </a:solidFill>
+          <a:ln w="12700">
+            <a:solidFill>
+              <a:srgbClr val="DB2777"/>
+            </a:solidFill>
+            <a:prstDash val="solid"/>
+          </a:ln>
+        </p:spPr>
+      </p:sp>
+      <p:sp>
+        <p:nvSpPr>
           <p:cNvPr id="43" name="Text 41"/>
           <p:cNvSpPr/>
           <p:nvPr/>
         </p:nvSpPr>
         <p:spPr>
           <a:xfrm>
-            <a:off x="3639312" y="4572000"/>
-            <a:ext cx="685800" cy="219456"/>
-          </a:xfrm>
-          <a:prstGeom prst="rect">
-            <a:avLst/>
-          </a:prstGeom>
-          <a:noFill/>
-          <a:ln/>
-        </p:spPr>
-        <p:txBody>
-          <a:bodyPr wrap="square" lIns="0" tIns="0" rIns="0" bIns="0" rtlCol="0" anchor="t"/>
-          <a:lstStyle/>
-          <a:p>
-            <a:pPr algn="ctr" indent="0" marL="0">
-              <a:buNone/>
-            </a:pPr>
-            <a:r>
-              <a:rPr lang="en-US" sz="750" i="1" dirty="0">
-                <a:solidFill>
-                  <a:srgbClr val="94A3B8"/>
-                </a:solidFill>
-                <a:latin typeface="Calibri" pitchFamily="34" charset="0"/>
-                <a:ea typeface="Calibri" pitchFamily="34" charset="-122"/>
-                <a:cs typeface="Calibri" pitchFamily="34" charset="-120"/>
-              </a:rPr>
-              <a:t>silent</a:t>
-            </a:r>
-            <a:endParaRPr lang="en-US" sz="750" dirty="0"/>
-          </a:p>
-        </p:txBody>
-      </p:sp>
-      <p:sp>
-        <p:nvSpPr>
-          <p:cNvPr id="44" name="Shape 42"/>
-          <p:cNvSpPr/>
-          <p:nvPr/>
-        </p:nvSpPr>
-        <p:spPr>
-          <a:xfrm>
             <a:off x="4447032" y="4169664"/>
-            <a:ext cx="685800" cy="384048"/>
-          </a:xfrm>
-          <a:prstGeom prst="rect">
-            <a:avLst>
-              <a:gd name="adj" fmla="val 9524"/>
-            </a:avLst>
-          </a:prstGeom>
-          <a:solidFill>
-            <a:srgbClr val="FFFFFF"/>
-          </a:solidFill>
-          <a:ln w="12700">
-            <a:solidFill>
-              <a:srgbClr val="DB2777"/>
-            </a:solidFill>
-            <a:prstDash val="solid"/>
-          </a:ln>
-        </p:spPr>
-      </p:sp>
-      <p:sp>
-        <p:nvSpPr>
-          <p:cNvPr id="45" name="Text 43"/>
-          <p:cNvSpPr/>
-          <p:nvPr/>
-        </p:nvSpPr>
-        <p:spPr>
-          <a:xfrm>
-            <a:off x="4447032" y="4169664"/>
-            <a:ext cx="685800" cy="384048"/>
+            <a:ext cx="685800" cy="475488"/>
           </a:xfrm>
           <a:prstGeom prst="rect">
             <a:avLst/>
@@ -22331,7 +22265,7 @@
                 <a:ea typeface="Trebuchet MS" pitchFamily="34" charset="-122"/>
                 <a:cs typeface="Trebuchet MS" pitchFamily="34" charset="-120"/>
               </a:rPr>
-              <a:t>b</a:t>
+              <a:t>l</a:t>
             </a:r>
             <a:endParaRPr lang="en-US" sz="900" dirty="0"/>
           </a:p>
@@ -22339,18 +22273,18 @@
       </p:sp>
       <p:sp>
         <p:nvSpPr>
-          <p:cNvPr id="46" name="Shape 44"/>
+          <p:cNvPr id="44" name="Shape 42"/>
           <p:cNvSpPr/>
           <p:nvPr/>
         </p:nvSpPr>
         <p:spPr>
           <a:xfrm>
             <a:off x="5254752" y="4169664"/>
-            <a:ext cx="685800" cy="384048"/>
+            <a:ext cx="685800" cy="475488"/>
           </a:xfrm>
           <a:prstGeom prst="rect">
             <a:avLst>
-              <a:gd name="adj" fmla="val 9524"/>
+              <a:gd name="adj" fmla="val 7692"/>
             </a:avLst>
           </a:prstGeom>
           <a:solidFill>
@@ -22366,14 +22300,14 @@
       </p:sp>
       <p:sp>
         <p:nvSpPr>
-          <p:cNvPr id="47" name="Text 45"/>
+          <p:cNvPr id="45" name="Text 43"/>
           <p:cNvSpPr/>
           <p:nvPr/>
         </p:nvSpPr>
         <p:spPr>
           <a:xfrm>
             <a:off x="5254752" y="4169664"/>
-            <a:ext cx="685800" cy="384048"/>
+            <a:ext cx="685800" cy="475488"/>
           </a:xfrm>
           <a:prstGeom prst="rect">
             <a:avLst/>
@@ -22397,7 +22331,7 @@
                 <a:ea typeface="Trebuchet MS" pitchFamily="34" charset="-122"/>
                 <a:cs typeface="Trebuchet MS" pitchFamily="34" charset="-120"/>
               </a:rPr>
-              <a:t>our</a:t>
+              <a:t>t</a:t>
             </a:r>
             <a:endParaRPr lang="en-US" sz="900" dirty="0"/>
           </a:p>
@@ -22405,57 +22339,18 @@
       </p:sp>
       <p:sp>
         <p:nvSpPr>
-          <p:cNvPr id="48" name="Text 46"/>
-          <p:cNvSpPr/>
-          <p:nvPr/>
-        </p:nvSpPr>
-        <p:spPr>
-          <a:xfrm>
-            <a:off x="5254752" y="4572000"/>
-            <a:ext cx="685800" cy="219456"/>
-          </a:xfrm>
-          <a:prstGeom prst="rect">
-            <a:avLst/>
-          </a:prstGeom>
-          <a:noFill/>
-          <a:ln/>
-        </p:spPr>
-        <p:txBody>
-          <a:bodyPr wrap="square" lIns="0" tIns="0" rIns="0" bIns="0" rtlCol="0" anchor="t"/>
-          <a:lstStyle/>
-          <a:p>
-            <a:pPr algn="ctr" indent="0" marL="0">
-              <a:buNone/>
-            </a:pPr>
-            <a:r>
-              <a:rPr lang="en-US" sz="750" i="1" dirty="0">
-                <a:solidFill>
-                  <a:srgbClr val="94A3B8"/>
-                </a:solidFill>
-                <a:latin typeface="Calibri" pitchFamily="34" charset="0"/>
-                <a:ea typeface="Calibri" pitchFamily="34" charset="-122"/>
-                <a:cs typeface="Calibri" pitchFamily="34" charset="-120"/>
-              </a:rPr>
-              <a:t>/er/</a:t>
-            </a:r>
-            <a:endParaRPr lang="en-US" sz="750" dirty="0"/>
-          </a:p>
-        </p:txBody>
-      </p:sp>
-      <p:sp>
-        <p:nvSpPr>
-          <p:cNvPr id="49" name="Shape 47"/>
+          <p:cNvPr id="46" name="Shape 44"/>
           <p:cNvSpPr/>
           <p:nvPr/>
         </p:nvSpPr>
         <p:spPr>
           <a:xfrm>
             <a:off x="6062472" y="4169664"/>
-            <a:ext cx="685800" cy="384048"/>
+            <a:ext cx="685800" cy="475488"/>
           </a:xfrm>
           <a:prstGeom prst="rect">
             <a:avLst>
-              <a:gd name="adj" fmla="val 9524"/>
+              <a:gd name="adj" fmla="val 7692"/>
             </a:avLst>
           </a:prstGeom>
           <a:solidFill>
@@ -22471,14 +22366,14 @@
       </p:sp>
       <p:sp>
         <p:nvSpPr>
-          <p:cNvPr id="50" name="Text 48"/>
+          <p:cNvPr id="47" name="Text 45"/>
           <p:cNvSpPr/>
           <p:nvPr/>
         </p:nvSpPr>
         <p:spPr>
           <a:xfrm>
             <a:off x="6062472" y="4169664"/>
-            <a:ext cx="685800" cy="384048"/>
+            <a:ext cx="685800" cy="475488"/>
           </a:xfrm>
           <a:prstGeom prst="rect">
             <a:avLst/>
@@ -22510,18 +22405,18 @@
       </p:sp>
       <p:sp>
         <p:nvSpPr>
-          <p:cNvPr id="51" name="Shape 49"/>
+          <p:cNvPr id="48" name="Shape 46"/>
           <p:cNvSpPr/>
           <p:nvPr/>
         </p:nvSpPr>
         <p:spPr>
           <a:xfrm>
             <a:off x="6870192" y="4169664"/>
-            <a:ext cx="685800" cy="384048"/>
+            <a:ext cx="685800" cy="475488"/>
           </a:xfrm>
           <a:prstGeom prst="rect">
             <a:avLst>
-              <a:gd name="adj" fmla="val 9524"/>
+              <a:gd name="adj" fmla="val 7692"/>
             </a:avLst>
           </a:prstGeom>
           <a:solidFill>
@@ -22537,14 +22432,14 @@
       </p:sp>
       <p:sp>
         <p:nvSpPr>
-          <p:cNvPr id="52" name="Text 50"/>
+          <p:cNvPr id="49" name="Text 47"/>
           <p:cNvSpPr/>
           <p:nvPr/>
         </p:nvSpPr>
         <p:spPr>
           <a:xfrm>
             <a:off x="6870192" y="4169664"/>
-            <a:ext cx="685800" cy="384048"/>
+            <a:ext cx="685800" cy="475488"/>
           </a:xfrm>
           <a:prstGeom prst="rect">
             <a:avLst/>
@@ -22576,18 +22471,18 @@
       </p:sp>
       <p:sp>
         <p:nvSpPr>
-          <p:cNvPr id="53" name="Shape 51"/>
+          <p:cNvPr id="50" name="Shape 48"/>
           <p:cNvSpPr/>
           <p:nvPr/>
         </p:nvSpPr>
         <p:spPr>
           <a:xfrm>
             <a:off x="7677912" y="4169664"/>
-            <a:ext cx="685800" cy="384048"/>
+            <a:ext cx="685800" cy="475488"/>
           </a:xfrm>
           <a:prstGeom prst="rect">
             <a:avLst>
-              <a:gd name="adj" fmla="val 9524"/>
+              <a:gd name="adj" fmla="val 7692"/>
             </a:avLst>
           </a:prstGeom>
           <a:solidFill>
@@ -22603,14 +22498,14 @@
       </p:sp>
       <p:sp>
         <p:nvSpPr>
-          <p:cNvPr id="54" name="Text 52"/>
+          <p:cNvPr id="51" name="Text 49"/>
           <p:cNvSpPr/>
           <p:nvPr/>
         </p:nvSpPr>
         <p:spPr>
           <a:xfrm>
             <a:off x="7677912" y="4169664"/>
-            <a:ext cx="685800" cy="384048"/>
+            <a:ext cx="685800" cy="475488"/>
           </a:xfrm>
           <a:prstGeom prst="rect">
             <a:avLst/>
@@ -28529,7 +28424,7 @@
                 <a:ea typeface="Trebuchet MS" pitchFamily="34" charset="-122"/>
                 <a:cs typeface="Trebuchet MS" pitchFamily="34" charset="-120"/>
               </a:rPr>
-              <a:t>adulthood</a:t>
+              <a:t>motherhood</a:t>
             </a:r>
             <a:endParaRPr lang="en-US" sz="2800" dirty="0"/>
           </a:p>
@@ -29356,7 +29251,7 @@
                 <a:ea typeface="Trebuchet MS" pitchFamily="34" charset="-122"/>
                 <a:cs typeface="Trebuchet MS" pitchFamily="34" charset="-120"/>
               </a:rPr>
-              <a:t>adulthood</a:t>
+              <a:t>motherhood</a:t>
             </a:r>
             <a:endParaRPr lang="en-US" sz="2800" dirty="0"/>
           </a:p>
@@ -29495,7 +29390,7 @@
                 <a:ea typeface="Trebuchet MS" pitchFamily="34" charset="-122"/>
                 <a:cs typeface="Trebuchet MS" pitchFamily="34" charset="-120"/>
               </a:rPr>
-              <a:t>adult</a:t>
+              <a:t>mother</a:t>
             </a:r>
             <a:endParaRPr lang="en-US" sz="1300" dirty="0"/>
           </a:p>
@@ -29534,7 +29429,7 @@
                 <a:ea typeface="Calibri" pitchFamily="34" charset="-122"/>
                 <a:cs typeface="Calibri" pitchFamily="34" charset="-120"/>
               </a:rPr>
-              <a:t>grown-up person</a:t>
+              <a:t>female parent</a:t>
             </a:r>
             <a:endParaRPr lang="en-US" sz="850" dirty="0"/>
           </a:p>
@@ -30341,7 +30236,7 @@
                 <a:ea typeface="Trebuchet MS" pitchFamily="34" charset="-122"/>
                 <a:cs typeface="Trebuchet MS" pitchFamily="34" charset="-120"/>
               </a:rPr>
-              <a:t>adulthood</a:t>
+              <a:t>motherhood</a:t>
             </a:r>
             <a:endParaRPr lang="en-US" sz="2800" dirty="0"/>
           </a:p>
@@ -30480,7 +30375,7 @@
                 <a:ea typeface="Trebuchet MS" pitchFamily="34" charset="-122"/>
                 <a:cs typeface="Trebuchet MS" pitchFamily="34" charset="-120"/>
               </a:rPr>
-              <a:t>adult</a:t>
+              <a:t>mother</a:t>
             </a:r>
             <a:endParaRPr lang="en-US" sz="1300" dirty="0"/>
           </a:p>
@@ -30519,7 +30414,7 @@
                 <a:ea typeface="Calibri" pitchFamily="34" charset="-122"/>
                 <a:cs typeface="Calibri" pitchFamily="34" charset="-120"/>
               </a:rPr>
-              <a:t>grown-up person</a:t>
+              <a:t>female parent</a:t>
             </a:r>
             <a:endParaRPr lang="en-US" sz="850" dirty="0"/>
           </a:p>
@@ -30790,7 +30685,7 @@
                 <a:ea typeface="Trebuchet MS" pitchFamily="34" charset="-122"/>
                 <a:cs typeface="Trebuchet MS" pitchFamily="34" charset="-120"/>
               </a:rPr>
-              <a:t>a</a:t>
+              <a:t>moth</a:t>
             </a:r>
             <a:endParaRPr lang="en-US" sz="1400" dirty="0"/>
           </a:p>
@@ -30895,7 +30790,7 @@
                 <a:ea typeface="Trebuchet MS" pitchFamily="34" charset="-122"/>
                 <a:cs typeface="Trebuchet MS" pitchFamily="34" charset="-120"/>
               </a:rPr>
-              <a:t>dult</a:t>
+              <a:t>er</a:t>
             </a:r>
             <a:endParaRPr lang="en-US" sz="1400" dirty="0"/>
           </a:p>
@@ -31563,7 +31458,7 @@
                 <a:ea typeface="Trebuchet MS" pitchFamily="34" charset="-122"/>
                 <a:cs typeface="Trebuchet MS" pitchFamily="34" charset="-120"/>
               </a:rPr>
-              <a:t>adulthood</a:t>
+              <a:t>motherhood</a:t>
             </a:r>
             <a:endParaRPr lang="en-US" sz="2800" dirty="0"/>
           </a:p>
@@ -31702,7 +31597,7 @@
                 <a:ea typeface="Trebuchet MS" pitchFamily="34" charset="-122"/>
                 <a:cs typeface="Trebuchet MS" pitchFamily="34" charset="-120"/>
               </a:rPr>
-              <a:t>adult</a:t>
+              <a:t>mother</a:t>
             </a:r>
             <a:endParaRPr lang="en-US" sz="1300" dirty="0"/>
           </a:p>
@@ -31741,7 +31636,7 @@
                 <a:ea typeface="Calibri" pitchFamily="34" charset="-122"/>
                 <a:cs typeface="Calibri" pitchFamily="34" charset="-120"/>
               </a:rPr>
-              <a:t>grown-up person</a:t>
+              <a:t>female parent</a:t>
             </a:r>
             <a:endParaRPr lang="en-US" sz="850" dirty="0"/>
           </a:p>
@@ -32012,7 +31907,7 @@
                 <a:ea typeface="Trebuchet MS" pitchFamily="34" charset="-122"/>
                 <a:cs typeface="Trebuchet MS" pitchFamily="34" charset="-120"/>
               </a:rPr>
-              <a:t>a</a:t>
+              <a:t>moth</a:t>
             </a:r>
             <a:endParaRPr lang="en-US" sz="1400" dirty="0"/>
           </a:p>
@@ -32117,7 +32012,7 @@
                 <a:ea typeface="Trebuchet MS" pitchFamily="34" charset="-122"/>
                 <a:cs typeface="Trebuchet MS" pitchFamily="34" charset="-120"/>
               </a:rPr>
-              <a:t>dult</a:t>
+              <a:t>er</a:t>
             </a:r>
             <a:endParaRPr lang="en-US" sz="1400" dirty="0"/>
           </a:p>
@@ -32329,7 +32224,7 @@
         </p:nvSpPr>
         <p:spPr>
           <a:xfrm>
-            <a:off x="2023872" y="4169664"/>
+            <a:off x="2124837" y="4169664"/>
             <a:ext cx="685800" cy="475488"/>
           </a:xfrm>
           <a:prstGeom prst="rect">
@@ -32356,7 +32251,7 @@
         </p:nvSpPr>
         <p:spPr>
           <a:xfrm>
-            <a:off x="2023872" y="4169664"/>
+            <a:off x="2124837" y="4169664"/>
             <a:ext cx="685800" cy="475488"/>
           </a:xfrm>
           <a:prstGeom prst="rect">
@@ -32381,7 +32276,7 @@
                 <a:ea typeface="Trebuchet MS" pitchFamily="34" charset="-122"/>
                 <a:cs typeface="Trebuchet MS" pitchFamily="34" charset="-120"/>
               </a:rPr>
-              <a:t>a</a:t>
+              <a:t>m</a:t>
             </a:r>
             <a:endParaRPr lang="en-US" sz="900" dirty="0"/>
           </a:p>
@@ -32395,7 +32290,7 @@
         </p:nvSpPr>
         <p:spPr>
           <a:xfrm>
-            <a:off x="2831592" y="4169664"/>
+            <a:off x="3033522" y="4169664"/>
             <a:ext cx="685800" cy="475488"/>
           </a:xfrm>
           <a:prstGeom prst="rect">
@@ -32422,7 +32317,7 @@
         </p:nvSpPr>
         <p:spPr>
           <a:xfrm>
-            <a:off x="2831592" y="4169664"/>
+            <a:off x="3033522" y="4169664"/>
             <a:ext cx="685800" cy="475488"/>
           </a:xfrm>
           <a:prstGeom prst="rect">
@@ -32447,7 +32342,7 @@
                 <a:ea typeface="Trebuchet MS" pitchFamily="34" charset="-122"/>
                 <a:cs typeface="Trebuchet MS" pitchFamily="34" charset="-120"/>
               </a:rPr>
-              <a:t>d</a:t>
+              <a:t>o</a:t>
             </a:r>
             <a:endParaRPr lang="en-US" sz="900" dirty="0"/>
           </a:p>
@@ -32461,7 +32356,7 @@
         </p:nvSpPr>
         <p:spPr>
           <a:xfrm>
-            <a:off x="3639312" y="4169664"/>
+            <a:off x="3942207" y="4169664"/>
             <a:ext cx="685800" cy="475488"/>
           </a:xfrm>
           <a:prstGeom prst="rect">
@@ -32488,7 +32383,7 @@
         </p:nvSpPr>
         <p:spPr>
           <a:xfrm>
-            <a:off x="3639312" y="4169664"/>
+            <a:off x="3942207" y="4169664"/>
             <a:ext cx="685800" cy="475488"/>
           </a:xfrm>
           <a:prstGeom prst="rect">
@@ -32513,7 +32408,7 @@
                 <a:ea typeface="Trebuchet MS" pitchFamily="34" charset="-122"/>
                 <a:cs typeface="Trebuchet MS" pitchFamily="34" charset="-120"/>
               </a:rPr>
-              <a:t>u</a:t>
+              <a:t>th</a:t>
             </a:r>
             <a:endParaRPr lang="en-US" sz="900" dirty="0"/>
           </a:p>
@@ -32527,7 +32422,7 @@
         </p:nvSpPr>
         <p:spPr>
           <a:xfrm>
-            <a:off x="4447032" y="4169664"/>
+            <a:off x="4850892" y="4169664"/>
             <a:ext cx="685800" cy="475488"/>
           </a:xfrm>
           <a:prstGeom prst="rect">
@@ -32554,7 +32449,7 @@
         </p:nvSpPr>
         <p:spPr>
           <a:xfrm>
-            <a:off x="4447032" y="4169664"/>
+            <a:off x="4850892" y="4169664"/>
             <a:ext cx="685800" cy="475488"/>
           </a:xfrm>
           <a:prstGeom prst="rect">
@@ -32579,7 +32474,7 @@
                 <a:ea typeface="Trebuchet MS" pitchFamily="34" charset="-122"/>
                 <a:cs typeface="Trebuchet MS" pitchFamily="34" charset="-120"/>
               </a:rPr>
-              <a:t>l</a:t>
+              <a:t>er</a:t>
             </a:r>
             <a:endParaRPr lang="en-US" sz="900" dirty="0"/>
           </a:p>
@@ -32593,7 +32488,7 @@
         </p:nvSpPr>
         <p:spPr>
           <a:xfrm>
-            <a:off x="5254752" y="4169664"/>
+            <a:off x="5759577" y="4169664"/>
             <a:ext cx="685800" cy="475488"/>
           </a:xfrm>
           <a:prstGeom prst="rect">
@@ -32620,7 +32515,7 @@
         </p:nvSpPr>
         <p:spPr>
           <a:xfrm>
-            <a:off x="5254752" y="4169664"/>
+            <a:off x="5759577" y="4169664"/>
             <a:ext cx="685800" cy="475488"/>
           </a:xfrm>
           <a:prstGeom prst="rect">
@@ -32645,7 +32540,7 @@
                 <a:ea typeface="Trebuchet MS" pitchFamily="34" charset="-122"/>
                 <a:cs typeface="Trebuchet MS" pitchFamily="34" charset="-120"/>
               </a:rPr>
-              <a:t>t</a:t>
+              <a:t>h</a:t>
             </a:r>
             <a:endParaRPr lang="en-US" sz="900" dirty="0"/>
           </a:p>
@@ -32659,7 +32554,7 @@
         </p:nvSpPr>
         <p:spPr>
           <a:xfrm>
-            <a:off x="6062472" y="4169664"/>
+            <a:off x="6668262" y="4169664"/>
             <a:ext cx="685800" cy="475488"/>
           </a:xfrm>
           <a:prstGeom prst="rect">
@@ -32686,7 +32581,7 @@
         </p:nvSpPr>
         <p:spPr>
           <a:xfrm>
-            <a:off x="6062472" y="4169664"/>
+            <a:off x="6668262" y="4169664"/>
             <a:ext cx="685800" cy="475488"/>
           </a:xfrm>
           <a:prstGeom prst="rect">
@@ -32711,7 +32606,7 @@
                 <a:ea typeface="Trebuchet MS" pitchFamily="34" charset="-122"/>
                 <a:cs typeface="Trebuchet MS" pitchFamily="34" charset="-120"/>
               </a:rPr>
-              <a:t>h</a:t>
+              <a:t>oo</a:t>
             </a:r>
             <a:endParaRPr lang="en-US" sz="900" dirty="0"/>
           </a:p>
@@ -32725,7 +32620,7 @@
         </p:nvSpPr>
         <p:spPr>
           <a:xfrm>
-            <a:off x="6870192" y="4169664"/>
+            <a:off x="7576947" y="4169664"/>
             <a:ext cx="685800" cy="475488"/>
           </a:xfrm>
           <a:prstGeom prst="rect">
@@ -32752,73 +32647,7 @@
         </p:nvSpPr>
         <p:spPr>
           <a:xfrm>
-            <a:off x="6870192" y="4169664"/>
-            <a:ext cx="685800" cy="475488"/>
-          </a:xfrm>
-          <a:prstGeom prst="rect">
-            <a:avLst/>
-          </a:prstGeom>
-          <a:noFill/>
-          <a:ln/>
-        </p:spPr>
-        <p:txBody>
-          <a:bodyPr wrap="square" lIns="0" tIns="0" rIns="0" bIns="0" rtlCol="0" anchor="ctr"/>
-          <a:lstStyle/>
-          <a:p>
-            <a:pPr algn="ctr" indent="0" marL="0">
-              <a:buNone/>
-            </a:pPr>
-            <a:r>
-              <a:rPr lang="en-US" sz="900" b="1" dirty="0">
-                <a:solidFill>
-                  <a:srgbClr val="9D174D"/>
-                </a:solidFill>
-                <a:latin typeface="Trebuchet MS" pitchFamily="34" charset="0"/>
-                <a:ea typeface="Trebuchet MS" pitchFamily="34" charset="-122"/>
-                <a:cs typeface="Trebuchet MS" pitchFamily="34" charset="-120"/>
-              </a:rPr>
-              <a:t>oo</a:t>
-            </a:r>
-            <a:endParaRPr lang="en-US" sz="900" dirty="0"/>
-          </a:p>
-        </p:txBody>
-      </p:sp>
-      <p:sp>
-        <p:nvSpPr>
-          <p:cNvPr id="50" name="Shape 48"/>
-          <p:cNvSpPr/>
-          <p:nvPr/>
-        </p:nvSpPr>
-        <p:spPr>
-          <a:xfrm>
-            <a:off x="7677912" y="4169664"/>
-            <a:ext cx="685800" cy="475488"/>
-          </a:xfrm>
-          <a:prstGeom prst="rect">
-            <a:avLst>
-              <a:gd name="adj" fmla="val 7692"/>
-            </a:avLst>
-          </a:prstGeom>
-          <a:solidFill>
-            <a:srgbClr val="FFFFFF"/>
-          </a:solidFill>
-          <a:ln w="12700">
-            <a:solidFill>
-              <a:srgbClr val="DB2777"/>
-            </a:solidFill>
-            <a:prstDash val="solid"/>
-          </a:ln>
-        </p:spPr>
-      </p:sp>
-      <p:sp>
-        <p:nvSpPr>
-          <p:cNvPr id="51" name="Text 49"/>
-          <p:cNvSpPr/>
-          <p:nvPr/>
-        </p:nvSpPr>
-        <p:spPr>
-          <a:xfrm>
-            <a:off x="7677912" y="4169664"/>
+            <a:off x="7576947" y="4169664"/>
             <a:ext cx="685800" cy="475488"/>
           </a:xfrm>
           <a:prstGeom prst="rect">
@@ -34950,7 +34779,7 @@
                 <a:ea typeface="Trebuchet MS" pitchFamily="34" charset="-122"/>
                 <a:cs typeface="Trebuchet MS" pitchFamily="34" charset="-120"/>
               </a:rPr>
-              <a:t>re-</a:t>
+              <a:t>over-</a:t>
             </a:r>
             <a:endParaRPr lang="en-US" sz="1300" dirty="0"/>
           </a:p>
@@ -35103,7 +34932,7 @@
                 <a:ea typeface="Trebuchet MS" pitchFamily="34" charset="-122"/>
                 <a:cs typeface="Trebuchet MS" pitchFamily="34" charset="-120"/>
               </a:rPr>
-              <a:t>out-</a:t>
+              <a:t>under-</a:t>
             </a:r>
             <a:endParaRPr lang="en-US" sz="1300" dirty="0"/>
           </a:p>
@@ -35167,7 +34996,7 @@
                 <a:ea typeface="Trebuchet MS" pitchFamily="34" charset="-122"/>
                 <a:cs typeface="Trebuchet MS" pitchFamily="34" charset="-120"/>
               </a:rPr>
-              <a:t>false</a:t>
+              <a:t>mother</a:t>
             </a:r>
             <a:endParaRPr lang="en-US" sz="1300" dirty="0"/>
           </a:p>
@@ -35256,7 +35085,7 @@
                 <a:ea typeface="Trebuchet MS" pitchFamily="34" charset="-122"/>
                 <a:cs typeface="Trebuchet MS" pitchFamily="34" charset="-120"/>
               </a:rPr>
-              <a:t>over-</a:t>
+              <a:t>re-</a:t>
             </a:r>
             <a:endParaRPr lang="en-US" sz="1300" dirty="0"/>
           </a:p>
@@ -35320,7 +35149,7 @@
                 <a:ea typeface="Trebuchet MS" pitchFamily="34" charset="-122"/>
                 <a:cs typeface="Trebuchet MS" pitchFamily="34" charset="-120"/>
               </a:rPr>
-              <a:t>like</a:t>
+              <a:t>knight</a:t>
             </a:r>
             <a:endParaRPr lang="en-US" sz="1300" dirty="0"/>
           </a:p>
@@ -35648,7 +35477,7 @@
                 <a:ea typeface="Trebuchet MS" pitchFamily="34" charset="-122"/>
                 <a:cs typeface="Trebuchet MS" pitchFamily="34" charset="-120"/>
               </a:rPr>
-              <a:t>falsehood</a:t>
+              <a:t>motherhood</a:t>
             </a:r>
             <a:endParaRPr lang="en-US" sz="1200" dirty="0"/>
           </a:p>
@@ -35714,7 +35543,7 @@
                 <a:ea typeface="Trebuchet MS" pitchFamily="34" charset="-122"/>
                 <a:cs typeface="Trebuchet MS" pitchFamily="34" charset="-120"/>
               </a:rPr>
-              <a:t>likelihood</a:t>
+              <a:t>knighthood</a:t>
             </a:r>
             <a:endParaRPr lang="en-US" sz="1200" dirty="0"/>
           </a:p>
@@ -35780,7 +35609,7 @@
                 <a:ea typeface="Trebuchet MS" pitchFamily="34" charset="-122"/>
                 <a:cs typeface="Trebuchet MS" pitchFamily="34" charset="-120"/>
               </a:rPr>
-              <a:t>manhood</a:t>
+              <a:t>likelihood</a:t>
             </a:r>
             <a:endParaRPr lang="en-US" sz="1200" dirty="0"/>
           </a:p>
@@ -35846,7 +35675,7 @@
                 <a:ea typeface="Trebuchet MS" pitchFamily="34" charset="-122"/>
                 <a:cs typeface="Trebuchet MS" pitchFamily="34" charset="-120"/>
               </a:rPr>
-              <a:t>parenthood</a:t>
+              <a:t>falsehood</a:t>
             </a:r>
             <a:endParaRPr lang="en-US" sz="1200" dirty="0"/>
           </a:p>
@@ -35912,7 +35741,7 @@
                 <a:ea typeface="Trebuchet MS" pitchFamily="34" charset="-122"/>
                 <a:cs typeface="Trebuchet MS" pitchFamily="34" charset="-120"/>
               </a:rPr>
-              <a:t>sisterhood</a:t>
+              <a:t>adulthood</a:t>
             </a:r>
             <a:endParaRPr lang="en-US" sz="1200" dirty="0"/>
           </a:p>
@@ -37100,7 +36929,7 @@
                 <a:ea typeface="Calibri" pitchFamily="34" charset="-122"/>
                 <a:cs typeface="Calibri" pitchFamily="34" charset="-120"/>
               </a:rPr>
-              <a:t>1.  The suffix '-hood' comes from Old English.</a:t>
+              <a:t>1.  Adding '-hood' to a word always makes it mean the opposite.</a:t>
             </a:r>
             <a:endParaRPr lang="en-US" sz="1300" dirty="0"/>
           </a:p>
@@ -37123,11 +36952,11 @@
             </a:avLst>
           </a:prstGeom>
           <a:solidFill>
-            <a:srgbClr val="DCFCE7"/>
-          </a:solidFill>
-          <a:ln w="12700">
-            <a:solidFill>
-              <a:srgbClr val="16A34A"/>
+            <a:srgbClr val="FEE2E2"/>
+          </a:solidFill>
+          <a:ln w="12700">
+            <a:solidFill>
+              <a:srgbClr val="DC2626"/>
             </a:solidFill>
             <a:prstDash val="solid"/>
           </a:ln>
@@ -37160,13 +36989,13 @@
             <a:r>
               <a:rPr lang="en-US" sz="1100" b="1" dirty="0">
                 <a:solidFill>
-                  <a:srgbClr val="16A34A"/>
+                  <a:srgbClr val="DC2626"/>
                 </a:solidFill>
                 <a:latin typeface="Trebuchet MS" pitchFamily="34" charset="0"/>
                 <a:ea typeface="Trebuchet MS" pitchFamily="34" charset="-122"/>
                 <a:cs typeface="Trebuchet MS" pitchFamily="34" charset="-120"/>
               </a:rPr>
-              <a:t>TRUE</a:t>
+              <a:t>FALSE</a:t>
             </a:r>
             <a:endParaRPr lang="en-US" sz="1100" dirty="0"/>
           </a:p>
@@ -37239,7 +37068,7 @@
                 <a:ea typeface="Calibri" pitchFamily="34" charset="-122"/>
                 <a:cs typeface="Calibri" pitchFamily="34" charset="-120"/>
               </a:rPr>
-              <a:t>2.  Adding '-hood' to a word makes it into a verb.</a:t>
+              <a:t>2.  The word 'childhood' contains the suffix '-hood'.</a:t>
             </a:r>
             <a:endParaRPr lang="en-US" sz="1300" dirty="0"/>
           </a:p>
@@ -37262,11 +37091,11 @@
             </a:avLst>
           </a:prstGeom>
           <a:solidFill>
-            <a:srgbClr val="FEE2E2"/>
-          </a:solidFill>
-          <a:ln w="12700">
-            <a:solidFill>
-              <a:srgbClr val="DC2626"/>
+            <a:srgbClr val="DCFCE7"/>
+          </a:solidFill>
+          <a:ln w="12700">
+            <a:solidFill>
+              <a:srgbClr val="16A34A"/>
             </a:solidFill>
             <a:prstDash val="solid"/>
           </a:ln>
@@ -37299,13 +37128,13 @@
             <a:r>
               <a:rPr lang="en-US" sz="1100" b="1" dirty="0">
                 <a:solidFill>
-                  <a:srgbClr val="DC2626"/>
+                  <a:srgbClr val="16A34A"/>
                 </a:solidFill>
                 <a:latin typeface="Trebuchet MS" pitchFamily="34" charset="0"/>
                 <a:ea typeface="Trebuchet MS" pitchFamily="34" charset="-122"/>
                 <a:cs typeface="Trebuchet MS" pitchFamily="34" charset="-120"/>
               </a:rPr>
-              <a:t>FALSE</a:t>
+              <a:t>TRUE</a:t>
             </a:r>
             <a:endParaRPr lang="en-US" sz="1100" dirty="0"/>
           </a:p>
@@ -37378,7 +37207,7 @@
                 <a:ea typeface="Calibri" pitchFamily="34" charset="-122"/>
                 <a:cs typeface="Calibri" pitchFamily="34" charset="-120"/>
               </a:rPr>
-              <a:t>3.  The suffix '-hood' can mean a state or condition, like in 'childhood'.</a:t>
+              <a:t>3.  'Neighbourhood' refers to the condition or state of being neighbours.</a:t>
             </a:r>
             <a:endParaRPr lang="en-US" sz="1300" dirty="0"/>
           </a:p>
@@ -37517,7 +37346,7 @@
                 <a:ea typeface="Calibri" pitchFamily="34" charset="-122"/>
                 <a:cs typeface="Calibri" pitchFamily="34" charset="-120"/>
               </a:rPr>
-              <a:t>4.  'Neighbourhood' contains the suffix '-hood'.</a:t>
+              <a:t>4.  The suffix '-hood' comes from Latin.</a:t>
             </a:r>
             <a:endParaRPr lang="en-US" sz="1300" dirty="0"/>
           </a:p>
@@ -37540,11 +37369,11 @@
             </a:avLst>
           </a:prstGeom>
           <a:solidFill>
-            <a:srgbClr val="DCFCE7"/>
-          </a:solidFill>
-          <a:ln w="12700">
-            <a:solidFill>
-              <a:srgbClr val="16A34A"/>
+            <a:srgbClr val="FEE2E2"/>
+          </a:solidFill>
+          <a:ln w="12700">
+            <a:solidFill>
+              <a:srgbClr val="DC2626"/>
             </a:solidFill>
             <a:prstDash val="solid"/>
           </a:ln>
@@ -37577,13 +37406,13 @@
             <a:r>
               <a:rPr lang="en-US" sz="1100" b="1" dirty="0">
                 <a:solidFill>
-                  <a:srgbClr val="16A34A"/>
+                  <a:srgbClr val="DC2626"/>
                 </a:solidFill>
                 <a:latin typeface="Trebuchet MS" pitchFamily="34" charset="0"/>
                 <a:ea typeface="Trebuchet MS" pitchFamily="34" charset="-122"/>
                 <a:cs typeface="Trebuchet MS" pitchFamily="34" charset="-120"/>
               </a:rPr>
-              <a:t>TRUE</a:t>
+              <a:t>FALSE</a:t>
             </a:r>
             <a:endParaRPr lang="en-US" sz="1100" dirty="0"/>
           </a:p>
@@ -37656,7 +37485,7 @@
                 <a:ea typeface="Calibri" pitchFamily="34" charset="-122"/>
                 <a:cs typeface="Calibri" pitchFamily="34" charset="-120"/>
               </a:rPr>
-              <a:t>5.  The suffix '-hood' always changes the spelling of the base word.</a:t>
+              <a:t>5.  The suffix '-hood' can turn a noun into another noun meaning a state or condition.</a:t>
             </a:r>
             <a:endParaRPr lang="en-US" sz="1300" dirty="0"/>
           </a:p>
@@ -37679,11 +37508,11 @@
             </a:avLst>
           </a:prstGeom>
           <a:solidFill>
-            <a:srgbClr val="FEE2E2"/>
-          </a:solidFill>
-          <a:ln w="12700">
-            <a:solidFill>
-              <a:srgbClr val="DC2626"/>
+            <a:srgbClr val="DCFCE7"/>
+          </a:solidFill>
+          <a:ln w="12700">
+            <a:solidFill>
+              <a:srgbClr val="16A34A"/>
             </a:solidFill>
             <a:prstDash val="solid"/>
           </a:ln>
@@ -37716,13 +37545,13 @@
             <a:r>
               <a:rPr lang="en-US" sz="1100" b="1" dirty="0">
                 <a:solidFill>
-                  <a:srgbClr val="DC2626"/>
+                  <a:srgbClr val="16A34A"/>
                 </a:solidFill>
                 <a:latin typeface="Trebuchet MS" pitchFamily="34" charset="0"/>
                 <a:ea typeface="Trebuchet MS" pitchFamily="34" charset="-122"/>
                 <a:cs typeface="Trebuchet MS" pitchFamily="34" charset="-120"/>
               </a:rPr>
-              <a:t>FALSE</a:t>
+              <a:t>TRUE</a:t>
             </a:r>
             <a:endParaRPr lang="en-US" sz="1100" dirty="0"/>
           </a:p>
@@ -38493,7 +38322,7 @@
                 <a:ea typeface="Trebuchet MS" pitchFamily="34" charset="-122"/>
                 <a:cs typeface="Trebuchet MS" pitchFamily="34" charset="-120"/>
               </a:rPr>
-              <a:t>falsehood</a:t>
+              <a:t>motherhood</a:t>
             </a:r>
             <a:endParaRPr lang="en-US" sz="1300" dirty="0"/>
           </a:p>
@@ -38559,7 +38388,7 @@
                 <a:ea typeface="Trebuchet MS" pitchFamily="34" charset="-122"/>
                 <a:cs typeface="Trebuchet MS" pitchFamily="34" charset="-120"/>
               </a:rPr>
-              <a:t>likelihood</a:t>
+              <a:t>knighthood</a:t>
             </a:r>
             <a:endParaRPr lang="en-US" sz="1300" dirty="0"/>
           </a:p>
@@ -38625,7 +38454,7 @@
                 <a:ea typeface="Trebuchet MS" pitchFamily="34" charset="-122"/>
                 <a:cs typeface="Trebuchet MS" pitchFamily="34" charset="-120"/>
               </a:rPr>
-              <a:t>manhood</a:t>
+              <a:t>likelihood</a:t>
             </a:r>
             <a:endParaRPr lang="en-US" sz="1300" dirty="0"/>
           </a:p>
@@ -38691,7 +38520,7 @@
                 <a:ea typeface="Trebuchet MS" pitchFamily="34" charset="-122"/>
                 <a:cs typeface="Trebuchet MS" pitchFamily="34" charset="-120"/>
               </a:rPr>
-              <a:t>parenthood</a:t>
+              <a:t>falsehood</a:t>
             </a:r>
             <a:endParaRPr lang="en-US" sz="1300" dirty="0"/>
           </a:p>
@@ -39629,7 +39458,7 @@
                 <a:ea typeface="Trebuchet MS" pitchFamily="34" charset="-122"/>
                 <a:cs typeface="Trebuchet MS" pitchFamily="34" charset="-120"/>
               </a:rPr>
-              <a:t>re-</a:t>
+              <a:t>over-</a:t>
             </a:r>
             <a:endParaRPr lang="en-US" sz="1300" dirty="0"/>
           </a:p>
@@ -39782,7 +39611,7 @@
                 <a:ea typeface="Trebuchet MS" pitchFamily="34" charset="-122"/>
                 <a:cs typeface="Trebuchet MS" pitchFamily="34" charset="-120"/>
               </a:rPr>
-              <a:t>out-</a:t>
+              <a:t>under-</a:t>
             </a:r>
             <a:endParaRPr lang="en-US" sz="1300" dirty="0"/>
           </a:p>
@@ -39846,7 +39675,7 @@
                 <a:ea typeface="Trebuchet MS" pitchFamily="34" charset="-122"/>
                 <a:cs typeface="Trebuchet MS" pitchFamily="34" charset="-120"/>
               </a:rPr>
-              <a:t>false</a:t>
+              <a:t>mother</a:t>
             </a:r>
             <a:endParaRPr lang="en-US" sz="1300" dirty="0"/>
           </a:p>
@@ -39935,7 +39764,7 @@
                 <a:ea typeface="Trebuchet MS" pitchFamily="34" charset="-122"/>
                 <a:cs typeface="Trebuchet MS" pitchFamily="34" charset="-120"/>
               </a:rPr>
-              <a:t>over-</a:t>
+              <a:t>re-</a:t>
             </a:r>
             <a:endParaRPr lang="en-US" sz="1300" dirty="0"/>
           </a:p>
@@ -39999,7 +39828,7 @@
                 <a:ea typeface="Trebuchet MS" pitchFamily="34" charset="-122"/>
                 <a:cs typeface="Trebuchet MS" pitchFamily="34" charset="-120"/>
               </a:rPr>
-              <a:t>like</a:t>
+              <a:t>knight</a:t>
             </a:r>
             <a:endParaRPr lang="en-US" sz="1300" dirty="0"/>
           </a:p>
@@ -40935,7 +40764,7 @@
                 <a:ea typeface="Calibri" pitchFamily="34" charset="-122"/>
                 <a:cs typeface="Calibri" pitchFamily="34" charset="-120"/>
               </a:rPr>
-              <a:t>How probable or likely something is to happen.</a:t>
+              <a:t>An honour given by a king or queen that allows someone to be called 'Sir'.</a:t>
             </a:r>
             <a:endParaRPr lang="en-US" sz="1200" dirty="0"/>
           </a:p>
@@ -41213,7 +41042,7 @@
                 <a:ea typeface="Calibri" pitchFamily="34" charset="-122"/>
                 <a:cs typeface="Calibri" pitchFamily="34" charset="-120"/>
               </a:rPr>
-              <a:t>The state of being a grown man.</a:t>
+              <a:t>How probable or possible it is that something will happen.</a:t>
             </a:r>
             <a:endParaRPr lang="en-US" sz="1200" dirty="0"/>
           </a:p>
@@ -41286,7 +41115,7 @@
                 <a:ea typeface="Trebuchet MS" pitchFamily="34" charset="-122"/>
                 <a:cs typeface="Trebuchet MS" pitchFamily="34" charset="-120"/>
               </a:rPr>
-              <a:t>falsehood</a:t>
+              <a:t>motherhood</a:t>
             </a:r>
             <a:endParaRPr lang="en-US" sz="1200" dirty="0"/>
           </a:p>
@@ -41352,7 +41181,7 @@
                 <a:ea typeface="Calibri" pitchFamily="34" charset="-122"/>
                 <a:cs typeface="Calibri" pitchFamily="34" charset="-120"/>
               </a:rPr>
-              <a:t>Something that is not true; a lie.</a:t>
+              <a:t>The state of being a mother and caring for children.</a:t>
             </a:r>
             <a:endParaRPr lang="en-US" sz="1200" dirty="0"/>
           </a:p>
@@ -41425,7 +41254,7 @@
                 <a:ea typeface="Trebuchet MS" pitchFamily="34" charset="-122"/>
                 <a:cs typeface="Trebuchet MS" pitchFamily="34" charset="-120"/>
               </a:rPr>
-              <a:t>likelihood</a:t>
+              <a:t>knighthood</a:t>
             </a:r>
             <a:endParaRPr lang="en-US" sz="1200" dirty="0"/>
           </a:p>
@@ -41564,7 +41393,7 @@
                 <a:ea typeface="Trebuchet MS" pitchFamily="34" charset="-122"/>
                 <a:cs typeface="Trebuchet MS" pitchFamily="34" charset="-120"/>
               </a:rPr>
-              <a:t>manhood</a:t>
+              <a:t>likelihood</a:t>
             </a:r>
             <a:endParaRPr lang="en-US" sz="1200" dirty="0"/>
           </a:p>
@@ -41630,7 +41459,7 @@
                 <a:ea typeface="Calibri" pitchFamily="34" charset="-122"/>
                 <a:cs typeface="Calibri" pitchFamily="34" charset="-120"/>
               </a:rPr>
-              <a:t>The state of being a parent and caring for a child.</a:t>
+              <a:t>Something that is not true; a lie.</a:t>
             </a:r>
             <a:endParaRPr lang="en-US" sz="1200" dirty="0"/>
           </a:p>
@@ -41703,7 +41532,7 @@
                 <a:ea typeface="Trebuchet MS" pitchFamily="34" charset="-122"/>
                 <a:cs typeface="Trebuchet MS" pitchFamily="34" charset="-120"/>
               </a:rPr>
-              <a:t>parenthood</a:t>
+              <a:t>falsehood</a:t>
             </a:r>
             <a:endParaRPr lang="en-US" sz="1200" dirty="0"/>
           </a:p>
@@ -42264,7 +42093,7 @@
                 <a:ea typeface="Calibri" pitchFamily="34" charset="-122"/>
                 <a:cs typeface="Calibri" pitchFamily="34" charset="-120"/>
               </a:rPr>
-              <a:t>She looked back on her childhood with lots of happy memories.</a:t>
+              <a:t>She looked back on her childhood with happy memories of playing in the park.</a:t>
             </a:r>
             <a:endParaRPr lang="en-US" sz="1500" dirty="0"/>
           </a:p>
@@ -42428,7 +42257,7 @@
                 <a:ea typeface="Calibri" pitchFamily="34" charset="-122"/>
                 <a:cs typeface="Calibri" pitchFamily="34" charset="-120"/>
               </a:rPr>
-              <a:t>The children played together safely in their neighbourhood.</a:t>
+              <a:t>The neighbourhood came together to plant trees along the street.</a:t>
             </a:r>
             <a:endParaRPr lang="en-US" sz="1500" dirty="0"/>
           </a:p>
@@ -42592,7 +42421,7 @@
                 <a:ea typeface="Calibri" pitchFamily="34" charset="-122"/>
                 <a:cs typeface="Calibri" pitchFamily="34" charset="-120"/>
               </a:rPr>
-              <a:t>Becoming a parent means taking on all the joys and challenges of parenthood.</a:t>
+              <a:t>Receiving a knighthood is one of the greatest honours in Australia and Britain.</a:t>
             </a:r>
             <a:endParaRPr lang="en-US" sz="1500" dirty="0"/>
           </a:p>

--- a/output/wordlabs-hood-suffix-3day.pptx
+++ b/output/wordlabs-hood-suffix-3day.pptx
@@ -4240,7 +4240,7 @@
                 <a:ea typeface="Calibri" pitchFamily="34" charset="-122"/>
                 <a:cs typeface="Calibri" pitchFamily="34" charset="-120"/>
               </a:rPr>
-              <a:t>"state, condition, or group"</a:t>
+              <a:t>"state of"</a:t>
             </a:r>
             <a:endParaRPr lang="en-US" sz="2200" dirty="0"/>
           </a:p>
@@ -4279,7 +4279,7 @@
                 <a:ea typeface="Calibri" pitchFamily="34" charset="-122"/>
                 <a:cs typeface="Calibri" pitchFamily="34" charset="-120"/>
               </a:rPr>
-              <a:t>Origin: Old English: had</a:t>
+              <a:t>Origin: Suffix</a:t>
             </a:r>
             <a:endParaRPr lang="en-US" sz="1300" dirty="0"/>
           </a:p>
@@ -5288,7 +5288,7 @@
                 <a:ea typeface="Calibri" pitchFamily="34" charset="-122"/>
                 <a:cs typeface="Calibri" pitchFamily="34" charset="-120"/>
               </a:rPr>
-              <a:t>Word Labs  •  wordlabs.app  •  Suffix: '-hood' = state, condition, or group</a:t>
+              <a:t>Word Labs  •  wordlabs.app  •  Suffix: '-hood' = state of</a:t>
             </a:r>
             <a:endParaRPr lang="en-US" sz="800" dirty="0"/>
           </a:p>
@@ -5622,7 +5622,7 @@
                 <a:ea typeface="Trebuchet MS" pitchFamily="34" charset="-122"/>
                 <a:cs typeface="Trebuchet MS" pitchFamily="34" charset="-120"/>
               </a:rPr>
-              <a:t>1</a:t>
+              <a:t>0</a:t>
             </a:r>
             <a:pPr algn="ctr" indent="0" marL="0">
               <a:buNone/>
@@ -5928,7 +5928,7 @@
                 <a:ea typeface="Calibri" pitchFamily="34" charset="-122"/>
                 <a:cs typeface="Calibri" pitchFamily="34" charset="-120"/>
               </a:rPr>
-              <a:t>Word Labs  •  wordlabs.app  •  Suffix: '-hood' = state, condition, or group</a:t>
+              <a:t>Word Labs  •  wordlabs.app  •  Suffix: '-hood' = state of</a:t>
             </a:r>
             <a:endParaRPr lang="en-US" sz="800" dirty="0"/>
           </a:p>
@@ -6032,20 +6032,6 @@
               <a:buNone/>
             </a:pPr>
             <a:r>
-              <a:rPr lang="en-US" sz="1800" dirty="0">
-                <a:solidFill>
-                  <a:srgbClr val="0F172A"/>
-                </a:solidFill>
-                <a:latin typeface="Calibri" pitchFamily="34" charset="0"/>
-                <a:ea typeface="Calibri" pitchFamily="34" charset="-122"/>
-                <a:cs typeface="Calibri" pitchFamily="34" charset="-120"/>
-              </a:rPr>
-              <a:t>During his </a:t>
-            </a:r>
-            <a:pPr algn="l" indent="0" marL="0">
-              <a:buNone/>
-            </a:pPr>
-            <a:r>
               <a:rPr lang="en-US" sz="1800" b="1" dirty="0">
                 <a:solidFill>
                   <a:srgbClr val="0D9488"/>
@@ -6057,7 +6043,7 @@
                 <a:ea typeface="Calibri" pitchFamily="34" charset="-122"/>
                 <a:cs typeface="Calibri" pitchFamily="34" charset="-120"/>
               </a:rPr>
-              <a:t>childhood</a:t>
+              <a:t>Parenthood</a:t>
             </a:r>
             <a:pPr algn="l" indent="0" marL="0">
               <a:buNone/>
@@ -6071,7 +6057,7 @@
                 <a:ea typeface="Calibri" pitchFamily="34" charset="-122"/>
                 <a:cs typeface="Calibri" pitchFamily="34" charset="-120"/>
               </a:rPr>
-              <a:t>, he dreamed of living in a friendly </a:t>
+              <a:t> means looking after your children every single day. The girls felt a real </a:t>
             </a:r>
             <a:pPr algn="l" indent="0" marL="0">
               <a:buNone/>
@@ -6088,7 +6074,7 @@
                 <a:ea typeface="Calibri" pitchFamily="34" charset="-122"/>
                 <a:cs typeface="Calibri" pitchFamily="34" charset="-120"/>
               </a:rPr>
-              <a:t>neighbourhood</a:t>
+              <a:t>sisterhood</a:t>
             </a:r>
             <a:pPr algn="l" indent="0" marL="0">
               <a:buNone/>
@@ -6102,7 +6088,7 @@
                 <a:ea typeface="Calibri" pitchFamily="34" charset="-122"/>
                 <a:cs typeface="Calibri" pitchFamily="34" charset="-120"/>
               </a:rPr>
-              <a:t>.</a:t>
+              <a:t> as they trained together for the race.</a:t>
             </a:r>
             <a:endParaRPr lang="en-US" sz="1800" dirty="0"/>
           </a:p>
@@ -6257,7 +6243,7 @@
                 <a:ea typeface="Trebuchet MS" pitchFamily="34" charset="-122"/>
                 <a:cs typeface="Trebuchet MS" pitchFamily="34" charset="-120"/>
               </a:rPr>
-              <a:t>childhood</a:t>
+              <a:t>parenthood</a:t>
             </a:r>
             <a:endParaRPr lang="en-US" sz="1400" dirty="0"/>
           </a:p>
@@ -6385,7 +6371,7 @@
                 <a:ea typeface="Trebuchet MS" pitchFamily="34" charset="-122"/>
                 <a:cs typeface="Trebuchet MS" pitchFamily="34" charset="-120"/>
               </a:rPr>
-              <a:t>neighbourhood</a:t>
+              <a:t>sisterhood</a:t>
             </a:r>
             <a:endParaRPr lang="en-US" sz="1400" dirty="0"/>
           </a:p>
@@ -6716,7 +6702,7 @@
                 <a:ea typeface="Calibri" pitchFamily="34" charset="-122"/>
                 <a:cs typeface="Calibri" pitchFamily="34" charset="-120"/>
               </a:rPr>
-              <a:t>Word Labs  •  wordlabs.app  •  Suffix: '-hood' = state, condition, or group</a:t>
+              <a:t>Word Labs  •  wordlabs.app  •  Suffix: '-hood' = state of</a:t>
             </a:r>
             <a:endParaRPr lang="en-US" sz="800" dirty="0"/>
           </a:p>
@@ -6855,7 +6841,7 @@
                 <a:ea typeface="Trebuchet MS" pitchFamily="34" charset="-122"/>
                 <a:cs typeface="Trebuchet MS" pitchFamily="34" charset="-120"/>
               </a:rPr>
-              <a:t>childhood</a:t>
+              <a:t>parenthood</a:t>
             </a:r>
             <a:endParaRPr lang="en-US" sz="2800" dirty="0"/>
           </a:p>
@@ -7543,7 +7529,7 @@
                 <a:ea typeface="Calibri" pitchFamily="34" charset="-122"/>
                 <a:cs typeface="Calibri" pitchFamily="34" charset="-120"/>
               </a:rPr>
-              <a:t>Word Labs  •  wordlabs.app  •  Suffix: '-hood' = state, condition, or group</a:t>
+              <a:t>Word Labs  •  wordlabs.app  •  Suffix: '-hood' = state of</a:t>
             </a:r>
             <a:endParaRPr lang="en-US" sz="800" dirty="0"/>
           </a:p>
@@ -7682,7 +7668,7 @@
                 <a:ea typeface="Trebuchet MS" pitchFamily="34" charset="-122"/>
                 <a:cs typeface="Trebuchet MS" pitchFamily="34" charset="-120"/>
               </a:rPr>
-              <a:t>childhood</a:t>
+              <a:t>parenthood</a:t>
             </a:r>
             <a:endParaRPr lang="en-US" sz="2800" dirty="0"/>
           </a:p>
@@ -7821,7 +7807,7 @@
                 <a:ea typeface="Trebuchet MS" pitchFamily="34" charset="-122"/>
                 <a:cs typeface="Trebuchet MS" pitchFamily="34" charset="-120"/>
               </a:rPr>
-              <a:t>child</a:t>
+              <a:t>parent</a:t>
             </a:r>
             <a:endParaRPr lang="en-US" sz="1300" dirty="0"/>
           </a:p>
@@ -7860,7 +7846,7 @@
                 <a:ea typeface="Calibri" pitchFamily="34" charset="-122"/>
                 <a:cs typeface="Calibri" pitchFamily="34" charset="-120"/>
               </a:rPr>
-              <a:t>young person</a:t>
+              <a:t>a mother or father</a:t>
             </a:r>
             <a:endParaRPr lang="en-US" sz="850" dirty="0"/>
           </a:p>
@@ -7972,7 +7958,7 @@
                 <a:ea typeface="Calibri" pitchFamily="34" charset="-122"/>
                 <a:cs typeface="Calibri" pitchFamily="34" charset="-120"/>
               </a:rPr>
-              <a:t>state or condition of</a:t>
+              <a:t>a state or condition of</a:t>
             </a:r>
             <a:endParaRPr lang="en-US" sz="850" dirty="0"/>
           </a:p>
@@ -8528,7 +8514,7 @@
                 <a:ea typeface="Calibri" pitchFamily="34" charset="-122"/>
                 <a:cs typeface="Calibri" pitchFamily="34" charset="-120"/>
               </a:rPr>
-              <a:t>Word Labs  •  wordlabs.app  •  Suffix: '-hood' = state, condition, or group</a:t>
+              <a:t>Word Labs  •  wordlabs.app  •  Suffix: '-hood' = state of</a:t>
             </a:r>
             <a:endParaRPr lang="en-US" sz="800" dirty="0"/>
           </a:p>
@@ -8667,7 +8653,7 @@
                 <a:ea typeface="Trebuchet MS" pitchFamily="34" charset="-122"/>
                 <a:cs typeface="Trebuchet MS" pitchFamily="34" charset="-120"/>
               </a:rPr>
-              <a:t>childhood</a:t>
+              <a:t>parenthood</a:t>
             </a:r>
             <a:endParaRPr lang="en-US" sz="2800" dirty="0"/>
           </a:p>
@@ -8806,7 +8792,7 @@
                 <a:ea typeface="Trebuchet MS" pitchFamily="34" charset="-122"/>
                 <a:cs typeface="Trebuchet MS" pitchFamily="34" charset="-120"/>
               </a:rPr>
-              <a:t>child</a:t>
+              <a:t>parent</a:t>
             </a:r>
             <a:endParaRPr lang="en-US" sz="1300" dirty="0"/>
           </a:p>
@@ -8845,7 +8831,7 @@
                 <a:ea typeface="Calibri" pitchFamily="34" charset="-122"/>
                 <a:cs typeface="Calibri" pitchFamily="34" charset="-120"/>
               </a:rPr>
-              <a:t>young person</a:t>
+              <a:t>a mother or father</a:t>
             </a:r>
             <a:endParaRPr lang="en-US" sz="850" dirty="0"/>
           </a:p>
@@ -8957,7 +8943,7 @@
                 <a:ea typeface="Calibri" pitchFamily="34" charset="-122"/>
                 <a:cs typeface="Calibri" pitchFamily="34" charset="-120"/>
               </a:rPr>
-              <a:t>state or condition of</a:t>
+              <a:t>a state or condition of</a:t>
             </a:r>
             <a:endParaRPr lang="en-US" sz="850" dirty="0"/>
           </a:p>
@@ -9064,7 +9050,7 @@
         </p:nvSpPr>
         <p:spPr>
           <a:xfrm>
-            <a:off x="2999232" y="3364992"/>
+            <a:off x="2313432" y="3364992"/>
             <a:ext cx="1645920" cy="475488"/>
           </a:xfrm>
           <a:prstGeom prst="rect">
@@ -9091,7 +9077,7 @@
         </p:nvSpPr>
         <p:spPr>
           <a:xfrm>
-            <a:off x="2999232" y="3364992"/>
+            <a:off x="2313432" y="3364992"/>
             <a:ext cx="1645920" cy="475488"/>
           </a:xfrm>
           <a:prstGeom prst="rect">
@@ -9116,7 +9102,7 @@
                 <a:ea typeface="Trebuchet MS" pitchFamily="34" charset="-122"/>
                 <a:cs typeface="Trebuchet MS" pitchFamily="34" charset="-120"/>
               </a:rPr>
-              <a:t>child</a:t>
+              <a:t>par</a:t>
             </a:r>
             <a:endParaRPr lang="en-US" sz="1400" dirty="0"/>
           </a:p>
@@ -9130,8 +9116,8 @@
         </p:nvSpPr>
         <p:spPr>
           <a:xfrm>
-            <a:off x="4645152" y="3364992"/>
-            <a:ext cx="1097280" cy="475488"/>
+            <a:off x="3959352" y="3364992"/>
+            <a:ext cx="411480" cy="475488"/>
           </a:xfrm>
           <a:prstGeom prst="rect">
             <a:avLst/>
@@ -9169,7 +9155,7 @@
         </p:nvSpPr>
         <p:spPr>
           <a:xfrm>
-            <a:off x="5742432" y="3364992"/>
+            <a:off x="4370832" y="3364992"/>
             <a:ext cx="1645920" cy="475488"/>
           </a:xfrm>
           <a:prstGeom prst="rect">
@@ -9196,7 +9182,7 @@
         </p:nvSpPr>
         <p:spPr>
           <a:xfrm>
-            <a:off x="5742432" y="3364992"/>
+            <a:off x="4370832" y="3364992"/>
             <a:ext cx="1645920" cy="475488"/>
           </a:xfrm>
           <a:prstGeom prst="rect">
@@ -9221,6 +9207,111 @@
                 <a:ea typeface="Trebuchet MS" pitchFamily="34" charset="-122"/>
                 <a:cs typeface="Trebuchet MS" pitchFamily="34" charset="-120"/>
               </a:rPr>
+              <a:t>ent</a:t>
+            </a:r>
+            <a:endParaRPr lang="en-US" sz="1400" dirty="0"/>
+          </a:p>
+        </p:txBody>
+      </p:sp>
+      <p:sp>
+        <p:nvSpPr>
+          <p:cNvPr id="30" name="Text 28"/>
+          <p:cNvSpPr/>
+          <p:nvPr/>
+        </p:nvSpPr>
+        <p:spPr>
+          <a:xfrm>
+            <a:off x="6016752" y="3364992"/>
+            <a:ext cx="411480" cy="475488"/>
+          </a:xfrm>
+          <a:prstGeom prst="rect">
+            <a:avLst/>
+          </a:prstGeom>
+          <a:noFill/>
+          <a:ln/>
+        </p:spPr>
+        <p:txBody>
+          <a:bodyPr wrap="square" lIns="0" tIns="0" rIns="0" bIns="0" rtlCol="0" anchor="ctr"/>
+          <a:lstStyle/>
+          <a:p>
+            <a:pPr algn="ctr" indent="0" marL="0">
+              <a:buNone/>
+            </a:pPr>
+            <a:r>
+              <a:rPr lang="en-US" sz="1600" b="1" dirty="0">
+                <a:solidFill>
+                  <a:srgbClr val="0D9488"/>
+                </a:solidFill>
+                <a:latin typeface="Trebuchet MS" pitchFamily="34" charset="0"/>
+                <a:ea typeface="Trebuchet MS" pitchFamily="34" charset="-122"/>
+                <a:cs typeface="Trebuchet MS" pitchFamily="34" charset="-120"/>
+              </a:rPr>
+              <a:t>·</a:t>
+            </a:r>
+            <a:endParaRPr lang="en-US" sz="1600" dirty="0"/>
+          </a:p>
+        </p:txBody>
+      </p:sp>
+      <p:sp>
+        <p:nvSpPr>
+          <p:cNvPr id="31" name="Shape 29"/>
+          <p:cNvSpPr/>
+          <p:nvPr/>
+        </p:nvSpPr>
+        <p:spPr>
+          <a:xfrm>
+            <a:off x="6428232" y="3364992"/>
+            <a:ext cx="1645920" cy="475488"/>
+          </a:xfrm>
+          <a:prstGeom prst="rect">
+            <a:avLst>
+              <a:gd name="adj" fmla="val 9615"/>
+            </a:avLst>
+          </a:prstGeom>
+          <a:solidFill>
+            <a:srgbClr val="FFFFFF"/>
+          </a:solidFill>
+          <a:ln w="12700">
+            <a:solidFill>
+              <a:srgbClr val="0D9488"/>
+            </a:solidFill>
+            <a:prstDash val="solid"/>
+          </a:ln>
+        </p:spPr>
+      </p:sp>
+      <p:sp>
+        <p:nvSpPr>
+          <p:cNvPr id="32" name="Text 30"/>
+          <p:cNvSpPr/>
+          <p:nvPr/>
+        </p:nvSpPr>
+        <p:spPr>
+          <a:xfrm>
+            <a:off x="6428232" y="3364992"/>
+            <a:ext cx="1645920" cy="475488"/>
+          </a:xfrm>
+          <a:prstGeom prst="rect">
+            <a:avLst/>
+          </a:prstGeom>
+          <a:noFill/>
+          <a:ln/>
+        </p:spPr>
+        <p:txBody>
+          <a:bodyPr wrap="square" lIns="0" tIns="0" rIns="0" bIns="0" rtlCol="0" anchor="ctr"/>
+          <a:lstStyle/>
+          <a:p>
+            <a:pPr algn="ctr" indent="0" marL="0">
+              <a:buNone/>
+            </a:pPr>
+            <a:r>
+              <a:rPr lang="en-US" sz="1400" b="1" dirty="0">
+                <a:solidFill>
+                  <a:srgbClr val="0D9488"/>
+                </a:solidFill>
+                <a:latin typeface="Trebuchet MS" pitchFamily="34" charset="0"/>
+                <a:ea typeface="Trebuchet MS" pitchFamily="34" charset="-122"/>
+                <a:cs typeface="Trebuchet MS" pitchFamily="34" charset="-120"/>
+              </a:rPr>
               <a:t>hood</a:t>
             </a:r>
             <a:endParaRPr lang="en-US" sz="1400" dirty="0"/>
@@ -9229,7 +9320,7 @@
       </p:sp>
       <p:sp>
         <p:nvSpPr>
-          <p:cNvPr id="30" name="Shape 28"/>
+          <p:cNvPr id="33" name="Shape 31"/>
           <p:cNvSpPr/>
           <p:nvPr/>
         </p:nvSpPr>
@@ -9256,7 +9347,7 @@
       </p:sp>
       <p:sp>
         <p:nvSpPr>
-          <p:cNvPr id="31" name="Text 29"/>
+          <p:cNvPr id="34" name="Text 32"/>
           <p:cNvSpPr/>
           <p:nvPr/>
         </p:nvSpPr>
@@ -9295,7 +9386,7 @@
       </p:sp>
       <p:sp>
         <p:nvSpPr>
-          <p:cNvPr id="32" name="Shape 30"/>
+          <p:cNvPr id="35" name="Shape 33"/>
           <p:cNvSpPr/>
           <p:nvPr/>
         </p:nvSpPr>
@@ -9322,7 +9413,7 @@
       </p:sp>
       <p:sp>
         <p:nvSpPr>
-          <p:cNvPr id="33" name="Text 31"/>
+          <p:cNvPr id="36" name="Text 34"/>
           <p:cNvSpPr/>
           <p:nvPr/>
         </p:nvSpPr>
@@ -9645,7 +9736,7 @@
                 <a:ea typeface="Calibri" pitchFamily="34" charset="-122"/>
                 <a:cs typeface="Calibri" pitchFamily="34" charset="-120"/>
               </a:rPr>
-              <a:t>Word Labs  •  wordlabs.app  •  Suffix: '-hood' = state, condition, or group</a:t>
+              <a:t>Word Labs  •  wordlabs.app  •  Suffix: '-hood' = state of</a:t>
             </a:r>
             <a:endParaRPr lang="en-US" sz="800" dirty="0"/>
           </a:p>
@@ -9784,7 +9875,7 @@
                 <a:ea typeface="Trebuchet MS" pitchFamily="34" charset="-122"/>
                 <a:cs typeface="Trebuchet MS" pitchFamily="34" charset="-120"/>
               </a:rPr>
-              <a:t>childhood</a:t>
+              <a:t>parenthood</a:t>
             </a:r>
             <a:endParaRPr lang="en-US" sz="2800" dirty="0"/>
           </a:p>
@@ -9923,7 +10014,7 @@
                 <a:ea typeface="Trebuchet MS" pitchFamily="34" charset="-122"/>
                 <a:cs typeface="Trebuchet MS" pitchFamily="34" charset="-120"/>
               </a:rPr>
-              <a:t>child</a:t>
+              <a:t>parent</a:t>
             </a:r>
             <a:endParaRPr lang="en-US" sz="1300" dirty="0"/>
           </a:p>
@@ -9962,7 +10053,7 @@
                 <a:ea typeface="Calibri" pitchFamily="34" charset="-122"/>
                 <a:cs typeface="Calibri" pitchFamily="34" charset="-120"/>
               </a:rPr>
-              <a:t>young person</a:t>
+              <a:t>a mother or father</a:t>
             </a:r>
             <a:endParaRPr lang="en-US" sz="850" dirty="0"/>
           </a:p>
@@ -10074,7 +10165,7 @@
                 <a:ea typeface="Calibri" pitchFamily="34" charset="-122"/>
                 <a:cs typeface="Calibri" pitchFamily="34" charset="-120"/>
               </a:rPr>
-              <a:t>state or condition of</a:t>
+              <a:t>a state or condition of</a:t>
             </a:r>
             <a:endParaRPr lang="en-US" sz="850" dirty="0"/>
           </a:p>
@@ -10181,7 +10272,7 @@
         </p:nvSpPr>
         <p:spPr>
           <a:xfrm>
-            <a:off x="2999232" y="3364992"/>
+            <a:off x="2313432" y="3364992"/>
             <a:ext cx="1645920" cy="475488"/>
           </a:xfrm>
           <a:prstGeom prst="rect">
@@ -10208,7 +10299,7 @@
         </p:nvSpPr>
         <p:spPr>
           <a:xfrm>
-            <a:off x="2999232" y="3364992"/>
+            <a:off x="2313432" y="3364992"/>
             <a:ext cx="1645920" cy="475488"/>
           </a:xfrm>
           <a:prstGeom prst="rect">
@@ -10233,7 +10324,7 @@
                 <a:ea typeface="Trebuchet MS" pitchFamily="34" charset="-122"/>
                 <a:cs typeface="Trebuchet MS" pitchFamily="34" charset="-120"/>
               </a:rPr>
-              <a:t>child</a:t>
+              <a:t>par</a:t>
             </a:r>
             <a:endParaRPr lang="en-US" sz="1400" dirty="0"/>
           </a:p>
@@ -10247,8 +10338,8 @@
         </p:nvSpPr>
         <p:spPr>
           <a:xfrm>
-            <a:off x="4645152" y="3364992"/>
-            <a:ext cx="1097280" cy="475488"/>
+            <a:off x="3959352" y="3364992"/>
+            <a:ext cx="411480" cy="475488"/>
           </a:xfrm>
           <a:prstGeom prst="rect">
             <a:avLst/>
@@ -10286,7 +10377,7 @@
         </p:nvSpPr>
         <p:spPr>
           <a:xfrm>
-            <a:off x="5742432" y="3364992"/>
+            <a:off x="4370832" y="3364992"/>
             <a:ext cx="1645920" cy="475488"/>
           </a:xfrm>
           <a:prstGeom prst="rect">
@@ -10313,7 +10404,7 @@
         </p:nvSpPr>
         <p:spPr>
           <a:xfrm>
-            <a:off x="5742432" y="3364992"/>
+            <a:off x="4370832" y="3364992"/>
             <a:ext cx="1645920" cy="475488"/>
           </a:xfrm>
           <a:prstGeom prst="rect">
@@ -10338,6 +10429,111 @@
                 <a:ea typeface="Trebuchet MS" pitchFamily="34" charset="-122"/>
                 <a:cs typeface="Trebuchet MS" pitchFamily="34" charset="-120"/>
               </a:rPr>
+              <a:t>ent</a:t>
+            </a:r>
+            <a:endParaRPr lang="en-US" sz="1400" dirty="0"/>
+          </a:p>
+        </p:txBody>
+      </p:sp>
+      <p:sp>
+        <p:nvSpPr>
+          <p:cNvPr id="30" name="Text 28"/>
+          <p:cNvSpPr/>
+          <p:nvPr/>
+        </p:nvSpPr>
+        <p:spPr>
+          <a:xfrm>
+            <a:off x="6016752" y="3364992"/>
+            <a:ext cx="411480" cy="475488"/>
+          </a:xfrm>
+          <a:prstGeom prst="rect">
+            <a:avLst/>
+          </a:prstGeom>
+          <a:noFill/>
+          <a:ln/>
+        </p:spPr>
+        <p:txBody>
+          <a:bodyPr wrap="square" lIns="0" tIns="0" rIns="0" bIns="0" rtlCol="0" anchor="ctr"/>
+          <a:lstStyle/>
+          <a:p>
+            <a:pPr algn="ctr" indent="0" marL="0">
+              <a:buNone/>
+            </a:pPr>
+            <a:r>
+              <a:rPr lang="en-US" sz="1600" b="1" dirty="0">
+                <a:solidFill>
+                  <a:srgbClr val="0D9488"/>
+                </a:solidFill>
+                <a:latin typeface="Trebuchet MS" pitchFamily="34" charset="0"/>
+                <a:ea typeface="Trebuchet MS" pitchFamily="34" charset="-122"/>
+                <a:cs typeface="Trebuchet MS" pitchFamily="34" charset="-120"/>
+              </a:rPr>
+              <a:t>·</a:t>
+            </a:r>
+            <a:endParaRPr lang="en-US" sz="1600" dirty="0"/>
+          </a:p>
+        </p:txBody>
+      </p:sp>
+      <p:sp>
+        <p:nvSpPr>
+          <p:cNvPr id="31" name="Shape 29"/>
+          <p:cNvSpPr/>
+          <p:nvPr/>
+        </p:nvSpPr>
+        <p:spPr>
+          <a:xfrm>
+            <a:off x="6428232" y="3364992"/>
+            <a:ext cx="1645920" cy="475488"/>
+          </a:xfrm>
+          <a:prstGeom prst="rect">
+            <a:avLst>
+              <a:gd name="adj" fmla="val 9615"/>
+            </a:avLst>
+          </a:prstGeom>
+          <a:solidFill>
+            <a:srgbClr val="FFFFFF"/>
+          </a:solidFill>
+          <a:ln w="12700">
+            <a:solidFill>
+              <a:srgbClr val="0D9488"/>
+            </a:solidFill>
+            <a:prstDash val="solid"/>
+          </a:ln>
+        </p:spPr>
+      </p:sp>
+      <p:sp>
+        <p:nvSpPr>
+          <p:cNvPr id="32" name="Text 30"/>
+          <p:cNvSpPr/>
+          <p:nvPr/>
+        </p:nvSpPr>
+        <p:spPr>
+          <a:xfrm>
+            <a:off x="6428232" y="3364992"/>
+            <a:ext cx="1645920" cy="475488"/>
+          </a:xfrm>
+          <a:prstGeom prst="rect">
+            <a:avLst/>
+          </a:prstGeom>
+          <a:noFill/>
+          <a:ln/>
+        </p:spPr>
+        <p:txBody>
+          <a:bodyPr wrap="square" lIns="0" tIns="0" rIns="0" bIns="0" rtlCol="0" anchor="ctr"/>
+          <a:lstStyle/>
+          <a:p>
+            <a:pPr algn="ctr" indent="0" marL="0">
+              <a:buNone/>
+            </a:pPr>
+            <a:r>
+              <a:rPr lang="en-US" sz="1400" b="1" dirty="0">
+                <a:solidFill>
+                  <a:srgbClr val="0D9488"/>
+                </a:solidFill>
+                <a:latin typeface="Trebuchet MS" pitchFamily="34" charset="0"/>
+                <a:ea typeface="Trebuchet MS" pitchFamily="34" charset="-122"/>
+                <a:cs typeface="Trebuchet MS" pitchFamily="34" charset="-120"/>
+              </a:rPr>
               <a:t>hood</a:t>
             </a:r>
             <a:endParaRPr lang="en-US" sz="1400" dirty="0"/>
@@ -10346,7 +10542,7 @@
       </p:sp>
       <p:sp>
         <p:nvSpPr>
-          <p:cNvPr id="30" name="Shape 28"/>
+          <p:cNvPr id="33" name="Shape 31"/>
           <p:cNvSpPr/>
           <p:nvPr/>
         </p:nvSpPr>
@@ -10373,7 +10569,7 @@
       </p:sp>
       <p:sp>
         <p:nvSpPr>
-          <p:cNvPr id="31" name="Text 29"/>
+          <p:cNvPr id="34" name="Text 32"/>
           <p:cNvSpPr/>
           <p:nvPr/>
         </p:nvSpPr>
@@ -10412,7 +10608,7 @@
       </p:sp>
       <p:sp>
         <p:nvSpPr>
-          <p:cNvPr id="32" name="Shape 30"/>
+          <p:cNvPr id="35" name="Shape 33"/>
           <p:cNvSpPr/>
           <p:nvPr/>
         </p:nvSpPr>
@@ -10439,14 +10635,14 @@
       </p:sp>
       <p:sp>
         <p:nvSpPr>
-          <p:cNvPr id="33" name="Shape 31"/>
-          <p:cNvSpPr/>
-          <p:nvPr/>
-        </p:nvSpPr>
-        <p:spPr>
-          <a:xfrm>
-            <a:off x="2124837" y="4169664"/>
-            <a:ext cx="685800" cy="475488"/>
+          <p:cNvPr id="36" name="Shape 34"/>
+          <p:cNvSpPr/>
+          <p:nvPr/>
+        </p:nvSpPr>
+        <p:spPr>
+          <a:xfrm>
+            <a:off x="1951330" y="4169664"/>
+            <a:ext cx="676656" cy="475488"/>
           </a:xfrm>
           <a:prstGeom prst="rect">
             <a:avLst>
@@ -10466,14 +10662,14 @@
       </p:sp>
       <p:sp>
         <p:nvSpPr>
-          <p:cNvPr id="34" name="Text 32"/>
-          <p:cNvSpPr/>
-          <p:nvPr/>
-        </p:nvSpPr>
-        <p:spPr>
-          <a:xfrm>
-            <a:off x="2124837" y="4169664"/>
-            <a:ext cx="685800" cy="475488"/>
+          <p:cNvPr id="37" name="Text 35"/>
+          <p:cNvSpPr/>
+          <p:nvPr/>
+        </p:nvSpPr>
+        <p:spPr>
+          <a:xfrm>
+            <a:off x="1951330" y="4169664"/>
+            <a:ext cx="676656" cy="475488"/>
           </a:xfrm>
           <a:prstGeom prst="rect">
             <a:avLst/>
@@ -10497,7 +10693,7 @@
                 <a:ea typeface="Trebuchet MS" pitchFamily="34" charset="-122"/>
                 <a:cs typeface="Trebuchet MS" pitchFamily="34" charset="-120"/>
               </a:rPr>
-              <a:t>ch</a:t>
+              <a:t>p</a:t>
             </a:r>
             <a:endParaRPr lang="en-US" sz="900" dirty="0"/>
           </a:p>
@@ -10505,14 +10701,14 @@
       </p:sp>
       <p:sp>
         <p:nvSpPr>
-          <p:cNvPr id="35" name="Shape 33"/>
-          <p:cNvSpPr/>
-          <p:nvPr/>
-        </p:nvSpPr>
-        <p:spPr>
-          <a:xfrm>
-            <a:off x="3033522" y="4169664"/>
-            <a:ext cx="685800" cy="475488"/>
+          <p:cNvPr id="38" name="Shape 36"/>
+          <p:cNvSpPr/>
+          <p:nvPr/>
+        </p:nvSpPr>
+        <p:spPr>
+          <a:xfrm>
+            <a:off x="2677363" y="4169664"/>
+            <a:ext cx="676656" cy="475488"/>
           </a:xfrm>
           <a:prstGeom prst="rect">
             <a:avLst>
@@ -10532,14 +10728,14 @@
       </p:sp>
       <p:sp>
         <p:nvSpPr>
-          <p:cNvPr id="36" name="Text 34"/>
-          <p:cNvSpPr/>
-          <p:nvPr/>
-        </p:nvSpPr>
-        <p:spPr>
-          <a:xfrm>
-            <a:off x="3033522" y="4169664"/>
-            <a:ext cx="685800" cy="475488"/>
+          <p:cNvPr id="39" name="Text 37"/>
+          <p:cNvSpPr/>
+          <p:nvPr/>
+        </p:nvSpPr>
+        <p:spPr>
+          <a:xfrm>
+            <a:off x="2677363" y="4169664"/>
+            <a:ext cx="676656" cy="475488"/>
           </a:xfrm>
           <a:prstGeom prst="rect">
             <a:avLst/>
@@ -10563,7 +10759,7 @@
                 <a:ea typeface="Trebuchet MS" pitchFamily="34" charset="-122"/>
                 <a:cs typeface="Trebuchet MS" pitchFamily="34" charset="-120"/>
               </a:rPr>
-              <a:t>i</a:t>
+              <a:t>a</a:t>
             </a:r>
             <a:endParaRPr lang="en-US" sz="900" dirty="0"/>
           </a:p>
@@ -10571,14 +10767,14 @@
       </p:sp>
       <p:sp>
         <p:nvSpPr>
-          <p:cNvPr id="37" name="Shape 35"/>
-          <p:cNvSpPr/>
-          <p:nvPr/>
-        </p:nvSpPr>
-        <p:spPr>
-          <a:xfrm>
-            <a:off x="3942207" y="4169664"/>
-            <a:ext cx="685800" cy="475488"/>
+          <p:cNvPr id="40" name="Shape 38"/>
+          <p:cNvSpPr/>
+          <p:nvPr/>
+        </p:nvSpPr>
+        <p:spPr>
+          <a:xfrm>
+            <a:off x="3403397" y="4169664"/>
+            <a:ext cx="676656" cy="475488"/>
           </a:xfrm>
           <a:prstGeom prst="rect">
             <a:avLst>
@@ -10598,14 +10794,14 @@
       </p:sp>
       <p:sp>
         <p:nvSpPr>
-          <p:cNvPr id="38" name="Text 36"/>
-          <p:cNvSpPr/>
-          <p:nvPr/>
-        </p:nvSpPr>
-        <p:spPr>
-          <a:xfrm>
-            <a:off x="3942207" y="4169664"/>
-            <a:ext cx="685800" cy="475488"/>
+          <p:cNvPr id="41" name="Text 39"/>
+          <p:cNvSpPr/>
+          <p:nvPr/>
+        </p:nvSpPr>
+        <p:spPr>
+          <a:xfrm>
+            <a:off x="3403397" y="4169664"/>
+            <a:ext cx="676656" cy="475488"/>
           </a:xfrm>
           <a:prstGeom prst="rect">
             <a:avLst/>
@@ -10629,7 +10825,7 @@
                 <a:ea typeface="Trebuchet MS" pitchFamily="34" charset="-122"/>
                 <a:cs typeface="Trebuchet MS" pitchFamily="34" charset="-120"/>
               </a:rPr>
-              <a:t>l</a:t>
+              <a:t>r</a:t>
             </a:r>
             <a:endParaRPr lang="en-US" sz="900" dirty="0"/>
           </a:p>
@@ -10637,14 +10833,14 @@
       </p:sp>
       <p:sp>
         <p:nvSpPr>
-          <p:cNvPr id="39" name="Shape 37"/>
-          <p:cNvSpPr/>
-          <p:nvPr/>
-        </p:nvSpPr>
-        <p:spPr>
-          <a:xfrm>
-            <a:off x="4850892" y="4169664"/>
-            <a:ext cx="685800" cy="475488"/>
+          <p:cNvPr id="42" name="Shape 40"/>
+          <p:cNvSpPr/>
+          <p:nvPr/>
+        </p:nvSpPr>
+        <p:spPr>
+          <a:xfrm>
+            <a:off x="4129430" y="4169664"/>
+            <a:ext cx="676656" cy="475488"/>
           </a:xfrm>
           <a:prstGeom prst="rect">
             <a:avLst>
@@ -10664,14 +10860,14 @@
       </p:sp>
       <p:sp>
         <p:nvSpPr>
-          <p:cNvPr id="40" name="Text 38"/>
-          <p:cNvSpPr/>
-          <p:nvPr/>
-        </p:nvSpPr>
-        <p:spPr>
-          <a:xfrm>
-            <a:off x="4850892" y="4169664"/>
-            <a:ext cx="685800" cy="475488"/>
+          <p:cNvPr id="43" name="Text 41"/>
+          <p:cNvSpPr/>
+          <p:nvPr/>
+        </p:nvSpPr>
+        <p:spPr>
+          <a:xfrm>
+            <a:off x="4129430" y="4169664"/>
+            <a:ext cx="676656" cy="475488"/>
           </a:xfrm>
           <a:prstGeom prst="rect">
             <a:avLst/>
@@ -10695,7 +10891,7 @@
                 <a:ea typeface="Trebuchet MS" pitchFamily="34" charset="-122"/>
                 <a:cs typeface="Trebuchet MS" pitchFamily="34" charset="-120"/>
               </a:rPr>
-              <a:t>d</a:t>
+              <a:t>e</a:t>
             </a:r>
             <a:endParaRPr lang="en-US" sz="900" dirty="0"/>
           </a:p>
@@ -10703,14 +10899,14 @@
       </p:sp>
       <p:sp>
         <p:nvSpPr>
-          <p:cNvPr id="41" name="Shape 39"/>
-          <p:cNvSpPr/>
-          <p:nvPr/>
-        </p:nvSpPr>
-        <p:spPr>
-          <a:xfrm>
-            <a:off x="5759577" y="4169664"/>
-            <a:ext cx="685800" cy="475488"/>
+          <p:cNvPr id="44" name="Shape 42"/>
+          <p:cNvSpPr/>
+          <p:nvPr/>
+        </p:nvSpPr>
+        <p:spPr>
+          <a:xfrm>
+            <a:off x="4855464" y="4169664"/>
+            <a:ext cx="676656" cy="475488"/>
           </a:xfrm>
           <a:prstGeom prst="rect">
             <a:avLst>
@@ -10730,14 +10926,14 @@
       </p:sp>
       <p:sp>
         <p:nvSpPr>
-          <p:cNvPr id="42" name="Text 40"/>
-          <p:cNvSpPr/>
-          <p:nvPr/>
-        </p:nvSpPr>
-        <p:spPr>
-          <a:xfrm>
-            <a:off x="5759577" y="4169664"/>
-            <a:ext cx="685800" cy="475488"/>
+          <p:cNvPr id="45" name="Text 43"/>
+          <p:cNvSpPr/>
+          <p:nvPr/>
+        </p:nvSpPr>
+        <p:spPr>
+          <a:xfrm>
+            <a:off x="4855464" y="4169664"/>
+            <a:ext cx="676656" cy="475488"/>
           </a:xfrm>
           <a:prstGeom prst="rect">
             <a:avLst/>
@@ -10761,7 +10957,7 @@
                 <a:ea typeface="Trebuchet MS" pitchFamily="34" charset="-122"/>
                 <a:cs typeface="Trebuchet MS" pitchFamily="34" charset="-120"/>
               </a:rPr>
-              <a:t>h</a:t>
+              <a:t>n</a:t>
             </a:r>
             <a:endParaRPr lang="en-US" sz="900" dirty="0"/>
           </a:p>
@@ -10769,14 +10965,14 @@
       </p:sp>
       <p:sp>
         <p:nvSpPr>
-          <p:cNvPr id="43" name="Shape 41"/>
-          <p:cNvSpPr/>
-          <p:nvPr/>
-        </p:nvSpPr>
-        <p:spPr>
-          <a:xfrm>
-            <a:off x="6668262" y="4169664"/>
-            <a:ext cx="685800" cy="475488"/>
+          <p:cNvPr id="46" name="Shape 44"/>
+          <p:cNvSpPr/>
+          <p:nvPr/>
+        </p:nvSpPr>
+        <p:spPr>
+          <a:xfrm>
+            <a:off x="5581498" y="4169664"/>
+            <a:ext cx="676656" cy="475488"/>
           </a:xfrm>
           <a:prstGeom prst="rect">
             <a:avLst>
@@ -10796,14 +10992,14 @@
       </p:sp>
       <p:sp>
         <p:nvSpPr>
-          <p:cNvPr id="44" name="Text 42"/>
-          <p:cNvSpPr/>
-          <p:nvPr/>
-        </p:nvSpPr>
-        <p:spPr>
-          <a:xfrm>
-            <a:off x="6668262" y="4169664"/>
-            <a:ext cx="685800" cy="475488"/>
+          <p:cNvPr id="47" name="Text 45"/>
+          <p:cNvSpPr/>
+          <p:nvPr/>
+        </p:nvSpPr>
+        <p:spPr>
+          <a:xfrm>
+            <a:off x="5581498" y="4169664"/>
+            <a:ext cx="676656" cy="475488"/>
           </a:xfrm>
           <a:prstGeom prst="rect">
             <a:avLst/>
@@ -10827,7 +11023,7 @@
                 <a:ea typeface="Trebuchet MS" pitchFamily="34" charset="-122"/>
                 <a:cs typeface="Trebuchet MS" pitchFamily="34" charset="-120"/>
               </a:rPr>
-              <a:t>oo</a:t>
+              <a:t>t</a:t>
             </a:r>
             <a:endParaRPr lang="en-US" sz="900" dirty="0"/>
           </a:p>
@@ -10835,14 +11031,14 @@
       </p:sp>
       <p:sp>
         <p:nvSpPr>
-          <p:cNvPr id="45" name="Shape 43"/>
-          <p:cNvSpPr/>
-          <p:nvPr/>
-        </p:nvSpPr>
-        <p:spPr>
-          <a:xfrm>
-            <a:off x="7576947" y="4169664"/>
-            <a:ext cx="685800" cy="475488"/>
+          <p:cNvPr id="48" name="Shape 46"/>
+          <p:cNvSpPr/>
+          <p:nvPr/>
+        </p:nvSpPr>
+        <p:spPr>
+          <a:xfrm>
+            <a:off x="6307531" y="4169664"/>
+            <a:ext cx="676656" cy="475488"/>
           </a:xfrm>
           <a:prstGeom prst="rect">
             <a:avLst>
@@ -10862,14 +11058,146 @@
       </p:sp>
       <p:sp>
         <p:nvSpPr>
-          <p:cNvPr id="46" name="Text 44"/>
-          <p:cNvSpPr/>
-          <p:nvPr/>
-        </p:nvSpPr>
-        <p:spPr>
-          <a:xfrm>
-            <a:off x="7576947" y="4169664"/>
-            <a:ext cx="685800" cy="475488"/>
+          <p:cNvPr id="49" name="Text 47"/>
+          <p:cNvSpPr/>
+          <p:nvPr/>
+        </p:nvSpPr>
+        <p:spPr>
+          <a:xfrm>
+            <a:off x="6307531" y="4169664"/>
+            <a:ext cx="676656" cy="475488"/>
+          </a:xfrm>
+          <a:prstGeom prst="rect">
+            <a:avLst/>
+          </a:prstGeom>
+          <a:noFill/>
+          <a:ln/>
+        </p:spPr>
+        <p:txBody>
+          <a:bodyPr wrap="square" lIns="0" tIns="0" rIns="0" bIns="0" rtlCol="0" anchor="ctr"/>
+          <a:lstStyle/>
+          <a:p>
+            <a:pPr algn="ctr" indent="0" marL="0">
+              <a:buNone/>
+            </a:pPr>
+            <a:r>
+              <a:rPr lang="en-US" sz="900" b="1" dirty="0">
+                <a:solidFill>
+                  <a:srgbClr val="9D174D"/>
+                </a:solidFill>
+                <a:latin typeface="Trebuchet MS" pitchFamily="34" charset="0"/>
+                <a:ea typeface="Trebuchet MS" pitchFamily="34" charset="-122"/>
+                <a:cs typeface="Trebuchet MS" pitchFamily="34" charset="-120"/>
+              </a:rPr>
+              <a:t>h</a:t>
+            </a:r>
+            <a:endParaRPr lang="en-US" sz="900" dirty="0"/>
+          </a:p>
+        </p:txBody>
+      </p:sp>
+      <p:sp>
+        <p:nvSpPr>
+          <p:cNvPr id="50" name="Shape 48"/>
+          <p:cNvSpPr/>
+          <p:nvPr/>
+        </p:nvSpPr>
+        <p:spPr>
+          <a:xfrm>
+            <a:off x="7033565" y="4169664"/>
+            <a:ext cx="676656" cy="475488"/>
+          </a:xfrm>
+          <a:prstGeom prst="rect">
+            <a:avLst>
+              <a:gd name="adj" fmla="val 7692"/>
+            </a:avLst>
+          </a:prstGeom>
+          <a:solidFill>
+            <a:srgbClr val="FFFFFF"/>
+          </a:solidFill>
+          <a:ln w="12700">
+            <a:solidFill>
+              <a:srgbClr val="DB2777"/>
+            </a:solidFill>
+            <a:prstDash val="solid"/>
+          </a:ln>
+        </p:spPr>
+      </p:sp>
+      <p:sp>
+        <p:nvSpPr>
+          <p:cNvPr id="51" name="Text 49"/>
+          <p:cNvSpPr/>
+          <p:nvPr/>
+        </p:nvSpPr>
+        <p:spPr>
+          <a:xfrm>
+            <a:off x="7033565" y="4169664"/>
+            <a:ext cx="676656" cy="475488"/>
+          </a:xfrm>
+          <a:prstGeom prst="rect">
+            <a:avLst/>
+          </a:prstGeom>
+          <a:noFill/>
+          <a:ln/>
+        </p:spPr>
+        <p:txBody>
+          <a:bodyPr wrap="square" lIns="0" tIns="0" rIns="0" bIns="0" rtlCol="0" anchor="ctr"/>
+          <a:lstStyle/>
+          <a:p>
+            <a:pPr algn="ctr" indent="0" marL="0">
+              <a:buNone/>
+            </a:pPr>
+            <a:r>
+              <a:rPr lang="en-US" sz="900" b="1" dirty="0">
+                <a:solidFill>
+                  <a:srgbClr val="9D174D"/>
+                </a:solidFill>
+                <a:latin typeface="Trebuchet MS" pitchFamily="34" charset="0"/>
+                <a:ea typeface="Trebuchet MS" pitchFamily="34" charset="-122"/>
+                <a:cs typeface="Trebuchet MS" pitchFamily="34" charset="-120"/>
+              </a:rPr>
+              <a:t>oo</a:t>
+            </a:r>
+            <a:endParaRPr lang="en-US" sz="900" dirty="0"/>
+          </a:p>
+        </p:txBody>
+      </p:sp>
+      <p:sp>
+        <p:nvSpPr>
+          <p:cNvPr id="52" name="Shape 50"/>
+          <p:cNvSpPr/>
+          <p:nvPr/>
+        </p:nvSpPr>
+        <p:spPr>
+          <a:xfrm>
+            <a:off x="7759598" y="4169664"/>
+            <a:ext cx="676656" cy="475488"/>
+          </a:xfrm>
+          <a:prstGeom prst="rect">
+            <a:avLst>
+              <a:gd name="adj" fmla="val 7692"/>
+            </a:avLst>
+          </a:prstGeom>
+          <a:solidFill>
+            <a:srgbClr val="FFFFFF"/>
+          </a:solidFill>
+          <a:ln w="12700">
+            <a:solidFill>
+              <a:srgbClr val="DB2777"/>
+            </a:solidFill>
+            <a:prstDash val="solid"/>
+          </a:ln>
+        </p:spPr>
+      </p:sp>
+      <p:sp>
+        <p:nvSpPr>
+          <p:cNvPr id="53" name="Text 51"/>
+          <p:cNvSpPr/>
+          <p:nvPr/>
+        </p:nvSpPr>
+        <p:spPr>
+          <a:xfrm>
+            <a:off x="7759598" y="4169664"/>
+            <a:ext cx="676656" cy="475488"/>
           </a:xfrm>
           <a:prstGeom prst="rect">
             <a:avLst/>
@@ -11185,7 +11513,7 @@
                 <a:ea typeface="Calibri" pitchFamily="34" charset="-122"/>
                 <a:cs typeface="Calibri" pitchFamily="34" charset="-120"/>
               </a:rPr>
-              <a:t>Word Labs  •  wordlabs.app  •  Suffix: '-hood' = state, condition, or group</a:t>
+              <a:t>Word Labs  •  wordlabs.app  •  Suffix: '-hood' = state of</a:t>
             </a:r>
             <a:endParaRPr lang="en-US" sz="800" dirty="0"/>
           </a:p>
@@ -11324,7 +11652,7 @@
                 <a:ea typeface="Trebuchet MS" pitchFamily="34" charset="-122"/>
                 <a:cs typeface="Trebuchet MS" pitchFamily="34" charset="-120"/>
               </a:rPr>
-              <a:t>neighbourhood</a:t>
+              <a:t>sisterhood</a:t>
             </a:r>
             <a:endParaRPr lang="en-US" sz="2800" dirty="0"/>
           </a:p>
@@ -12012,7 +12340,7 @@
                 <a:ea typeface="Calibri" pitchFamily="34" charset="-122"/>
                 <a:cs typeface="Calibri" pitchFamily="34" charset="-120"/>
               </a:rPr>
-              <a:t>Word Labs  •  wordlabs.app  •  Suffix: '-hood' = state, condition, or group</a:t>
+              <a:t>Word Labs  •  wordlabs.app  •  Suffix: '-hood' = state of</a:t>
             </a:r>
             <a:endParaRPr lang="en-US" sz="800" dirty="0"/>
           </a:p>
@@ -12151,7 +12479,7 @@
                 <a:ea typeface="Trebuchet MS" pitchFamily="34" charset="-122"/>
                 <a:cs typeface="Trebuchet MS" pitchFamily="34" charset="-120"/>
               </a:rPr>
-              <a:t>neighbourhood</a:t>
+              <a:t>sisterhood</a:t>
             </a:r>
             <a:endParaRPr lang="en-US" sz="2800" dirty="0"/>
           </a:p>
@@ -12290,7 +12618,7 @@
                 <a:ea typeface="Trebuchet MS" pitchFamily="34" charset="-122"/>
                 <a:cs typeface="Trebuchet MS" pitchFamily="34" charset="-120"/>
               </a:rPr>
-              <a:t>neighbour</a:t>
+              <a:t>sister</a:t>
             </a:r>
             <a:endParaRPr lang="en-US" sz="1300" dirty="0"/>
           </a:p>
@@ -12329,7 +12657,7 @@
                 <a:ea typeface="Calibri" pitchFamily="34" charset="-122"/>
                 <a:cs typeface="Calibri" pitchFamily="34" charset="-120"/>
               </a:rPr>
-              <a:t>person living nearby</a:t>
+              <a:t>a girl or woman with the same parents as you</a:t>
             </a:r>
             <a:endParaRPr lang="en-US" sz="850" dirty="0"/>
           </a:p>
@@ -12441,7 +12769,7 @@
                 <a:ea typeface="Calibri" pitchFamily="34" charset="-122"/>
                 <a:cs typeface="Calibri" pitchFamily="34" charset="-120"/>
               </a:rPr>
-              <a:t>state or condition of</a:t>
+              <a:t>a state or group of</a:t>
             </a:r>
             <a:endParaRPr lang="en-US" sz="850" dirty="0"/>
           </a:p>
@@ -12997,7 +13325,7 @@
                 <a:ea typeface="Calibri" pitchFamily="34" charset="-122"/>
                 <a:cs typeface="Calibri" pitchFamily="34" charset="-120"/>
               </a:rPr>
-              <a:t>Word Labs  •  wordlabs.app  •  Suffix: '-hood' = state, condition, or group</a:t>
+              <a:t>Word Labs  •  wordlabs.app  •  Suffix: '-hood' = state of</a:t>
             </a:r>
             <a:endParaRPr lang="en-US" sz="800" dirty="0"/>
           </a:p>
@@ -13136,7 +13464,7 @@
                 <a:ea typeface="Trebuchet MS" pitchFamily="34" charset="-122"/>
                 <a:cs typeface="Trebuchet MS" pitchFamily="34" charset="-120"/>
               </a:rPr>
-              <a:t>neighbourhood</a:t>
+              <a:t>sisterhood</a:t>
             </a:r>
             <a:endParaRPr lang="en-US" sz="2800" dirty="0"/>
           </a:p>
@@ -13275,7 +13603,7 @@
                 <a:ea typeface="Trebuchet MS" pitchFamily="34" charset="-122"/>
                 <a:cs typeface="Trebuchet MS" pitchFamily="34" charset="-120"/>
               </a:rPr>
-              <a:t>neighbour</a:t>
+              <a:t>sister</a:t>
             </a:r>
             <a:endParaRPr lang="en-US" sz="1300" dirty="0"/>
           </a:p>
@@ -13314,7 +13642,7 @@
                 <a:ea typeface="Calibri" pitchFamily="34" charset="-122"/>
                 <a:cs typeface="Calibri" pitchFamily="34" charset="-120"/>
               </a:rPr>
-              <a:t>person living nearby</a:t>
+              <a:t>a girl or woman with the same parents as you</a:t>
             </a:r>
             <a:endParaRPr lang="en-US" sz="850" dirty="0"/>
           </a:p>
@@ -13426,7 +13754,7 @@
                 <a:ea typeface="Calibri" pitchFamily="34" charset="-122"/>
                 <a:cs typeface="Calibri" pitchFamily="34" charset="-120"/>
               </a:rPr>
-              <a:t>state or condition of</a:t>
+              <a:t>a state or group of</a:t>
             </a:r>
             <a:endParaRPr lang="en-US" sz="850" dirty="0"/>
           </a:p>
@@ -13585,7 +13913,7 @@
                 <a:ea typeface="Trebuchet MS" pitchFamily="34" charset="-122"/>
                 <a:cs typeface="Trebuchet MS" pitchFamily="34" charset="-120"/>
               </a:rPr>
-              <a:t>neigh</a:t>
+              <a:t>sis</a:t>
             </a:r>
             <a:endParaRPr lang="en-US" sz="1400" dirty="0"/>
           </a:p>
@@ -13690,7 +14018,7 @@
                 <a:ea typeface="Trebuchet MS" pitchFamily="34" charset="-122"/>
                 <a:cs typeface="Trebuchet MS" pitchFamily="34" charset="-120"/>
               </a:rPr>
-              <a:t>bour</a:t>
+              <a:t>ter</a:t>
             </a:r>
             <a:endParaRPr lang="en-US" sz="1400" dirty="0"/>
           </a:p>
@@ -14128,7 +14456,7 @@
                 <a:ea typeface="Calibri" pitchFamily="34" charset="-122"/>
                 <a:cs typeface="Calibri" pitchFamily="34" charset="-120"/>
               </a:rPr>
-              <a:t>Suffix '-hood' — state, condition, or group</a:t>
+              <a:t>Suffix '-hood' — state of</a:t>
             </a:r>
             <a:endParaRPr lang="en-US" sz="1600" dirty="0"/>
           </a:p>
@@ -14484,7 +14812,7 @@
                 <a:ea typeface="Calibri" pitchFamily="34" charset="-122"/>
                 <a:cs typeface="Calibri" pitchFamily="34" charset="-120"/>
               </a:rPr>
-              <a:t>Word Labs  •  wordlabs.app  •  Suffix: '-hood' = state, condition, or group</a:t>
+              <a:t>Word Labs  •  wordlabs.app  •  Suffix: '-hood' = state of</a:t>
             </a:r>
             <a:endParaRPr lang="en-US" sz="800" dirty="0"/>
           </a:p>
@@ -14623,7 +14951,7 @@
                 <a:ea typeface="Trebuchet MS" pitchFamily="34" charset="-122"/>
                 <a:cs typeface="Trebuchet MS" pitchFamily="34" charset="-120"/>
               </a:rPr>
-              <a:t>neighbourhood</a:t>
+              <a:t>sisterhood</a:t>
             </a:r>
             <a:endParaRPr lang="en-US" sz="2800" dirty="0"/>
           </a:p>
@@ -14762,7 +15090,7 @@
                 <a:ea typeface="Trebuchet MS" pitchFamily="34" charset="-122"/>
                 <a:cs typeface="Trebuchet MS" pitchFamily="34" charset="-120"/>
               </a:rPr>
-              <a:t>neighbour</a:t>
+              <a:t>sister</a:t>
             </a:r>
             <a:endParaRPr lang="en-US" sz="1300" dirty="0"/>
           </a:p>
@@ -14801,7 +15129,7 @@
                 <a:ea typeface="Calibri" pitchFamily="34" charset="-122"/>
                 <a:cs typeface="Calibri" pitchFamily="34" charset="-120"/>
               </a:rPr>
-              <a:t>person living nearby</a:t>
+              <a:t>a girl or woman with the same parents as you</a:t>
             </a:r>
             <a:endParaRPr lang="en-US" sz="850" dirty="0"/>
           </a:p>
@@ -14913,7 +15241,7 @@
                 <a:ea typeface="Calibri" pitchFamily="34" charset="-122"/>
                 <a:cs typeface="Calibri" pitchFamily="34" charset="-120"/>
               </a:rPr>
-              <a:t>state or condition of</a:t>
+              <a:t>a state or group of</a:t>
             </a:r>
             <a:endParaRPr lang="en-US" sz="850" dirty="0"/>
           </a:p>
@@ -15072,7 +15400,7 @@
                 <a:ea typeface="Trebuchet MS" pitchFamily="34" charset="-122"/>
                 <a:cs typeface="Trebuchet MS" pitchFamily="34" charset="-120"/>
               </a:rPr>
-              <a:t>neigh</a:t>
+              <a:t>sis</a:t>
             </a:r>
             <a:endParaRPr lang="en-US" sz="1400" dirty="0"/>
           </a:p>
@@ -15177,7 +15505,7 @@
                 <a:ea typeface="Trebuchet MS" pitchFamily="34" charset="-122"/>
                 <a:cs typeface="Trebuchet MS" pitchFamily="34" charset="-120"/>
               </a:rPr>
-              <a:t>bour</a:t>
+              <a:t>ter</a:t>
             </a:r>
             <a:endParaRPr lang="en-US" sz="1400" dirty="0"/>
           </a:p>
@@ -15363,11 +15691,11 @@
         <p:spPr>
           <a:xfrm>
             <a:off x="1874520" y="4096512"/>
-            <a:ext cx="6903720" cy="804672"/>
+            <a:ext cx="6903720" cy="658368"/>
           </a:xfrm>
           <a:prstGeom prst="rect">
             <a:avLst>
-              <a:gd name="adj" fmla="val 6818"/>
+              <a:gd name="adj" fmla="val 8333"/>
             </a:avLst>
           </a:prstGeom>
           <a:solidFill>
@@ -15389,12 +15717,12 @@
         </p:nvSpPr>
         <p:spPr>
           <a:xfrm>
-            <a:off x="2124837" y="4169664"/>
-            <a:ext cx="685800" cy="384048"/>
+            <a:off x="2023872" y="4169664"/>
+            <a:ext cx="685800" cy="475488"/>
           </a:xfrm>
           <a:prstGeom prst="rect">
             <a:avLst>
-              <a:gd name="adj" fmla="val 9524"/>
+              <a:gd name="adj" fmla="val 7692"/>
             </a:avLst>
           </a:prstGeom>
           <a:solidFill>
@@ -15416,8 +15744,8 @@
         </p:nvSpPr>
         <p:spPr>
           <a:xfrm>
-            <a:off x="2124837" y="4169664"/>
-            <a:ext cx="685800" cy="384048"/>
+            <a:off x="2023872" y="4169664"/>
+            <a:ext cx="685800" cy="475488"/>
           </a:xfrm>
           <a:prstGeom prst="rect">
             <a:avLst/>
@@ -15441,7 +15769,7 @@
                 <a:ea typeface="Trebuchet MS" pitchFamily="34" charset="-122"/>
                 <a:cs typeface="Trebuchet MS" pitchFamily="34" charset="-120"/>
               </a:rPr>
-              <a:t>n</a:t>
+              <a:t>s</a:t>
             </a:r>
             <a:endParaRPr lang="en-US" sz="900" dirty="0"/>
           </a:p>
@@ -15455,12 +15783,12 @@
         </p:nvSpPr>
         <p:spPr>
           <a:xfrm>
-            <a:off x="3033522" y="4169664"/>
-            <a:ext cx="685800" cy="384048"/>
+            <a:off x="2831592" y="4169664"/>
+            <a:ext cx="685800" cy="475488"/>
           </a:xfrm>
           <a:prstGeom prst="rect">
             <a:avLst>
-              <a:gd name="adj" fmla="val 9524"/>
+              <a:gd name="adj" fmla="val 7692"/>
             </a:avLst>
           </a:prstGeom>
           <a:solidFill>
@@ -15482,8 +15810,8 @@
         </p:nvSpPr>
         <p:spPr>
           <a:xfrm>
-            <a:off x="3033522" y="4169664"/>
-            <a:ext cx="685800" cy="384048"/>
+            <a:off x="2831592" y="4169664"/>
+            <a:ext cx="685800" cy="475488"/>
           </a:xfrm>
           <a:prstGeom prst="rect">
             <a:avLst/>
@@ -15507,7 +15835,7 @@
                 <a:ea typeface="Trebuchet MS" pitchFamily="34" charset="-122"/>
                 <a:cs typeface="Trebuchet MS" pitchFamily="34" charset="-120"/>
               </a:rPr>
-              <a:t>eigh</a:t>
+              <a:t>i</a:t>
             </a:r>
             <a:endParaRPr lang="en-US" sz="900" dirty="0"/>
           </a:p>
@@ -15515,57 +15843,18 @@
       </p:sp>
       <p:sp>
         <p:nvSpPr>
-          <p:cNvPr id="40" name="Text 38"/>
-          <p:cNvSpPr/>
-          <p:nvPr/>
-        </p:nvSpPr>
-        <p:spPr>
-          <a:xfrm>
-            <a:off x="3033522" y="4572000"/>
-            <a:ext cx="685800" cy="219456"/>
-          </a:xfrm>
-          <a:prstGeom prst="rect">
-            <a:avLst/>
-          </a:prstGeom>
-          <a:noFill/>
-          <a:ln/>
-        </p:spPr>
-        <p:txBody>
-          <a:bodyPr wrap="square" lIns="0" tIns="0" rIns="0" bIns="0" rtlCol="0" anchor="t"/>
-          <a:lstStyle/>
-          <a:p>
-            <a:pPr algn="ctr" indent="0" marL="0">
-              <a:buNone/>
-            </a:pPr>
-            <a:r>
-              <a:rPr lang="en-US" sz="750" i="1" dirty="0">
-                <a:solidFill>
-                  <a:srgbClr val="94A3B8"/>
-                </a:solidFill>
-                <a:latin typeface="Calibri" pitchFamily="34" charset="0"/>
-                <a:ea typeface="Calibri" pitchFamily="34" charset="-122"/>
-                <a:cs typeface="Calibri" pitchFamily="34" charset="-120"/>
-              </a:rPr>
-              <a:t>/ay/</a:t>
-            </a:r>
-            <a:endParaRPr lang="en-US" sz="750" dirty="0"/>
-          </a:p>
-        </p:txBody>
-      </p:sp>
-      <p:sp>
-        <p:nvSpPr>
-          <p:cNvPr id="41" name="Shape 39"/>
-          <p:cNvSpPr/>
-          <p:nvPr/>
-        </p:nvSpPr>
-        <p:spPr>
-          <a:xfrm>
-            <a:off x="3942207" y="4169664"/>
-            <a:ext cx="685800" cy="384048"/>
+          <p:cNvPr id="40" name="Shape 38"/>
+          <p:cNvSpPr/>
+          <p:nvPr/>
+        </p:nvSpPr>
+        <p:spPr>
+          <a:xfrm>
+            <a:off x="3639312" y="4169664"/>
+            <a:ext cx="685800" cy="475488"/>
           </a:xfrm>
           <a:prstGeom prst="rect">
             <a:avLst>
-              <a:gd name="adj" fmla="val 9524"/>
+              <a:gd name="adj" fmla="val 7692"/>
             </a:avLst>
           </a:prstGeom>
           <a:solidFill>
@@ -15581,14 +15870,14 @@
       </p:sp>
       <p:sp>
         <p:nvSpPr>
-          <p:cNvPr id="42" name="Text 40"/>
-          <p:cNvSpPr/>
-          <p:nvPr/>
-        </p:nvSpPr>
-        <p:spPr>
-          <a:xfrm>
-            <a:off x="3942207" y="4169664"/>
-            <a:ext cx="685800" cy="384048"/>
+          <p:cNvPr id="41" name="Text 39"/>
+          <p:cNvSpPr/>
+          <p:nvPr/>
+        </p:nvSpPr>
+        <p:spPr>
+          <a:xfrm>
+            <a:off x="3639312" y="4169664"/>
+            <a:ext cx="685800" cy="475488"/>
           </a:xfrm>
           <a:prstGeom prst="rect">
             <a:avLst/>
@@ -15612,7 +15901,7 @@
                 <a:ea typeface="Trebuchet MS" pitchFamily="34" charset="-122"/>
                 <a:cs typeface="Trebuchet MS" pitchFamily="34" charset="-120"/>
               </a:rPr>
-              <a:t>b</a:t>
+              <a:t>s</a:t>
             </a:r>
             <a:endParaRPr lang="en-US" sz="900" dirty="0"/>
           </a:p>
@@ -15620,18 +15909,18 @@
       </p:sp>
       <p:sp>
         <p:nvSpPr>
-          <p:cNvPr id="43" name="Shape 41"/>
-          <p:cNvSpPr/>
-          <p:nvPr/>
-        </p:nvSpPr>
-        <p:spPr>
-          <a:xfrm>
-            <a:off x="4850892" y="4169664"/>
-            <a:ext cx="685800" cy="384048"/>
+          <p:cNvPr id="42" name="Shape 40"/>
+          <p:cNvSpPr/>
+          <p:nvPr/>
+        </p:nvSpPr>
+        <p:spPr>
+          <a:xfrm>
+            <a:off x="4447032" y="4169664"/>
+            <a:ext cx="685800" cy="475488"/>
           </a:xfrm>
           <a:prstGeom prst="rect">
             <a:avLst>
-              <a:gd name="adj" fmla="val 9524"/>
+              <a:gd name="adj" fmla="val 7692"/>
             </a:avLst>
           </a:prstGeom>
           <a:solidFill>
@@ -15647,14 +15936,14 @@
       </p:sp>
       <p:sp>
         <p:nvSpPr>
-          <p:cNvPr id="44" name="Text 42"/>
-          <p:cNvSpPr/>
-          <p:nvPr/>
-        </p:nvSpPr>
-        <p:spPr>
-          <a:xfrm>
-            <a:off x="4850892" y="4169664"/>
-            <a:ext cx="685800" cy="384048"/>
+          <p:cNvPr id="43" name="Text 41"/>
+          <p:cNvSpPr/>
+          <p:nvPr/>
+        </p:nvSpPr>
+        <p:spPr>
+          <a:xfrm>
+            <a:off x="4447032" y="4169664"/>
+            <a:ext cx="685800" cy="475488"/>
           </a:xfrm>
           <a:prstGeom prst="rect">
             <a:avLst/>
@@ -15678,7 +15967,7 @@
                 <a:ea typeface="Trebuchet MS" pitchFamily="34" charset="-122"/>
                 <a:cs typeface="Trebuchet MS" pitchFamily="34" charset="-120"/>
               </a:rPr>
-              <a:t>our</a:t>
+              <a:t>t</a:t>
             </a:r>
             <a:endParaRPr lang="en-US" sz="900" dirty="0"/>
           </a:p>
@@ -15686,80 +15975,41 @@
       </p:sp>
       <p:sp>
         <p:nvSpPr>
+          <p:cNvPr id="44" name="Shape 42"/>
+          <p:cNvSpPr/>
+          <p:nvPr/>
+        </p:nvSpPr>
+        <p:spPr>
+          <a:xfrm>
+            <a:off x="5254752" y="4169664"/>
+            <a:ext cx="685800" cy="475488"/>
+          </a:xfrm>
+          <a:prstGeom prst="rect">
+            <a:avLst>
+              <a:gd name="adj" fmla="val 7692"/>
+            </a:avLst>
+          </a:prstGeom>
+          <a:solidFill>
+            <a:srgbClr val="FFFFFF"/>
+          </a:solidFill>
+          <a:ln w="12700">
+            <a:solidFill>
+              <a:srgbClr val="DB2777"/>
+            </a:solidFill>
+            <a:prstDash val="solid"/>
+          </a:ln>
+        </p:spPr>
+      </p:sp>
+      <p:sp>
+        <p:nvSpPr>
           <p:cNvPr id="45" name="Text 43"/>
           <p:cNvSpPr/>
           <p:nvPr/>
         </p:nvSpPr>
         <p:spPr>
           <a:xfrm>
-            <a:off x="4850892" y="4572000"/>
-            <a:ext cx="685800" cy="219456"/>
-          </a:xfrm>
-          <a:prstGeom prst="rect">
-            <a:avLst/>
-          </a:prstGeom>
-          <a:noFill/>
-          <a:ln/>
-        </p:spPr>
-        <p:txBody>
-          <a:bodyPr wrap="square" lIns="0" tIns="0" rIns="0" bIns="0" rtlCol="0" anchor="t"/>
-          <a:lstStyle/>
-          <a:p>
-            <a:pPr algn="ctr" indent="0" marL="0">
-              <a:buNone/>
-            </a:pPr>
-            <a:r>
-              <a:rPr lang="en-US" sz="750" i="1" dirty="0">
-                <a:solidFill>
-                  <a:srgbClr val="94A3B8"/>
-                </a:solidFill>
-                <a:latin typeface="Calibri" pitchFamily="34" charset="0"/>
-                <a:ea typeface="Calibri" pitchFamily="34" charset="-122"/>
-                <a:cs typeface="Calibri" pitchFamily="34" charset="-120"/>
-              </a:rPr>
-              <a:t>/er/</a:t>
-            </a:r>
-            <a:endParaRPr lang="en-US" sz="750" dirty="0"/>
-          </a:p>
-        </p:txBody>
-      </p:sp>
-      <p:sp>
-        <p:nvSpPr>
-          <p:cNvPr id="46" name="Shape 44"/>
-          <p:cNvSpPr/>
-          <p:nvPr/>
-        </p:nvSpPr>
-        <p:spPr>
-          <a:xfrm>
-            <a:off x="5759577" y="4169664"/>
-            <a:ext cx="685800" cy="384048"/>
-          </a:xfrm>
-          <a:prstGeom prst="rect">
-            <a:avLst>
-              <a:gd name="adj" fmla="val 9524"/>
-            </a:avLst>
-          </a:prstGeom>
-          <a:solidFill>
-            <a:srgbClr val="FFFFFF"/>
-          </a:solidFill>
-          <a:ln w="12700">
-            <a:solidFill>
-              <a:srgbClr val="DB2777"/>
-            </a:solidFill>
-            <a:prstDash val="solid"/>
-          </a:ln>
-        </p:spPr>
-      </p:sp>
-      <p:sp>
-        <p:nvSpPr>
-          <p:cNvPr id="47" name="Text 45"/>
-          <p:cNvSpPr/>
-          <p:nvPr/>
-        </p:nvSpPr>
-        <p:spPr>
-          <a:xfrm>
-            <a:off x="5759577" y="4169664"/>
-            <a:ext cx="685800" cy="384048"/>
+            <a:off x="5254752" y="4169664"/>
+            <a:ext cx="685800" cy="475488"/>
           </a:xfrm>
           <a:prstGeom prst="rect">
             <a:avLst/>
@@ -15783,7 +16033,7 @@
                 <a:ea typeface="Trebuchet MS" pitchFamily="34" charset="-122"/>
                 <a:cs typeface="Trebuchet MS" pitchFamily="34" charset="-120"/>
               </a:rPr>
-              <a:t>h</a:t>
+              <a:t>er</a:t>
             </a:r>
             <a:endParaRPr lang="en-US" sz="900" dirty="0"/>
           </a:p>
@@ -15791,18 +16041,18 @@
       </p:sp>
       <p:sp>
         <p:nvSpPr>
-          <p:cNvPr id="48" name="Shape 46"/>
-          <p:cNvSpPr/>
-          <p:nvPr/>
-        </p:nvSpPr>
-        <p:spPr>
-          <a:xfrm>
-            <a:off x="6668262" y="4169664"/>
-            <a:ext cx="685800" cy="384048"/>
+          <p:cNvPr id="46" name="Shape 44"/>
+          <p:cNvSpPr/>
+          <p:nvPr/>
+        </p:nvSpPr>
+        <p:spPr>
+          <a:xfrm>
+            <a:off x="6062472" y="4169664"/>
+            <a:ext cx="685800" cy="475488"/>
           </a:xfrm>
           <a:prstGeom prst="rect">
             <a:avLst>
-              <a:gd name="adj" fmla="val 9524"/>
+              <a:gd name="adj" fmla="val 7692"/>
             </a:avLst>
           </a:prstGeom>
           <a:solidFill>
@@ -15818,14 +16068,14 @@
       </p:sp>
       <p:sp>
         <p:nvSpPr>
-          <p:cNvPr id="49" name="Text 47"/>
-          <p:cNvSpPr/>
-          <p:nvPr/>
-        </p:nvSpPr>
-        <p:spPr>
-          <a:xfrm>
-            <a:off x="6668262" y="4169664"/>
-            <a:ext cx="685800" cy="384048"/>
+          <p:cNvPr id="47" name="Text 45"/>
+          <p:cNvSpPr/>
+          <p:nvPr/>
+        </p:nvSpPr>
+        <p:spPr>
+          <a:xfrm>
+            <a:off x="6062472" y="4169664"/>
+            <a:ext cx="685800" cy="475488"/>
           </a:xfrm>
           <a:prstGeom prst="rect">
             <a:avLst/>
@@ -15849,6 +16099,72 @@
                 <a:ea typeface="Trebuchet MS" pitchFamily="34" charset="-122"/>
                 <a:cs typeface="Trebuchet MS" pitchFamily="34" charset="-120"/>
               </a:rPr>
+              <a:t>h</a:t>
+            </a:r>
+            <a:endParaRPr lang="en-US" sz="900" dirty="0"/>
+          </a:p>
+        </p:txBody>
+      </p:sp>
+      <p:sp>
+        <p:nvSpPr>
+          <p:cNvPr id="48" name="Shape 46"/>
+          <p:cNvSpPr/>
+          <p:nvPr/>
+        </p:nvSpPr>
+        <p:spPr>
+          <a:xfrm>
+            <a:off x="6870192" y="4169664"/>
+            <a:ext cx="685800" cy="475488"/>
+          </a:xfrm>
+          <a:prstGeom prst="rect">
+            <a:avLst>
+              <a:gd name="adj" fmla="val 7692"/>
+            </a:avLst>
+          </a:prstGeom>
+          <a:solidFill>
+            <a:srgbClr val="FFFFFF"/>
+          </a:solidFill>
+          <a:ln w="12700">
+            <a:solidFill>
+              <a:srgbClr val="DB2777"/>
+            </a:solidFill>
+            <a:prstDash val="solid"/>
+          </a:ln>
+        </p:spPr>
+      </p:sp>
+      <p:sp>
+        <p:nvSpPr>
+          <p:cNvPr id="49" name="Text 47"/>
+          <p:cNvSpPr/>
+          <p:nvPr/>
+        </p:nvSpPr>
+        <p:spPr>
+          <a:xfrm>
+            <a:off x="6870192" y="4169664"/>
+            <a:ext cx="685800" cy="475488"/>
+          </a:xfrm>
+          <a:prstGeom prst="rect">
+            <a:avLst/>
+          </a:prstGeom>
+          <a:noFill/>
+          <a:ln/>
+        </p:spPr>
+        <p:txBody>
+          <a:bodyPr wrap="square" lIns="0" tIns="0" rIns="0" bIns="0" rtlCol="0" anchor="ctr"/>
+          <a:lstStyle/>
+          <a:p>
+            <a:pPr algn="ctr" indent="0" marL="0">
+              <a:buNone/>
+            </a:pPr>
+            <a:r>
+              <a:rPr lang="en-US" sz="900" b="1" dirty="0">
+                <a:solidFill>
+                  <a:srgbClr val="9D174D"/>
+                </a:solidFill>
+                <a:latin typeface="Trebuchet MS" pitchFamily="34" charset="0"/>
+                <a:ea typeface="Trebuchet MS" pitchFamily="34" charset="-122"/>
+                <a:cs typeface="Trebuchet MS" pitchFamily="34" charset="-120"/>
+              </a:rPr>
               <a:t>oo</a:t>
             </a:r>
             <a:endParaRPr lang="en-US" sz="900" dirty="0"/>
@@ -15863,12 +16179,12 @@
         </p:nvSpPr>
         <p:spPr>
           <a:xfrm>
-            <a:off x="7576947" y="4169664"/>
-            <a:ext cx="685800" cy="384048"/>
+            <a:off x="7677912" y="4169664"/>
+            <a:ext cx="685800" cy="475488"/>
           </a:xfrm>
           <a:prstGeom prst="rect">
             <a:avLst>
-              <a:gd name="adj" fmla="val 9524"/>
+              <a:gd name="adj" fmla="val 7692"/>
             </a:avLst>
           </a:prstGeom>
           <a:solidFill>
@@ -15890,8 +16206,8 @@
         </p:nvSpPr>
         <p:spPr>
           <a:xfrm>
-            <a:off x="7576947" y="4169664"/>
-            <a:ext cx="685800" cy="384048"/>
+            <a:off x="7677912" y="4169664"/>
+            <a:ext cx="685800" cy="475488"/>
           </a:xfrm>
           <a:prstGeom prst="rect">
             <a:avLst/>
@@ -16489,7 +16805,7 @@
                 <a:ea typeface="Calibri" pitchFamily="34" charset="-122"/>
                 <a:cs typeface="Calibri" pitchFamily="34" charset="-120"/>
               </a:rPr>
-              <a:t>Word Labs  •  wordlabs.app  •  Suffix: '-hood' = state, condition, or group</a:t>
+              <a:t>Word Labs  •  wordlabs.app  •  Suffix: '-hood' = state of</a:t>
             </a:r>
             <a:endParaRPr lang="en-US" sz="800" dirty="0"/>
           </a:p>
@@ -16823,7 +17139,7 @@
                 <a:ea typeface="Trebuchet MS" pitchFamily="34" charset="-122"/>
                 <a:cs typeface="Trebuchet MS" pitchFamily="34" charset="-120"/>
               </a:rPr>
-              <a:t>2</a:t>
+              <a:t>0</a:t>
             </a:r>
             <a:pPr algn="ctr" indent="0" marL="0">
               <a:buNone/>
@@ -16837,7 +17153,7 @@
                 <a:ea typeface="Trebuchet MS" pitchFamily="34" charset="-122"/>
                 <a:cs typeface="Trebuchet MS" pitchFamily="34" charset="-120"/>
               </a:rPr>
-              <a:t>  punctuation marks</a:t>
+              <a:t>  punctuation mark</a:t>
             </a:r>
             <a:endParaRPr lang="en-US" sz="2800" dirty="0"/>
           </a:p>
@@ -17129,7 +17445,7 @@
                 <a:ea typeface="Calibri" pitchFamily="34" charset="-122"/>
                 <a:cs typeface="Calibri" pitchFamily="34" charset="-120"/>
               </a:rPr>
-              <a:t>Word Labs  •  wordlabs.app  •  Suffix: '-hood' = state, condition, or group</a:t>
+              <a:t>Word Labs  •  wordlabs.app  •  Suffix: '-hood' = state of</a:t>
             </a:r>
             <a:endParaRPr lang="en-US" sz="800" dirty="0"/>
           </a:p>
@@ -17241,7 +17557,7 @@
                 <a:ea typeface="Calibri" pitchFamily="34" charset="-122"/>
                 <a:cs typeface="Calibri" pitchFamily="34" charset="-120"/>
               </a:rPr>
-              <a:t>In </a:t>
+              <a:t>The team played with a strong sense of </a:t>
             </a:r>
             <a:pPr algn="l" indent="0" marL="0">
               <a:buNone/>
@@ -17258,7 +17574,7 @@
                 <a:ea typeface="Calibri" pitchFamily="34" charset="-122"/>
                 <a:cs typeface="Calibri" pitchFamily="34" charset="-120"/>
               </a:rPr>
-              <a:t>adulthood</a:t>
+              <a:t>brotherhood</a:t>
             </a:r>
             <a:pPr algn="l" indent="0" marL="0">
               <a:buNone/>
@@ -17272,7 +17588,7 @@
                 <a:ea typeface="Calibri" pitchFamily="34" charset="-122"/>
                 <a:cs typeface="Calibri" pitchFamily="34" charset="-120"/>
               </a:rPr>
-              <a:t>, she appreciated the </a:t>
+              <a:t> and looked after each other. Everyone in our </a:t>
             </a:r>
             <a:pPr algn="l" indent="0" marL="0">
               <a:buNone/>
@@ -17289,7 +17605,7 @@
                 <a:ea typeface="Calibri" pitchFamily="34" charset="-122"/>
                 <a:cs typeface="Calibri" pitchFamily="34" charset="-120"/>
               </a:rPr>
-              <a:t>brotherhood</a:t>
+              <a:t>neighbourhood</a:t>
             </a:r>
             <a:pPr algn="l" indent="0" marL="0">
               <a:buNone/>
@@ -17303,7 +17619,7 @@
                 <a:ea typeface="Calibri" pitchFamily="34" charset="-122"/>
                 <a:cs typeface="Calibri" pitchFamily="34" charset="-120"/>
               </a:rPr>
-              <a:t> of her team and was proud of her </a:t>
+              <a:t> helped clean up the park on Saturday. The article was full of </a:t>
             </a:r>
             <a:pPr algn="l" indent="0" marL="0">
               <a:buNone/>
@@ -17320,7 +17636,7 @@
                 <a:ea typeface="Calibri" pitchFamily="34" charset="-122"/>
                 <a:cs typeface="Calibri" pitchFamily="34" charset="-120"/>
               </a:rPr>
-              <a:t>motherhood</a:t>
+              <a:t>falsehood</a:t>
             </a:r>
             <a:pPr algn="l" indent="0" marL="0">
               <a:buNone/>
@@ -17334,7 +17650,7 @@
                 <a:ea typeface="Calibri" pitchFamily="34" charset="-122"/>
                 <a:cs typeface="Calibri" pitchFamily="34" charset="-120"/>
               </a:rPr>
-              <a:t>.</a:t>
+              <a:t> and none of it turned out to be true.</a:t>
             </a:r>
             <a:endParaRPr lang="en-US" sz="1800" dirty="0"/>
           </a:p>
@@ -17489,7 +17805,7 @@
                 <a:ea typeface="Trebuchet MS" pitchFamily="34" charset="-122"/>
                 <a:cs typeface="Trebuchet MS" pitchFamily="34" charset="-120"/>
               </a:rPr>
-              <a:t>adulthood</a:t>
+              <a:t>brotherhood</a:t>
             </a:r>
             <a:endParaRPr lang="en-US" sz="1400" dirty="0"/>
           </a:p>
@@ -17617,7 +17933,7 @@
                 <a:ea typeface="Trebuchet MS" pitchFamily="34" charset="-122"/>
                 <a:cs typeface="Trebuchet MS" pitchFamily="34" charset="-120"/>
               </a:rPr>
-              <a:t>brotherhood</a:t>
+              <a:t>neighbourhood</a:t>
             </a:r>
             <a:endParaRPr lang="en-US" sz="1400" dirty="0"/>
           </a:p>
@@ -17745,7 +18061,7 @@
                 <a:ea typeface="Trebuchet MS" pitchFamily="34" charset="-122"/>
                 <a:cs typeface="Trebuchet MS" pitchFamily="34" charset="-120"/>
               </a:rPr>
-              <a:t>motherhood</a:t>
+              <a:t>falsehood</a:t>
             </a:r>
             <a:endParaRPr lang="en-US" sz="1400" dirty="0"/>
           </a:p>
@@ -18076,7 +18392,7 @@
                 <a:ea typeface="Calibri" pitchFamily="34" charset="-122"/>
                 <a:cs typeface="Calibri" pitchFamily="34" charset="-120"/>
               </a:rPr>
-              <a:t>Word Labs  •  wordlabs.app  •  Suffix: '-hood' = state, condition, or group</a:t>
+              <a:t>Word Labs  •  wordlabs.app  •  Suffix: '-hood' = state of</a:t>
             </a:r>
             <a:endParaRPr lang="en-US" sz="800" dirty="0"/>
           </a:p>
@@ -18215,7 +18531,7 @@
                 <a:ea typeface="Trebuchet MS" pitchFamily="34" charset="-122"/>
                 <a:cs typeface="Trebuchet MS" pitchFamily="34" charset="-120"/>
               </a:rPr>
-              <a:t>adulthood</a:t>
+              <a:t>brotherhood</a:t>
             </a:r>
             <a:endParaRPr lang="en-US" sz="2800" dirty="0"/>
           </a:p>
@@ -18903,7 +19219,7 @@
                 <a:ea typeface="Calibri" pitchFamily="34" charset="-122"/>
                 <a:cs typeface="Calibri" pitchFamily="34" charset="-120"/>
               </a:rPr>
-              <a:t>Word Labs  •  wordlabs.app  •  Suffix: '-hood' = state, condition, or group</a:t>
+              <a:t>Word Labs  •  wordlabs.app  •  Suffix: '-hood' = state of</a:t>
             </a:r>
             <a:endParaRPr lang="en-US" sz="800" dirty="0"/>
           </a:p>
@@ -19042,7 +19358,7 @@
                 <a:ea typeface="Trebuchet MS" pitchFamily="34" charset="-122"/>
                 <a:cs typeface="Trebuchet MS" pitchFamily="34" charset="-120"/>
               </a:rPr>
-              <a:t>adulthood</a:t>
+              <a:t>brotherhood</a:t>
             </a:r>
             <a:endParaRPr lang="en-US" sz="2800" dirty="0"/>
           </a:p>
@@ -19181,7 +19497,7 @@
                 <a:ea typeface="Trebuchet MS" pitchFamily="34" charset="-122"/>
                 <a:cs typeface="Trebuchet MS" pitchFamily="34" charset="-120"/>
               </a:rPr>
-              <a:t>adult</a:t>
+              <a:t>brother</a:t>
             </a:r>
             <a:endParaRPr lang="en-US" sz="1300" dirty="0"/>
           </a:p>
@@ -19220,7 +19536,7 @@
                 <a:ea typeface="Calibri" pitchFamily="34" charset="-122"/>
                 <a:cs typeface="Calibri" pitchFamily="34" charset="-120"/>
               </a:rPr>
-              <a:t>fully grown person</a:t>
+              <a:t>a boy or man with the same parents as you</a:t>
             </a:r>
             <a:endParaRPr lang="en-US" sz="850" dirty="0"/>
           </a:p>
@@ -19332,7 +19648,7 @@
                 <a:ea typeface="Calibri" pitchFamily="34" charset="-122"/>
                 <a:cs typeface="Calibri" pitchFamily="34" charset="-120"/>
               </a:rPr>
-              <a:t>state or condition of</a:t>
+              <a:t>a state or group of</a:t>
             </a:r>
             <a:endParaRPr lang="en-US" sz="850" dirty="0"/>
           </a:p>
@@ -19888,7 +20204,7 @@
                 <a:ea typeface="Calibri" pitchFamily="34" charset="-122"/>
                 <a:cs typeface="Calibri" pitchFamily="34" charset="-120"/>
               </a:rPr>
-              <a:t>Word Labs  •  wordlabs.app  •  Suffix: '-hood' = state, condition, or group</a:t>
+              <a:t>Word Labs  •  wordlabs.app  •  Suffix: '-hood' = state of</a:t>
             </a:r>
             <a:endParaRPr lang="en-US" sz="800" dirty="0"/>
           </a:p>
@@ -20027,7 +20343,7 @@
                 <a:ea typeface="Trebuchet MS" pitchFamily="34" charset="-122"/>
                 <a:cs typeface="Trebuchet MS" pitchFamily="34" charset="-120"/>
               </a:rPr>
-              <a:t>adulthood</a:t>
+              <a:t>brotherhood</a:t>
             </a:r>
             <a:endParaRPr lang="en-US" sz="2800" dirty="0"/>
           </a:p>
@@ -20166,7 +20482,7 @@
                 <a:ea typeface="Trebuchet MS" pitchFamily="34" charset="-122"/>
                 <a:cs typeface="Trebuchet MS" pitchFamily="34" charset="-120"/>
               </a:rPr>
-              <a:t>adult</a:t>
+              <a:t>brother</a:t>
             </a:r>
             <a:endParaRPr lang="en-US" sz="1300" dirty="0"/>
           </a:p>
@@ -20205,7 +20521,7 @@
                 <a:ea typeface="Calibri" pitchFamily="34" charset="-122"/>
                 <a:cs typeface="Calibri" pitchFamily="34" charset="-120"/>
               </a:rPr>
-              <a:t>fully grown person</a:t>
+              <a:t>a boy or man with the same parents as you</a:t>
             </a:r>
             <a:endParaRPr lang="en-US" sz="850" dirty="0"/>
           </a:p>
@@ -20317,7 +20633,7 @@
                 <a:ea typeface="Calibri" pitchFamily="34" charset="-122"/>
                 <a:cs typeface="Calibri" pitchFamily="34" charset="-120"/>
               </a:rPr>
-              <a:t>state or condition of</a:t>
+              <a:t>a state or group of</a:t>
             </a:r>
             <a:endParaRPr lang="en-US" sz="850" dirty="0"/>
           </a:p>
@@ -20476,7 +20792,7 @@
                 <a:ea typeface="Trebuchet MS" pitchFamily="34" charset="-122"/>
                 <a:cs typeface="Trebuchet MS" pitchFamily="34" charset="-120"/>
               </a:rPr>
-              <a:t>a</a:t>
+              <a:t>broth</a:t>
             </a:r>
             <a:endParaRPr lang="en-US" sz="1400" dirty="0"/>
           </a:p>
@@ -20581,7 +20897,7 @@
                 <a:ea typeface="Trebuchet MS" pitchFamily="34" charset="-122"/>
                 <a:cs typeface="Trebuchet MS" pitchFamily="34" charset="-120"/>
               </a:rPr>
-              <a:t>dult</a:t>
+              <a:t>er</a:t>
             </a:r>
             <a:endParaRPr lang="en-US" sz="1400" dirty="0"/>
           </a:p>
@@ -21110,7 +21426,7 @@
                 <a:ea typeface="Calibri" pitchFamily="34" charset="-122"/>
                 <a:cs typeface="Calibri" pitchFamily="34" charset="-120"/>
               </a:rPr>
-              <a:t>Word Labs  •  wordlabs.app  •  Suffix: '-hood' = state, condition, or group</a:t>
+              <a:t>Word Labs  •  wordlabs.app  •  Suffix: '-hood' = state of</a:t>
             </a:r>
             <a:endParaRPr lang="en-US" sz="800" dirty="0"/>
           </a:p>
@@ -21249,7 +21565,7 @@
                 <a:ea typeface="Trebuchet MS" pitchFamily="34" charset="-122"/>
                 <a:cs typeface="Trebuchet MS" pitchFamily="34" charset="-120"/>
               </a:rPr>
-              <a:t>adulthood</a:t>
+              <a:t>brotherhood</a:t>
             </a:r>
             <a:endParaRPr lang="en-US" sz="2800" dirty="0"/>
           </a:p>
@@ -21388,7 +21704,7 @@
                 <a:ea typeface="Trebuchet MS" pitchFamily="34" charset="-122"/>
                 <a:cs typeface="Trebuchet MS" pitchFamily="34" charset="-120"/>
               </a:rPr>
-              <a:t>adult</a:t>
+              <a:t>brother</a:t>
             </a:r>
             <a:endParaRPr lang="en-US" sz="1300" dirty="0"/>
           </a:p>
@@ -21427,7 +21743,7 @@
                 <a:ea typeface="Calibri" pitchFamily="34" charset="-122"/>
                 <a:cs typeface="Calibri" pitchFamily="34" charset="-120"/>
               </a:rPr>
-              <a:t>fully grown person</a:t>
+              <a:t>a boy or man with the same parents as you</a:t>
             </a:r>
             <a:endParaRPr lang="en-US" sz="850" dirty="0"/>
           </a:p>
@@ -21539,7 +21855,7 @@
                 <a:ea typeface="Calibri" pitchFamily="34" charset="-122"/>
                 <a:cs typeface="Calibri" pitchFamily="34" charset="-120"/>
               </a:rPr>
-              <a:t>state or condition of</a:t>
+              <a:t>a state or group of</a:t>
             </a:r>
             <a:endParaRPr lang="en-US" sz="850" dirty="0"/>
           </a:p>
@@ -21698,7 +22014,7 @@
                 <a:ea typeface="Trebuchet MS" pitchFamily="34" charset="-122"/>
                 <a:cs typeface="Trebuchet MS" pitchFamily="34" charset="-120"/>
               </a:rPr>
-              <a:t>a</a:t>
+              <a:t>broth</a:t>
             </a:r>
             <a:endParaRPr lang="en-US" sz="1400" dirty="0"/>
           </a:p>
@@ -21803,7 +22119,7 @@
                 <a:ea typeface="Trebuchet MS" pitchFamily="34" charset="-122"/>
                 <a:cs typeface="Trebuchet MS" pitchFamily="34" charset="-120"/>
               </a:rPr>
-              <a:t>dult</a:t>
+              <a:t>er</a:t>
             </a:r>
             <a:endParaRPr lang="en-US" sz="1400" dirty="0"/>
           </a:p>
@@ -22067,7 +22383,7 @@
                 <a:ea typeface="Trebuchet MS" pitchFamily="34" charset="-122"/>
                 <a:cs typeface="Trebuchet MS" pitchFamily="34" charset="-120"/>
               </a:rPr>
-              <a:t>a</a:t>
+              <a:t>b</a:t>
             </a:r>
             <a:endParaRPr lang="en-US" sz="900" dirty="0"/>
           </a:p>
@@ -22133,7 +22449,7 @@
                 <a:ea typeface="Trebuchet MS" pitchFamily="34" charset="-122"/>
                 <a:cs typeface="Trebuchet MS" pitchFamily="34" charset="-120"/>
               </a:rPr>
-              <a:t>d</a:t>
+              <a:t>r</a:t>
             </a:r>
             <a:endParaRPr lang="en-US" sz="900" dirty="0"/>
           </a:p>
@@ -22199,7 +22515,7 @@
                 <a:ea typeface="Trebuchet MS" pitchFamily="34" charset="-122"/>
                 <a:cs typeface="Trebuchet MS" pitchFamily="34" charset="-120"/>
               </a:rPr>
-              <a:t>u</a:t>
+              <a:t>o</a:t>
             </a:r>
             <a:endParaRPr lang="en-US" sz="900" dirty="0"/>
           </a:p>
@@ -22265,7 +22581,7 @@
                 <a:ea typeface="Trebuchet MS" pitchFamily="34" charset="-122"/>
                 <a:cs typeface="Trebuchet MS" pitchFamily="34" charset="-120"/>
               </a:rPr>
-              <a:t>l</a:t>
+              <a:t>th</a:t>
             </a:r>
             <a:endParaRPr lang="en-US" sz="900" dirty="0"/>
           </a:p>
@@ -22331,7 +22647,7 @@
                 <a:ea typeface="Trebuchet MS" pitchFamily="34" charset="-122"/>
                 <a:cs typeface="Trebuchet MS" pitchFamily="34" charset="-120"/>
               </a:rPr>
-              <a:t>t</a:t>
+              <a:t>er</a:t>
             </a:r>
             <a:endParaRPr lang="en-US" sz="900" dirty="0"/>
           </a:p>
@@ -22821,7 +23137,7 @@
                 <a:ea typeface="Calibri" pitchFamily="34" charset="-122"/>
                 <a:cs typeface="Calibri" pitchFamily="34" charset="-120"/>
               </a:rPr>
-              <a:t>Word Labs  •  wordlabs.app  •  Suffix: '-hood' = state, condition, or group</a:t>
+              <a:t>Word Labs  •  wordlabs.app  •  Suffix: '-hood' = state of</a:t>
             </a:r>
             <a:endParaRPr lang="en-US" sz="800" dirty="0"/>
           </a:p>
@@ -22960,7 +23276,7 @@
                 <a:ea typeface="Trebuchet MS" pitchFamily="34" charset="-122"/>
                 <a:cs typeface="Trebuchet MS" pitchFamily="34" charset="-120"/>
               </a:rPr>
-              <a:t>brotherhood</a:t>
+              <a:t>neighbourhood</a:t>
             </a:r>
             <a:endParaRPr lang="en-US" sz="2800" dirty="0"/>
           </a:p>
@@ -23648,7 +23964,7 @@
                 <a:ea typeface="Calibri" pitchFamily="34" charset="-122"/>
                 <a:cs typeface="Calibri" pitchFamily="34" charset="-120"/>
               </a:rPr>
-              <a:t>Word Labs  •  wordlabs.app  •  Suffix: '-hood' = state, condition, or group</a:t>
+              <a:t>Word Labs  •  wordlabs.app  •  Suffix: '-hood' = state of</a:t>
             </a:r>
             <a:endParaRPr lang="en-US" sz="800" dirty="0"/>
           </a:p>
@@ -23787,7 +24103,7 @@
                 <a:ea typeface="Trebuchet MS" pitchFamily="34" charset="-122"/>
                 <a:cs typeface="Trebuchet MS" pitchFamily="34" charset="-120"/>
               </a:rPr>
-              <a:t>brotherhood</a:t>
+              <a:t>neighbourhood</a:t>
             </a:r>
             <a:endParaRPr lang="en-US" sz="2800" dirty="0"/>
           </a:p>
@@ -23926,7 +24242,7 @@
                 <a:ea typeface="Trebuchet MS" pitchFamily="34" charset="-122"/>
                 <a:cs typeface="Trebuchet MS" pitchFamily="34" charset="-120"/>
               </a:rPr>
-              <a:t>brother</a:t>
+              <a:t>neighbour</a:t>
             </a:r>
             <a:endParaRPr lang="en-US" sz="1300" dirty="0"/>
           </a:p>
@@ -23965,7 +24281,7 @@
                 <a:ea typeface="Calibri" pitchFamily="34" charset="-122"/>
                 <a:cs typeface="Calibri" pitchFamily="34" charset="-120"/>
               </a:rPr>
-              <a:t>male sibling</a:t>
+              <a:t>a person who lives near you</a:t>
             </a:r>
             <a:endParaRPr lang="en-US" sz="850" dirty="0"/>
           </a:p>
@@ -24077,7 +24393,7 @@
                 <a:ea typeface="Calibri" pitchFamily="34" charset="-122"/>
                 <a:cs typeface="Calibri" pitchFamily="34" charset="-120"/>
               </a:rPr>
-              <a:t>state or condition of</a:t>
+              <a:t>a state, area or group of</a:t>
             </a:r>
             <a:endParaRPr lang="en-US" sz="850" dirty="0"/>
           </a:p>
@@ -24633,7 +24949,7 @@
                 <a:ea typeface="Calibri" pitchFamily="34" charset="-122"/>
                 <a:cs typeface="Calibri" pitchFamily="34" charset="-120"/>
               </a:rPr>
-              <a:t>Word Labs  •  wordlabs.app  •  Suffix: '-hood' = state, condition, or group</a:t>
+              <a:t>Word Labs  •  wordlabs.app  •  Suffix: '-hood' = state of</a:t>
             </a:r>
             <a:endParaRPr lang="en-US" sz="800" dirty="0"/>
           </a:p>
@@ -24706,7 +25022,7 @@
                 <a:ea typeface="Trebuchet MS" pitchFamily="34" charset="-122"/>
                 <a:cs typeface="Trebuchet MS" pitchFamily="34" charset="-120"/>
               </a:rPr>
-              <a:t>We are learning that the suffix '-hood' means 'state, condition, or group'.</a:t>
+              <a:t>We are learning that the suffix '-hood' means 'state of'.</a:t>
             </a:r>
             <a:endParaRPr lang="en-US" sz="2000" dirty="0"/>
           </a:p>
@@ -25352,7 +25668,7 @@
                 <a:ea typeface="Calibri" pitchFamily="34" charset="-122"/>
                 <a:cs typeface="Calibri" pitchFamily="34" charset="-120"/>
               </a:rPr>
-              <a:t>Word Labs  •  wordlabs.app  •  Suffix: '-hood' = state, condition, or group</a:t>
+              <a:t>Word Labs  •  wordlabs.app  •  Suffix: '-hood' = state of</a:t>
             </a:r>
             <a:endParaRPr lang="en-US" sz="800" dirty="0"/>
           </a:p>
@@ -25491,7 +25807,7 @@
                 <a:ea typeface="Trebuchet MS" pitchFamily="34" charset="-122"/>
                 <a:cs typeface="Trebuchet MS" pitchFamily="34" charset="-120"/>
               </a:rPr>
-              <a:t>brotherhood</a:t>
+              <a:t>neighbourhood</a:t>
             </a:r>
             <a:endParaRPr lang="en-US" sz="2800" dirty="0"/>
           </a:p>
@@ -25630,7 +25946,7 @@
                 <a:ea typeface="Trebuchet MS" pitchFamily="34" charset="-122"/>
                 <a:cs typeface="Trebuchet MS" pitchFamily="34" charset="-120"/>
               </a:rPr>
-              <a:t>brother</a:t>
+              <a:t>neighbour</a:t>
             </a:r>
             <a:endParaRPr lang="en-US" sz="1300" dirty="0"/>
           </a:p>
@@ -25669,7 +25985,7 @@
                 <a:ea typeface="Calibri" pitchFamily="34" charset="-122"/>
                 <a:cs typeface="Calibri" pitchFamily="34" charset="-120"/>
               </a:rPr>
-              <a:t>male sibling</a:t>
+              <a:t>a person who lives near you</a:t>
             </a:r>
             <a:endParaRPr lang="en-US" sz="850" dirty="0"/>
           </a:p>
@@ -25781,7 +26097,7 @@
                 <a:ea typeface="Calibri" pitchFamily="34" charset="-122"/>
                 <a:cs typeface="Calibri" pitchFamily="34" charset="-120"/>
               </a:rPr>
-              <a:t>state or condition of</a:t>
+              <a:t>a state, area or group of</a:t>
             </a:r>
             <a:endParaRPr lang="en-US" sz="850" dirty="0"/>
           </a:p>
@@ -25940,7 +26256,7 @@
                 <a:ea typeface="Trebuchet MS" pitchFamily="34" charset="-122"/>
                 <a:cs typeface="Trebuchet MS" pitchFamily="34" charset="-120"/>
               </a:rPr>
-              <a:t>broth</a:t>
+              <a:t>neigh</a:t>
             </a:r>
             <a:endParaRPr lang="en-US" sz="1400" dirty="0"/>
           </a:p>
@@ -26045,7 +26361,7 @@
                 <a:ea typeface="Trebuchet MS" pitchFamily="34" charset="-122"/>
                 <a:cs typeface="Trebuchet MS" pitchFamily="34" charset="-120"/>
               </a:rPr>
-              <a:t>er</a:t>
+              <a:t>bour</a:t>
             </a:r>
             <a:endParaRPr lang="en-US" sz="1400" dirty="0"/>
           </a:p>
@@ -26574,7 +26890,7 @@
                 <a:ea typeface="Calibri" pitchFamily="34" charset="-122"/>
                 <a:cs typeface="Calibri" pitchFamily="34" charset="-120"/>
               </a:rPr>
-              <a:t>Word Labs  •  wordlabs.app  •  Suffix: '-hood' = state, condition, or group</a:t>
+              <a:t>Word Labs  •  wordlabs.app  •  Suffix: '-hood' = state of</a:t>
             </a:r>
             <a:endParaRPr lang="en-US" sz="800" dirty="0"/>
           </a:p>
@@ -26713,7 +27029,7 @@
                 <a:ea typeface="Trebuchet MS" pitchFamily="34" charset="-122"/>
                 <a:cs typeface="Trebuchet MS" pitchFamily="34" charset="-120"/>
               </a:rPr>
-              <a:t>brotherhood</a:t>
+              <a:t>neighbourhood</a:t>
             </a:r>
             <a:endParaRPr lang="en-US" sz="2800" dirty="0"/>
           </a:p>
@@ -26852,7 +27168,7 @@
                 <a:ea typeface="Trebuchet MS" pitchFamily="34" charset="-122"/>
                 <a:cs typeface="Trebuchet MS" pitchFamily="34" charset="-120"/>
               </a:rPr>
-              <a:t>brother</a:t>
+              <a:t>neighbour</a:t>
             </a:r>
             <a:endParaRPr lang="en-US" sz="1300" dirty="0"/>
           </a:p>
@@ -26891,7 +27207,7 @@
                 <a:ea typeface="Calibri" pitchFamily="34" charset="-122"/>
                 <a:cs typeface="Calibri" pitchFamily="34" charset="-120"/>
               </a:rPr>
-              <a:t>male sibling</a:t>
+              <a:t>a person who lives near you</a:t>
             </a:r>
             <a:endParaRPr lang="en-US" sz="850" dirty="0"/>
           </a:p>
@@ -27003,7 +27319,7 @@
                 <a:ea typeface="Calibri" pitchFamily="34" charset="-122"/>
                 <a:cs typeface="Calibri" pitchFamily="34" charset="-120"/>
               </a:rPr>
-              <a:t>state or condition of</a:t>
+              <a:t>a state, area or group of</a:t>
             </a:r>
             <a:endParaRPr lang="en-US" sz="850" dirty="0"/>
           </a:p>
@@ -27162,7 +27478,7 @@
                 <a:ea typeface="Trebuchet MS" pitchFamily="34" charset="-122"/>
                 <a:cs typeface="Trebuchet MS" pitchFamily="34" charset="-120"/>
               </a:rPr>
-              <a:t>broth</a:t>
+              <a:t>neigh</a:t>
             </a:r>
             <a:endParaRPr lang="en-US" sz="1400" dirty="0"/>
           </a:p>
@@ -27267,7 +27583,7 @@
                 <a:ea typeface="Trebuchet MS" pitchFamily="34" charset="-122"/>
                 <a:cs typeface="Trebuchet MS" pitchFamily="34" charset="-120"/>
               </a:rPr>
-              <a:t>er</a:t>
+              <a:t>bour</a:t>
             </a:r>
             <a:endParaRPr lang="en-US" sz="1400" dirty="0"/>
           </a:p>
@@ -27479,7 +27795,7 @@
         </p:nvSpPr>
         <p:spPr>
           <a:xfrm>
-            <a:off x="2023872" y="4169664"/>
+            <a:off x="2124837" y="4169664"/>
             <a:ext cx="685800" cy="475488"/>
           </a:xfrm>
           <a:prstGeom prst="rect">
@@ -27506,7 +27822,7 @@
         </p:nvSpPr>
         <p:spPr>
           <a:xfrm>
-            <a:off x="2023872" y="4169664"/>
+            <a:off x="2124837" y="4169664"/>
             <a:ext cx="685800" cy="475488"/>
           </a:xfrm>
           <a:prstGeom prst="rect">
@@ -27531,7 +27847,7 @@
                 <a:ea typeface="Trebuchet MS" pitchFamily="34" charset="-122"/>
                 <a:cs typeface="Trebuchet MS" pitchFamily="34" charset="-120"/>
               </a:rPr>
-              <a:t>b</a:t>
+              <a:t>n</a:t>
             </a:r>
             <a:endParaRPr lang="en-US" sz="900" dirty="0"/>
           </a:p>
@@ -27545,7 +27861,7 @@
         </p:nvSpPr>
         <p:spPr>
           <a:xfrm>
-            <a:off x="2831592" y="4169664"/>
+            <a:off x="3033522" y="4169664"/>
             <a:ext cx="685800" cy="475488"/>
           </a:xfrm>
           <a:prstGeom prst="rect">
@@ -27572,7 +27888,7 @@
         </p:nvSpPr>
         <p:spPr>
           <a:xfrm>
-            <a:off x="2831592" y="4169664"/>
+            <a:off x="3033522" y="4169664"/>
             <a:ext cx="685800" cy="475488"/>
           </a:xfrm>
           <a:prstGeom prst="rect">
@@ -27597,7 +27913,7 @@
                 <a:ea typeface="Trebuchet MS" pitchFamily="34" charset="-122"/>
                 <a:cs typeface="Trebuchet MS" pitchFamily="34" charset="-120"/>
               </a:rPr>
-              <a:t>r</a:t>
+              <a:t>eigh</a:t>
             </a:r>
             <a:endParaRPr lang="en-US" sz="900" dirty="0"/>
           </a:p>
@@ -27611,7 +27927,7 @@
         </p:nvSpPr>
         <p:spPr>
           <a:xfrm>
-            <a:off x="3639312" y="4169664"/>
+            <a:off x="3942207" y="4169664"/>
             <a:ext cx="685800" cy="475488"/>
           </a:xfrm>
           <a:prstGeom prst="rect">
@@ -27638,7 +27954,7 @@
         </p:nvSpPr>
         <p:spPr>
           <a:xfrm>
-            <a:off x="3639312" y="4169664"/>
+            <a:off x="3942207" y="4169664"/>
             <a:ext cx="685800" cy="475488"/>
           </a:xfrm>
           <a:prstGeom prst="rect">
@@ -27663,7 +27979,7 @@
                 <a:ea typeface="Trebuchet MS" pitchFamily="34" charset="-122"/>
                 <a:cs typeface="Trebuchet MS" pitchFamily="34" charset="-120"/>
               </a:rPr>
-              <a:t>o</a:t>
+              <a:t>b</a:t>
             </a:r>
             <a:endParaRPr lang="en-US" sz="900" dirty="0"/>
           </a:p>
@@ -27677,7 +27993,7 @@
         </p:nvSpPr>
         <p:spPr>
           <a:xfrm>
-            <a:off x="4447032" y="4169664"/>
+            <a:off x="4850892" y="4169664"/>
             <a:ext cx="685800" cy="475488"/>
           </a:xfrm>
           <a:prstGeom prst="rect">
@@ -27704,7 +28020,7 @@
         </p:nvSpPr>
         <p:spPr>
           <a:xfrm>
-            <a:off x="4447032" y="4169664"/>
+            <a:off x="4850892" y="4169664"/>
             <a:ext cx="685800" cy="475488"/>
           </a:xfrm>
           <a:prstGeom prst="rect">
@@ -27729,7 +28045,7 @@
                 <a:ea typeface="Trebuchet MS" pitchFamily="34" charset="-122"/>
                 <a:cs typeface="Trebuchet MS" pitchFamily="34" charset="-120"/>
               </a:rPr>
-              <a:t>th</a:t>
+              <a:t>our</a:t>
             </a:r>
             <a:endParaRPr lang="en-US" sz="900" dirty="0"/>
           </a:p>
@@ -27743,7 +28059,7 @@
         </p:nvSpPr>
         <p:spPr>
           <a:xfrm>
-            <a:off x="5254752" y="4169664"/>
+            <a:off x="5759577" y="4169664"/>
             <a:ext cx="685800" cy="475488"/>
           </a:xfrm>
           <a:prstGeom prst="rect">
@@ -27770,7 +28086,7 @@
         </p:nvSpPr>
         <p:spPr>
           <a:xfrm>
-            <a:off x="5254752" y="4169664"/>
+            <a:off x="5759577" y="4169664"/>
             <a:ext cx="685800" cy="475488"/>
           </a:xfrm>
           <a:prstGeom prst="rect">
@@ -27795,7 +28111,7 @@
                 <a:ea typeface="Trebuchet MS" pitchFamily="34" charset="-122"/>
                 <a:cs typeface="Trebuchet MS" pitchFamily="34" charset="-120"/>
               </a:rPr>
-              <a:t>er</a:t>
+              <a:t>h</a:t>
             </a:r>
             <a:endParaRPr lang="en-US" sz="900" dirty="0"/>
           </a:p>
@@ -27809,7 +28125,7 @@
         </p:nvSpPr>
         <p:spPr>
           <a:xfrm>
-            <a:off x="6062472" y="4169664"/>
+            <a:off x="6668262" y="4169664"/>
             <a:ext cx="685800" cy="475488"/>
           </a:xfrm>
           <a:prstGeom prst="rect">
@@ -27836,7 +28152,7 @@
         </p:nvSpPr>
         <p:spPr>
           <a:xfrm>
-            <a:off x="6062472" y="4169664"/>
+            <a:off x="6668262" y="4169664"/>
             <a:ext cx="685800" cy="475488"/>
           </a:xfrm>
           <a:prstGeom prst="rect">
@@ -27861,7 +28177,7 @@
                 <a:ea typeface="Trebuchet MS" pitchFamily="34" charset="-122"/>
                 <a:cs typeface="Trebuchet MS" pitchFamily="34" charset="-120"/>
               </a:rPr>
-              <a:t>h</a:t>
+              <a:t>oo</a:t>
             </a:r>
             <a:endParaRPr lang="en-US" sz="900" dirty="0"/>
           </a:p>
@@ -27875,7 +28191,7 @@
         </p:nvSpPr>
         <p:spPr>
           <a:xfrm>
-            <a:off x="6870192" y="4169664"/>
+            <a:off x="7576947" y="4169664"/>
             <a:ext cx="685800" cy="475488"/>
           </a:xfrm>
           <a:prstGeom prst="rect">
@@ -27902,73 +28218,7 @@
         </p:nvSpPr>
         <p:spPr>
           <a:xfrm>
-            <a:off x="6870192" y="4169664"/>
-            <a:ext cx="685800" cy="475488"/>
-          </a:xfrm>
-          <a:prstGeom prst="rect">
-            <a:avLst/>
-          </a:prstGeom>
-          <a:noFill/>
-          <a:ln/>
-        </p:spPr>
-        <p:txBody>
-          <a:bodyPr wrap="square" lIns="0" tIns="0" rIns="0" bIns="0" rtlCol="0" anchor="ctr"/>
-          <a:lstStyle/>
-          <a:p>
-            <a:pPr algn="ctr" indent="0" marL="0">
-              <a:buNone/>
-            </a:pPr>
-            <a:r>
-              <a:rPr lang="en-US" sz="900" b="1" dirty="0">
-                <a:solidFill>
-                  <a:srgbClr val="9D174D"/>
-                </a:solidFill>
-                <a:latin typeface="Trebuchet MS" pitchFamily="34" charset="0"/>
-                <a:ea typeface="Trebuchet MS" pitchFamily="34" charset="-122"/>
-                <a:cs typeface="Trebuchet MS" pitchFamily="34" charset="-120"/>
-              </a:rPr>
-              <a:t>oo</a:t>
-            </a:r>
-            <a:endParaRPr lang="en-US" sz="900" dirty="0"/>
-          </a:p>
-        </p:txBody>
-      </p:sp>
-      <p:sp>
-        <p:nvSpPr>
-          <p:cNvPr id="50" name="Shape 48"/>
-          <p:cNvSpPr/>
-          <p:nvPr/>
-        </p:nvSpPr>
-        <p:spPr>
-          <a:xfrm>
-            <a:off x="7677912" y="4169664"/>
-            <a:ext cx="685800" cy="475488"/>
-          </a:xfrm>
-          <a:prstGeom prst="rect">
-            <a:avLst>
-              <a:gd name="adj" fmla="val 7692"/>
-            </a:avLst>
-          </a:prstGeom>
-          <a:solidFill>
-            <a:srgbClr val="FFFFFF"/>
-          </a:solidFill>
-          <a:ln w="12700">
-            <a:solidFill>
-              <a:srgbClr val="DB2777"/>
-            </a:solidFill>
-            <a:prstDash val="solid"/>
-          </a:ln>
-        </p:spPr>
-      </p:sp>
-      <p:sp>
-        <p:nvSpPr>
-          <p:cNvPr id="51" name="Text 49"/>
-          <p:cNvSpPr/>
-          <p:nvPr/>
-        </p:nvSpPr>
-        <p:spPr>
-          <a:xfrm>
-            <a:off x="7677912" y="4169664"/>
+            <a:off x="7576947" y="4169664"/>
             <a:ext cx="685800" cy="475488"/>
           </a:xfrm>
           <a:prstGeom prst="rect">
@@ -28285,7 +28535,7 @@
                 <a:ea typeface="Calibri" pitchFamily="34" charset="-122"/>
                 <a:cs typeface="Calibri" pitchFamily="34" charset="-120"/>
               </a:rPr>
-              <a:t>Word Labs  •  wordlabs.app  •  Suffix: '-hood' = state, condition, or group</a:t>
+              <a:t>Word Labs  •  wordlabs.app  •  Suffix: '-hood' = state of</a:t>
             </a:r>
             <a:endParaRPr lang="en-US" sz="800" dirty="0"/>
           </a:p>
@@ -28424,7 +28674,7 @@
                 <a:ea typeface="Trebuchet MS" pitchFamily="34" charset="-122"/>
                 <a:cs typeface="Trebuchet MS" pitchFamily="34" charset="-120"/>
               </a:rPr>
-              <a:t>motherhood</a:t>
+              <a:t>falsehood</a:t>
             </a:r>
             <a:endParaRPr lang="en-US" sz="2800" dirty="0"/>
           </a:p>
@@ -29112,7 +29362,7 @@
                 <a:ea typeface="Calibri" pitchFamily="34" charset="-122"/>
                 <a:cs typeface="Calibri" pitchFamily="34" charset="-120"/>
               </a:rPr>
-              <a:t>Word Labs  •  wordlabs.app  •  Suffix: '-hood' = state, condition, or group</a:t>
+              <a:t>Word Labs  •  wordlabs.app  •  Suffix: '-hood' = state of</a:t>
             </a:r>
             <a:endParaRPr lang="en-US" sz="800" dirty="0"/>
           </a:p>
@@ -29251,7 +29501,7 @@
                 <a:ea typeface="Trebuchet MS" pitchFamily="34" charset="-122"/>
                 <a:cs typeface="Trebuchet MS" pitchFamily="34" charset="-120"/>
               </a:rPr>
-              <a:t>motherhood</a:t>
+              <a:t>falsehood</a:t>
             </a:r>
             <a:endParaRPr lang="en-US" sz="2800" dirty="0"/>
           </a:p>
@@ -29390,7 +29640,7 @@
                 <a:ea typeface="Trebuchet MS" pitchFamily="34" charset="-122"/>
                 <a:cs typeface="Trebuchet MS" pitchFamily="34" charset="-120"/>
               </a:rPr>
-              <a:t>mother</a:t>
+              <a:t>false</a:t>
             </a:r>
             <a:endParaRPr lang="en-US" sz="1300" dirty="0"/>
           </a:p>
@@ -29429,7 +29679,7 @@
                 <a:ea typeface="Calibri" pitchFamily="34" charset="-122"/>
                 <a:cs typeface="Calibri" pitchFamily="34" charset="-120"/>
               </a:rPr>
-              <a:t>female parent</a:t>
+              <a:t>not true</a:t>
             </a:r>
             <a:endParaRPr lang="en-US" sz="850" dirty="0"/>
           </a:p>
@@ -29541,7 +29791,7 @@
                 <a:ea typeface="Calibri" pitchFamily="34" charset="-122"/>
                 <a:cs typeface="Calibri" pitchFamily="34" charset="-120"/>
               </a:rPr>
-              <a:t>state or condition of</a:t>
+              <a:t>a state or condition of</a:t>
             </a:r>
             <a:endParaRPr lang="en-US" sz="850" dirty="0"/>
           </a:p>
@@ -30097,7 +30347,7 @@
                 <a:ea typeface="Calibri" pitchFamily="34" charset="-122"/>
                 <a:cs typeface="Calibri" pitchFamily="34" charset="-120"/>
               </a:rPr>
-              <a:t>Word Labs  •  wordlabs.app  •  Suffix: '-hood' = state, condition, or group</a:t>
+              <a:t>Word Labs  •  wordlabs.app  •  Suffix: '-hood' = state of</a:t>
             </a:r>
             <a:endParaRPr lang="en-US" sz="800" dirty="0"/>
           </a:p>
@@ -30236,7 +30486,7 @@
                 <a:ea typeface="Trebuchet MS" pitchFamily="34" charset="-122"/>
                 <a:cs typeface="Trebuchet MS" pitchFamily="34" charset="-120"/>
               </a:rPr>
-              <a:t>motherhood</a:t>
+              <a:t>falsehood</a:t>
             </a:r>
             <a:endParaRPr lang="en-US" sz="2800" dirty="0"/>
           </a:p>
@@ -30375,7 +30625,7 @@
                 <a:ea typeface="Trebuchet MS" pitchFamily="34" charset="-122"/>
                 <a:cs typeface="Trebuchet MS" pitchFamily="34" charset="-120"/>
               </a:rPr>
-              <a:t>mother</a:t>
+              <a:t>false</a:t>
             </a:r>
             <a:endParaRPr lang="en-US" sz="1300" dirty="0"/>
           </a:p>
@@ -30414,7 +30664,7 @@
                 <a:ea typeface="Calibri" pitchFamily="34" charset="-122"/>
                 <a:cs typeface="Calibri" pitchFamily="34" charset="-120"/>
               </a:rPr>
-              <a:t>female parent</a:t>
+              <a:t>not true</a:t>
             </a:r>
             <a:endParaRPr lang="en-US" sz="850" dirty="0"/>
           </a:p>
@@ -30526,7 +30776,7 @@
                 <a:ea typeface="Calibri" pitchFamily="34" charset="-122"/>
                 <a:cs typeface="Calibri" pitchFamily="34" charset="-120"/>
               </a:rPr>
-              <a:t>state or condition of</a:t>
+              <a:t>a state or condition of</a:t>
             </a:r>
             <a:endParaRPr lang="en-US" sz="850" dirty="0"/>
           </a:p>
@@ -30633,7 +30883,7 @@
         </p:nvSpPr>
         <p:spPr>
           <a:xfrm>
-            <a:off x="2313432" y="3364992"/>
+            <a:off x="2999232" y="3364992"/>
             <a:ext cx="1645920" cy="475488"/>
           </a:xfrm>
           <a:prstGeom prst="rect">
@@ -30660,7 +30910,7 @@
         </p:nvSpPr>
         <p:spPr>
           <a:xfrm>
-            <a:off x="2313432" y="3364992"/>
+            <a:off x="2999232" y="3364992"/>
             <a:ext cx="1645920" cy="475488"/>
           </a:xfrm>
           <a:prstGeom prst="rect">
@@ -30685,7 +30935,7 @@
                 <a:ea typeface="Trebuchet MS" pitchFamily="34" charset="-122"/>
                 <a:cs typeface="Trebuchet MS" pitchFamily="34" charset="-120"/>
               </a:rPr>
-              <a:t>moth</a:t>
+              <a:t>false</a:t>
             </a:r>
             <a:endParaRPr lang="en-US" sz="1400" dirty="0"/>
           </a:p>
@@ -30699,8 +30949,8 @@
         </p:nvSpPr>
         <p:spPr>
           <a:xfrm>
-            <a:off x="3959352" y="3364992"/>
-            <a:ext cx="411480" cy="475488"/>
+            <a:off x="4645152" y="3364992"/>
+            <a:ext cx="1097280" cy="475488"/>
           </a:xfrm>
           <a:prstGeom prst="rect">
             <a:avLst/>
@@ -30738,7 +30988,7 @@
         </p:nvSpPr>
         <p:spPr>
           <a:xfrm>
-            <a:off x="4370832" y="3364992"/>
+            <a:off x="5742432" y="3364992"/>
             <a:ext cx="1645920" cy="475488"/>
           </a:xfrm>
           <a:prstGeom prst="rect">
@@ -30765,7 +31015,7 @@
         </p:nvSpPr>
         <p:spPr>
           <a:xfrm>
-            <a:off x="4370832" y="3364992"/>
+            <a:off x="5742432" y="3364992"/>
             <a:ext cx="1645920" cy="475488"/>
           </a:xfrm>
           <a:prstGeom prst="rect">
@@ -30790,7 +31040,7 @@
                 <a:ea typeface="Trebuchet MS" pitchFamily="34" charset="-122"/>
                 <a:cs typeface="Trebuchet MS" pitchFamily="34" charset="-120"/>
               </a:rPr>
-              <a:t>er</a:t>
+              <a:t>hood</a:t>
             </a:r>
             <a:endParaRPr lang="en-US" sz="1400" dirty="0"/>
           </a:p>
@@ -30798,14 +31048,41 @@
       </p:sp>
       <p:sp>
         <p:nvSpPr>
-          <p:cNvPr id="30" name="Text 28"/>
-          <p:cNvSpPr/>
-          <p:nvPr/>
-        </p:nvSpPr>
-        <p:spPr>
-          <a:xfrm>
-            <a:off x="6016752" y="3364992"/>
-            <a:ext cx="411480" cy="475488"/>
+          <p:cNvPr id="30" name="Shape 28"/>
+          <p:cNvSpPr/>
+          <p:nvPr/>
+        </p:nvSpPr>
+        <p:spPr>
+          <a:xfrm>
+            <a:off x="365760" y="4096512"/>
+            <a:ext cx="1371600" cy="804672"/>
+          </a:xfrm>
+          <a:prstGeom prst="rect">
+            <a:avLst>
+              <a:gd name="adj" fmla="val 6818"/>
+            </a:avLst>
+          </a:prstGeom>
+          <a:solidFill>
+            <a:srgbClr val="E2E8F0"/>
+          </a:solidFill>
+          <a:ln w="12700">
+            <a:solidFill>
+              <a:srgbClr val="E2E8F0"/>
+            </a:solidFill>
+            <a:prstDash val="solid"/>
+          </a:ln>
+        </p:spPr>
+      </p:sp>
+      <p:sp>
+        <p:nvSpPr>
+          <p:cNvPr id="31" name="Text 29"/>
+          <p:cNvSpPr/>
+          <p:nvPr/>
+        </p:nvSpPr>
+        <p:spPr>
+          <a:xfrm>
+            <a:off x="365760" y="4096512"/>
+            <a:ext cx="1371600" cy="804672"/>
           </a:xfrm>
           <a:prstGeom prst="rect">
             <a:avLst/>
@@ -30821,96 +31098,30 @@
               <a:buNone/>
             </a:pPr>
             <a:r>
-              <a:rPr lang="en-US" sz="1600" b="1" dirty="0">
-                <a:solidFill>
-                  <a:srgbClr val="0D9488"/>
+              <a:rPr lang="en-US" sz="1100" b="1" dirty="0">
+                <a:solidFill>
+                  <a:srgbClr val="475569"/>
                 </a:solidFill>
                 <a:latin typeface="Trebuchet MS" pitchFamily="34" charset="0"/>
                 <a:ea typeface="Trebuchet MS" pitchFamily="34" charset="-122"/>
                 <a:cs typeface="Trebuchet MS" pitchFamily="34" charset="-120"/>
               </a:rPr>
-              <a:t>·</a:t>
-            </a:r>
-            <a:endParaRPr lang="en-US" sz="1600" dirty="0"/>
-          </a:p>
-        </p:txBody>
-      </p:sp>
-      <p:sp>
-        <p:nvSpPr>
-          <p:cNvPr id="31" name="Shape 29"/>
-          <p:cNvSpPr/>
-          <p:nvPr/>
-        </p:nvSpPr>
-        <p:spPr>
-          <a:xfrm>
-            <a:off x="6428232" y="3364992"/>
-            <a:ext cx="1645920" cy="475488"/>
-          </a:xfrm>
-          <a:prstGeom prst="rect">
-            <a:avLst>
-              <a:gd name="adj" fmla="val 9615"/>
-            </a:avLst>
-          </a:prstGeom>
-          <a:solidFill>
-            <a:srgbClr val="FFFFFF"/>
-          </a:solidFill>
-          <a:ln w="12700">
-            <a:solidFill>
-              <a:srgbClr val="0D9488"/>
-            </a:solidFill>
-            <a:prstDash val="solid"/>
-          </a:ln>
-        </p:spPr>
-      </p:sp>
-      <p:sp>
-        <p:nvSpPr>
-          <p:cNvPr id="32" name="Text 30"/>
-          <p:cNvSpPr/>
-          <p:nvPr/>
-        </p:nvSpPr>
-        <p:spPr>
-          <a:xfrm>
-            <a:off x="6428232" y="3364992"/>
-            <a:ext cx="1645920" cy="475488"/>
-          </a:xfrm>
-          <a:prstGeom prst="rect">
-            <a:avLst/>
-          </a:prstGeom>
-          <a:noFill/>
-          <a:ln/>
-        </p:spPr>
-        <p:txBody>
-          <a:bodyPr wrap="square" lIns="0" tIns="0" rIns="0" bIns="0" rtlCol="0" anchor="ctr"/>
-          <a:lstStyle/>
-          <a:p>
-            <a:pPr algn="ctr" indent="0" marL="0">
-              <a:buNone/>
-            </a:pPr>
-            <a:r>
-              <a:rPr lang="en-US" sz="1400" b="1" dirty="0">
-                <a:solidFill>
-                  <a:srgbClr val="0D9488"/>
-                </a:solidFill>
-                <a:latin typeface="Trebuchet MS" pitchFamily="34" charset="0"/>
-                <a:ea typeface="Trebuchet MS" pitchFamily="34" charset="-122"/>
-                <a:cs typeface="Trebuchet MS" pitchFamily="34" charset="-120"/>
-              </a:rPr>
-              <a:t>hood</a:t>
-            </a:r>
-            <a:endParaRPr lang="en-US" sz="1400" dirty="0"/>
-          </a:p>
-        </p:txBody>
-      </p:sp>
-      <p:sp>
-        <p:nvSpPr>
-          <p:cNvPr id="33" name="Shape 31"/>
-          <p:cNvSpPr/>
-          <p:nvPr/>
-        </p:nvSpPr>
-        <p:spPr>
-          <a:xfrm>
-            <a:off x="365760" y="4096512"/>
-            <a:ext cx="1371600" cy="804672"/>
+              <a:t>Phonemes</a:t>
+            </a:r>
+            <a:endParaRPr lang="en-US" sz="1100" dirty="0"/>
+          </a:p>
+        </p:txBody>
+      </p:sp>
+      <p:sp>
+        <p:nvSpPr>
+          <p:cNvPr id="32" name="Shape 30"/>
+          <p:cNvSpPr/>
+          <p:nvPr/>
+        </p:nvSpPr>
+        <p:spPr>
+          <a:xfrm>
+            <a:off x="1874520" y="4096512"/>
+            <a:ext cx="6903720" cy="804672"/>
           </a:xfrm>
           <a:prstGeom prst="rect">
             <a:avLst>
@@ -30918,85 +31129,19 @@
             </a:avLst>
           </a:prstGeom>
           <a:solidFill>
-            <a:srgbClr val="E2E8F0"/>
+            <a:srgbClr val="F8FAFC"/>
           </a:solidFill>
           <a:ln w="12700">
             <a:solidFill>
               <a:srgbClr val="E2E8F0"/>
             </a:solidFill>
-            <a:prstDash val="solid"/>
-          </a:ln>
-        </p:spPr>
-      </p:sp>
-      <p:sp>
-        <p:nvSpPr>
-          <p:cNvPr id="34" name="Text 32"/>
-          <p:cNvSpPr/>
-          <p:nvPr/>
-        </p:nvSpPr>
-        <p:spPr>
-          <a:xfrm>
-            <a:off x="365760" y="4096512"/>
-            <a:ext cx="1371600" cy="804672"/>
-          </a:xfrm>
-          <a:prstGeom prst="rect">
-            <a:avLst/>
-          </a:prstGeom>
-          <a:noFill/>
-          <a:ln/>
-        </p:spPr>
-        <p:txBody>
-          <a:bodyPr wrap="square" lIns="0" tIns="0" rIns="0" bIns="0" rtlCol="0" anchor="ctr"/>
-          <a:lstStyle/>
-          <a:p>
-            <a:pPr algn="ctr" indent="0" marL="0">
-              <a:buNone/>
-            </a:pPr>
-            <a:r>
-              <a:rPr lang="en-US" sz="1100" b="1" dirty="0">
-                <a:solidFill>
-                  <a:srgbClr val="475569"/>
-                </a:solidFill>
-                <a:latin typeface="Trebuchet MS" pitchFamily="34" charset="0"/>
-                <a:ea typeface="Trebuchet MS" pitchFamily="34" charset="-122"/>
-                <a:cs typeface="Trebuchet MS" pitchFamily="34" charset="-120"/>
-              </a:rPr>
-              <a:t>Phonemes</a:t>
-            </a:r>
-            <a:endParaRPr lang="en-US" sz="1100" dirty="0"/>
-          </a:p>
-        </p:txBody>
-      </p:sp>
-      <p:sp>
-        <p:nvSpPr>
-          <p:cNvPr id="35" name="Shape 33"/>
-          <p:cNvSpPr/>
-          <p:nvPr/>
-        </p:nvSpPr>
-        <p:spPr>
-          <a:xfrm>
-            <a:off x="1874520" y="4096512"/>
-            <a:ext cx="6903720" cy="804672"/>
-          </a:xfrm>
-          <a:prstGeom prst="rect">
-            <a:avLst>
-              <a:gd name="adj" fmla="val 6818"/>
-            </a:avLst>
-          </a:prstGeom>
-          <a:solidFill>
-            <a:srgbClr val="F8FAFC"/>
-          </a:solidFill>
-          <a:ln w="12700">
-            <a:solidFill>
-              <a:srgbClr val="E2E8F0"/>
-            </a:solidFill>
             <a:prstDash val="dash"/>
           </a:ln>
         </p:spPr>
       </p:sp>
       <p:sp>
         <p:nvSpPr>
-          <p:cNvPr id="36" name="Text 34"/>
+          <p:cNvPr id="33" name="Text 31"/>
           <p:cNvSpPr/>
           <p:nvPr/>
         </p:nvSpPr>
@@ -31319,7 +31464,7 @@
                 <a:ea typeface="Calibri" pitchFamily="34" charset="-122"/>
                 <a:cs typeface="Calibri" pitchFamily="34" charset="-120"/>
               </a:rPr>
-              <a:t>Word Labs  •  wordlabs.app  •  Suffix: '-hood' = state, condition, or group</a:t>
+              <a:t>Word Labs  •  wordlabs.app  •  Suffix: '-hood' = state of</a:t>
             </a:r>
             <a:endParaRPr lang="en-US" sz="800" dirty="0"/>
           </a:p>
@@ -31458,7 +31603,7 @@
                 <a:ea typeface="Trebuchet MS" pitchFamily="34" charset="-122"/>
                 <a:cs typeface="Trebuchet MS" pitchFamily="34" charset="-120"/>
               </a:rPr>
-              <a:t>motherhood</a:t>
+              <a:t>falsehood</a:t>
             </a:r>
             <a:endParaRPr lang="en-US" sz="2800" dirty="0"/>
           </a:p>
@@ -31597,7 +31742,7 @@
                 <a:ea typeface="Trebuchet MS" pitchFamily="34" charset="-122"/>
                 <a:cs typeface="Trebuchet MS" pitchFamily="34" charset="-120"/>
               </a:rPr>
-              <a:t>mother</a:t>
+              <a:t>false</a:t>
             </a:r>
             <a:endParaRPr lang="en-US" sz="1300" dirty="0"/>
           </a:p>
@@ -31636,7 +31781,7 @@
                 <a:ea typeface="Calibri" pitchFamily="34" charset="-122"/>
                 <a:cs typeface="Calibri" pitchFamily="34" charset="-120"/>
               </a:rPr>
-              <a:t>female parent</a:t>
+              <a:t>not true</a:t>
             </a:r>
             <a:endParaRPr lang="en-US" sz="850" dirty="0"/>
           </a:p>
@@ -31748,7 +31893,7 @@
                 <a:ea typeface="Calibri" pitchFamily="34" charset="-122"/>
                 <a:cs typeface="Calibri" pitchFamily="34" charset="-120"/>
               </a:rPr>
-              <a:t>state or condition of</a:t>
+              <a:t>a state or condition of</a:t>
             </a:r>
             <a:endParaRPr lang="en-US" sz="850" dirty="0"/>
           </a:p>
@@ -31855,7 +32000,7 @@
         </p:nvSpPr>
         <p:spPr>
           <a:xfrm>
-            <a:off x="2313432" y="3364992"/>
+            <a:off x="2999232" y="3364992"/>
             <a:ext cx="1645920" cy="475488"/>
           </a:xfrm>
           <a:prstGeom prst="rect">
@@ -31882,7 +32027,7 @@
         </p:nvSpPr>
         <p:spPr>
           <a:xfrm>
-            <a:off x="2313432" y="3364992"/>
+            <a:off x="2999232" y="3364992"/>
             <a:ext cx="1645920" cy="475488"/>
           </a:xfrm>
           <a:prstGeom prst="rect">
@@ -31907,7 +32052,7 @@
                 <a:ea typeface="Trebuchet MS" pitchFamily="34" charset="-122"/>
                 <a:cs typeface="Trebuchet MS" pitchFamily="34" charset="-120"/>
               </a:rPr>
-              <a:t>moth</a:t>
+              <a:t>false</a:t>
             </a:r>
             <a:endParaRPr lang="en-US" sz="1400" dirty="0"/>
           </a:p>
@@ -31921,8 +32066,8 @@
         </p:nvSpPr>
         <p:spPr>
           <a:xfrm>
-            <a:off x="3959352" y="3364992"/>
-            <a:ext cx="411480" cy="475488"/>
+            <a:off x="4645152" y="3364992"/>
+            <a:ext cx="1097280" cy="475488"/>
           </a:xfrm>
           <a:prstGeom prst="rect">
             <a:avLst/>
@@ -31960,7 +32105,7 @@
         </p:nvSpPr>
         <p:spPr>
           <a:xfrm>
-            <a:off x="4370832" y="3364992"/>
+            <a:off x="5742432" y="3364992"/>
             <a:ext cx="1645920" cy="475488"/>
           </a:xfrm>
           <a:prstGeom prst="rect">
@@ -31987,7 +32132,7 @@
         </p:nvSpPr>
         <p:spPr>
           <a:xfrm>
-            <a:off x="4370832" y="3364992"/>
+            <a:off x="5742432" y="3364992"/>
             <a:ext cx="1645920" cy="475488"/>
           </a:xfrm>
           <a:prstGeom prst="rect">
@@ -32012,7 +32157,7 @@
                 <a:ea typeface="Trebuchet MS" pitchFamily="34" charset="-122"/>
                 <a:cs typeface="Trebuchet MS" pitchFamily="34" charset="-120"/>
               </a:rPr>
-              <a:t>er</a:t>
+              <a:t>hood</a:t>
             </a:r>
             <a:endParaRPr lang="en-US" sz="1400" dirty="0"/>
           </a:p>
@@ -32020,14 +32165,41 @@
       </p:sp>
       <p:sp>
         <p:nvSpPr>
-          <p:cNvPr id="30" name="Text 28"/>
-          <p:cNvSpPr/>
-          <p:nvPr/>
-        </p:nvSpPr>
-        <p:spPr>
-          <a:xfrm>
-            <a:off x="6016752" y="3364992"/>
-            <a:ext cx="411480" cy="475488"/>
+          <p:cNvPr id="30" name="Shape 28"/>
+          <p:cNvSpPr/>
+          <p:nvPr/>
+        </p:nvSpPr>
+        <p:spPr>
+          <a:xfrm>
+            <a:off x="365760" y="4096512"/>
+            <a:ext cx="1371600" cy="804672"/>
+          </a:xfrm>
+          <a:prstGeom prst="rect">
+            <a:avLst>
+              <a:gd name="adj" fmla="val 6818"/>
+            </a:avLst>
+          </a:prstGeom>
+          <a:solidFill>
+            <a:srgbClr val="E2E8F0"/>
+          </a:solidFill>
+          <a:ln w="12700">
+            <a:solidFill>
+              <a:srgbClr val="E2E8F0"/>
+            </a:solidFill>
+            <a:prstDash val="solid"/>
+          </a:ln>
+        </p:spPr>
+      </p:sp>
+      <p:sp>
+        <p:nvSpPr>
+          <p:cNvPr id="31" name="Text 29"/>
+          <p:cNvSpPr/>
+          <p:nvPr/>
+        </p:nvSpPr>
+        <p:spPr>
+          <a:xfrm>
+            <a:off x="365760" y="4096512"/>
+            <a:ext cx="1371600" cy="804672"/>
           </a:xfrm>
           <a:prstGeom prst="rect">
             <a:avLst/>
@@ -32043,57 +32215,84 @@
               <a:buNone/>
             </a:pPr>
             <a:r>
-              <a:rPr lang="en-US" sz="1600" b="1" dirty="0">
-                <a:solidFill>
-                  <a:srgbClr val="0D9488"/>
+              <a:rPr lang="en-US" sz="1100" b="1" dirty="0">
+                <a:solidFill>
+                  <a:srgbClr val="475569"/>
                 </a:solidFill>
                 <a:latin typeface="Trebuchet MS" pitchFamily="34" charset="0"/>
                 <a:ea typeface="Trebuchet MS" pitchFamily="34" charset="-122"/>
                 <a:cs typeface="Trebuchet MS" pitchFamily="34" charset="-120"/>
               </a:rPr>
-              <a:t>·</a:t>
-            </a:r>
-            <a:endParaRPr lang="en-US" sz="1600" dirty="0"/>
-          </a:p>
-        </p:txBody>
-      </p:sp>
-      <p:sp>
-        <p:nvSpPr>
-          <p:cNvPr id="31" name="Shape 29"/>
-          <p:cNvSpPr/>
-          <p:nvPr/>
-        </p:nvSpPr>
-        <p:spPr>
-          <a:xfrm>
-            <a:off x="6428232" y="3364992"/>
-            <a:ext cx="1645920" cy="475488"/>
+              <a:t>Phonemes</a:t>
+            </a:r>
+            <a:endParaRPr lang="en-US" sz="1100" dirty="0"/>
+          </a:p>
+        </p:txBody>
+      </p:sp>
+      <p:sp>
+        <p:nvSpPr>
+          <p:cNvPr id="32" name="Shape 30"/>
+          <p:cNvSpPr/>
+          <p:nvPr/>
+        </p:nvSpPr>
+        <p:spPr>
+          <a:xfrm>
+            <a:off x="1874520" y="4096512"/>
+            <a:ext cx="6903720" cy="658368"/>
           </a:xfrm>
           <a:prstGeom prst="rect">
             <a:avLst>
-              <a:gd name="adj" fmla="val 9615"/>
+              <a:gd name="adj" fmla="val 8333"/>
             </a:avLst>
           </a:prstGeom>
           <a:solidFill>
+            <a:srgbClr val="FCE7F3"/>
+          </a:solidFill>
+          <a:ln w="12700">
+            <a:solidFill>
+              <a:srgbClr val="DB2777"/>
+            </a:solidFill>
+            <a:prstDash val="solid"/>
+          </a:ln>
+        </p:spPr>
+      </p:sp>
+      <p:sp>
+        <p:nvSpPr>
+          <p:cNvPr id="33" name="Shape 31"/>
+          <p:cNvSpPr/>
+          <p:nvPr/>
+        </p:nvSpPr>
+        <p:spPr>
+          <a:xfrm>
+            <a:off x="2124837" y="4169664"/>
+            <a:ext cx="685800" cy="475488"/>
+          </a:xfrm>
+          <a:prstGeom prst="rect">
+            <a:avLst>
+              <a:gd name="adj" fmla="val 7692"/>
+            </a:avLst>
+          </a:prstGeom>
+          <a:solidFill>
             <a:srgbClr val="FFFFFF"/>
           </a:solidFill>
           <a:ln w="12700">
             <a:solidFill>
-              <a:srgbClr val="0D9488"/>
-            </a:solidFill>
-            <a:prstDash val="solid"/>
-          </a:ln>
-        </p:spPr>
-      </p:sp>
-      <p:sp>
-        <p:nvSpPr>
-          <p:cNvPr id="32" name="Text 30"/>
-          <p:cNvSpPr/>
-          <p:nvPr/>
-        </p:nvSpPr>
-        <p:spPr>
-          <a:xfrm>
-            <a:off x="6428232" y="3364992"/>
-            <a:ext cx="1645920" cy="475488"/>
+              <a:srgbClr val="DB2777"/>
+            </a:solidFill>
+            <a:prstDash val="solid"/>
+          </a:ln>
+        </p:spPr>
+      </p:sp>
+      <p:sp>
+        <p:nvSpPr>
+          <p:cNvPr id="34" name="Text 32"/>
+          <p:cNvSpPr/>
+          <p:nvPr/>
+        </p:nvSpPr>
+        <p:spPr>
+          <a:xfrm>
+            <a:off x="2124837" y="4169664"/>
+            <a:ext cx="685800" cy="475488"/>
           </a:xfrm>
           <a:prstGeom prst="rect">
             <a:avLst/>
@@ -32109,57 +32308,57 @@
               <a:buNone/>
             </a:pPr>
             <a:r>
-              <a:rPr lang="en-US" sz="1400" b="1" dirty="0">
-                <a:solidFill>
-                  <a:srgbClr val="0D9488"/>
+              <a:rPr lang="en-US" sz="900" b="1" dirty="0">
+                <a:solidFill>
+                  <a:srgbClr val="9D174D"/>
                 </a:solidFill>
                 <a:latin typeface="Trebuchet MS" pitchFamily="34" charset="0"/>
                 <a:ea typeface="Trebuchet MS" pitchFamily="34" charset="-122"/>
                 <a:cs typeface="Trebuchet MS" pitchFamily="34" charset="-120"/>
               </a:rPr>
-              <a:t>hood</a:t>
-            </a:r>
-            <a:endParaRPr lang="en-US" sz="1400" dirty="0"/>
-          </a:p>
-        </p:txBody>
-      </p:sp>
-      <p:sp>
-        <p:nvSpPr>
-          <p:cNvPr id="33" name="Shape 31"/>
-          <p:cNvSpPr/>
-          <p:nvPr/>
-        </p:nvSpPr>
-        <p:spPr>
-          <a:xfrm>
-            <a:off x="365760" y="4096512"/>
-            <a:ext cx="1371600" cy="804672"/>
+              <a:t>f</a:t>
+            </a:r>
+            <a:endParaRPr lang="en-US" sz="900" dirty="0"/>
+          </a:p>
+        </p:txBody>
+      </p:sp>
+      <p:sp>
+        <p:nvSpPr>
+          <p:cNvPr id="35" name="Shape 33"/>
+          <p:cNvSpPr/>
+          <p:nvPr/>
+        </p:nvSpPr>
+        <p:spPr>
+          <a:xfrm>
+            <a:off x="3033522" y="4169664"/>
+            <a:ext cx="685800" cy="475488"/>
           </a:xfrm>
           <a:prstGeom prst="rect">
             <a:avLst>
-              <a:gd name="adj" fmla="val 6818"/>
+              <a:gd name="adj" fmla="val 7692"/>
             </a:avLst>
           </a:prstGeom>
           <a:solidFill>
-            <a:srgbClr val="E2E8F0"/>
-          </a:solidFill>
-          <a:ln w="12700">
-            <a:solidFill>
-              <a:srgbClr val="E2E8F0"/>
-            </a:solidFill>
-            <a:prstDash val="solid"/>
-          </a:ln>
-        </p:spPr>
-      </p:sp>
-      <p:sp>
-        <p:nvSpPr>
-          <p:cNvPr id="34" name="Text 32"/>
-          <p:cNvSpPr/>
-          <p:nvPr/>
-        </p:nvSpPr>
-        <p:spPr>
-          <a:xfrm>
-            <a:off x="365760" y="4096512"/>
-            <a:ext cx="1371600" cy="804672"/>
+            <a:srgbClr val="FFFFFF"/>
+          </a:solidFill>
+          <a:ln w="12700">
+            <a:solidFill>
+              <a:srgbClr val="DB2777"/>
+            </a:solidFill>
+            <a:prstDash val="solid"/>
+          </a:ln>
+        </p:spPr>
+      </p:sp>
+      <p:sp>
+        <p:nvSpPr>
+          <p:cNvPr id="36" name="Text 34"/>
+          <p:cNvSpPr/>
+          <p:nvPr/>
+        </p:nvSpPr>
+        <p:spPr>
+          <a:xfrm>
+            <a:off x="3033522" y="4169664"/>
+            <a:ext cx="685800" cy="475488"/>
           </a:xfrm>
           <a:prstGeom prst="rect">
             <a:avLst/>
@@ -32175,56 +32374,29 @@
               <a:buNone/>
             </a:pPr>
             <a:r>
-              <a:rPr lang="en-US" sz="1100" b="1" dirty="0">
-                <a:solidFill>
-                  <a:srgbClr val="475569"/>
+              <a:rPr lang="en-US" sz="900" b="1" dirty="0">
+                <a:solidFill>
+                  <a:srgbClr val="9D174D"/>
                 </a:solidFill>
                 <a:latin typeface="Trebuchet MS" pitchFamily="34" charset="0"/>
                 <a:ea typeface="Trebuchet MS" pitchFamily="34" charset="-122"/>
                 <a:cs typeface="Trebuchet MS" pitchFamily="34" charset="-120"/>
               </a:rPr>
-              <a:t>Phonemes</a:t>
-            </a:r>
-            <a:endParaRPr lang="en-US" sz="1100" dirty="0"/>
-          </a:p>
-        </p:txBody>
-      </p:sp>
-      <p:sp>
-        <p:nvSpPr>
-          <p:cNvPr id="35" name="Shape 33"/>
-          <p:cNvSpPr/>
-          <p:nvPr/>
-        </p:nvSpPr>
-        <p:spPr>
-          <a:xfrm>
-            <a:off x="1874520" y="4096512"/>
-            <a:ext cx="6903720" cy="658368"/>
-          </a:xfrm>
-          <a:prstGeom prst="rect">
-            <a:avLst>
-              <a:gd name="adj" fmla="val 8333"/>
-            </a:avLst>
-          </a:prstGeom>
-          <a:solidFill>
-            <a:srgbClr val="FCE7F3"/>
-          </a:solidFill>
-          <a:ln w="12700">
-            <a:solidFill>
-              <a:srgbClr val="DB2777"/>
-            </a:solidFill>
-            <a:prstDash val="solid"/>
-          </a:ln>
-        </p:spPr>
-      </p:sp>
-      <p:sp>
-        <p:nvSpPr>
-          <p:cNvPr id="36" name="Shape 34"/>
-          <p:cNvSpPr/>
-          <p:nvPr/>
-        </p:nvSpPr>
-        <p:spPr>
-          <a:xfrm>
-            <a:off x="2124837" y="4169664"/>
+              <a:t>al</a:t>
+            </a:r>
+            <a:endParaRPr lang="en-US" sz="900" dirty="0"/>
+          </a:p>
+        </p:txBody>
+      </p:sp>
+      <p:sp>
+        <p:nvSpPr>
+          <p:cNvPr id="37" name="Shape 35"/>
+          <p:cNvSpPr/>
+          <p:nvPr/>
+        </p:nvSpPr>
+        <p:spPr>
+          <a:xfrm>
+            <a:off x="3942207" y="4169664"/>
             <a:ext cx="685800" cy="475488"/>
           </a:xfrm>
           <a:prstGeom prst="rect">
@@ -32245,13 +32417,13 @@
       </p:sp>
       <p:sp>
         <p:nvSpPr>
-          <p:cNvPr id="37" name="Text 35"/>
-          <p:cNvSpPr/>
-          <p:nvPr/>
-        </p:nvSpPr>
-        <p:spPr>
-          <a:xfrm>
-            <a:off x="2124837" y="4169664"/>
+          <p:cNvPr id="38" name="Text 36"/>
+          <p:cNvSpPr/>
+          <p:nvPr/>
+        </p:nvSpPr>
+        <p:spPr>
+          <a:xfrm>
+            <a:off x="3942207" y="4169664"/>
             <a:ext cx="685800" cy="475488"/>
           </a:xfrm>
           <a:prstGeom prst="rect">
@@ -32276,7 +32448,7 @@
                 <a:ea typeface="Trebuchet MS" pitchFamily="34" charset="-122"/>
                 <a:cs typeface="Trebuchet MS" pitchFamily="34" charset="-120"/>
               </a:rPr>
-              <a:t>m</a:t>
+              <a:t>s</a:t>
             </a:r>
             <a:endParaRPr lang="en-US" sz="900" dirty="0"/>
           </a:p>
@@ -32284,13 +32456,13 @@
       </p:sp>
       <p:sp>
         <p:nvSpPr>
-          <p:cNvPr id="38" name="Shape 36"/>
-          <p:cNvSpPr/>
-          <p:nvPr/>
-        </p:nvSpPr>
-        <p:spPr>
-          <a:xfrm>
-            <a:off x="3033522" y="4169664"/>
+          <p:cNvPr id="39" name="Shape 37"/>
+          <p:cNvSpPr/>
+          <p:nvPr/>
+        </p:nvSpPr>
+        <p:spPr>
+          <a:xfrm>
+            <a:off x="4850892" y="4169664"/>
             <a:ext cx="685800" cy="475488"/>
           </a:xfrm>
           <a:prstGeom prst="rect">
@@ -32311,13 +32483,13 @@
       </p:sp>
       <p:sp>
         <p:nvSpPr>
-          <p:cNvPr id="39" name="Text 37"/>
-          <p:cNvSpPr/>
-          <p:nvPr/>
-        </p:nvSpPr>
-        <p:spPr>
-          <a:xfrm>
-            <a:off x="3033522" y="4169664"/>
+          <p:cNvPr id="40" name="Text 38"/>
+          <p:cNvSpPr/>
+          <p:nvPr/>
+        </p:nvSpPr>
+        <p:spPr>
+          <a:xfrm>
+            <a:off x="4850892" y="4169664"/>
             <a:ext cx="685800" cy="475488"/>
           </a:xfrm>
           <a:prstGeom prst="rect">
@@ -32342,7 +32514,7 @@
                 <a:ea typeface="Trebuchet MS" pitchFamily="34" charset="-122"/>
                 <a:cs typeface="Trebuchet MS" pitchFamily="34" charset="-120"/>
               </a:rPr>
-              <a:t>o</a:t>
+              <a:t>e</a:t>
             </a:r>
             <a:endParaRPr lang="en-US" sz="900" dirty="0"/>
           </a:p>
@@ -32350,13 +32522,13 @@
       </p:sp>
       <p:sp>
         <p:nvSpPr>
-          <p:cNvPr id="40" name="Shape 38"/>
-          <p:cNvSpPr/>
-          <p:nvPr/>
-        </p:nvSpPr>
-        <p:spPr>
-          <a:xfrm>
-            <a:off x="3942207" y="4169664"/>
+          <p:cNvPr id="41" name="Shape 39"/>
+          <p:cNvSpPr/>
+          <p:nvPr/>
+        </p:nvSpPr>
+        <p:spPr>
+          <a:xfrm>
+            <a:off x="5759577" y="4169664"/>
             <a:ext cx="685800" cy="475488"/>
           </a:xfrm>
           <a:prstGeom prst="rect">
@@ -32377,13 +32549,13 @@
       </p:sp>
       <p:sp>
         <p:nvSpPr>
-          <p:cNvPr id="41" name="Text 39"/>
-          <p:cNvSpPr/>
-          <p:nvPr/>
-        </p:nvSpPr>
-        <p:spPr>
-          <a:xfrm>
-            <a:off x="3942207" y="4169664"/>
+          <p:cNvPr id="42" name="Text 40"/>
+          <p:cNvSpPr/>
+          <p:nvPr/>
+        </p:nvSpPr>
+        <p:spPr>
+          <a:xfrm>
+            <a:off x="5759577" y="4169664"/>
             <a:ext cx="685800" cy="475488"/>
           </a:xfrm>
           <a:prstGeom prst="rect">
@@ -32408,7 +32580,7 @@
                 <a:ea typeface="Trebuchet MS" pitchFamily="34" charset="-122"/>
                 <a:cs typeface="Trebuchet MS" pitchFamily="34" charset="-120"/>
               </a:rPr>
-              <a:t>th</a:t>
+              <a:t>h</a:t>
             </a:r>
             <a:endParaRPr lang="en-US" sz="900" dirty="0"/>
           </a:p>
@@ -32416,13 +32588,13 @@
       </p:sp>
       <p:sp>
         <p:nvSpPr>
-          <p:cNvPr id="42" name="Shape 40"/>
-          <p:cNvSpPr/>
-          <p:nvPr/>
-        </p:nvSpPr>
-        <p:spPr>
-          <a:xfrm>
-            <a:off x="4850892" y="4169664"/>
+          <p:cNvPr id="43" name="Shape 41"/>
+          <p:cNvSpPr/>
+          <p:nvPr/>
+        </p:nvSpPr>
+        <p:spPr>
+          <a:xfrm>
+            <a:off x="6668262" y="4169664"/>
             <a:ext cx="685800" cy="475488"/>
           </a:xfrm>
           <a:prstGeom prst="rect">
@@ -32443,13 +32615,13 @@
       </p:sp>
       <p:sp>
         <p:nvSpPr>
-          <p:cNvPr id="43" name="Text 41"/>
-          <p:cNvSpPr/>
-          <p:nvPr/>
-        </p:nvSpPr>
-        <p:spPr>
-          <a:xfrm>
-            <a:off x="4850892" y="4169664"/>
+          <p:cNvPr id="44" name="Text 42"/>
+          <p:cNvSpPr/>
+          <p:nvPr/>
+        </p:nvSpPr>
+        <p:spPr>
+          <a:xfrm>
+            <a:off x="6668262" y="4169664"/>
             <a:ext cx="685800" cy="475488"/>
           </a:xfrm>
           <a:prstGeom prst="rect">
@@ -32474,7 +32646,7 @@
                 <a:ea typeface="Trebuchet MS" pitchFamily="34" charset="-122"/>
                 <a:cs typeface="Trebuchet MS" pitchFamily="34" charset="-120"/>
               </a:rPr>
-              <a:t>er</a:t>
+              <a:t>oo</a:t>
             </a:r>
             <a:endParaRPr lang="en-US" sz="900" dirty="0"/>
           </a:p>
@@ -32482,13 +32654,13 @@
       </p:sp>
       <p:sp>
         <p:nvSpPr>
-          <p:cNvPr id="44" name="Shape 42"/>
-          <p:cNvSpPr/>
-          <p:nvPr/>
-        </p:nvSpPr>
-        <p:spPr>
-          <a:xfrm>
-            <a:off x="5759577" y="4169664"/>
+          <p:cNvPr id="45" name="Shape 43"/>
+          <p:cNvSpPr/>
+          <p:nvPr/>
+        </p:nvSpPr>
+        <p:spPr>
+          <a:xfrm>
+            <a:off x="7576947" y="4169664"/>
             <a:ext cx="685800" cy="475488"/>
           </a:xfrm>
           <a:prstGeom prst="rect">
@@ -32509,139 +32681,7 @@
       </p:sp>
       <p:sp>
         <p:nvSpPr>
-          <p:cNvPr id="45" name="Text 43"/>
-          <p:cNvSpPr/>
-          <p:nvPr/>
-        </p:nvSpPr>
-        <p:spPr>
-          <a:xfrm>
-            <a:off x="5759577" y="4169664"/>
-            <a:ext cx="685800" cy="475488"/>
-          </a:xfrm>
-          <a:prstGeom prst="rect">
-            <a:avLst/>
-          </a:prstGeom>
-          <a:noFill/>
-          <a:ln/>
-        </p:spPr>
-        <p:txBody>
-          <a:bodyPr wrap="square" lIns="0" tIns="0" rIns="0" bIns="0" rtlCol="0" anchor="ctr"/>
-          <a:lstStyle/>
-          <a:p>
-            <a:pPr algn="ctr" indent="0" marL="0">
-              <a:buNone/>
-            </a:pPr>
-            <a:r>
-              <a:rPr lang="en-US" sz="900" b="1" dirty="0">
-                <a:solidFill>
-                  <a:srgbClr val="9D174D"/>
-                </a:solidFill>
-                <a:latin typeface="Trebuchet MS" pitchFamily="34" charset="0"/>
-                <a:ea typeface="Trebuchet MS" pitchFamily="34" charset="-122"/>
-                <a:cs typeface="Trebuchet MS" pitchFamily="34" charset="-120"/>
-              </a:rPr>
-              <a:t>h</a:t>
-            </a:r>
-            <a:endParaRPr lang="en-US" sz="900" dirty="0"/>
-          </a:p>
-        </p:txBody>
-      </p:sp>
-      <p:sp>
-        <p:nvSpPr>
-          <p:cNvPr id="46" name="Shape 44"/>
-          <p:cNvSpPr/>
-          <p:nvPr/>
-        </p:nvSpPr>
-        <p:spPr>
-          <a:xfrm>
-            <a:off x="6668262" y="4169664"/>
-            <a:ext cx="685800" cy="475488"/>
-          </a:xfrm>
-          <a:prstGeom prst="rect">
-            <a:avLst>
-              <a:gd name="adj" fmla="val 7692"/>
-            </a:avLst>
-          </a:prstGeom>
-          <a:solidFill>
-            <a:srgbClr val="FFFFFF"/>
-          </a:solidFill>
-          <a:ln w="12700">
-            <a:solidFill>
-              <a:srgbClr val="DB2777"/>
-            </a:solidFill>
-            <a:prstDash val="solid"/>
-          </a:ln>
-        </p:spPr>
-      </p:sp>
-      <p:sp>
-        <p:nvSpPr>
-          <p:cNvPr id="47" name="Text 45"/>
-          <p:cNvSpPr/>
-          <p:nvPr/>
-        </p:nvSpPr>
-        <p:spPr>
-          <a:xfrm>
-            <a:off x="6668262" y="4169664"/>
-            <a:ext cx="685800" cy="475488"/>
-          </a:xfrm>
-          <a:prstGeom prst="rect">
-            <a:avLst/>
-          </a:prstGeom>
-          <a:noFill/>
-          <a:ln/>
-        </p:spPr>
-        <p:txBody>
-          <a:bodyPr wrap="square" lIns="0" tIns="0" rIns="0" bIns="0" rtlCol="0" anchor="ctr"/>
-          <a:lstStyle/>
-          <a:p>
-            <a:pPr algn="ctr" indent="0" marL="0">
-              <a:buNone/>
-            </a:pPr>
-            <a:r>
-              <a:rPr lang="en-US" sz="900" b="1" dirty="0">
-                <a:solidFill>
-                  <a:srgbClr val="9D174D"/>
-                </a:solidFill>
-                <a:latin typeface="Trebuchet MS" pitchFamily="34" charset="0"/>
-                <a:ea typeface="Trebuchet MS" pitchFamily="34" charset="-122"/>
-                <a:cs typeface="Trebuchet MS" pitchFamily="34" charset="-120"/>
-              </a:rPr>
-              <a:t>oo</a:t>
-            </a:r>
-            <a:endParaRPr lang="en-US" sz="900" dirty="0"/>
-          </a:p>
-        </p:txBody>
-      </p:sp>
-      <p:sp>
-        <p:nvSpPr>
-          <p:cNvPr id="48" name="Shape 46"/>
-          <p:cNvSpPr/>
-          <p:nvPr/>
-        </p:nvSpPr>
-        <p:spPr>
-          <a:xfrm>
-            <a:off x="7576947" y="4169664"/>
-            <a:ext cx="685800" cy="475488"/>
-          </a:xfrm>
-          <a:prstGeom prst="rect">
-            <a:avLst>
-              <a:gd name="adj" fmla="val 7692"/>
-            </a:avLst>
-          </a:prstGeom>
-          <a:solidFill>
-            <a:srgbClr val="FFFFFF"/>
-          </a:solidFill>
-          <a:ln w="12700">
-            <a:solidFill>
-              <a:srgbClr val="DB2777"/>
-            </a:solidFill>
-            <a:prstDash val="solid"/>
-          </a:ln>
-        </p:spPr>
-      </p:sp>
-      <p:sp>
-        <p:nvSpPr>
-          <p:cNvPr id="49" name="Text 47"/>
+          <p:cNvPr id="46" name="Text 44"/>
           <p:cNvSpPr/>
           <p:nvPr/>
         </p:nvSpPr>
@@ -32964,7 +33004,7 @@
                 <a:ea typeface="Calibri" pitchFamily="34" charset="-122"/>
                 <a:cs typeface="Calibri" pitchFamily="34" charset="-120"/>
               </a:rPr>
-              <a:t>Word Labs  •  wordlabs.app  •  Suffix: '-hood' = state, condition, or group</a:t>
+              <a:t>Word Labs  •  wordlabs.app  •  Suffix: '-hood' = state of</a:t>
             </a:r>
             <a:endParaRPr lang="en-US" sz="800" dirty="0"/>
           </a:p>
@@ -34133,7 +34173,7 @@
                 <a:ea typeface="Calibri" pitchFamily="34" charset="-122"/>
                 <a:cs typeface="Calibri" pitchFamily="34" charset="-120"/>
               </a:rPr>
-              <a:t>Word Labs  •  wordlabs.app  •  Suffix: '-hood' = state, condition, or group</a:t>
+              <a:t>Word Labs  •  wordlabs.app  •  Suffix: '-hood' = state of</a:t>
             </a:r>
             <a:endParaRPr lang="en-US" sz="800" dirty="0"/>
           </a:p>
@@ -34391,7 +34431,7 @@
             <a:avLst/>
           </a:prstGeom>
           <a:solidFill>
-            <a:srgbClr val="DDD6FE"/>
+            <a:srgbClr val="F8FAFC"/>
           </a:solidFill>
           <a:ln w="12700">
             <a:solidFill>
@@ -34403,14 +34443,39 @@
       </p:sp>
       <p:sp>
         <p:nvSpPr>
-          <p:cNvPr id="18" name="Text 16"/>
-          <p:cNvSpPr/>
-          <p:nvPr/>
-        </p:nvSpPr>
-        <p:spPr>
-          <a:xfrm>
-            <a:off x="365760" y="1563624"/>
-            <a:ext cx="2468880" cy="402336"/>
+          <p:cNvPr id="18" name="Shape 16"/>
+          <p:cNvSpPr/>
+          <p:nvPr/>
+        </p:nvSpPr>
+        <p:spPr>
+          <a:xfrm>
+            <a:off x="2971800" y="1563624"/>
+            <a:ext cx="2834640" cy="402336"/>
+          </a:xfrm>
+          <a:prstGeom prst="rect">
+            <a:avLst/>
+          </a:prstGeom>
+          <a:solidFill>
+            <a:srgbClr val="CCFBF1"/>
+          </a:solidFill>
+          <a:ln w="12700">
+            <a:solidFill>
+              <a:srgbClr val="E2E8F0"/>
+            </a:solidFill>
+            <a:prstDash val="solid"/>
+          </a:ln>
+        </p:spPr>
+      </p:sp>
+      <p:sp>
+        <p:nvSpPr>
+          <p:cNvPr id="19" name="Text 17"/>
+          <p:cNvSpPr/>
+          <p:nvPr/>
+        </p:nvSpPr>
+        <p:spPr>
+          <a:xfrm>
+            <a:off x="2971800" y="1563624"/>
+            <a:ext cx="2834640" cy="402336"/>
           </a:xfrm>
           <a:prstGeom prst="rect">
             <a:avLst/>
@@ -34428,13 +34493,13 @@
             <a:r>
               <a:rPr lang="en-US" sz="1300" b="1" dirty="0">
                 <a:solidFill>
-                  <a:srgbClr val="4C1D95"/>
+                  <a:srgbClr val="0F766E"/>
                 </a:solidFill>
                 <a:latin typeface="Trebuchet MS" pitchFamily="34" charset="0"/>
                 <a:ea typeface="Trebuchet MS" pitchFamily="34" charset="-122"/>
                 <a:cs typeface="Trebuchet MS" pitchFamily="34" charset="-120"/>
               </a:rPr>
-              <a:t>un-</a:t>
+              <a:t>child</a:t>
             </a:r>
             <a:endParaRPr lang="en-US" sz="1300" dirty="0"/>
           </a:p>
@@ -34442,20 +34507,20 @@
       </p:sp>
       <p:sp>
         <p:nvSpPr>
-          <p:cNvPr id="19" name="Shape 17"/>
-          <p:cNvSpPr/>
-          <p:nvPr/>
-        </p:nvSpPr>
-        <p:spPr>
-          <a:xfrm>
-            <a:off x="2971800" y="1563624"/>
+          <p:cNvPr id="20" name="Shape 18"/>
+          <p:cNvSpPr/>
+          <p:nvPr/>
+        </p:nvSpPr>
+        <p:spPr>
+          <a:xfrm>
+            <a:off x="5943600" y="1563624"/>
             <a:ext cx="2834640" cy="402336"/>
           </a:xfrm>
           <a:prstGeom prst="rect">
             <a:avLst/>
           </a:prstGeom>
           <a:solidFill>
-            <a:srgbClr val="CCFBF1"/>
+            <a:srgbClr val="FCE7F3"/>
           </a:solidFill>
           <a:ln w="12700">
             <a:solidFill>
@@ -34467,13 +34532,13 @@
       </p:sp>
       <p:sp>
         <p:nvSpPr>
-          <p:cNvPr id="20" name="Text 18"/>
-          <p:cNvSpPr/>
-          <p:nvPr/>
-        </p:nvSpPr>
-        <p:spPr>
-          <a:xfrm>
-            <a:off x="2971800" y="1563624"/>
+          <p:cNvPr id="21" name="Text 19"/>
+          <p:cNvSpPr/>
+          <p:nvPr/>
+        </p:nvSpPr>
+        <p:spPr>
+          <a:xfrm>
+            <a:off x="5943600" y="1563624"/>
             <a:ext cx="2834640" cy="402336"/>
           </a:xfrm>
           <a:prstGeom prst="rect">
@@ -34492,13 +34557,13 @@
             <a:r>
               <a:rPr lang="en-US" sz="1300" b="1" dirty="0">
                 <a:solidFill>
-                  <a:srgbClr val="0F766E"/>
+                  <a:srgbClr val="9D174D"/>
                 </a:solidFill>
                 <a:latin typeface="Trebuchet MS" pitchFamily="34" charset="0"/>
                 <a:ea typeface="Trebuchet MS" pitchFamily="34" charset="-122"/>
                 <a:cs typeface="Trebuchet MS" pitchFamily="34" charset="-120"/>
               </a:rPr>
-              <a:t>child</a:t>
+              <a:t>-hood</a:t>
             </a:r>
             <a:endParaRPr lang="en-US" sz="1300" dirty="0"/>
           </a:p>
@@ -34506,20 +34571,45 @@
       </p:sp>
       <p:sp>
         <p:nvSpPr>
-          <p:cNvPr id="21" name="Shape 19"/>
-          <p:cNvSpPr/>
-          <p:nvPr/>
-        </p:nvSpPr>
-        <p:spPr>
-          <a:xfrm>
-            <a:off x="5943600" y="1563624"/>
+          <p:cNvPr id="22" name="Shape 20"/>
+          <p:cNvSpPr/>
+          <p:nvPr/>
+        </p:nvSpPr>
+        <p:spPr>
+          <a:xfrm>
+            <a:off x="365760" y="1984248"/>
+            <a:ext cx="2468880" cy="402336"/>
+          </a:xfrm>
+          <a:prstGeom prst="rect">
+            <a:avLst/>
+          </a:prstGeom>
+          <a:solidFill>
+            <a:srgbClr val="F1F5F9"/>
+          </a:solidFill>
+          <a:ln w="12700">
+            <a:solidFill>
+              <a:srgbClr val="E2E8F0"/>
+            </a:solidFill>
+            <a:prstDash val="solid"/>
+          </a:ln>
+        </p:spPr>
+      </p:sp>
+      <p:sp>
+        <p:nvSpPr>
+          <p:cNvPr id="23" name="Shape 21"/>
+          <p:cNvSpPr/>
+          <p:nvPr/>
+        </p:nvSpPr>
+        <p:spPr>
+          <a:xfrm>
+            <a:off x="2971800" y="1984248"/>
             <a:ext cx="2834640" cy="402336"/>
           </a:xfrm>
           <a:prstGeom prst="rect">
             <a:avLst/>
           </a:prstGeom>
           <a:solidFill>
-            <a:srgbClr val="FCE7F3"/>
+            <a:srgbClr val="CCFBF1"/>
           </a:solidFill>
           <a:ln w="12700">
             <a:solidFill>
@@ -34531,13 +34621,13 @@
       </p:sp>
       <p:sp>
         <p:nvSpPr>
-          <p:cNvPr id="22" name="Text 20"/>
-          <p:cNvSpPr/>
-          <p:nvPr/>
-        </p:nvSpPr>
-        <p:spPr>
-          <a:xfrm>
-            <a:off x="5943600" y="1563624"/>
+          <p:cNvPr id="24" name="Text 22"/>
+          <p:cNvSpPr/>
+          <p:nvPr/>
+        </p:nvSpPr>
+        <p:spPr>
+          <a:xfrm>
+            <a:off x="2971800" y="1984248"/>
             <a:ext cx="2834640" cy="402336"/>
           </a:xfrm>
           <a:prstGeom prst="rect">
@@ -34556,13 +34646,13 @@
             <a:r>
               <a:rPr lang="en-US" sz="1300" b="1" dirty="0">
                 <a:solidFill>
-                  <a:srgbClr val="9D174D"/>
+                  <a:srgbClr val="0F766E"/>
                 </a:solidFill>
                 <a:latin typeface="Trebuchet MS" pitchFamily="34" charset="0"/>
                 <a:ea typeface="Trebuchet MS" pitchFamily="34" charset="-122"/>
                 <a:cs typeface="Trebuchet MS" pitchFamily="34" charset="-120"/>
               </a:rPr>
-              <a:t>-hood</a:t>
+              <a:t>like</a:t>
             </a:r>
             <a:endParaRPr lang="en-US" sz="1300" dirty="0"/>
           </a:p>
@@ -34570,20 +34660,45 @@
       </p:sp>
       <p:sp>
         <p:nvSpPr>
-          <p:cNvPr id="23" name="Shape 21"/>
-          <p:cNvSpPr/>
-          <p:nvPr/>
-        </p:nvSpPr>
-        <p:spPr>
-          <a:xfrm>
-            <a:off x="365760" y="1984248"/>
+          <p:cNvPr id="25" name="Shape 23"/>
+          <p:cNvSpPr/>
+          <p:nvPr/>
+        </p:nvSpPr>
+        <p:spPr>
+          <a:xfrm>
+            <a:off x="5943600" y="1984248"/>
+            <a:ext cx="2834640" cy="402336"/>
+          </a:xfrm>
+          <a:prstGeom prst="rect">
+            <a:avLst/>
+          </a:prstGeom>
+          <a:solidFill>
+            <a:srgbClr val="F1F5F9"/>
+          </a:solidFill>
+          <a:ln w="12700">
+            <a:solidFill>
+              <a:srgbClr val="E2E8F0"/>
+            </a:solidFill>
+            <a:prstDash val="solid"/>
+          </a:ln>
+        </p:spPr>
+      </p:sp>
+      <p:sp>
+        <p:nvSpPr>
+          <p:cNvPr id="26" name="Shape 24"/>
+          <p:cNvSpPr/>
+          <p:nvPr/>
+        </p:nvSpPr>
+        <p:spPr>
+          <a:xfrm>
+            <a:off x="365760" y="2404872"/>
             <a:ext cx="2468880" cy="402336"/>
           </a:xfrm>
           <a:prstGeom prst="rect">
             <a:avLst/>
           </a:prstGeom>
           <a:solidFill>
-            <a:srgbClr val="DDD6FE"/>
+            <a:srgbClr val="F8FAFC"/>
           </a:solidFill>
           <a:ln w="12700">
             <a:solidFill>
@@ -34595,14 +34710,39 @@
       </p:sp>
       <p:sp>
         <p:nvSpPr>
-          <p:cNvPr id="24" name="Text 22"/>
-          <p:cNvSpPr/>
-          <p:nvPr/>
-        </p:nvSpPr>
-        <p:spPr>
-          <a:xfrm>
-            <a:off x="365760" y="1984248"/>
-            <a:ext cx="2468880" cy="402336"/>
+          <p:cNvPr id="27" name="Shape 25"/>
+          <p:cNvSpPr/>
+          <p:nvPr/>
+        </p:nvSpPr>
+        <p:spPr>
+          <a:xfrm>
+            <a:off x="2971800" y="2404872"/>
+            <a:ext cx="2834640" cy="402336"/>
+          </a:xfrm>
+          <a:prstGeom prst="rect">
+            <a:avLst/>
+          </a:prstGeom>
+          <a:solidFill>
+            <a:srgbClr val="CCFBF1"/>
+          </a:solidFill>
+          <a:ln w="12700">
+            <a:solidFill>
+              <a:srgbClr val="E2E8F0"/>
+            </a:solidFill>
+            <a:prstDash val="solid"/>
+          </a:ln>
+        </p:spPr>
+      </p:sp>
+      <p:sp>
+        <p:nvSpPr>
+          <p:cNvPr id="28" name="Text 26"/>
+          <p:cNvSpPr/>
+          <p:nvPr/>
+        </p:nvSpPr>
+        <p:spPr>
+          <a:xfrm>
+            <a:off x="2971800" y="2404872"/>
+            <a:ext cx="2834640" cy="402336"/>
           </a:xfrm>
           <a:prstGeom prst="rect">
             <a:avLst/>
@@ -34620,13 +34760,13 @@
             <a:r>
               <a:rPr lang="en-US" sz="1300" b="1" dirty="0">
                 <a:solidFill>
-                  <a:srgbClr val="4C1D95"/>
+                  <a:srgbClr val="0F766E"/>
                 </a:solidFill>
                 <a:latin typeface="Trebuchet MS" pitchFamily="34" charset="0"/>
                 <a:ea typeface="Trebuchet MS" pitchFamily="34" charset="-122"/>
                 <a:cs typeface="Trebuchet MS" pitchFamily="34" charset="-120"/>
               </a:rPr>
-              <a:t>mis-</a:t>
+              <a:t>neighbour</a:t>
             </a:r>
             <a:endParaRPr lang="en-US" sz="1300" dirty="0"/>
           </a:p>
@@ -34634,19 +34774,69 @@
       </p:sp>
       <p:sp>
         <p:nvSpPr>
-          <p:cNvPr id="25" name="Shape 23"/>
-          <p:cNvSpPr/>
-          <p:nvPr/>
-        </p:nvSpPr>
-        <p:spPr>
-          <a:xfrm>
-            <a:off x="2971800" y="1984248"/>
+          <p:cNvPr id="29" name="Shape 27"/>
+          <p:cNvSpPr/>
+          <p:nvPr/>
+        </p:nvSpPr>
+        <p:spPr>
+          <a:xfrm>
+            <a:off x="5943600" y="2404872"/>
             <a:ext cx="2834640" cy="402336"/>
           </a:xfrm>
           <a:prstGeom prst="rect">
             <a:avLst/>
           </a:prstGeom>
           <a:solidFill>
+            <a:srgbClr val="F8FAFC"/>
+          </a:solidFill>
+          <a:ln w="12700">
+            <a:solidFill>
+              <a:srgbClr val="E2E8F0"/>
+            </a:solidFill>
+            <a:prstDash val="solid"/>
+          </a:ln>
+        </p:spPr>
+      </p:sp>
+      <p:sp>
+        <p:nvSpPr>
+          <p:cNvPr id="30" name="Shape 28"/>
+          <p:cNvSpPr/>
+          <p:nvPr/>
+        </p:nvSpPr>
+        <p:spPr>
+          <a:xfrm>
+            <a:off x="365760" y="2825496"/>
+            <a:ext cx="2468880" cy="402336"/>
+          </a:xfrm>
+          <a:prstGeom prst="rect">
+            <a:avLst/>
+          </a:prstGeom>
+          <a:solidFill>
+            <a:srgbClr val="F1F5F9"/>
+          </a:solidFill>
+          <a:ln w="12700">
+            <a:solidFill>
+              <a:srgbClr val="E2E8F0"/>
+            </a:solidFill>
+            <a:prstDash val="solid"/>
+          </a:ln>
+        </p:spPr>
+      </p:sp>
+      <p:sp>
+        <p:nvSpPr>
+          <p:cNvPr id="31" name="Shape 29"/>
+          <p:cNvSpPr/>
+          <p:nvPr/>
+        </p:nvSpPr>
+        <p:spPr>
+          <a:xfrm>
+            <a:off x="2971800" y="2825496"/>
+            <a:ext cx="2834640" cy="402336"/>
+          </a:xfrm>
+          <a:prstGeom prst="rect">
+            <a:avLst/>
+          </a:prstGeom>
+          <a:solidFill>
             <a:srgbClr val="CCFBF1"/>
           </a:solidFill>
           <a:ln w="12700">
@@ -34659,13 +34849,13 @@
       </p:sp>
       <p:sp>
         <p:nvSpPr>
-          <p:cNvPr id="26" name="Text 24"/>
-          <p:cNvSpPr/>
-          <p:nvPr/>
-        </p:nvSpPr>
-        <p:spPr>
-          <a:xfrm>
-            <a:off x="2971800" y="1984248"/>
+          <p:cNvPr id="32" name="Text 30"/>
+          <p:cNvSpPr/>
+          <p:nvPr/>
+        </p:nvSpPr>
+        <p:spPr>
+          <a:xfrm>
+            <a:off x="2971800" y="2825496"/>
             <a:ext cx="2834640" cy="402336"/>
           </a:xfrm>
           <a:prstGeom prst="rect">
@@ -34690,7 +34880,7 @@
                 <a:ea typeface="Trebuchet MS" pitchFamily="34" charset="-122"/>
                 <a:cs typeface="Trebuchet MS" pitchFamily="34" charset="-120"/>
               </a:rPr>
-              <a:t>neighbour</a:t>
+              <a:t>brother</a:t>
             </a:r>
             <a:endParaRPr lang="en-US" sz="1300" dirty="0"/>
           </a:p>
@@ -34698,13 +34888,13 @@
       </p:sp>
       <p:sp>
         <p:nvSpPr>
-          <p:cNvPr id="27" name="Shape 25"/>
-          <p:cNvSpPr/>
-          <p:nvPr/>
-        </p:nvSpPr>
-        <p:spPr>
-          <a:xfrm>
-            <a:off x="5943600" y="1984248"/>
+          <p:cNvPr id="33" name="Shape 31"/>
+          <p:cNvSpPr/>
+          <p:nvPr/>
+        </p:nvSpPr>
+        <p:spPr>
+          <a:xfrm>
+            <a:off x="5943600" y="2825496"/>
             <a:ext cx="2834640" cy="402336"/>
           </a:xfrm>
           <a:prstGeom prst="rect">
@@ -34723,20 +34913,20 @@
       </p:sp>
       <p:sp>
         <p:nvSpPr>
-          <p:cNvPr id="28" name="Shape 26"/>
-          <p:cNvSpPr/>
-          <p:nvPr/>
-        </p:nvSpPr>
-        <p:spPr>
-          <a:xfrm>
-            <a:off x="365760" y="2404872"/>
+          <p:cNvPr id="34" name="Shape 32"/>
+          <p:cNvSpPr/>
+          <p:nvPr/>
+        </p:nvSpPr>
+        <p:spPr>
+          <a:xfrm>
+            <a:off x="365760" y="3246120"/>
             <a:ext cx="2468880" cy="402336"/>
           </a:xfrm>
           <a:prstGeom prst="rect">
             <a:avLst/>
           </a:prstGeom>
           <a:solidFill>
-            <a:srgbClr val="DDD6FE"/>
+            <a:srgbClr val="F8FAFC"/>
           </a:solidFill>
           <a:ln w="12700">
             <a:solidFill>
@@ -34748,14 +34938,39 @@
       </p:sp>
       <p:sp>
         <p:nvSpPr>
-          <p:cNvPr id="29" name="Text 27"/>
-          <p:cNvSpPr/>
-          <p:nvPr/>
-        </p:nvSpPr>
-        <p:spPr>
-          <a:xfrm>
-            <a:off x="365760" y="2404872"/>
-            <a:ext cx="2468880" cy="402336"/>
+          <p:cNvPr id="35" name="Shape 33"/>
+          <p:cNvSpPr/>
+          <p:nvPr/>
+        </p:nvSpPr>
+        <p:spPr>
+          <a:xfrm>
+            <a:off x="2971800" y="3246120"/>
+            <a:ext cx="2834640" cy="402336"/>
+          </a:xfrm>
+          <a:prstGeom prst="rect">
+            <a:avLst/>
+          </a:prstGeom>
+          <a:solidFill>
+            <a:srgbClr val="CCFBF1"/>
+          </a:solidFill>
+          <a:ln w="12700">
+            <a:solidFill>
+              <a:srgbClr val="E2E8F0"/>
+            </a:solidFill>
+            <a:prstDash val="solid"/>
+          </a:ln>
+        </p:spPr>
+      </p:sp>
+      <p:sp>
+        <p:nvSpPr>
+          <p:cNvPr id="36" name="Text 34"/>
+          <p:cNvSpPr/>
+          <p:nvPr/>
+        </p:nvSpPr>
+        <p:spPr>
+          <a:xfrm>
+            <a:off x="2971800" y="3246120"/>
+            <a:ext cx="2834640" cy="402336"/>
           </a:xfrm>
           <a:prstGeom prst="rect">
             <a:avLst/>
@@ -34773,13 +34988,13 @@
             <a:r>
               <a:rPr lang="en-US" sz="1300" b="1" dirty="0">
                 <a:solidFill>
-                  <a:srgbClr val="4C1D95"/>
+                  <a:srgbClr val="0F766E"/>
                 </a:solidFill>
                 <a:latin typeface="Trebuchet MS" pitchFamily="34" charset="0"/>
                 <a:ea typeface="Trebuchet MS" pitchFamily="34" charset="-122"/>
                 <a:cs typeface="Trebuchet MS" pitchFamily="34" charset="-120"/>
               </a:rPr>
-              <a:t>over-</a:t>
+              <a:t>false</a:t>
             </a:r>
             <a:endParaRPr lang="en-US" sz="1300" dirty="0"/>
           </a:p>
@@ -34787,19 +35002,69 @@
       </p:sp>
       <p:sp>
         <p:nvSpPr>
-          <p:cNvPr id="30" name="Shape 28"/>
-          <p:cNvSpPr/>
-          <p:nvPr/>
-        </p:nvSpPr>
-        <p:spPr>
-          <a:xfrm>
-            <a:off x="2971800" y="2404872"/>
+          <p:cNvPr id="37" name="Shape 35"/>
+          <p:cNvSpPr/>
+          <p:nvPr/>
+        </p:nvSpPr>
+        <p:spPr>
+          <a:xfrm>
+            <a:off x="5943600" y="3246120"/>
             <a:ext cx="2834640" cy="402336"/>
           </a:xfrm>
           <a:prstGeom prst="rect">
             <a:avLst/>
           </a:prstGeom>
           <a:solidFill>
+            <a:srgbClr val="F8FAFC"/>
+          </a:solidFill>
+          <a:ln w="12700">
+            <a:solidFill>
+              <a:srgbClr val="E2E8F0"/>
+            </a:solidFill>
+            <a:prstDash val="solid"/>
+          </a:ln>
+        </p:spPr>
+      </p:sp>
+      <p:sp>
+        <p:nvSpPr>
+          <p:cNvPr id="38" name="Shape 36"/>
+          <p:cNvSpPr/>
+          <p:nvPr/>
+        </p:nvSpPr>
+        <p:spPr>
+          <a:xfrm>
+            <a:off x="365760" y="3666744"/>
+            <a:ext cx="2468880" cy="402336"/>
+          </a:xfrm>
+          <a:prstGeom prst="rect">
+            <a:avLst/>
+          </a:prstGeom>
+          <a:solidFill>
+            <a:srgbClr val="F1F5F9"/>
+          </a:solidFill>
+          <a:ln w="12700">
+            <a:solidFill>
+              <a:srgbClr val="E2E8F0"/>
+            </a:solidFill>
+            <a:prstDash val="solid"/>
+          </a:ln>
+        </p:spPr>
+      </p:sp>
+      <p:sp>
+        <p:nvSpPr>
+          <p:cNvPr id="39" name="Shape 37"/>
+          <p:cNvSpPr/>
+          <p:nvPr/>
+        </p:nvSpPr>
+        <p:spPr>
+          <a:xfrm>
+            <a:off x="2971800" y="3666744"/>
+            <a:ext cx="2834640" cy="402336"/>
+          </a:xfrm>
+          <a:prstGeom prst="rect">
+            <a:avLst/>
+          </a:prstGeom>
+          <a:solidFill>
             <a:srgbClr val="CCFBF1"/>
           </a:solidFill>
           <a:ln w="12700">
@@ -34812,13 +35077,13 @@
       </p:sp>
       <p:sp>
         <p:nvSpPr>
-          <p:cNvPr id="31" name="Text 29"/>
-          <p:cNvSpPr/>
-          <p:nvPr/>
-        </p:nvSpPr>
-        <p:spPr>
-          <a:xfrm>
-            <a:off x="2971800" y="2404872"/>
+          <p:cNvPr id="40" name="Text 38"/>
+          <p:cNvSpPr/>
+          <p:nvPr/>
+        </p:nvSpPr>
+        <p:spPr>
+          <a:xfrm>
+            <a:off x="2971800" y="3666744"/>
             <a:ext cx="2834640" cy="402336"/>
           </a:xfrm>
           <a:prstGeom prst="rect">
@@ -34843,7 +35108,7 @@
                 <a:ea typeface="Trebuchet MS" pitchFamily="34" charset="-122"/>
                 <a:cs typeface="Trebuchet MS" pitchFamily="34" charset="-120"/>
               </a:rPr>
-              <a:t>brother</a:t>
+              <a:t>adult</a:t>
             </a:r>
             <a:endParaRPr lang="en-US" sz="1300" dirty="0"/>
           </a:p>
@@ -34851,20 +35116,20 @@
       </p:sp>
       <p:sp>
         <p:nvSpPr>
-          <p:cNvPr id="32" name="Shape 30"/>
-          <p:cNvSpPr/>
-          <p:nvPr/>
-        </p:nvSpPr>
-        <p:spPr>
-          <a:xfrm>
-            <a:off x="5943600" y="2404872"/>
+          <p:cNvPr id="41" name="Shape 39"/>
+          <p:cNvSpPr/>
+          <p:nvPr/>
+        </p:nvSpPr>
+        <p:spPr>
+          <a:xfrm>
+            <a:off x="5943600" y="3666744"/>
             <a:ext cx="2834640" cy="402336"/>
           </a:xfrm>
           <a:prstGeom prst="rect">
             <a:avLst/>
           </a:prstGeom>
           <a:solidFill>
-            <a:srgbClr val="F8FAFC"/>
+            <a:srgbClr val="F1F5F9"/>
           </a:solidFill>
           <a:ln w="12700">
             <a:solidFill>
@@ -34876,39 +35141,14 @@
       </p:sp>
       <p:sp>
         <p:nvSpPr>
-          <p:cNvPr id="33" name="Shape 31"/>
-          <p:cNvSpPr/>
-          <p:nvPr/>
-        </p:nvSpPr>
-        <p:spPr>
-          <a:xfrm>
-            <a:off x="365760" y="2825496"/>
-            <a:ext cx="2468880" cy="402336"/>
-          </a:xfrm>
-          <a:prstGeom prst="rect">
-            <a:avLst/>
-          </a:prstGeom>
-          <a:solidFill>
-            <a:srgbClr val="DDD6FE"/>
-          </a:solidFill>
-          <a:ln w="12700">
-            <a:solidFill>
-              <a:srgbClr val="E2E8F0"/>
-            </a:solidFill>
-            <a:prstDash val="solid"/>
-          </a:ln>
-        </p:spPr>
-      </p:sp>
-      <p:sp>
-        <p:nvSpPr>
-          <p:cNvPr id="34" name="Text 32"/>
-          <p:cNvSpPr/>
-          <p:nvPr/>
-        </p:nvSpPr>
-        <p:spPr>
-          <a:xfrm>
-            <a:off x="365760" y="2825496"/>
-            <a:ext cx="2468880" cy="402336"/>
+          <p:cNvPr id="42" name="Text 40"/>
+          <p:cNvSpPr/>
+          <p:nvPr/>
+        </p:nvSpPr>
+        <p:spPr>
+          <a:xfrm>
+            <a:off x="365760" y="3611880"/>
+            <a:ext cx="1828800" cy="347472"/>
           </a:xfrm>
           <a:prstGeom prst="rect">
             <a:avLst/>
@@ -34920,59 +35160,61 @@
           <a:bodyPr wrap="square" lIns="0" tIns="0" rIns="0" bIns="0" rtlCol="0" anchor="ctr"/>
           <a:lstStyle/>
           <a:p>
-            <a:pPr algn="ctr" indent="0" marL="0">
-              <a:buNone/>
-            </a:pPr>
-            <a:r>
-              <a:rPr lang="en-US" sz="1300" b="1" dirty="0">
-                <a:solidFill>
-                  <a:srgbClr val="4C1D95"/>
+            <a:pPr algn="l" indent="0" marL="0">
+              <a:buNone/>
+            </a:pPr>
+            <a:r>
+              <a:rPr lang="en-US" sz="1200" b="1" dirty="0">
+                <a:solidFill>
+                  <a:srgbClr val="0F172A"/>
                 </a:solidFill>
                 <a:latin typeface="Trebuchet MS" pitchFamily="34" charset="0"/>
                 <a:ea typeface="Trebuchet MS" pitchFamily="34" charset="-122"/>
                 <a:cs typeface="Trebuchet MS" pitchFamily="34" charset="-120"/>
               </a:rPr>
-              <a:t>under-</a:t>
-            </a:r>
-            <a:endParaRPr lang="en-US" sz="1300" dirty="0"/>
-          </a:p>
-        </p:txBody>
-      </p:sp>
-      <p:sp>
-        <p:nvSpPr>
-          <p:cNvPr id="35" name="Shape 33"/>
-          <p:cNvSpPr/>
-          <p:nvPr/>
-        </p:nvSpPr>
-        <p:spPr>
-          <a:xfrm>
-            <a:off x="2971800" y="2825496"/>
-            <a:ext cx="2834640" cy="402336"/>
-          </a:xfrm>
-          <a:prstGeom prst="rect">
-            <a:avLst/>
-          </a:prstGeom>
-          <a:solidFill>
-            <a:srgbClr val="CCFBF1"/>
-          </a:solidFill>
-          <a:ln w="12700">
-            <a:solidFill>
-              <a:srgbClr val="E2E8F0"/>
-            </a:solidFill>
-            <a:prstDash val="solid"/>
-          </a:ln>
-        </p:spPr>
-      </p:sp>
-      <p:sp>
-        <p:nvSpPr>
-          <p:cNvPr id="36" name="Text 34"/>
-          <p:cNvSpPr/>
-          <p:nvPr/>
-        </p:nvSpPr>
-        <p:spPr>
-          <a:xfrm>
-            <a:off x="2971800" y="2825496"/>
-            <a:ext cx="2834640" cy="402336"/>
+              <a:t>Sample words:</a:t>
+            </a:r>
+            <a:endParaRPr lang="en-US" sz="1200" dirty="0"/>
+          </a:p>
+        </p:txBody>
+      </p:sp>
+      <p:sp>
+        <p:nvSpPr>
+          <p:cNvPr id="43" name="Shape 41"/>
+          <p:cNvSpPr/>
+          <p:nvPr/>
+        </p:nvSpPr>
+        <p:spPr>
+          <a:xfrm>
+            <a:off x="365760" y="4023360"/>
+            <a:ext cx="2011680" cy="402336"/>
+          </a:xfrm>
+          <a:prstGeom prst="rect">
+            <a:avLst>
+              <a:gd name="adj" fmla="val 13636"/>
+            </a:avLst>
+          </a:prstGeom>
+          <a:solidFill>
+            <a:srgbClr val="EEF2FF"/>
+          </a:solidFill>
+          <a:ln w="12700">
+            <a:solidFill>
+              <a:srgbClr val="6366F1"/>
+            </a:solidFill>
+            <a:prstDash val="solid"/>
+          </a:ln>
+        </p:spPr>
+      </p:sp>
+      <p:sp>
+        <p:nvSpPr>
+          <p:cNvPr id="44" name="Text 42"/>
+          <p:cNvSpPr/>
+          <p:nvPr/>
+        </p:nvSpPr>
+        <p:spPr>
+          <a:xfrm>
+            <a:off x="365760" y="4023360"/>
+            <a:ext cx="2011680" cy="402336"/>
           </a:xfrm>
           <a:prstGeom prst="rect">
             <a:avLst/>
@@ -34988,80 +35230,57 @@
               <a:buNone/>
             </a:pPr>
             <a:r>
-              <a:rPr lang="en-US" sz="1300" b="1" dirty="0">
-                <a:solidFill>
-                  <a:srgbClr val="0F766E"/>
+              <a:rPr lang="en-US" sz="1200" b="1" dirty="0">
+                <a:solidFill>
+                  <a:srgbClr val="4338CA"/>
                 </a:solidFill>
                 <a:latin typeface="Trebuchet MS" pitchFamily="34" charset="0"/>
                 <a:ea typeface="Trebuchet MS" pitchFamily="34" charset="-122"/>
                 <a:cs typeface="Trebuchet MS" pitchFamily="34" charset="-120"/>
               </a:rPr>
-              <a:t>mother</a:t>
-            </a:r>
-            <a:endParaRPr lang="en-US" sz="1300" dirty="0"/>
-          </a:p>
-        </p:txBody>
-      </p:sp>
-      <p:sp>
-        <p:nvSpPr>
-          <p:cNvPr id="37" name="Shape 35"/>
-          <p:cNvSpPr/>
-          <p:nvPr/>
-        </p:nvSpPr>
-        <p:spPr>
-          <a:xfrm>
-            <a:off x="5943600" y="2825496"/>
-            <a:ext cx="2834640" cy="402336"/>
-          </a:xfrm>
-          <a:prstGeom prst="rect">
-            <a:avLst/>
-          </a:prstGeom>
-          <a:solidFill>
-            <a:srgbClr val="F1F5F9"/>
-          </a:solidFill>
-          <a:ln w="12700">
-            <a:solidFill>
-              <a:srgbClr val="E2E8F0"/>
-            </a:solidFill>
-            <a:prstDash val="solid"/>
-          </a:ln>
-        </p:spPr>
-      </p:sp>
-      <p:sp>
-        <p:nvSpPr>
-          <p:cNvPr id="38" name="Shape 36"/>
-          <p:cNvSpPr/>
-          <p:nvPr/>
-        </p:nvSpPr>
-        <p:spPr>
-          <a:xfrm>
-            <a:off x="365760" y="3246120"/>
-            <a:ext cx="2468880" cy="402336"/>
-          </a:xfrm>
-          <a:prstGeom prst="rect">
-            <a:avLst/>
-          </a:prstGeom>
-          <a:solidFill>
-            <a:srgbClr val="DDD6FE"/>
-          </a:solidFill>
-          <a:ln w="12700">
-            <a:solidFill>
-              <a:srgbClr val="E2E8F0"/>
-            </a:solidFill>
-            <a:prstDash val="solid"/>
-          </a:ln>
-        </p:spPr>
-      </p:sp>
-      <p:sp>
-        <p:nvSpPr>
-          <p:cNvPr id="39" name="Text 37"/>
-          <p:cNvSpPr/>
-          <p:nvPr/>
-        </p:nvSpPr>
-        <p:spPr>
-          <a:xfrm>
-            <a:off x="365760" y="3246120"/>
-            <a:ext cx="2468880" cy="402336"/>
+              <a:t>childhood</a:t>
+            </a:r>
+            <a:endParaRPr lang="en-US" sz="1200" dirty="0"/>
+          </a:p>
+        </p:txBody>
+      </p:sp>
+      <p:sp>
+        <p:nvSpPr>
+          <p:cNvPr id="45" name="Shape 43"/>
+          <p:cNvSpPr/>
+          <p:nvPr/>
+        </p:nvSpPr>
+        <p:spPr>
+          <a:xfrm>
+            <a:off x="2542032" y="4023360"/>
+            <a:ext cx="2011680" cy="402336"/>
+          </a:xfrm>
+          <a:prstGeom prst="rect">
+            <a:avLst>
+              <a:gd name="adj" fmla="val 13636"/>
+            </a:avLst>
+          </a:prstGeom>
+          <a:solidFill>
+            <a:srgbClr val="EEF2FF"/>
+          </a:solidFill>
+          <a:ln w="12700">
+            <a:solidFill>
+              <a:srgbClr val="6366F1"/>
+            </a:solidFill>
+            <a:prstDash val="solid"/>
+          </a:ln>
+        </p:spPr>
+      </p:sp>
+      <p:sp>
+        <p:nvSpPr>
+          <p:cNvPr id="46" name="Text 44"/>
+          <p:cNvSpPr/>
+          <p:nvPr/>
+        </p:nvSpPr>
+        <p:spPr>
+          <a:xfrm>
+            <a:off x="2542032" y="4023360"/>
+            <a:ext cx="2011680" cy="402336"/>
           </a:xfrm>
           <a:prstGeom prst="rect">
             <a:avLst/>
@@ -35077,143 +35296,15 @@
               <a:buNone/>
             </a:pPr>
             <a:r>
-              <a:rPr lang="en-US" sz="1300" b="1" dirty="0">
-                <a:solidFill>
-                  <a:srgbClr val="4C1D95"/>
+              <a:rPr lang="en-US" sz="1200" b="1" dirty="0">
+                <a:solidFill>
+                  <a:srgbClr val="4338CA"/>
                 </a:solidFill>
                 <a:latin typeface="Trebuchet MS" pitchFamily="34" charset="0"/>
                 <a:ea typeface="Trebuchet MS" pitchFamily="34" charset="-122"/>
                 <a:cs typeface="Trebuchet MS" pitchFamily="34" charset="-120"/>
               </a:rPr>
-              <a:t>re-</a:t>
-            </a:r>
-            <a:endParaRPr lang="en-US" sz="1300" dirty="0"/>
-          </a:p>
-        </p:txBody>
-      </p:sp>
-      <p:sp>
-        <p:nvSpPr>
-          <p:cNvPr id="40" name="Shape 38"/>
-          <p:cNvSpPr/>
-          <p:nvPr/>
-        </p:nvSpPr>
-        <p:spPr>
-          <a:xfrm>
-            <a:off x="2971800" y="3246120"/>
-            <a:ext cx="2834640" cy="402336"/>
-          </a:xfrm>
-          <a:prstGeom prst="rect">
-            <a:avLst/>
-          </a:prstGeom>
-          <a:solidFill>
-            <a:srgbClr val="CCFBF1"/>
-          </a:solidFill>
-          <a:ln w="12700">
-            <a:solidFill>
-              <a:srgbClr val="E2E8F0"/>
-            </a:solidFill>
-            <a:prstDash val="solid"/>
-          </a:ln>
-        </p:spPr>
-      </p:sp>
-      <p:sp>
-        <p:nvSpPr>
-          <p:cNvPr id="41" name="Text 39"/>
-          <p:cNvSpPr/>
-          <p:nvPr/>
-        </p:nvSpPr>
-        <p:spPr>
-          <a:xfrm>
-            <a:off x="2971800" y="3246120"/>
-            <a:ext cx="2834640" cy="402336"/>
-          </a:xfrm>
-          <a:prstGeom prst="rect">
-            <a:avLst/>
-          </a:prstGeom>
-          <a:noFill/>
-          <a:ln/>
-        </p:spPr>
-        <p:txBody>
-          <a:bodyPr wrap="square" lIns="0" tIns="0" rIns="0" bIns="0" rtlCol="0" anchor="ctr"/>
-          <a:lstStyle/>
-          <a:p>
-            <a:pPr algn="ctr" indent="0" marL="0">
-              <a:buNone/>
-            </a:pPr>
-            <a:r>
-              <a:rPr lang="en-US" sz="1300" b="1" dirty="0">
-                <a:solidFill>
-                  <a:srgbClr val="0F766E"/>
-                </a:solidFill>
-                <a:latin typeface="Trebuchet MS" pitchFamily="34" charset="0"/>
-                <a:ea typeface="Trebuchet MS" pitchFamily="34" charset="-122"/>
-                <a:cs typeface="Trebuchet MS" pitchFamily="34" charset="-120"/>
-              </a:rPr>
-              <a:t>knight</a:t>
-            </a:r>
-            <a:endParaRPr lang="en-US" sz="1300" dirty="0"/>
-          </a:p>
-        </p:txBody>
-      </p:sp>
-      <p:sp>
-        <p:nvSpPr>
-          <p:cNvPr id="42" name="Shape 40"/>
-          <p:cNvSpPr/>
-          <p:nvPr/>
-        </p:nvSpPr>
-        <p:spPr>
-          <a:xfrm>
-            <a:off x="5943600" y="3246120"/>
-            <a:ext cx="2834640" cy="402336"/>
-          </a:xfrm>
-          <a:prstGeom prst="rect">
-            <a:avLst/>
-          </a:prstGeom>
-          <a:solidFill>
-            <a:srgbClr val="F8FAFC"/>
-          </a:solidFill>
-          <a:ln w="12700">
-            <a:solidFill>
-              <a:srgbClr val="E2E8F0"/>
-            </a:solidFill>
-            <a:prstDash val="solid"/>
-          </a:ln>
-        </p:spPr>
-      </p:sp>
-      <p:sp>
-        <p:nvSpPr>
-          <p:cNvPr id="43" name="Text 41"/>
-          <p:cNvSpPr/>
-          <p:nvPr/>
-        </p:nvSpPr>
-        <p:spPr>
-          <a:xfrm>
-            <a:off x="365760" y="3611880"/>
-            <a:ext cx="1828800" cy="347472"/>
-          </a:xfrm>
-          <a:prstGeom prst="rect">
-            <a:avLst/>
-          </a:prstGeom>
-          <a:noFill/>
-          <a:ln/>
-        </p:spPr>
-        <p:txBody>
-          <a:bodyPr wrap="square" lIns="0" tIns="0" rIns="0" bIns="0" rtlCol="0" anchor="ctr"/>
-          <a:lstStyle/>
-          <a:p>
-            <a:pPr algn="l" indent="0" marL="0">
-              <a:buNone/>
-            </a:pPr>
-            <a:r>
-              <a:rPr lang="en-US" sz="1200" b="1" dirty="0">
-                <a:solidFill>
-                  <a:srgbClr val="0F172A"/>
-                </a:solidFill>
-                <a:latin typeface="Trebuchet MS" pitchFamily="34" charset="0"/>
-                <a:ea typeface="Trebuchet MS" pitchFamily="34" charset="-122"/>
-                <a:cs typeface="Trebuchet MS" pitchFamily="34" charset="-120"/>
-              </a:rPr>
-              <a:t>Sample words:</a:t>
+              <a:t>likelihood</a:t>
             </a:r>
             <a:endParaRPr lang="en-US" sz="1200" dirty="0"/>
           </a:p>
@@ -35221,13 +35312,13 @@
       </p:sp>
       <p:sp>
         <p:nvSpPr>
-          <p:cNvPr id="44" name="Shape 42"/>
-          <p:cNvSpPr/>
-          <p:nvPr/>
-        </p:nvSpPr>
-        <p:spPr>
-          <a:xfrm>
-            <a:off x="365760" y="4023360"/>
+          <p:cNvPr id="47" name="Shape 45"/>
+          <p:cNvSpPr/>
+          <p:nvPr/>
+        </p:nvSpPr>
+        <p:spPr>
+          <a:xfrm>
+            <a:off x="4718304" y="4023360"/>
             <a:ext cx="2011680" cy="402336"/>
           </a:xfrm>
           <a:prstGeom prst="rect">
@@ -35248,475 +35339,13 @@
       </p:sp>
       <p:sp>
         <p:nvSpPr>
-          <p:cNvPr id="45" name="Text 43"/>
-          <p:cNvSpPr/>
-          <p:nvPr/>
-        </p:nvSpPr>
-        <p:spPr>
-          <a:xfrm>
-            <a:off x="365760" y="4023360"/>
-            <a:ext cx="2011680" cy="402336"/>
-          </a:xfrm>
-          <a:prstGeom prst="rect">
-            <a:avLst/>
-          </a:prstGeom>
-          <a:noFill/>
-          <a:ln/>
-        </p:spPr>
-        <p:txBody>
-          <a:bodyPr wrap="square" lIns="0" tIns="0" rIns="0" bIns="0" rtlCol="0" anchor="ctr"/>
-          <a:lstStyle/>
-          <a:p>
-            <a:pPr algn="ctr" indent="0" marL="0">
-              <a:buNone/>
-            </a:pPr>
-            <a:r>
-              <a:rPr lang="en-US" sz="1200" b="1" dirty="0">
-                <a:solidFill>
-                  <a:srgbClr val="4338CA"/>
-                </a:solidFill>
-                <a:latin typeface="Trebuchet MS" pitchFamily="34" charset="0"/>
-                <a:ea typeface="Trebuchet MS" pitchFamily="34" charset="-122"/>
-                <a:cs typeface="Trebuchet MS" pitchFamily="34" charset="-120"/>
-              </a:rPr>
-              <a:t>childhood</a:t>
-            </a:r>
-            <a:endParaRPr lang="en-US" sz="1200" dirty="0"/>
-          </a:p>
-        </p:txBody>
-      </p:sp>
-      <p:sp>
-        <p:nvSpPr>
-          <p:cNvPr id="46" name="Shape 44"/>
-          <p:cNvSpPr/>
-          <p:nvPr/>
-        </p:nvSpPr>
-        <p:spPr>
-          <a:xfrm>
-            <a:off x="2542032" y="4023360"/>
-            <a:ext cx="2011680" cy="402336"/>
-          </a:xfrm>
-          <a:prstGeom prst="rect">
-            <a:avLst>
-              <a:gd name="adj" fmla="val 13636"/>
-            </a:avLst>
-          </a:prstGeom>
-          <a:solidFill>
-            <a:srgbClr val="EEF2FF"/>
-          </a:solidFill>
-          <a:ln w="12700">
-            <a:solidFill>
-              <a:srgbClr val="6366F1"/>
-            </a:solidFill>
-            <a:prstDash val="solid"/>
-          </a:ln>
-        </p:spPr>
-      </p:sp>
-      <p:sp>
-        <p:nvSpPr>
-          <p:cNvPr id="47" name="Text 45"/>
-          <p:cNvSpPr/>
-          <p:nvPr/>
-        </p:nvSpPr>
-        <p:spPr>
-          <a:xfrm>
-            <a:off x="2542032" y="4023360"/>
-            <a:ext cx="2011680" cy="402336"/>
-          </a:xfrm>
-          <a:prstGeom prst="rect">
-            <a:avLst/>
-          </a:prstGeom>
-          <a:noFill/>
-          <a:ln/>
-        </p:spPr>
-        <p:txBody>
-          <a:bodyPr wrap="square" lIns="0" tIns="0" rIns="0" bIns="0" rtlCol="0" anchor="ctr"/>
-          <a:lstStyle/>
-          <a:p>
-            <a:pPr algn="ctr" indent="0" marL="0">
-              <a:buNone/>
-            </a:pPr>
-            <a:r>
-              <a:rPr lang="en-US" sz="1200" b="1" dirty="0">
-                <a:solidFill>
-                  <a:srgbClr val="4338CA"/>
-                </a:solidFill>
-                <a:latin typeface="Trebuchet MS" pitchFamily="34" charset="0"/>
-                <a:ea typeface="Trebuchet MS" pitchFamily="34" charset="-122"/>
-                <a:cs typeface="Trebuchet MS" pitchFamily="34" charset="-120"/>
-              </a:rPr>
-              <a:t>neighbourhood</a:t>
-            </a:r>
-            <a:endParaRPr lang="en-US" sz="1200" dirty="0"/>
-          </a:p>
-        </p:txBody>
-      </p:sp>
-      <p:sp>
-        <p:nvSpPr>
-          <p:cNvPr id="48" name="Shape 46"/>
+          <p:cNvPr id="48" name="Text 46"/>
           <p:cNvSpPr/>
           <p:nvPr/>
         </p:nvSpPr>
         <p:spPr>
           <a:xfrm>
             <a:off x="4718304" y="4023360"/>
-            <a:ext cx="2011680" cy="402336"/>
-          </a:xfrm>
-          <a:prstGeom prst="rect">
-            <a:avLst>
-              <a:gd name="adj" fmla="val 13636"/>
-            </a:avLst>
-          </a:prstGeom>
-          <a:solidFill>
-            <a:srgbClr val="EEF2FF"/>
-          </a:solidFill>
-          <a:ln w="12700">
-            <a:solidFill>
-              <a:srgbClr val="6366F1"/>
-            </a:solidFill>
-            <a:prstDash val="solid"/>
-          </a:ln>
-        </p:spPr>
-      </p:sp>
-      <p:sp>
-        <p:nvSpPr>
-          <p:cNvPr id="49" name="Text 47"/>
-          <p:cNvSpPr/>
-          <p:nvPr/>
-        </p:nvSpPr>
-        <p:spPr>
-          <a:xfrm>
-            <a:off x="4718304" y="4023360"/>
-            <a:ext cx="2011680" cy="402336"/>
-          </a:xfrm>
-          <a:prstGeom prst="rect">
-            <a:avLst/>
-          </a:prstGeom>
-          <a:noFill/>
-          <a:ln/>
-        </p:spPr>
-        <p:txBody>
-          <a:bodyPr wrap="square" lIns="0" tIns="0" rIns="0" bIns="0" rtlCol="0" anchor="ctr"/>
-          <a:lstStyle/>
-          <a:p>
-            <a:pPr algn="ctr" indent="0" marL="0">
-              <a:buNone/>
-            </a:pPr>
-            <a:r>
-              <a:rPr lang="en-US" sz="1200" b="1" dirty="0">
-                <a:solidFill>
-                  <a:srgbClr val="4338CA"/>
-                </a:solidFill>
-                <a:latin typeface="Trebuchet MS" pitchFamily="34" charset="0"/>
-                <a:ea typeface="Trebuchet MS" pitchFamily="34" charset="-122"/>
-                <a:cs typeface="Trebuchet MS" pitchFamily="34" charset="-120"/>
-              </a:rPr>
-              <a:t>brotherhood</a:t>
-            </a:r>
-            <a:endParaRPr lang="en-US" sz="1200" dirty="0"/>
-          </a:p>
-        </p:txBody>
-      </p:sp>
-      <p:sp>
-        <p:nvSpPr>
-          <p:cNvPr id="50" name="Shape 48"/>
-          <p:cNvSpPr/>
-          <p:nvPr/>
-        </p:nvSpPr>
-        <p:spPr>
-          <a:xfrm>
-            <a:off x="6894576" y="4023360"/>
-            <a:ext cx="2011680" cy="402336"/>
-          </a:xfrm>
-          <a:prstGeom prst="rect">
-            <a:avLst>
-              <a:gd name="adj" fmla="val 13636"/>
-            </a:avLst>
-          </a:prstGeom>
-          <a:solidFill>
-            <a:srgbClr val="EEF2FF"/>
-          </a:solidFill>
-          <a:ln w="12700">
-            <a:solidFill>
-              <a:srgbClr val="6366F1"/>
-            </a:solidFill>
-            <a:prstDash val="solid"/>
-          </a:ln>
-        </p:spPr>
-      </p:sp>
-      <p:sp>
-        <p:nvSpPr>
-          <p:cNvPr id="51" name="Text 49"/>
-          <p:cNvSpPr/>
-          <p:nvPr/>
-        </p:nvSpPr>
-        <p:spPr>
-          <a:xfrm>
-            <a:off x="6894576" y="4023360"/>
-            <a:ext cx="2011680" cy="402336"/>
-          </a:xfrm>
-          <a:prstGeom prst="rect">
-            <a:avLst/>
-          </a:prstGeom>
-          <a:noFill/>
-          <a:ln/>
-        </p:spPr>
-        <p:txBody>
-          <a:bodyPr wrap="square" lIns="0" tIns="0" rIns="0" bIns="0" rtlCol="0" anchor="ctr"/>
-          <a:lstStyle/>
-          <a:p>
-            <a:pPr algn="ctr" indent="0" marL="0">
-              <a:buNone/>
-            </a:pPr>
-            <a:r>
-              <a:rPr lang="en-US" sz="1200" b="1" dirty="0">
-                <a:solidFill>
-                  <a:srgbClr val="4338CA"/>
-                </a:solidFill>
-                <a:latin typeface="Trebuchet MS" pitchFamily="34" charset="0"/>
-                <a:ea typeface="Trebuchet MS" pitchFamily="34" charset="-122"/>
-                <a:cs typeface="Trebuchet MS" pitchFamily="34" charset="-120"/>
-              </a:rPr>
-              <a:t>motherhood</a:t>
-            </a:r>
-            <a:endParaRPr lang="en-US" sz="1200" dirty="0"/>
-          </a:p>
-        </p:txBody>
-      </p:sp>
-      <p:sp>
-        <p:nvSpPr>
-          <p:cNvPr id="52" name="Shape 50"/>
-          <p:cNvSpPr/>
-          <p:nvPr/>
-        </p:nvSpPr>
-        <p:spPr>
-          <a:xfrm>
-            <a:off x="365760" y="4498848"/>
-            <a:ext cx="2011680" cy="402336"/>
-          </a:xfrm>
-          <a:prstGeom prst="rect">
-            <a:avLst>
-              <a:gd name="adj" fmla="val 13636"/>
-            </a:avLst>
-          </a:prstGeom>
-          <a:solidFill>
-            <a:srgbClr val="EEF2FF"/>
-          </a:solidFill>
-          <a:ln w="12700">
-            <a:solidFill>
-              <a:srgbClr val="6366F1"/>
-            </a:solidFill>
-            <a:prstDash val="solid"/>
-          </a:ln>
-        </p:spPr>
-      </p:sp>
-      <p:sp>
-        <p:nvSpPr>
-          <p:cNvPr id="53" name="Text 51"/>
-          <p:cNvSpPr/>
-          <p:nvPr/>
-        </p:nvSpPr>
-        <p:spPr>
-          <a:xfrm>
-            <a:off x="365760" y="4498848"/>
-            <a:ext cx="2011680" cy="402336"/>
-          </a:xfrm>
-          <a:prstGeom prst="rect">
-            <a:avLst/>
-          </a:prstGeom>
-          <a:noFill/>
-          <a:ln/>
-        </p:spPr>
-        <p:txBody>
-          <a:bodyPr wrap="square" lIns="0" tIns="0" rIns="0" bIns="0" rtlCol="0" anchor="ctr"/>
-          <a:lstStyle/>
-          <a:p>
-            <a:pPr algn="ctr" indent="0" marL="0">
-              <a:buNone/>
-            </a:pPr>
-            <a:r>
-              <a:rPr lang="en-US" sz="1200" b="1" dirty="0">
-                <a:solidFill>
-                  <a:srgbClr val="4338CA"/>
-                </a:solidFill>
-                <a:latin typeface="Trebuchet MS" pitchFamily="34" charset="0"/>
-                <a:ea typeface="Trebuchet MS" pitchFamily="34" charset="-122"/>
-                <a:cs typeface="Trebuchet MS" pitchFamily="34" charset="-120"/>
-              </a:rPr>
-              <a:t>knighthood</a:t>
-            </a:r>
-            <a:endParaRPr lang="en-US" sz="1200" dirty="0"/>
-          </a:p>
-        </p:txBody>
-      </p:sp>
-      <p:sp>
-        <p:nvSpPr>
-          <p:cNvPr id="54" name="Shape 52"/>
-          <p:cNvSpPr/>
-          <p:nvPr/>
-        </p:nvSpPr>
-        <p:spPr>
-          <a:xfrm>
-            <a:off x="2542032" y="4498848"/>
-            <a:ext cx="2011680" cy="402336"/>
-          </a:xfrm>
-          <a:prstGeom prst="rect">
-            <a:avLst>
-              <a:gd name="adj" fmla="val 13636"/>
-            </a:avLst>
-          </a:prstGeom>
-          <a:solidFill>
-            <a:srgbClr val="EEF2FF"/>
-          </a:solidFill>
-          <a:ln w="12700">
-            <a:solidFill>
-              <a:srgbClr val="6366F1"/>
-            </a:solidFill>
-            <a:prstDash val="solid"/>
-          </a:ln>
-        </p:spPr>
-      </p:sp>
-      <p:sp>
-        <p:nvSpPr>
-          <p:cNvPr id="55" name="Text 53"/>
-          <p:cNvSpPr/>
-          <p:nvPr/>
-        </p:nvSpPr>
-        <p:spPr>
-          <a:xfrm>
-            <a:off x="2542032" y="4498848"/>
-            <a:ext cx="2011680" cy="402336"/>
-          </a:xfrm>
-          <a:prstGeom prst="rect">
-            <a:avLst/>
-          </a:prstGeom>
-          <a:noFill/>
-          <a:ln/>
-        </p:spPr>
-        <p:txBody>
-          <a:bodyPr wrap="square" lIns="0" tIns="0" rIns="0" bIns="0" rtlCol="0" anchor="ctr"/>
-          <a:lstStyle/>
-          <a:p>
-            <a:pPr algn="ctr" indent="0" marL="0">
-              <a:buNone/>
-            </a:pPr>
-            <a:r>
-              <a:rPr lang="en-US" sz="1200" b="1" dirty="0">
-                <a:solidFill>
-                  <a:srgbClr val="4338CA"/>
-                </a:solidFill>
-                <a:latin typeface="Trebuchet MS" pitchFamily="34" charset="0"/>
-                <a:ea typeface="Trebuchet MS" pitchFamily="34" charset="-122"/>
-                <a:cs typeface="Trebuchet MS" pitchFamily="34" charset="-120"/>
-              </a:rPr>
-              <a:t>likelihood</a:t>
-            </a:r>
-            <a:endParaRPr lang="en-US" sz="1200" dirty="0"/>
-          </a:p>
-        </p:txBody>
-      </p:sp>
-      <p:sp>
-        <p:nvSpPr>
-          <p:cNvPr id="56" name="Shape 54"/>
-          <p:cNvSpPr/>
-          <p:nvPr/>
-        </p:nvSpPr>
-        <p:spPr>
-          <a:xfrm>
-            <a:off x="4718304" y="4498848"/>
-            <a:ext cx="2011680" cy="402336"/>
-          </a:xfrm>
-          <a:prstGeom prst="rect">
-            <a:avLst>
-              <a:gd name="adj" fmla="val 13636"/>
-            </a:avLst>
-          </a:prstGeom>
-          <a:solidFill>
-            <a:srgbClr val="EEF2FF"/>
-          </a:solidFill>
-          <a:ln w="12700">
-            <a:solidFill>
-              <a:srgbClr val="6366F1"/>
-            </a:solidFill>
-            <a:prstDash val="solid"/>
-          </a:ln>
-        </p:spPr>
-      </p:sp>
-      <p:sp>
-        <p:nvSpPr>
-          <p:cNvPr id="57" name="Text 55"/>
-          <p:cNvSpPr/>
-          <p:nvPr/>
-        </p:nvSpPr>
-        <p:spPr>
-          <a:xfrm>
-            <a:off x="4718304" y="4498848"/>
-            <a:ext cx="2011680" cy="402336"/>
-          </a:xfrm>
-          <a:prstGeom prst="rect">
-            <a:avLst/>
-          </a:prstGeom>
-          <a:noFill/>
-          <a:ln/>
-        </p:spPr>
-        <p:txBody>
-          <a:bodyPr wrap="square" lIns="0" tIns="0" rIns="0" bIns="0" rtlCol="0" anchor="ctr"/>
-          <a:lstStyle/>
-          <a:p>
-            <a:pPr algn="ctr" indent="0" marL="0">
-              <a:buNone/>
-            </a:pPr>
-            <a:r>
-              <a:rPr lang="en-US" sz="1200" b="1" dirty="0">
-                <a:solidFill>
-                  <a:srgbClr val="4338CA"/>
-                </a:solidFill>
-                <a:latin typeface="Trebuchet MS" pitchFamily="34" charset="0"/>
-                <a:ea typeface="Trebuchet MS" pitchFamily="34" charset="-122"/>
-                <a:cs typeface="Trebuchet MS" pitchFamily="34" charset="-120"/>
-              </a:rPr>
-              <a:t>falsehood</a:t>
-            </a:r>
-            <a:endParaRPr lang="en-US" sz="1200" dirty="0"/>
-          </a:p>
-        </p:txBody>
-      </p:sp>
-      <p:sp>
-        <p:nvSpPr>
-          <p:cNvPr id="58" name="Shape 56"/>
-          <p:cNvSpPr/>
-          <p:nvPr/>
-        </p:nvSpPr>
-        <p:spPr>
-          <a:xfrm>
-            <a:off x="6894576" y="4498848"/>
-            <a:ext cx="2011680" cy="402336"/>
-          </a:xfrm>
-          <a:prstGeom prst="rect">
-            <a:avLst>
-              <a:gd name="adj" fmla="val 13636"/>
-            </a:avLst>
-          </a:prstGeom>
-          <a:solidFill>
-            <a:srgbClr val="EEF2FF"/>
-          </a:solidFill>
-          <a:ln w="12700">
-            <a:solidFill>
-              <a:srgbClr val="6366F1"/>
-            </a:solidFill>
-            <a:prstDash val="solid"/>
-          </a:ln>
-        </p:spPr>
-      </p:sp>
-      <p:sp>
-        <p:nvSpPr>
-          <p:cNvPr id="59" name="Text 57"/>
-          <p:cNvSpPr/>
-          <p:nvPr/>
-        </p:nvSpPr>
-        <p:spPr>
-          <a:xfrm>
-            <a:off x="6894576" y="4498848"/>
             <a:ext cx="2011680" cy="402336"/>
           </a:xfrm>
           <a:prstGeom prst="rect">
@@ -36033,7 +35662,7 @@
                 <a:ea typeface="Calibri" pitchFamily="34" charset="-122"/>
                 <a:cs typeface="Calibri" pitchFamily="34" charset="-120"/>
               </a:rPr>
-              <a:t>Word Labs  •  wordlabs.app  •  Suffix: '-hood' = state, condition, or group</a:t>
+              <a:t>Word Labs  •  wordlabs.app  •  Suffix: '-hood' = state of</a:t>
             </a:r>
             <a:endParaRPr lang="en-US" sz="800" dirty="0"/>
           </a:p>
@@ -36197,7 +35826,7 @@
                 <a:ea typeface="Calibri" pitchFamily="34" charset="-122"/>
                 <a:cs typeface="Calibri" pitchFamily="34" charset="-120"/>
               </a:rPr>
-              <a:t>A meaningful word part added to the end of a word to change its meaning or form. The suffix '-hood' means 'state, condition, or group'.</a:t>
+              <a:t>A meaningful word part added to the end of a word to change its meaning or form. The suffix '-hood' means 'state of'.</a:t>
             </a:r>
             <a:endParaRPr lang="en-US" sz="1350" dirty="0"/>
           </a:p>
@@ -36525,7 +36154,7 @@
                 <a:ea typeface="Calibri" pitchFamily="34" charset="-122"/>
                 <a:cs typeface="Calibri" pitchFamily="34" charset="-120"/>
               </a:rPr>
-              <a:t>A meaningful word part added to the beginning of a root to change its meaning. E.g. 'un-' in 'neighbourhood' means 'not'.</a:t>
+              <a:t>A meaningful word part added to the beginning of a root to change its meaning. E.g. 'un-' in 'likelihood' means 'not'.</a:t>
             </a:r>
             <a:endParaRPr lang="en-US" sz="1350" dirty="0"/>
           </a:p>
@@ -36817,7 +36446,7 @@
                 <a:ea typeface="Calibri" pitchFamily="34" charset="-122"/>
                 <a:cs typeface="Calibri" pitchFamily="34" charset="-120"/>
               </a:rPr>
-              <a:t>Word Labs  •  wordlabs.app  •  Suffix: '-hood' = state, condition, or group</a:t>
+              <a:t>Word Labs  •  wordlabs.app  •  Suffix: '-hood' = state of</a:t>
             </a:r>
             <a:endParaRPr lang="en-US" sz="800" dirty="0"/>
           </a:p>
@@ -36929,7 +36558,7 @@
                 <a:ea typeface="Calibri" pitchFamily="34" charset="-122"/>
                 <a:cs typeface="Calibri" pitchFamily="34" charset="-120"/>
               </a:rPr>
-              <a:t>1.  Adding '-hood' to a word always makes it mean the opposite.</a:t>
+              <a:t>1.  'likelihood' means 'the chance that something will happen'.</a:t>
             </a:r>
             <a:endParaRPr lang="en-US" sz="1300" dirty="0"/>
           </a:p>
@@ -36952,11 +36581,11 @@
             </a:avLst>
           </a:prstGeom>
           <a:solidFill>
-            <a:srgbClr val="FEE2E2"/>
-          </a:solidFill>
-          <a:ln w="12700">
-            <a:solidFill>
-              <a:srgbClr val="DC2626"/>
+            <a:srgbClr val="DCFCE7"/>
+          </a:solidFill>
+          <a:ln w="12700">
+            <a:solidFill>
+              <a:srgbClr val="16A34A"/>
             </a:solidFill>
             <a:prstDash val="solid"/>
           </a:ln>
@@ -36989,13 +36618,13 @@
             <a:r>
               <a:rPr lang="en-US" sz="1100" b="1" dirty="0">
                 <a:solidFill>
-                  <a:srgbClr val="DC2626"/>
+                  <a:srgbClr val="16A34A"/>
                 </a:solidFill>
                 <a:latin typeface="Trebuchet MS" pitchFamily="34" charset="0"/>
                 <a:ea typeface="Trebuchet MS" pitchFamily="34" charset="-122"/>
                 <a:cs typeface="Trebuchet MS" pitchFamily="34" charset="-120"/>
               </a:rPr>
-              <a:t>FALSE</a:t>
+              <a:t>TRUE</a:t>
             </a:r>
             <a:endParaRPr lang="en-US" sz="1100" dirty="0"/>
           </a:p>
@@ -37068,7 +36697,7 @@
                 <a:ea typeface="Calibri" pitchFamily="34" charset="-122"/>
                 <a:cs typeface="Calibri" pitchFamily="34" charset="-120"/>
               </a:rPr>
-              <a:t>2.  The word 'childhood' contains the suffix '-hood'.</a:t>
+              <a:t>2.  'childhood' means 'the period of a person's life when they are a child'.</a:t>
             </a:r>
             <a:endParaRPr lang="en-US" sz="1300" dirty="0"/>
           </a:p>
@@ -37207,7 +36836,7 @@
                 <a:ea typeface="Calibri" pitchFamily="34" charset="-122"/>
                 <a:cs typeface="Calibri" pitchFamily="34" charset="-120"/>
               </a:rPr>
-              <a:t>3.  'Neighbourhood' refers to the condition or state of being neighbours.</a:t>
+              <a:t>3.  'likelihood' means 'the exact time something will happen'.</a:t>
             </a:r>
             <a:endParaRPr lang="en-US" sz="1300" dirty="0"/>
           </a:p>
@@ -37230,11 +36859,11 @@
             </a:avLst>
           </a:prstGeom>
           <a:solidFill>
-            <a:srgbClr val="DCFCE7"/>
-          </a:solidFill>
-          <a:ln w="12700">
-            <a:solidFill>
-              <a:srgbClr val="16A34A"/>
+            <a:srgbClr val="FEE2E2"/>
+          </a:solidFill>
+          <a:ln w="12700">
+            <a:solidFill>
+              <a:srgbClr val="DC2626"/>
             </a:solidFill>
             <a:prstDash val="solid"/>
           </a:ln>
@@ -37267,13 +36896,13 @@
             <a:r>
               <a:rPr lang="en-US" sz="1100" b="1" dirty="0">
                 <a:solidFill>
-                  <a:srgbClr val="16A34A"/>
+                  <a:srgbClr val="DC2626"/>
                 </a:solidFill>
                 <a:latin typeface="Trebuchet MS" pitchFamily="34" charset="0"/>
                 <a:ea typeface="Trebuchet MS" pitchFamily="34" charset="-122"/>
                 <a:cs typeface="Trebuchet MS" pitchFamily="34" charset="-120"/>
               </a:rPr>
-              <a:t>TRUE</a:t>
+              <a:t>FALSE</a:t>
             </a:r>
             <a:endParaRPr lang="en-US" sz="1100" dirty="0"/>
           </a:p>
@@ -37346,7 +36975,7 @@
                 <a:ea typeface="Calibri" pitchFamily="34" charset="-122"/>
                 <a:cs typeface="Calibri" pitchFamily="34" charset="-120"/>
               </a:rPr>
-              <a:t>4.  The suffix '-hood' comes from Latin.</a:t>
+              <a:t>4.  'hood' means 'state of'.</a:t>
             </a:r>
             <a:endParaRPr lang="en-US" sz="1300" dirty="0"/>
           </a:p>
@@ -37369,11 +36998,11 @@
             </a:avLst>
           </a:prstGeom>
           <a:solidFill>
-            <a:srgbClr val="FEE2E2"/>
-          </a:solidFill>
-          <a:ln w="12700">
-            <a:solidFill>
-              <a:srgbClr val="DC2626"/>
+            <a:srgbClr val="DCFCE7"/>
+          </a:solidFill>
+          <a:ln w="12700">
+            <a:solidFill>
+              <a:srgbClr val="16A34A"/>
             </a:solidFill>
             <a:prstDash val="solid"/>
           </a:ln>
@@ -37406,13 +37035,13 @@
             <a:r>
               <a:rPr lang="en-US" sz="1100" b="1" dirty="0">
                 <a:solidFill>
-                  <a:srgbClr val="DC2626"/>
+                  <a:srgbClr val="16A34A"/>
                 </a:solidFill>
                 <a:latin typeface="Trebuchet MS" pitchFamily="34" charset="0"/>
                 <a:ea typeface="Trebuchet MS" pitchFamily="34" charset="-122"/>
                 <a:cs typeface="Trebuchet MS" pitchFamily="34" charset="-120"/>
               </a:rPr>
-              <a:t>FALSE</a:t>
+              <a:t>TRUE</a:t>
             </a:r>
             <a:endParaRPr lang="en-US" sz="1100" dirty="0"/>
           </a:p>
@@ -37485,7 +37114,7 @@
                 <a:ea typeface="Calibri" pitchFamily="34" charset="-122"/>
                 <a:cs typeface="Calibri" pitchFamily="34" charset="-120"/>
               </a:rPr>
-              <a:t>5.  The suffix '-hood' can turn a noun into another noun meaning a state or condition.</a:t>
+              <a:t>5.  'childhood' means 'a small tool used for planting seeds in a garden'.</a:t>
             </a:r>
             <a:endParaRPr lang="en-US" sz="1300" dirty="0"/>
           </a:p>
@@ -37508,11 +37137,11 @@
             </a:avLst>
           </a:prstGeom>
           <a:solidFill>
-            <a:srgbClr val="DCFCE7"/>
-          </a:solidFill>
-          <a:ln w="12700">
-            <a:solidFill>
-              <a:srgbClr val="16A34A"/>
+            <a:srgbClr val="FEE2E2"/>
+          </a:solidFill>
+          <a:ln w="12700">
+            <a:solidFill>
+              <a:srgbClr val="DC2626"/>
             </a:solidFill>
             <a:prstDash val="solid"/>
           </a:ln>
@@ -37545,13 +37174,13 @@
             <a:r>
               <a:rPr lang="en-US" sz="1100" b="1" dirty="0">
                 <a:solidFill>
-                  <a:srgbClr val="16A34A"/>
+                  <a:srgbClr val="DC2626"/>
                 </a:solidFill>
                 <a:latin typeface="Trebuchet MS" pitchFamily="34" charset="0"/>
                 <a:ea typeface="Trebuchet MS" pitchFamily="34" charset="-122"/>
                 <a:cs typeface="Trebuchet MS" pitchFamily="34" charset="-120"/>
               </a:rPr>
-              <a:t>TRUE</a:t>
+              <a:t>FALSE</a:t>
             </a:r>
             <a:endParaRPr lang="en-US" sz="1100" dirty="0"/>
           </a:p>
@@ -37843,7 +37472,7 @@
                 <a:ea typeface="Calibri" pitchFamily="34" charset="-122"/>
                 <a:cs typeface="Calibri" pitchFamily="34" charset="-120"/>
               </a:rPr>
-              <a:t>Word Labs  •  wordlabs.app  •  Suffix: '-hood' = state, condition, or group</a:t>
+              <a:t>Word Labs  •  wordlabs.app  •  Suffix: '-hood' = state of</a:t>
             </a:r>
             <a:endParaRPr lang="en-US" sz="800" dirty="0"/>
           </a:p>
@@ -37980,7 +37609,7 @@
                 <a:ea typeface="Trebuchet MS" pitchFamily="34" charset="-122"/>
                 <a:cs typeface="Trebuchet MS" pitchFamily="34" charset="-120"/>
               </a:rPr>
-              <a:t>state, condition, or group</a:t>
+              <a:t>state of</a:t>
             </a:r>
             <a:endParaRPr lang="en-US" sz="2000" dirty="0"/>
           </a:p>
@@ -38019,7 +37648,7 @@
                 <a:ea typeface="Calibri" pitchFamily="34" charset="-122"/>
                 <a:cs typeface="Calibri" pitchFamily="34" charset="-120"/>
               </a:rPr>
-              <a:t>Origin: Old English: had</a:t>
+              <a:t>Origin: Suffix</a:t>
             </a:r>
             <a:endParaRPr lang="en-US" sz="1100" dirty="0"/>
           </a:p>
@@ -38190,7 +37819,7 @@
                 <a:ea typeface="Trebuchet MS" pitchFamily="34" charset="-122"/>
                 <a:cs typeface="Trebuchet MS" pitchFamily="34" charset="-120"/>
               </a:rPr>
-              <a:t>neighbourhood</a:t>
+              <a:t>likelihood</a:t>
             </a:r>
             <a:endParaRPr lang="en-US" sz="1300" dirty="0"/>
           </a:p>
@@ -38256,271 +37885,7 @@
                 <a:ea typeface="Trebuchet MS" pitchFamily="34" charset="-122"/>
                 <a:cs typeface="Trebuchet MS" pitchFamily="34" charset="-120"/>
               </a:rPr>
-              <a:t>brotherhood</a:t>
-            </a:r>
-            <a:endParaRPr lang="en-US" sz="1300" dirty="0"/>
-          </a:p>
-        </p:txBody>
-      </p:sp>
-      <p:sp>
-        <p:nvSpPr>
-          <p:cNvPr id="22" name="Shape 20"/>
-          <p:cNvSpPr/>
-          <p:nvPr/>
-        </p:nvSpPr>
-        <p:spPr>
-          <a:xfrm>
-            <a:off x="6812280" y="2743200"/>
-            <a:ext cx="2011680" cy="502920"/>
-          </a:xfrm>
-          <a:prstGeom prst="rect">
-            <a:avLst>
-              <a:gd name="adj" fmla="val 14545"/>
-            </a:avLst>
-          </a:prstGeom>
-          <a:solidFill>
-            <a:srgbClr val="EEF2FF"/>
-          </a:solidFill>
-          <a:ln w="12700">
-            <a:solidFill>
-              <a:srgbClr val="6366F1"/>
-            </a:solidFill>
-            <a:prstDash val="solid"/>
-          </a:ln>
-        </p:spPr>
-      </p:sp>
-      <p:sp>
-        <p:nvSpPr>
-          <p:cNvPr id="23" name="Text 21"/>
-          <p:cNvSpPr/>
-          <p:nvPr/>
-        </p:nvSpPr>
-        <p:spPr>
-          <a:xfrm>
-            <a:off x="6812280" y="2743200"/>
-            <a:ext cx="2011680" cy="502920"/>
-          </a:xfrm>
-          <a:prstGeom prst="rect">
-            <a:avLst/>
-          </a:prstGeom>
-          <a:noFill/>
-          <a:ln/>
-        </p:spPr>
-        <p:txBody>
-          <a:bodyPr wrap="square" lIns="0" tIns="0" rIns="0" bIns="0" rtlCol="0" anchor="ctr"/>
-          <a:lstStyle/>
-          <a:p>
-            <a:pPr algn="ctr" indent="0" marL="0">
-              <a:buNone/>
-            </a:pPr>
-            <a:r>
-              <a:rPr lang="en-US" sz="1300" b="1" dirty="0">
-                <a:solidFill>
-                  <a:srgbClr val="4338CA"/>
-                </a:solidFill>
-                <a:latin typeface="Trebuchet MS" pitchFamily="34" charset="0"/>
-                <a:ea typeface="Trebuchet MS" pitchFamily="34" charset="-122"/>
-                <a:cs typeface="Trebuchet MS" pitchFamily="34" charset="-120"/>
-              </a:rPr>
-              <a:t>motherhood</a:t>
-            </a:r>
-            <a:endParaRPr lang="en-US" sz="1300" dirty="0"/>
-          </a:p>
-        </p:txBody>
-      </p:sp>
-      <p:sp>
-        <p:nvSpPr>
-          <p:cNvPr id="24" name="Shape 22"/>
-          <p:cNvSpPr/>
-          <p:nvPr/>
-        </p:nvSpPr>
-        <p:spPr>
-          <a:xfrm>
-            <a:off x="365760" y="3401568"/>
-            <a:ext cx="2011680" cy="502920"/>
-          </a:xfrm>
-          <a:prstGeom prst="rect">
-            <a:avLst>
-              <a:gd name="adj" fmla="val 14545"/>
-            </a:avLst>
-          </a:prstGeom>
-          <a:solidFill>
-            <a:srgbClr val="EEF2FF"/>
-          </a:solidFill>
-          <a:ln w="12700">
-            <a:solidFill>
-              <a:srgbClr val="6366F1"/>
-            </a:solidFill>
-            <a:prstDash val="solid"/>
-          </a:ln>
-        </p:spPr>
-      </p:sp>
-      <p:sp>
-        <p:nvSpPr>
-          <p:cNvPr id="25" name="Text 23"/>
-          <p:cNvSpPr/>
-          <p:nvPr/>
-        </p:nvSpPr>
-        <p:spPr>
-          <a:xfrm>
-            <a:off x="365760" y="3401568"/>
-            <a:ext cx="2011680" cy="502920"/>
-          </a:xfrm>
-          <a:prstGeom prst="rect">
-            <a:avLst/>
-          </a:prstGeom>
-          <a:noFill/>
-          <a:ln/>
-        </p:spPr>
-        <p:txBody>
-          <a:bodyPr wrap="square" lIns="0" tIns="0" rIns="0" bIns="0" rtlCol="0" anchor="ctr"/>
-          <a:lstStyle/>
-          <a:p>
-            <a:pPr algn="ctr" indent="0" marL="0">
-              <a:buNone/>
-            </a:pPr>
-            <a:r>
-              <a:rPr lang="en-US" sz="1300" b="1" dirty="0">
-                <a:solidFill>
-                  <a:srgbClr val="4338CA"/>
-                </a:solidFill>
-                <a:latin typeface="Trebuchet MS" pitchFamily="34" charset="0"/>
-                <a:ea typeface="Trebuchet MS" pitchFamily="34" charset="-122"/>
-                <a:cs typeface="Trebuchet MS" pitchFamily="34" charset="-120"/>
-              </a:rPr>
-              <a:t>knighthood</a:t>
-            </a:r>
-            <a:endParaRPr lang="en-US" sz="1300" dirty="0"/>
-          </a:p>
-        </p:txBody>
-      </p:sp>
-      <p:sp>
-        <p:nvSpPr>
-          <p:cNvPr id="26" name="Shape 24"/>
-          <p:cNvSpPr/>
-          <p:nvPr/>
-        </p:nvSpPr>
-        <p:spPr>
-          <a:xfrm>
-            <a:off x="2514600" y="3401568"/>
-            <a:ext cx="2011680" cy="502920"/>
-          </a:xfrm>
-          <a:prstGeom prst="rect">
-            <a:avLst>
-              <a:gd name="adj" fmla="val 14545"/>
-            </a:avLst>
-          </a:prstGeom>
-          <a:solidFill>
-            <a:srgbClr val="EEF2FF"/>
-          </a:solidFill>
-          <a:ln w="12700">
-            <a:solidFill>
-              <a:srgbClr val="6366F1"/>
-            </a:solidFill>
-            <a:prstDash val="solid"/>
-          </a:ln>
-        </p:spPr>
-      </p:sp>
-      <p:sp>
-        <p:nvSpPr>
-          <p:cNvPr id="27" name="Text 25"/>
-          <p:cNvSpPr/>
-          <p:nvPr/>
-        </p:nvSpPr>
-        <p:spPr>
-          <a:xfrm>
-            <a:off x="2514600" y="3401568"/>
-            <a:ext cx="2011680" cy="502920"/>
-          </a:xfrm>
-          <a:prstGeom prst="rect">
-            <a:avLst/>
-          </a:prstGeom>
-          <a:noFill/>
-          <a:ln/>
-        </p:spPr>
-        <p:txBody>
-          <a:bodyPr wrap="square" lIns="0" tIns="0" rIns="0" bIns="0" rtlCol="0" anchor="ctr"/>
-          <a:lstStyle/>
-          <a:p>
-            <a:pPr algn="ctr" indent="0" marL="0">
-              <a:buNone/>
-            </a:pPr>
-            <a:r>
-              <a:rPr lang="en-US" sz="1300" b="1" dirty="0">
-                <a:solidFill>
-                  <a:srgbClr val="4338CA"/>
-                </a:solidFill>
-                <a:latin typeface="Trebuchet MS" pitchFamily="34" charset="0"/>
-                <a:ea typeface="Trebuchet MS" pitchFamily="34" charset="-122"/>
-                <a:cs typeface="Trebuchet MS" pitchFamily="34" charset="-120"/>
-              </a:rPr>
-              <a:t>likelihood</a:t>
-            </a:r>
-            <a:endParaRPr lang="en-US" sz="1300" dirty="0"/>
-          </a:p>
-        </p:txBody>
-      </p:sp>
-      <p:sp>
-        <p:nvSpPr>
-          <p:cNvPr id="28" name="Shape 26"/>
-          <p:cNvSpPr/>
-          <p:nvPr/>
-        </p:nvSpPr>
-        <p:spPr>
-          <a:xfrm>
-            <a:off x="4663440" y="3401568"/>
-            <a:ext cx="2011680" cy="502920"/>
-          </a:xfrm>
-          <a:prstGeom prst="rect">
-            <a:avLst>
-              <a:gd name="adj" fmla="val 14545"/>
-            </a:avLst>
-          </a:prstGeom>
-          <a:solidFill>
-            <a:srgbClr val="EEF2FF"/>
-          </a:solidFill>
-          <a:ln w="12700">
-            <a:solidFill>
-              <a:srgbClr val="6366F1"/>
-            </a:solidFill>
-            <a:prstDash val="solid"/>
-          </a:ln>
-        </p:spPr>
-      </p:sp>
-      <p:sp>
-        <p:nvSpPr>
-          <p:cNvPr id="29" name="Text 27"/>
-          <p:cNvSpPr/>
-          <p:nvPr/>
-        </p:nvSpPr>
-        <p:spPr>
-          <a:xfrm>
-            <a:off x="4663440" y="3401568"/>
-            <a:ext cx="2011680" cy="502920"/>
-          </a:xfrm>
-          <a:prstGeom prst="rect">
-            <a:avLst/>
-          </a:prstGeom>
-          <a:noFill/>
-          <a:ln/>
-        </p:spPr>
-        <p:txBody>
-          <a:bodyPr wrap="square" lIns="0" tIns="0" rIns="0" bIns="0" rtlCol="0" anchor="ctr"/>
-          <a:lstStyle/>
-          <a:p>
-            <a:pPr algn="ctr" indent="0" marL="0">
-              <a:buNone/>
-            </a:pPr>
-            <a:r>
-              <a:rPr lang="en-US" sz="1300" b="1" dirty="0">
-                <a:solidFill>
-                  <a:srgbClr val="4338CA"/>
-                </a:solidFill>
-                <a:latin typeface="Trebuchet MS" pitchFamily="34" charset="0"/>
-                <a:ea typeface="Trebuchet MS" pitchFamily="34" charset="-122"/>
-                <a:cs typeface="Trebuchet MS" pitchFamily="34" charset="-120"/>
-              </a:rPr>
-              <a:t>falsehood</a:t>
+              <a:t>adulthood</a:t>
             </a:r>
             <a:endParaRPr lang="en-US" sz="1300" dirty="0"/>
           </a:p>
@@ -38812,7 +38177,7 @@
                 <a:ea typeface="Calibri" pitchFamily="34" charset="-122"/>
                 <a:cs typeface="Calibri" pitchFamily="34" charset="-120"/>
               </a:rPr>
-              <a:t>Word Labs  •  wordlabs.app  •  Suffix: '-hood' = state, condition, or group</a:t>
+              <a:t>Word Labs  •  wordlabs.app  •  Suffix: '-hood' = state of</a:t>
             </a:r>
             <a:endParaRPr lang="en-US" sz="800" dirty="0"/>
           </a:p>
@@ -39070,7 +38435,7 @@
             <a:avLst/>
           </a:prstGeom>
           <a:solidFill>
-            <a:srgbClr val="DDD6FE"/>
+            <a:srgbClr val="F8FAFC"/>
           </a:solidFill>
           <a:ln w="12700">
             <a:solidFill>
@@ -39082,14 +38447,39 @@
       </p:sp>
       <p:sp>
         <p:nvSpPr>
-          <p:cNvPr id="18" name="Text 16"/>
-          <p:cNvSpPr/>
-          <p:nvPr/>
-        </p:nvSpPr>
-        <p:spPr>
-          <a:xfrm>
-            <a:off x="640080" y="1755648"/>
-            <a:ext cx="1463040" cy="420624"/>
+          <p:cNvPr id="18" name="Shape 16"/>
+          <p:cNvSpPr/>
+          <p:nvPr/>
+        </p:nvSpPr>
+        <p:spPr>
+          <a:xfrm>
+            <a:off x="3291840" y="1755648"/>
+            <a:ext cx="1645920" cy="420624"/>
+          </a:xfrm>
+          <a:prstGeom prst="rect">
+            <a:avLst/>
+          </a:prstGeom>
+          <a:solidFill>
+            <a:srgbClr val="CCFBF1"/>
+          </a:solidFill>
+          <a:ln w="12700">
+            <a:solidFill>
+              <a:srgbClr val="E5E7EB"/>
+            </a:solidFill>
+            <a:prstDash val="solid"/>
+          </a:ln>
+        </p:spPr>
+      </p:sp>
+      <p:sp>
+        <p:nvSpPr>
+          <p:cNvPr id="19" name="Text 17"/>
+          <p:cNvSpPr/>
+          <p:nvPr/>
+        </p:nvSpPr>
+        <p:spPr>
+          <a:xfrm>
+            <a:off x="3291840" y="1755648"/>
+            <a:ext cx="1645920" cy="420624"/>
           </a:xfrm>
           <a:prstGeom prst="rect">
             <a:avLst/>
@@ -39107,13 +38497,13 @@
             <a:r>
               <a:rPr lang="en-US" sz="1300" b="1" dirty="0">
                 <a:solidFill>
-                  <a:srgbClr val="4C1D95"/>
+                  <a:srgbClr val="0F766E"/>
                 </a:solidFill>
                 <a:latin typeface="Trebuchet MS" pitchFamily="34" charset="0"/>
                 <a:ea typeface="Trebuchet MS" pitchFamily="34" charset="-122"/>
                 <a:cs typeface="Trebuchet MS" pitchFamily="34" charset="-120"/>
               </a:rPr>
-              <a:t>un-</a:t>
+              <a:t>child</a:t>
             </a:r>
             <a:endParaRPr lang="en-US" sz="1300" dirty="0"/>
           </a:p>
@@ -39121,20 +38511,20 @@
       </p:sp>
       <p:sp>
         <p:nvSpPr>
-          <p:cNvPr id="19" name="Shape 17"/>
-          <p:cNvSpPr/>
-          <p:nvPr/>
-        </p:nvSpPr>
-        <p:spPr>
-          <a:xfrm>
-            <a:off x="3291840" y="1755648"/>
-            <a:ext cx="1645920" cy="420624"/>
-          </a:xfrm>
-          <a:prstGeom prst="rect">
-            <a:avLst/>
-          </a:prstGeom>
-          <a:solidFill>
-            <a:srgbClr val="CCFBF1"/>
+          <p:cNvPr id="20" name="Shape 18"/>
+          <p:cNvSpPr/>
+          <p:nvPr/>
+        </p:nvSpPr>
+        <p:spPr>
+          <a:xfrm>
+            <a:off x="5943600" y="1755648"/>
+            <a:ext cx="1463040" cy="420624"/>
+          </a:xfrm>
+          <a:prstGeom prst="rect">
+            <a:avLst/>
+          </a:prstGeom>
+          <a:solidFill>
+            <a:srgbClr val="FCE7F3"/>
           </a:solidFill>
           <a:ln w="12700">
             <a:solidFill>
@@ -39146,14 +38536,14 @@
       </p:sp>
       <p:sp>
         <p:nvSpPr>
-          <p:cNvPr id="20" name="Text 18"/>
-          <p:cNvSpPr/>
-          <p:nvPr/>
-        </p:nvSpPr>
-        <p:spPr>
-          <a:xfrm>
-            <a:off x="3291840" y="1755648"/>
-            <a:ext cx="1645920" cy="420624"/>
+          <p:cNvPr id="21" name="Text 19"/>
+          <p:cNvSpPr/>
+          <p:nvPr/>
+        </p:nvSpPr>
+        <p:spPr>
+          <a:xfrm>
+            <a:off x="5943600" y="1755648"/>
+            <a:ext cx="1463040" cy="420624"/>
           </a:xfrm>
           <a:prstGeom prst="rect">
             <a:avLst/>
@@ -39171,13 +38561,13 @@
             <a:r>
               <a:rPr lang="en-US" sz="1300" b="1" dirty="0">
                 <a:solidFill>
-                  <a:srgbClr val="0F766E"/>
+                  <a:srgbClr val="9D174D"/>
                 </a:solidFill>
                 <a:latin typeface="Trebuchet MS" pitchFamily="34" charset="0"/>
                 <a:ea typeface="Trebuchet MS" pitchFamily="34" charset="-122"/>
                 <a:cs typeface="Trebuchet MS" pitchFamily="34" charset="-120"/>
               </a:rPr>
-              <a:t>child</a:t>
+              <a:t>-hood</a:t>
             </a:r>
             <a:endParaRPr lang="en-US" sz="1300" dirty="0"/>
           </a:p>
@@ -39185,20 +38575,20 @@
       </p:sp>
       <p:sp>
         <p:nvSpPr>
-          <p:cNvPr id="21" name="Shape 19"/>
-          <p:cNvSpPr/>
-          <p:nvPr/>
-        </p:nvSpPr>
-        <p:spPr>
-          <a:xfrm>
-            <a:off x="5943600" y="1755648"/>
+          <p:cNvPr id="22" name="Shape 20"/>
+          <p:cNvSpPr/>
+          <p:nvPr/>
+        </p:nvSpPr>
+        <p:spPr>
+          <a:xfrm>
+            <a:off x="640080" y="2212848"/>
             <a:ext cx="1463040" cy="420624"/>
           </a:xfrm>
           <a:prstGeom prst="rect">
             <a:avLst/>
           </a:prstGeom>
           <a:solidFill>
-            <a:srgbClr val="FCE7F3"/>
+            <a:srgbClr val="F1F5F9"/>
           </a:solidFill>
           <a:ln w="12700">
             <a:solidFill>
@@ -39210,14 +38600,39 @@
       </p:sp>
       <p:sp>
         <p:nvSpPr>
-          <p:cNvPr id="22" name="Text 20"/>
-          <p:cNvSpPr/>
-          <p:nvPr/>
-        </p:nvSpPr>
-        <p:spPr>
-          <a:xfrm>
-            <a:off x="5943600" y="1755648"/>
-            <a:ext cx="1463040" cy="420624"/>
+          <p:cNvPr id="23" name="Shape 21"/>
+          <p:cNvSpPr/>
+          <p:nvPr/>
+        </p:nvSpPr>
+        <p:spPr>
+          <a:xfrm>
+            <a:off x="3291840" y="2212848"/>
+            <a:ext cx="1645920" cy="420624"/>
+          </a:xfrm>
+          <a:prstGeom prst="rect">
+            <a:avLst/>
+          </a:prstGeom>
+          <a:solidFill>
+            <a:srgbClr val="CCFBF1"/>
+          </a:solidFill>
+          <a:ln w="12700">
+            <a:solidFill>
+              <a:srgbClr val="E5E7EB"/>
+            </a:solidFill>
+            <a:prstDash val="solid"/>
+          </a:ln>
+        </p:spPr>
+      </p:sp>
+      <p:sp>
+        <p:nvSpPr>
+          <p:cNvPr id="24" name="Text 22"/>
+          <p:cNvSpPr/>
+          <p:nvPr/>
+        </p:nvSpPr>
+        <p:spPr>
+          <a:xfrm>
+            <a:off x="3291840" y="2212848"/>
+            <a:ext cx="1645920" cy="420624"/>
           </a:xfrm>
           <a:prstGeom prst="rect">
             <a:avLst/>
@@ -39235,13 +38650,13 @@
             <a:r>
               <a:rPr lang="en-US" sz="1300" b="1" dirty="0">
                 <a:solidFill>
-                  <a:srgbClr val="9D174D"/>
+                  <a:srgbClr val="0F766E"/>
                 </a:solidFill>
                 <a:latin typeface="Trebuchet MS" pitchFamily="34" charset="0"/>
                 <a:ea typeface="Trebuchet MS" pitchFamily="34" charset="-122"/>
                 <a:cs typeface="Trebuchet MS" pitchFamily="34" charset="-120"/>
               </a:rPr>
-              <a:t>-hood</a:t>
+              <a:t>like</a:t>
             </a:r>
             <a:endParaRPr lang="en-US" sz="1300" dirty="0"/>
           </a:p>
@@ -39249,20 +38664,20 @@
       </p:sp>
       <p:sp>
         <p:nvSpPr>
-          <p:cNvPr id="23" name="Shape 21"/>
-          <p:cNvSpPr/>
-          <p:nvPr/>
-        </p:nvSpPr>
-        <p:spPr>
-          <a:xfrm>
-            <a:off x="640080" y="2212848"/>
+          <p:cNvPr id="25" name="Shape 23"/>
+          <p:cNvSpPr/>
+          <p:nvPr/>
+        </p:nvSpPr>
+        <p:spPr>
+          <a:xfrm>
+            <a:off x="5943600" y="2212848"/>
             <a:ext cx="1463040" cy="420624"/>
           </a:xfrm>
           <a:prstGeom prst="rect">
             <a:avLst/>
           </a:prstGeom>
           <a:solidFill>
-            <a:srgbClr val="DDD6FE"/>
+            <a:srgbClr val="F1F5F9"/>
           </a:solidFill>
           <a:ln w="12700">
             <a:solidFill>
@@ -39274,18 +38689,68 @@
       </p:sp>
       <p:sp>
         <p:nvSpPr>
-          <p:cNvPr id="24" name="Text 22"/>
-          <p:cNvSpPr/>
-          <p:nvPr/>
-        </p:nvSpPr>
-        <p:spPr>
-          <a:xfrm>
-            <a:off x="640080" y="2212848"/>
+          <p:cNvPr id="26" name="Shape 24"/>
+          <p:cNvSpPr/>
+          <p:nvPr/>
+        </p:nvSpPr>
+        <p:spPr>
+          <a:xfrm>
+            <a:off x="640080" y="2670048"/>
             <a:ext cx="1463040" cy="420624"/>
           </a:xfrm>
           <a:prstGeom prst="rect">
             <a:avLst/>
           </a:prstGeom>
+          <a:solidFill>
+            <a:srgbClr val="F8FAFC"/>
+          </a:solidFill>
+          <a:ln w="12700">
+            <a:solidFill>
+              <a:srgbClr val="E5E7EB"/>
+            </a:solidFill>
+            <a:prstDash val="solid"/>
+          </a:ln>
+        </p:spPr>
+      </p:sp>
+      <p:sp>
+        <p:nvSpPr>
+          <p:cNvPr id="27" name="Shape 25"/>
+          <p:cNvSpPr/>
+          <p:nvPr/>
+        </p:nvSpPr>
+        <p:spPr>
+          <a:xfrm>
+            <a:off x="3291840" y="2670048"/>
+            <a:ext cx="1645920" cy="420624"/>
+          </a:xfrm>
+          <a:prstGeom prst="rect">
+            <a:avLst/>
+          </a:prstGeom>
+          <a:solidFill>
+            <a:srgbClr val="CCFBF1"/>
+          </a:solidFill>
+          <a:ln w="12700">
+            <a:solidFill>
+              <a:srgbClr val="E5E7EB"/>
+            </a:solidFill>
+            <a:prstDash val="solid"/>
+          </a:ln>
+        </p:spPr>
+      </p:sp>
+      <p:sp>
+        <p:nvSpPr>
+          <p:cNvPr id="28" name="Text 26"/>
+          <p:cNvSpPr/>
+          <p:nvPr/>
+        </p:nvSpPr>
+        <p:spPr>
+          <a:xfrm>
+            <a:off x="3291840" y="2670048"/>
+            <a:ext cx="1645920" cy="420624"/>
+          </a:xfrm>
+          <a:prstGeom prst="rect">
+            <a:avLst/>
+          </a:prstGeom>
           <a:noFill/>
           <a:ln/>
         </p:spPr>
@@ -39299,13 +38764,13 @@
             <a:r>
               <a:rPr lang="en-US" sz="1300" b="1" dirty="0">
                 <a:solidFill>
-                  <a:srgbClr val="4C1D95"/>
+                  <a:srgbClr val="0F766E"/>
                 </a:solidFill>
                 <a:latin typeface="Trebuchet MS" pitchFamily="34" charset="0"/>
                 <a:ea typeface="Trebuchet MS" pitchFamily="34" charset="-122"/>
                 <a:cs typeface="Trebuchet MS" pitchFamily="34" charset="-120"/>
               </a:rPr>
-              <a:t>mis-</a:t>
+              <a:t>neighbour</a:t>
             </a:r>
             <a:endParaRPr lang="en-US" sz="1300" dirty="0"/>
           </a:p>
@@ -39313,13 +38778,63 @@
       </p:sp>
       <p:sp>
         <p:nvSpPr>
-          <p:cNvPr id="25" name="Shape 23"/>
-          <p:cNvSpPr/>
-          <p:nvPr/>
-        </p:nvSpPr>
-        <p:spPr>
-          <a:xfrm>
-            <a:off x="3291840" y="2212848"/>
+          <p:cNvPr id="29" name="Shape 27"/>
+          <p:cNvSpPr/>
+          <p:nvPr/>
+        </p:nvSpPr>
+        <p:spPr>
+          <a:xfrm>
+            <a:off x="5943600" y="2670048"/>
+            <a:ext cx="1463040" cy="420624"/>
+          </a:xfrm>
+          <a:prstGeom prst="rect">
+            <a:avLst/>
+          </a:prstGeom>
+          <a:solidFill>
+            <a:srgbClr val="F8FAFC"/>
+          </a:solidFill>
+          <a:ln w="12700">
+            <a:solidFill>
+              <a:srgbClr val="E5E7EB"/>
+            </a:solidFill>
+            <a:prstDash val="solid"/>
+          </a:ln>
+        </p:spPr>
+      </p:sp>
+      <p:sp>
+        <p:nvSpPr>
+          <p:cNvPr id="30" name="Shape 28"/>
+          <p:cNvSpPr/>
+          <p:nvPr/>
+        </p:nvSpPr>
+        <p:spPr>
+          <a:xfrm>
+            <a:off x="640080" y="3127248"/>
+            <a:ext cx="1463040" cy="420624"/>
+          </a:xfrm>
+          <a:prstGeom prst="rect">
+            <a:avLst/>
+          </a:prstGeom>
+          <a:solidFill>
+            <a:srgbClr val="F1F5F9"/>
+          </a:solidFill>
+          <a:ln w="12700">
+            <a:solidFill>
+              <a:srgbClr val="E5E7EB"/>
+            </a:solidFill>
+            <a:prstDash val="solid"/>
+          </a:ln>
+        </p:spPr>
+      </p:sp>
+      <p:sp>
+        <p:nvSpPr>
+          <p:cNvPr id="31" name="Shape 29"/>
+          <p:cNvSpPr/>
+          <p:nvPr/>
+        </p:nvSpPr>
+        <p:spPr>
+          <a:xfrm>
+            <a:off x="3291840" y="3127248"/>
             <a:ext cx="1645920" cy="420624"/>
           </a:xfrm>
           <a:prstGeom prst="rect">
@@ -39338,13 +38853,13 @@
       </p:sp>
       <p:sp>
         <p:nvSpPr>
-          <p:cNvPr id="26" name="Text 24"/>
-          <p:cNvSpPr/>
-          <p:nvPr/>
-        </p:nvSpPr>
-        <p:spPr>
-          <a:xfrm>
-            <a:off x="3291840" y="2212848"/>
+          <p:cNvPr id="32" name="Text 30"/>
+          <p:cNvSpPr/>
+          <p:nvPr/>
+        </p:nvSpPr>
+        <p:spPr>
+          <a:xfrm>
+            <a:off x="3291840" y="3127248"/>
             <a:ext cx="1645920" cy="420624"/>
           </a:xfrm>
           <a:prstGeom prst="rect">
@@ -39369,7 +38884,7 @@
                 <a:ea typeface="Trebuchet MS" pitchFamily="34" charset="-122"/>
                 <a:cs typeface="Trebuchet MS" pitchFamily="34" charset="-120"/>
               </a:rPr>
-              <a:t>neighbour</a:t>
+              <a:t>brother</a:t>
             </a:r>
             <a:endParaRPr lang="en-US" sz="1300" dirty="0"/>
           </a:p>
@@ -39377,13 +38892,13 @@
       </p:sp>
       <p:sp>
         <p:nvSpPr>
-          <p:cNvPr id="27" name="Shape 25"/>
-          <p:cNvSpPr/>
-          <p:nvPr/>
-        </p:nvSpPr>
-        <p:spPr>
-          <a:xfrm>
-            <a:off x="5943600" y="2212848"/>
+          <p:cNvPr id="33" name="Shape 31"/>
+          <p:cNvSpPr/>
+          <p:nvPr/>
+        </p:nvSpPr>
+        <p:spPr>
+          <a:xfrm>
+            <a:off x="5943600" y="3127248"/>
             <a:ext cx="1463040" cy="420624"/>
           </a:xfrm>
           <a:prstGeom prst="rect">
@@ -39402,20 +38917,20 @@
       </p:sp>
       <p:sp>
         <p:nvSpPr>
-          <p:cNvPr id="28" name="Shape 26"/>
-          <p:cNvSpPr/>
-          <p:nvPr/>
-        </p:nvSpPr>
-        <p:spPr>
-          <a:xfrm>
-            <a:off x="640080" y="2670048"/>
+          <p:cNvPr id="34" name="Shape 32"/>
+          <p:cNvSpPr/>
+          <p:nvPr/>
+        </p:nvSpPr>
+        <p:spPr>
+          <a:xfrm>
+            <a:off x="640080" y="3584448"/>
             <a:ext cx="1463040" cy="420624"/>
           </a:xfrm>
           <a:prstGeom prst="rect">
             <a:avLst/>
           </a:prstGeom>
           <a:solidFill>
-            <a:srgbClr val="DDD6FE"/>
+            <a:srgbClr val="F8FAFC"/>
           </a:solidFill>
           <a:ln w="12700">
             <a:solidFill>
@@ -39427,14 +38942,39 @@
       </p:sp>
       <p:sp>
         <p:nvSpPr>
-          <p:cNvPr id="29" name="Text 27"/>
-          <p:cNvSpPr/>
-          <p:nvPr/>
-        </p:nvSpPr>
-        <p:spPr>
-          <a:xfrm>
-            <a:off x="640080" y="2670048"/>
-            <a:ext cx="1463040" cy="420624"/>
+          <p:cNvPr id="35" name="Shape 33"/>
+          <p:cNvSpPr/>
+          <p:nvPr/>
+        </p:nvSpPr>
+        <p:spPr>
+          <a:xfrm>
+            <a:off x="3291840" y="3584448"/>
+            <a:ext cx="1645920" cy="420624"/>
+          </a:xfrm>
+          <a:prstGeom prst="rect">
+            <a:avLst/>
+          </a:prstGeom>
+          <a:solidFill>
+            <a:srgbClr val="CCFBF1"/>
+          </a:solidFill>
+          <a:ln w="12700">
+            <a:solidFill>
+              <a:srgbClr val="E5E7EB"/>
+            </a:solidFill>
+            <a:prstDash val="solid"/>
+          </a:ln>
+        </p:spPr>
+      </p:sp>
+      <p:sp>
+        <p:nvSpPr>
+          <p:cNvPr id="36" name="Text 34"/>
+          <p:cNvSpPr/>
+          <p:nvPr/>
+        </p:nvSpPr>
+        <p:spPr>
+          <a:xfrm>
+            <a:off x="3291840" y="3584448"/>
+            <a:ext cx="1645920" cy="420624"/>
           </a:xfrm>
           <a:prstGeom prst="rect">
             <a:avLst/>
@@ -39452,13 +38992,13 @@
             <a:r>
               <a:rPr lang="en-US" sz="1300" b="1" dirty="0">
                 <a:solidFill>
-                  <a:srgbClr val="4C1D95"/>
+                  <a:srgbClr val="0F766E"/>
                 </a:solidFill>
                 <a:latin typeface="Trebuchet MS" pitchFamily="34" charset="0"/>
                 <a:ea typeface="Trebuchet MS" pitchFamily="34" charset="-122"/>
                 <a:cs typeface="Trebuchet MS" pitchFamily="34" charset="-120"/>
               </a:rPr>
-              <a:t>over-</a:t>
+              <a:t>false</a:t>
             </a:r>
             <a:endParaRPr lang="en-US" sz="1300" dirty="0"/>
           </a:p>
@@ -39466,13 +39006,63 @@
       </p:sp>
       <p:sp>
         <p:nvSpPr>
-          <p:cNvPr id="30" name="Shape 28"/>
-          <p:cNvSpPr/>
-          <p:nvPr/>
-        </p:nvSpPr>
-        <p:spPr>
-          <a:xfrm>
-            <a:off x="3291840" y="2670048"/>
+          <p:cNvPr id="37" name="Shape 35"/>
+          <p:cNvSpPr/>
+          <p:nvPr/>
+        </p:nvSpPr>
+        <p:spPr>
+          <a:xfrm>
+            <a:off x="5943600" y="3584448"/>
+            <a:ext cx="1463040" cy="420624"/>
+          </a:xfrm>
+          <a:prstGeom prst="rect">
+            <a:avLst/>
+          </a:prstGeom>
+          <a:solidFill>
+            <a:srgbClr val="F8FAFC"/>
+          </a:solidFill>
+          <a:ln w="12700">
+            <a:solidFill>
+              <a:srgbClr val="E5E7EB"/>
+            </a:solidFill>
+            <a:prstDash val="solid"/>
+          </a:ln>
+        </p:spPr>
+      </p:sp>
+      <p:sp>
+        <p:nvSpPr>
+          <p:cNvPr id="38" name="Shape 36"/>
+          <p:cNvSpPr/>
+          <p:nvPr/>
+        </p:nvSpPr>
+        <p:spPr>
+          <a:xfrm>
+            <a:off x="640080" y="4041648"/>
+            <a:ext cx="1463040" cy="420624"/>
+          </a:xfrm>
+          <a:prstGeom prst="rect">
+            <a:avLst/>
+          </a:prstGeom>
+          <a:solidFill>
+            <a:srgbClr val="F1F5F9"/>
+          </a:solidFill>
+          <a:ln w="12700">
+            <a:solidFill>
+              <a:srgbClr val="E5E7EB"/>
+            </a:solidFill>
+            <a:prstDash val="solid"/>
+          </a:ln>
+        </p:spPr>
+      </p:sp>
+      <p:sp>
+        <p:nvSpPr>
+          <p:cNvPr id="39" name="Shape 37"/>
+          <p:cNvSpPr/>
+          <p:nvPr/>
+        </p:nvSpPr>
+        <p:spPr>
+          <a:xfrm>
+            <a:off x="3291840" y="4041648"/>
             <a:ext cx="1645920" cy="420624"/>
           </a:xfrm>
           <a:prstGeom prst="rect">
@@ -39491,13 +39081,13 @@
       </p:sp>
       <p:sp>
         <p:nvSpPr>
-          <p:cNvPr id="31" name="Text 29"/>
-          <p:cNvSpPr/>
-          <p:nvPr/>
-        </p:nvSpPr>
-        <p:spPr>
-          <a:xfrm>
-            <a:off x="3291840" y="2670048"/>
+          <p:cNvPr id="40" name="Text 38"/>
+          <p:cNvSpPr/>
+          <p:nvPr/>
+        </p:nvSpPr>
+        <p:spPr>
+          <a:xfrm>
+            <a:off x="3291840" y="4041648"/>
             <a:ext cx="1645920" cy="420624"/>
           </a:xfrm>
           <a:prstGeom prst="rect">
@@ -39522,7 +39112,7 @@
                 <a:ea typeface="Trebuchet MS" pitchFamily="34" charset="-122"/>
                 <a:cs typeface="Trebuchet MS" pitchFamily="34" charset="-120"/>
               </a:rPr>
-              <a:t>brother</a:t>
+              <a:t>adult</a:t>
             </a:r>
             <a:endParaRPr lang="en-US" sz="1300" dirty="0"/>
           </a:p>
@@ -39530,20 +39120,20 @@
       </p:sp>
       <p:sp>
         <p:nvSpPr>
-          <p:cNvPr id="32" name="Shape 30"/>
-          <p:cNvSpPr/>
-          <p:nvPr/>
-        </p:nvSpPr>
-        <p:spPr>
-          <a:xfrm>
-            <a:off x="5943600" y="2670048"/>
+          <p:cNvPr id="41" name="Shape 39"/>
+          <p:cNvSpPr/>
+          <p:nvPr/>
+        </p:nvSpPr>
+        <p:spPr>
+          <a:xfrm>
+            <a:off x="5943600" y="4041648"/>
             <a:ext cx="1463040" cy="420624"/>
           </a:xfrm>
           <a:prstGeom prst="rect">
             <a:avLst/>
           </a:prstGeom>
           <a:solidFill>
-            <a:srgbClr val="F8FAFC"/>
+            <a:srgbClr val="F1F5F9"/>
           </a:solidFill>
           <a:ln w="12700">
             <a:solidFill>
@@ -39555,319 +39145,13 @@
       </p:sp>
       <p:sp>
         <p:nvSpPr>
-          <p:cNvPr id="33" name="Shape 31"/>
-          <p:cNvSpPr/>
-          <p:nvPr/>
-        </p:nvSpPr>
-        <p:spPr>
-          <a:xfrm>
-            <a:off x="640080" y="3127248"/>
-            <a:ext cx="1463040" cy="420624"/>
-          </a:xfrm>
-          <a:prstGeom prst="rect">
-            <a:avLst/>
-          </a:prstGeom>
-          <a:solidFill>
-            <a:srgbClr val="DDD6FE"/>
-          </a:solidFill>
-          <a:ln w="12700">
-            <a:solidFill>
-              <a:srgbClr val="E5E7EB"/>
-            </a:solidFill>
-            <a:prstDash val="solid"/>
-          </a:ln>
-        </p:spPr>
-      </p:sp>
-      <p:sp>
-        <p:nvSpPr>
-          <p:cNvPr id="34" name="Text 32"/>
-          <p:cNvSpPr/>
-          <p:nvPr/>
-        </p:nvSpPr>
-        <p:spPr>
-          <a:xfrm>
-            <a:off x="640080" y="3127248"/>
-            <a:ext cx="1463040" cy="420624"/>
-          </a:xfrm>
-          <a:prstGeom prst="rect">
-            <a:avLst/>
-          </a:prstGeom>
-          <a:noFill/>
-          <a:ln/>
-        </p:spPr>
-        <p:txBody>
-          <a:bodyPr wrap="square" lIns="0" tIns="0" rIns="0" bIns="0" rtlCol="0" anchor="ctr"/>
-          <a:lstStyle/>
-          <a:p>
-            <a:pPr algn="ctr" indent="0" marL="0">
-              <a:buNone/>
-            </a:pPr>
-            <a:r>
-              <a:rPr lang="en-US" sz="1300" b="1" dirty="0">
-                <a:solidFill>
-                  <a:srgbClr val="4C1D95"/>
-                </a:solidFill>
-                <a:latin typeface="Trebuchet MS" pitchFamily="34" charset="0"/>
-                <a:ea typeface="Trebuchet MS" pitchFamily="34" charset="-122"/>
-                <a:cs typeface="Trebuchet MS" pitchFamily="34" charset="-120"/>
-              </a:rPr>
-              <a:t>under-</a:t>
-            </a:r>
-            <a:endParaRPr lang="en-US" sz="1300" dirty="0"/>
-          </a:p>
-        </p:txBody>
-      </p:sp>
-      <p:sp>
-        <p:nvSpPr>
-          <p:cNvPr id="35" name="Shape 33"/>
-          <p:cNvSpPr/>
-          <p:nvPr/>
-        </p:nvSpPr>
-        <p:spPr>
-          <a:xfrm>
-            <a:off x="3291840" y="3127248"/>
-            <a:ext cx="1645920" cy="420624"/>
-          </a:xfrm>
-          <a:prstGeom prst="rect">
-            <a:avLst/>
-          </a:prstGeom>
-          <a:solidFill>
-            <a:srgbClr val="CCFBF1"/>
-          </a:solidFill>
-          <a:ln w="12700">
-            <a:solidFill>
-              <a:srgbClr val="E5E7EB"/>
-            </a:solidFill>
-            <a:prstDash val="solid"/>
-          </a:ln>
-        </p:spPr>
-      </p:sp>
-      <p:sp>
-        <p:nvSpPr>
-          <p:cNvPr id="36" name="Text 34"/>
-          <p:cNvSpPr/>
-          <p:nvPr/>
-        </p:nvSpPr>
-        <p:spPr>
-          <a:xfrm>
-            <a:off x="3291840" y="3127248"/>
-            <a:ext cx="1645920" cy="420624"/>
-          </a:xfrm>
-          <a:prstGeom prst="rect">
-            <a:avLst/>
-          </a:prstGeom>
-          <a:noFill/>
-          <a:ln/>
-        </p:spPr>
-        <p:txBody>
-          <a:bodyPr wrap="square" lIns="0" tIns="0" rIns="0" bIns="0" rtlCol="0" anchor="ctr"/>
-          <a:lstStyle/>
-          <a:p>
-            <a:pPr algn="ctr" indent="0" marL="0">
-              <a:buNone/>
-            </a:pPr>
-            <a:r>
-              <a:rPr lang="en-US" sz="1300" b="1" dirty="0">
-                <a:solidFill>
-                  <a:srgbClr val="0F766E"/>
-                </a:solidFill>
-                <a:latin typeface="Trebuchet MS" pitchFamily="34" charset="0"/>
-                <a:ea typeface="Trebuchet MS" pitchFamily="34" charset="-122"/>
-                <a:cs typeface="Trebuchet MS" pitchFamily="34" charset="-120"/>
-              </a:rPr>
-              <a:t>mother</a:t>
-            </a:r>
-            <a:endParaRPr lang="en-US" sz="1300" dirty="0"/>
-          </a:p>
-        </p:txBody>
-      </p:sp>
-      <p:sp>
-        <p:nvSpPr>
-          <p:cNvPr id="37" name="Shape 35"/>
-          <p:cNvSpPr/>
-          <p:nvPr/>
-        </p:nvSpPr>
-        <p:spPr>
-          <a:xfrm>
-            <a:off x="5943600" y="3127248"/>
-            <a:ext cx="1463040" cy="420624"/>
-          </a:xfrm>
-          <a:prstGeom prst="rect">
-            <a:avLst/>
-          </a:prstGeom>
-          <a:solidFill>
-            <a:srgbClr val="F1F5F9"/>
-          </a:solidFill>
-          <a:ln w="12700">
-            <a:solidFill>
-              <a:srgbClr val="E5E7EB"/>
-            </a:solidFill>
-            <a:prstDash val="solid"/>
-          </a:ln>
-        </p:spPr>
-      </p:sp>
-      <p:sp>
-        <p:nvSpPr>
-          <p:cNvPr id="38" name="Shape 36"/>
-          <p:cNvSpPr/>
-          <p:nvPr/>
-        </p:nvSpPr>
-        <p:spPr>
-          <a:xfrm>
-            <a:off x="640080" y="3584448"/>
-            <a:ext cx="1463040" cy="420624"/>
-          </a:xfrm>
-          <a:prstGeom prst="rect">
-            <a:avLst/>
-          </a:prstGeom>
-          <a:solidFill>
-            <a:srgbClr val="DDD6FE"/>
-          </a:solidFill>
-          <a:ln w="12700">
-            <a:solidFill>
-              <a:srgbClr val="E5E7EB"/>
-            </a:solidFill>
-            <a:prstDash val="solid"/>
-          </a:ln>
-        </p:spPr>
-      </p:sp>
-      <p:sp>
-        <p:nvSpPr>
-          <p:cNvPr id="39" name="Text 37"/>
-          <p:cNvSpPr/>
-          <p:nvPr/>
-        </p:nvSpPr>
-        <p:spPr>
-          <a:xfrm>
-            <a:off x="640080" y="3584448"/>
-            <a:ext cx="1463040" cy="420624"/>
-          </a:xfrm>
-          <a:prstGeom prst="rect">
-            <a:avLst/>
-          </a:prstGeom>
-          <a:noFill/>
-          <a:ln/>
-        </p:spPr>
-        <p:txBody>
-          <a:bodyPr wrap="square" lIns="0" tIns="0" rIns="0" bIns="0" rtlCol="0" anchor="ctr"/>
-          <a:lstStyle/>
-          <a:p>
-            <a:pPr algn="ctr" indent="0" marL="0">
-              <a:buNone/>
-            </a:pPr>
-            <a:r>
-              <a:rPr lang="en-US" sz="1300" b="1" dirty="0">
-                <a:solidFill>
-                  <a:srgbClr val="4C1D95"/>
-                </a:solidFill>
-                <a:latin typeface="Trebuchet MS" pitchFamily="34" charset="0"/>
-                <a:ea typeface="Trebuchet MS" pitchFamily="34" charset="-122"/>
-                <a:cs typeface="Trebuchet MS" pitchFamily="34" charset="-120"/>
-              </a:rPr>
-              <a:t>re-</a:t>
-            </a:r>
-            <a:endParaRPr lang="en-US" sz="1300" dirty="0"/>
-          </a:p>
-        </p:txBody>
-      </p:sp>
-      <p:sp>
-        <p:nvSpPr>
-          <p:cNvPr id="40" name="Shape 38"/>
-          <p:cNvSpPr/>
-          <p:nvPr/>
-        </p:nvSpPr>
-        <p:spPr>
-          <a:xfrm>
-            <a:off x="3291840" y="3584448"/>
-            <a:ext cx="1645920" cy="420624"/>
-          </a:xfrm>
-          <a:prstGeom prst="rect">
-            <a:avLst/>
-          </a:prstGeom>
-          <a:solidFill>
-            <a:srgbClr val="CCFBF1"/>
-          </a:solidFill>
-          <a:ln w="12700">
-            <a:solidFill>
-              <a:srgbClr val="E5E7EB"/>
-            </a:solidFill>
-            <a:prstDash val="solid"/>
-          </a:ln>
-        </p:spPr>
-      </p:sp>
-      <p:sp>
-        <p:nvSpPr>
-          <p:cNvPr id="41" name="Text 39"/>
-          <p:cNvSpPr/>
-          <p:nvPr/>
-        </p:nvSpPr>
-        <p:spPr>
-          <a:xfrm>
-            <a:off x="3291840" y="3584448"/>
-            <a:ext cx="1645920" cy="420624"/>
-          </a:xfrm>
-          <a:prstGeom prst="rect">
-            <a:avLst/>
-          </a:prstGeom>
-          <a:noFill/>
-          <a:ln/>
-        </p:spPr>
-        <p:txBody>
-          <a:bodyPr wrap="square" lIns="0" tIns="0" rIns="0" bIns="0" rtlCol="0" anchor="ctr"/>
-          <a:lstStyle/>
-          <a:p>
-            <a:pPr algn="ctr" indent="0" marL="0">
-              <a:buNone/>
-            </a:pPr>
-            <a:r>
-              <a:rPr lang="en-US" sz="1300" b="1" dirty="0">
-                <a:solidFill>
-                  <a:srgbClr val="0F766E"/>
-                </a:solidFill>
-                <a:latin typeface="Trebuchet MS" pitchFamily="34" charset="0"/>
-                <a:ea typeface="Trebuchet MS" pitchFamily="34" charset="-122"/>
-                <a:cs typeface="Trebuchet MS" pitchFamily="34" charset="-120"/>
-              </a:rPr>
-              <a:t>knight</a:t>
-            </a:r>
-            <a:endParaRPr lang="en-US" sz="1300" dirty="0"/>
-          </a:p>
-        </p:txBody>
-      </p:sp>
-      <p:sp>
-        <p:nvSpPr>
-          <p:cNvPr id="42" name="Shape 40"/>
-          <p:cNvSpPr/>
-          <p:nvPr/>
-        </p:nvSpPr>
-        <p:spPr>
-          <a:xfrm>
-            <a:off x="5943600" y="3584448"/>
-            <a:ext cx="1463040" cy="420624"/>
-          </a:xfrm>
-          <a:prstGeom prst="rect">
-            <a:avLst/>
-          </a:prstGeom>
-          <a:solidFill>
-            <a:srgbClr val="F8FAFC"/>
-          </a:solidFill>
-          <a:ln w="12700">
-            <a:solidFill>
-              <a:srgbClr val="E5E7EB"/>
-            </a:solidFill>
-            <a:prstDash val="solid"/>
-          </a:ln>
-        </p:spPr>
-      </p:sp>
-      <p:sp>
-        <p:nvSpPr>
-          <p:cNvPr id="43" name="Text 41"/>
-          <p:cNvSpPr/>
-          <p:nvPr/>
-        </p:nvSpPr>
-        <p:spPr>
-          <a:xfrm>
-            <a:off x="365760" y="4178808"/>
+          <p:cNvPr id="42" name="Text 40"/>
+          <p:cNvSpPr/>
+          <p:nvPr/>
+        </p:nvSpPr>
+        <p:spPr>
+          <a:xfrm>
+            <a:off x="365760" y="4636008"/>
             <a:ext cx="1097280" cy="420624"/>
           </a:xfrm>
           <a:prstGeom prst="rect">
@@ -39900,14 +39184,14 @@
       </p:sp>
       <p:sp>
         <p:nvSpPr>
-          <p:cNvPr id="44" name="Shape 42"/>
-          <p:cNvSpPr/>
-          <p:nvPr/>
-        </p:nvSpPr>
-        <p:spPr>
-          <a:xfrm>
-            <a:off x="1508760" y="4178808"/>
-            <a:ext cx="822960" cy="420624"/>
+          <p:cNvPr id="43" name="Shape 41"/>
+          <p:cNvSpPr/>
+          <p:nvPr/>
+        </p:nvSpPr>
+        <p:spPr>
+          <a:xfrm>
+            <a:off x="1508760" y="4636008"/>
+            <a:ext cx="1097280" cy="420624"/>
           </a:xfrm>
           <a:prstGeom prst="rect">
             <a:avLst>
@@ -39915,11 +39199,11 @@
             </a:avLst>
           </a:prstGeom>
           <a:solidFill>
-            <a:srgbClr val="DDD6FE"/>
+            <a:srgbClr val="CCFBF1"/>
           </a:solidFill>
           <a:ln w="19050">
             <a:solidFill>
-              <a:srgbClr val="7C3AED"/>
+              <a:srgbClr val="0D9488"/>
             </a:solidFill>
             <a:prstDash val="solid"/>
           </a:ln>
@@ -39934,14 +39218,14 @@
       </p:sp>
       <p:sp>
         <p:nvSpPr>
-          <p:cNvPr id="45" name="Text 43"/>
-          <p:cNvSpPr/>
-          <p:nvPr/>
-        </p:nvSpPr>
-        <p:spPr>
-          <a:xfrm>
-            <a:off x="1508760" y="4178808"/>
-            <a:ext cx="822960" cy="420624"/>
+          <p:cNvPr id="44" name="Text 42"/>
+          <p:cNvSpPr/>
+          <p:nvPr/>
+        </p:nvSpPr>
+        <p:spPr>
+          <a:xfrm>
+            <a:off x="1508760" y="4636008"/>
+            <a:ext cx="1097280" cy="420624"/>
           </a:xfrm>
           <a:prstGeom prst="rect">
             <a:avLst/>
@@ -39959,13 +39243,13 @@
             <a:r>
               <a:rPr lang="en-US" sz="1300" b="1" dirty="0">
                 <a:solidFill>
-                  <a:srgbClr val="4C1D95"/>
+                  <a:srgbClr val="0F766E"/>
                 </a:solidFill>
                 <a:latin typeface="Trebuchet MS" pitchFamily="34" charset="0"/>
                 <a:ea typeface="Trebuchet MS" pitchFamily="34" charset="-122"/>
                 <a:cs typeface="Trebuchet MS" pitchFamily="34" charset="-120"/>
               </a:rPr>
-              <a:t>un-</a:t>
+              <a:t>child</a:t>
             </a:r>
             <a:endParaRPr lang="en-US" sz="1300" dirty="0"/>
           </a:p>
@@ -39973,13 +39257,13 @@
       </p:sp>
       <p:sp>
         <p:nvSpPr>
-          <p:cNvPr id="46" name="Text 44"/>
-          <p:cNvSpPr/>
-          <p:nvPr/>
-        </p:nvSpPr>
-        <p:spPr>
-          <a:xfrm>
-            <a:off x="2359152" y="4178808"/>
+          <p:cNvPr id="45" name="Text 43"/>
+          <p:cNvSpPr/>
+          <p:nvPr/>
+        </p:nvSpPr>
+        <p:spPr>
+          <a:xfrm>
+            <a:off x="2633472" y="4636008"/>
             <a:ext cx="320040" cy="420624"/>
           </a:xfrm>
           <a:prstGeom prst="rect">
@@ -40012,13 +39296,13 @@
       </p:sp>
       <p:sp>
         <p:nvSpPr>
-          <p:cNvPr id="47" name="Shape 45"/>
-          <p:cNvSpPr/>
-          <p:nvPr/>
-        </p:nvSpPr>
-        <p:spPr>
-          <a:xfrm>
-            <a:off x="2706624" y="4178808"/>
+          <p:cNvPr id="46" name="Shape 44"/>
+          <p:cNvSpPr/>
+          <p:nvPr/>
+        </p:nvSpPr>
+        <p:spPr>
+          <a:xfrm>
+            <a:off x="2980944" y="4636008"/>
             <a:ext cx="1097280" cy="420624"/>
           </a:xfrm>
           <a:prstGeom prst="rect">
@@ -40027,11 +39311,11 @@
             </a:avLst>
           </a:prstGeom>
           <a:solidFill>
-            <a:srgbClr val="CCFBF1"/>
+            <a:srgbClr val="FCE7F3"/>
           </a:solidFill>
           <a:ln w="19050">
             <a:solidFill>
-              <a:srgbClr val="0D9488"/>
+              <a:srgbClr val="DB2777"/>
             </a:solidFill>
             <a:prstDash val="solid"/>
           </a:ln>
@@ -40046,13 +39330,13 @@
       </p:sp>
       <p:sp>
         <p:nvSpPr>
-          <p:cNvPr id="48" name="Text 46"/>
-          <p:cNvSpPr/>
-          <p:nvPr/>
-        </p:nvSpPr>
-        <p:spPr>
-          <a:xfrm>
-            <a:off x="2706624" y="4178808"/>
+          <p:cNvPr id="47" name="Text 45"/>
+          <p:cNvSpPr/>
+          <p:nvPr/>
+        </p:nvSpPr>
+        <p:spPr>
+          <a:xfrm>
+            <a:off x="2980944" y="4636008"/>
             <a:ext cx="1097280" cy="420624"/>
           </a:xfrm>
           <a:prstGeom prst="rect">
@@ -40071,13 +39355,13 @@
             <a:r>
               <a:rPr lang="en-US" sz="1300" b="1" dirty="0">
                 <a:solidFill>
-                  <a:srgbClr val="0F766E"/>
+                  <a:srgbClr val="9D174D"/>
                 </a:solidFill>
                 <a:latin typeface="Trebuchet MS" pitchFamily="34" charset="0"/>
                 <a:ea typeface="Trebuchet MS" pitchFamily="34" charset="-122"/>
                 <a:cs typeface="Trebuchet MS" pitchFamily="34" charset="-120"/>
               </a:rPr>
-              <a:t>child</a:t>
+              <a:t>-hood</a:t>
             </a:r>
             <a:endParaRPr lang="en-US" sz="1300" dirty="0"/>
           </a:p>
@@ -40085,14 +39369,14 @@
       </p:sp>
       <p:sp>
         <p:nvSpPr>
-          <p:cNvPr id="49" name="Text 47"/>
-          <p:cNvSpPr/>
-          <p:nvPr/>
-        </p:nvSpPr>
-        <p:spPr>
-          <a:xfrm>
-            <a:off x="3831336" y="4178808"/>
-            <a:ext cx="320040" cy="420624"/>
+          <p:cNvPr id="48" name="Text 46"/>
+          <p:cNvSpPr/>
+          <p:nvPr/>
+        </p:nvSpPr>
+        <p:spPr>
+          <a:xfrm>
+            <a:off x="4151376" y="4636008"/>
+            <a:ext cx="365760" cy="420624"/>
           </a:xfrm>
           <a:prstGeom prst="rect">
             <a:avLst/>
@@ -40108,30 +39392,30 @@
               <a:buNone/>
             </a:pPr>
             <a:r>
-              <a:rPr lang="en-US" sz="1400" dirty="0">
-                <a:solidFill>
-                  <a:srgbClr val="475569"/>
+              <a:rPr lang="en-US" sz="1800" b="1" dirty="0">
+                <a:solidFill>
+                  <a:srgbClr val="0D9488"/>
                 </a:solidFill>
                 <a:latin typeface="Trebuchet MS" pitchFamily="34" charset="0"/>
                 <a:ea typeface="Trebuchet MS" pitchFamily="34" charset="-122"/>
                 <a:cs typeface="Trebuchet MS" pitchFamily="34" charset="-120"/>
               </a:rPr>
-              <a:t>+</a:t>
-            </a:r>
-            <a:endParaRPr lang="en-US" sz="1400" dirty="0"/>
-          </a:p>
-        </p:txBody>
-      </p:sp>
-      <p:sp>
-        <p:nvSpPr>
-          <p:cNvPr id="50" name="Shape 48"/>
-          <p:cNvSpPr/>
-          <p:nvPr/>
-        </p:nvSpPr>
-        <p:spPr>
-          <a:xfrm>
-            <a:off x="4178808" y="4178808"/>
-            <a:ext cx="1097280" cy="420624"/>
+              <a:t>=</a:t>
+            </a:r>
+            <a:endParaRPr lang="en-US" sz="1800" dirty="0"/>
+          </a:p>
+        </p:txBody>
+      </p:sp>
+      <p:sp>
+        <p:nvSpPr>
+          <p:cNvPr id="49" name="Shape 47"/>
+          <p:cNvSpPr/>
+          <p:nvPr/>
+        </p:nvSpPr>
+        <p:spPr>
+          <a:xfrm>
+            <a:off x="4562856" y="4636008"/>
+            <a:ext cx="2194560" cy="420624"/>
           </a:xfrm>
           <a:prstGeom prst="rect">
             <a:avLst>
@@ -40139,118 +39423,6 @@
             </a:avLst>
           </a:prstGeom>
           <a:solidFill>
-            <a:srgbClr val="FCE7F3"/>
-          </a:solidFill>
-          <a:ln w="19050">
-            <a:solidFill>
-              <a:srgbClr val="DB2777"/>
-            </a:solidFill>
-            <a:prstDash val="solid"/>
-          </a:ln>
-          <a:effectLst>
-            <a:outerShdw sx="100000" sy="100000" kx="0" ky="0" algn="bl" rotWithShape="0" blurRad="101600" dist="38100" dir="8100000">
-              <a:srgbClr val="000000">
-                <a:alpha val="12000"/>
-              </a:srgbClr>
-            </a:outerShdw>
-          </a:effectLst>
-        </p:spPr>
-      </p:sp>
-      <p:sp>
-        <p:nvSpPr>
-          <p:cNvPr id="51" name="Text 49"/>
-          <p:cNvSpPr/>
-          <p:nvPr/>
-        </p:nvSpPr>
-        <p:spPr>
-          <a:xfrm>
-            <a:off x="4178808" y="4178808"/>
-            <a:ext cx="1097280" cy="420624"/>
-          </a:xfrm>
-          <a:prstGeom prst="rect">
-            <a:avLst/>
-          </a:prstGeom>
-          <a:noFill/>
-          <a:ln/>
-        </p:spPr>
-        <p:txBody>
-          <a:bodyPr wrap="square" lIns="0" tIns="0" rIns="0" bIns="0" rtlCol="0" anchor="ctr"/>
-          <a:lstStyle/>
-          <a:p>
-            <a:pPr algn="ctr" indent="0" marL="0">
-              <a:buNone/>
-            </a:pPr>
-            <a:r>
-              <a:rPr lang="en-US" sz="1300" b="1" dirty="0">
-                <a:solidFill>
-                  <a:srgbClr val="9D174D"/>
-                </a:solidFill>
-                <a:latin typeface="Trebuchet MS" pitchFamily="34" charset="0"/>
-                <a:ea typeface="Trebuchet MS" pitchFamily="34" charset="-122"/>
-                <a:cs typeface="Trebuchet MS" pitchFamily="34" charset="-120"/>
-              </a:rPr>
-              <a:t>-hood</a:t>
-            </a:r>
-            <a:endParaRPr lang="en-US" sz="1300" dirty="0"/>
-          </a:p>
-        </p:txBody>
-      </p:sp>
-      <p:sp>
-        <p:nvSpPr>
-          <p:cNvPr id="52" name="Text 50"/>
-          <p:cNvSpPr/>
-          <p:nvPr/>
-        </p:nvSpPr>
-        <p:spPr>
-          <a:xfrm>
-            <a:off x="5349240" y="4178808"/>
-            <a:ext cx="365760" cy="420624"/>
-          </a:xfrm>
-          <a:prstGeom prst="rect">
-            <a:avLst/>
-          </a:prstGeom>
-          <a:noFill/>
-          <a:ln/>
-        </p:spPr>
-        <p:txBody>
-          <a:bodyPr wrap="square" lIns="0" tIns="0" rIns="0" bIns="0" rtlCol="0" anchor="ctr"/>
-          <a:lstStyle/>
-          <a:p>
-            <a:pPr algn="ctr" indent="0" marL="0">
-              <a:buNone/>
-            </a:pPr>
-            <a:r>
-              <a:rPr lang="en-US" sz="1800" b="1" dirty="0">
-                <a:solidFill>
-                  <a:srgbClr val="0D9488"/>
-                </a:solidFill>
-                <a:latin typeface="Trebuchet MS" pitchFamily="34" charset="0"/>
-                <a:ea typeface="Trebuchet MS" pitchFamily="34" charset="-122"/>
-                <a:cs typeface="Trebuchet MS" pitchFamily="34" charset="-120"/>
-              </a:rPr>
-              <a:t>=</a:t>
-            </a:r>
-            <a:endParaRPr lang="en-US" sz="1800" dirty="0"/>
-          </a:p>
-        </p:txBody>
-      </p:sp>
-      <p:sp>
-        <p:nvSpPr>
-          <p:cNvPr id="53" name="Shape 51"/>
-          <p:cNvSpPr/>
-          <p:nvPr/>
-        </p:nvSpPr>
-        <p:spPr>
-          <a:xfrm>
-            <a:off x="5760720" y="4178808"/>
-            <a:ext cx="2194560" cy="420624"/>
-          </a:xfrm>
-          <a:prstGeom prst="rect">
-            <a:avLst>
-              <a:gd name="adj" fmla="val 17391"/>
-            </a:avLst>
-          </a:prstGeom>
-          <a:solidFill>
             <a:srgbClr val="0D9488"/>
           </a:solidFill>
           <a:ln w="12700">
@@ -40263,13 +39435,13 @@
       </p:sp>
       <p:sp>
         <p:nvSpPr>
-          <p:cNvPr id="54" name="Text 52"/>
-          <p:cNvSpPr/>
-          <p:nvPr/>
-        </p:nvSpPr>
-        <p:spPr>
-          <a:xfrm>
-            <a:off x="5760720" y="4178808"/>
+          <p:cNvPr id="50" name="Text 48"/>
+          <p:cNvSpPr/>
+          <p:nvPr/>
+        </p:nvSpPr>
+        <p:spPr>
+          <a:xfrm>
+            <a:off x="4562856" y="4636008"/>
             <a:ext cx="2194560" cy="420624"/>
           </a:xfrm>
           <a:prstGeom prst="rect">
@@ -40586,7 +39758,7 @@
                 <a:ea typeface="Calibri" pitchFamily="34" charset="-122"/>
                 <a:cs typeface="Calibri" pitchFamily="34" charset="-120"/>
               </a:rPr>
-              <a:t>Word Labs  •  wordlabs.app  •  Suffix: '-hood' = state, condition, or group</a:t>
+              <a:t>Word Labs  •  wordlabs.app  •  Suffix: '-hood' = state of</a:t>
             </a:r>
             <a:endParaRPr lang="en-US" sz="800" dirty="0"/>
           </a:p>
@@ -40764,7 +39936,7 @@
                 <a:ea typeface="Calibri" pitchFamily="34" charset="-122"/>
                 <a:cs typeface="Calibri" pitchFamily="34" charset="-120"/>
               </a:rPr>
-              <a:t>An honour given by a king or queen that allows someone to be called 'Sir'.</a:t>
+              <a:t>the period of a person's life when they are a child</a:t>
             </a:r>
             <a:endParaRPr lang="en-US" sz="1200" dirty="0"/>
           </a:p>
@@ -40837,7 +40009,7 @@
                 <a:ea typeface="Trebuchet MS" pitchFamily="34" charset="-122"/>
                 <a:cs typeface="Trebuchet MS" pitchFamily="34" charset="-120"/>
               </a:rPr>
-              <a:t>neighbourhood</a:t>
+              <a:t>likelihood</a:t>
             </a:r>
             <a:endParaRPr lang="en-US" sz="1200" dirty="0"/>
           </a:p>
@@ -40903,7 +40075,7 @@
                 <a:ea typeface="Calibri" pitchFamily="34" charset="-122"/>
                 <a:cs typeface="Calibri" pitchFamily="34" charset="-120"/>
               </a:rPr>
-              <a:t>A feeling of friendship and support shared between people, like brothers.</a:t>
+              <a:t>the time of life when a person is fully grown up</a:t>
             </a:r>
             <a:endParaRPr lang="en-US" sz="1200" dirty="0"/>
           </a:p>
@@ -40976,7 +40148,7 @@
                 <a:ea typeface="Trebuchet MS" pitchFamily="34" charset="-122"/>
                 <a:cs typeface="Trebuchet MS" pitchFamily="34" charset="-120"/>
               </a:rPr>
-              <a:t>brotherhood</a:t>
+              <a:t>adulthood</a:t>
             </a:r>
             <a:endParaRPr lang="en-US" sz="1200" dirty="0"/>
           </a:p>
@@ -41042,563 +40214,7 @@
                 <a:ea typeface="Calibri" pitchFamily="34" charset="-122"/>
                 <a:cs typeface="Calibri" pitchFamily="34" charset="-120"/>
               </a:rPr>
-              <a:t>How probable or possible it is that something will happen.</a:t>
-            </a:r>
-            <a:endParaRPr lang="en-US" sz="1200" dirty="0"/>
-          </a:p>
-        </p:txBody>
-      </p:sp>
-      <p:sp>
-        <p:nvSpPr>
-          <p:cNvPr id="23" name="Shape 21"/>
-          <p:cNvSpPr/>
-          <p:nvPr/>
-        </p:nvSpPr>
-        <p:spPr>
-          <a:xfrm>
-            <a:off x="365760" y="2779776"/>
-            <a:ext cx="2011680" cy="457200"/>
-          </a:xfrm>
-          <a:prstGeom prst="rect">
-            <a:avLst>
-              <a:gd name="adj" fmla="val 12000"/>
-            </a:avLst>
-          </a:prstGeom>
-          <a:solidFill>
-            <a:srgbClr val="EEF2FF"/>
-          </a:solidFill>
-          <a:ln w="12700">
-            <a:solidFill>
-              <a:srgbClr val="6366F1"/>
-            </a:solidFill>
-            <a:prstDash val="solid"/>
-          </a:ln>
-          <a:effectLst>
-            <a:outerShdw sx="100000" sy="100000" kx="0" ky="0" algn="bl" rotWithShape="0" blurRad="101600" dist="38100" dir="8100000">
-              <a:srgbClr val="000000">
-                <a:alpha val="12000"/>
-              </a:srgbClr>
-            </a:outerShdw>
-          </a:effectLst>
-        </p:spPr>
-      </p:sp>
-      <p:sp>
-        <p:nvSpPr>
-          <p:cNvPr id="24" name="Text 22"/>
-          <p:cNvSpPr/>
-          <p:nvPr/>
-        </p:nvSpPr>
-        <p:spPr>
-          <a:xfrm>
-            <a:off x="365760" y="2779776"/>
-            <a:ext cx="2011680" cy="457200"/>
-          </a:xfrm>
-          <a:prstGeom prst="rect">
-            <a:avLst/>
-          </a:prstGeom>
-          <a:noFill/>
-          <a:ln/>
-        </p:spPr>
-        <p:txBody>
-          <a:bodyPr wrap="square" lIns="0" tIns="0" rIns="0" bIns="0" rtlCol="0" anchor="ctr"/>
-          <a:lstStyle/>
-          <a:p>
-            <a:pPr algn="ctr" indent="0" marL="0">
-              <a:buNone/>
-            </a:pPr>
-            <a:r>
-              <a:rPr lang="en-US" sz="1200" b="1" dirty="0">
-                <a:solidFill>
-                  <a:srgbClr val="4338CA"/>
-                </a:solidFill>
-                <a:latin typeface="Trebuchet MS" pitchFamily="34" charset="0"/>
-                <a:ea typeface="Trebuchet MS" pitchFamily="34" charset="-122"/>
-                <a:cs typeface="Trebuchet MS" pitchFamily="34" charset="-120"/>
-              </a:rPr>
-              <a:t>motherhood</a:t>
-            </a:r>
-            <a:endParaRPr lang="en-US" sz="1200" dirty="0"/>
-          </a:p>
-        </p:txBody>
-      </p:sp>
-      <p:sp>
-        <p:nvSpPr>
-          <p:cNvPr id="25" name="Shape 23"/>
-          <p:cNvSpPr/>
-          <p:nvPr/>
-        </p:nvSpPr>
-        <p:spPr>
-          <a:xfrm>
-            <a:off x="2514600" y="2779776"/>
-            <a:ext cx="6263640" cy="457200"/>
-          </a:xfrm>
-          <a:prstGeom prst="rect">
-            <a:avLst>
-              <a:gd name="adj" fmla="val 12000"/>
-            </a:avLst>
-          </a:prstGeom>
-          <a:solidFill>
-            <a:srgbClr val="F8FAFC"/>
-          </a:solidFill>
-          <a:ln w="12700">
-            <a:solidFill>
-              <a:srgbClr val="E2E8F0"/>
-            </a:solidFill>
-            <a:prstDash val="solid"/>
-          </a:ln>
-        </p:spPr>
-      </p:sp>
-      <p:sp>
-        <p:nvSpPr>
-          <p:cNvPr id="26" name="Text 24"/>
-          <p:cNvSpPr/>
-          <p:nvPr/>
-        </p:nvSpPr>
-        <p:spPr>
-          <a:xfrm>
-            <a:off x="2651760" y="2779776"/>
-            <a:ext cx="6035040" cy="457200"/>
-          </a:xfrm>
-          <a:prstGeom prst="rect">
-            <a:avLst/>
-          </a:prstGeom>
-          <a:noFill/>
-          <a:ln/>
-        </p:spPr>
-        <p:txBody>
-          <a:bodyPr wrap="square" rtlCol="0" anchor="ctr"/>
-          <a:lstStyle/>
-          <a:p>
-            <a:pPr algn="l" indent="0" marL="0">
-              <a:buNone/>
-            </a:pPr>
-            <a:r>
-              <a:rPr lang="en-US" sz="1200" dirty="0">
-                <a:solidFill>
-                  <a:srgbClr val="0F172A"/>
-                </a:solidFill>
-                <a:latin typeface="Calibri" pitchFamily="34" charset="0"/>
-                <a:ea typeface="Calibri" pitchFamily="34" charset="-122"/>
-                <a:cs typeface="Calibri" pitchFamily="34" charset="-120"/>
-              </a:rPr>
-              <a:t>The state of being a mother and caring for children.</a:t>
-            </a:r>
-            <a:endParaRPr lang="en-US" sz="1200" dirty="0"/>
-          </a:p>
-        </p:txBody>
-      </p:sp>
-      <p:sp>
-        <p:nvSpPr>
-          <p:cNvPr id="27" name="Shape 25"/>
-          <p:cNvSpPr/>
-          <p:nvPr/>
-        </p:nvSpPr>
-        <p:spPr>
-          <a:xfrm>
-            <a:off x="365760" y="3310128"/>
-            <a:ext cx="2011680" cy="457200"/>
-          </a:xfrm>
-          <a:prstGeom prst="rect">
-            <a:avLst>
-              <a:gd name="adj" fmla="val 12000"/>
-            </a:avLst>
-          </a:prstGeom>
-          <a:solidFill>
-            <a:srgbClr val="EEF2FF"/>
-          </a:solidFill>
-          <a:ln w="12700">
-            <a:solidFill>
-              <a:srgbClr val="6366F1"/>
-            </a:solidFill>
-            <a:prstDash val="solid"/>
-          </a:ln>
-          <a:effectLst>
-            <a:outerShdw sx="100000" sy="100000" kx="0" ky="0" algn="bl" rotWithShape="0" blurRad="101600" dist="38100" dir="8100000">
-              <a:srgbClr val="000000">
-                <a:alpha val="12000"/>
-              </a:srgbClr>
-            </a:outerShdw>
-          </a:effectLst>
-        </p:spPr>
-      </p:sp>
-      <p:sp>
-        <p:nvSpPr>
-          <p:cNvPr id="28" name="Text 26"/>
-          <p:cNvSpPr/>
-          <p:nvPr/>
-        </p:nvSpPr>
-        <p:spPr>
-          <a:xfrm>
-            <a:off x="365760" y="3310128"/>
-            <a:ext cx="2011680" cy="457200"/>
-          </a:xfrm>
-          <a:prstGeom prst="rect">
-            <a:avLst/>
-          </a:prstGeom>
-          <a:noFill/>
-          <a:ln/>
-        </p:spPr>
-        <p:txBody>
-          <a:bodyPr wrap="square" lIns="0" tIns="0" rIns="0" bIns="0" rtlCol="0" anchor="ctr"/>
-          <a:lstStyle/>
-          <a:p>
-            <a:pPr algn="ctr" indent="0" marL="0">
-              <a:buNone/>
-            </a:pPr>
-            <a:r>
-              <a:rPr lang="en-US" sz="1200" b="1" dirty="0">
-                <a:solidFill>
-                  <a:srgbClr val="4338CA"/>
-                </a:solidFill>
-                <a:latin typeface="Trebuchet MS" pitchFamily="34" charset="0"/>
-                <a:ea typeface="Trebuchet MS" pitchFamily="34" charset="-122"/>
-                <a:cs typeface="Trebuchet MS" pitchFamily="34" charset="-120"/>
-              </a:rPr>
-              <a:t>knighthood</a:t>
-            </a:r>
-            <a:endParaRPr lang="en-US" sz="1200" dirty="0"/>
-          </a:p>
-        </p:txBody>
-      </p:sp>
-      <p:sp>
-        <p:nvSpPr>
-          <p:cNvPr id="29" name="Shape 27"/>
-          <p:cNvSpPr/>
-          <p:nvPr/>
-        </p:nvSpPr>
-        <p:spPr>
-          <a:xfrm>
-            <a:off x="2514600" y="3310128"/>
-            <a:ext cx="6263640" cy="457200"/>
-          </a:xfrm>
-          <a:prstGeom prst="rect">
-            <a:avLst>
-              <a:gd name="adj" fmla="val 12000"/>
-            </a:avLst>
-          </a:prstGeom>
-          <a:solidFill>
-            <a:srgbClr val="F8FAFC"/>
-          </a:solidFill>
-          <a:ln w="12700">
-            <a:solidFill>
-              <a:srgbClr val="E2E8F0"/>
-            </a:solidFill>
-            <a:prstDash val="solid"/>
-          </a:ln>
-        </p:spPr>
-      </p:sp>
-      <p:sp>
-        <p:nvSpPr>
-          <p:cNvPr id="30" name="Text 28"/>
-          <p:cNvSpPr/>
-          <p:nvPr/>
-        </p:nvSpPr>
-        <p:spPr>
-          <a:xfrm>
-            <a:off x="2651760" y="3310128"/>
-            <a:ext cx="6035040" cy="457200"/>
-          </a:xfrm>
-          <a:prstGeom prst="rect">
-            <a:avLst/>
-          </a:prstGeom>
-          <a:noFill/>
-          <a:ln/>
-        </p:spPr>
-        <p:txBody>
-          <a:bodyPr wrap="square" rtlCol="0" anchor="ctr"/>
-          <a:lstStyle/>
-          <a:p>
-            <a:pPr algn="l" indent="0" marL="0">
-              <a:buNone/>
-            </a:pPr>
-            <a:r>
-              <a:rPr lang="en-US" sz="1200" dirty="0">
-                <a:solidFill>
-                  <a:srgbClr val="0F172A"/>
-                </a:solidFill>
-                <a:latin typeface="Calibri" pitchFamily="34" charset="0"/>
-                <a:ea typeface="Calibri" pitchFamily="34" charset="-122"/>
-                <a:cs typeface="Calibri" pitchFamily="34" charset="-120"/>
-              </a:rPr>
-              <a:t>The time in your life when you are a child.</a:t>
-            </a:r>
-            <a:endParaRPr lang="en-US" sz="1200" dirty="0"/>
-          </a:p>
-        </p:txBody>
-      </p:sp>
-      <p:sp>
-        <p:nvSpPr>
-          <p:cNvPr id="31" name="Shape 29"/>
-          <p:cNvSpPr/>
-          <p:nvPr/>
-        </p:nvSpPr>
-        <p:spPr>
-          <a:xfrm>
-            <a:off x="365760" y="3840480"/>
-            <a:ext cx="2011680" cy="457200"/>
-          </a:xfrm>
-          <a:prstGeom prst="rect">
-            <a:avLst>
-              <a:gd name="adj" fmla="val 12000"/>
-            </a:avLst>
-          </a:prstGeom>
-          <a:solidFill>
-            <a:srgbClr val="EEF2FF"/>
-          </a:solidFill>
-          <a:ln w="12700">
-            <a:solidFill>
-              <a:srgbClr val="6366F1"/>
-            </a:solidFill>
-            <a:prstDash val="solid"/>
-          </a:ln>
-          <a:effectLst>
-            <a:outerShdw sx="100000" sy="100000" kx="0" ky="0" algn="bl" rotWithShape="0" blurRad="101600" dist="38100" dir="8100000">
-              <a:srgbClr val="000000">
-                <a:alpha val="12000"/>
-              </a:srgbClr>
-            </a:outerShdw>
-          </a:effectLst>
-        </p:spPr>
-      </p:sp>
-      <p:sp>
-        <p:nvSpPr>
-          <p:cNvPr id="32" name="Text 30"/>
-          <p:cNvSpPr/>
-          <p:nvPr/>
-        </p:nvSpPr>
-        <p:spPr>
-          <a:xfrm>
-            <a:off x="365760" y="3840480"/>
-            <a:ext cx="2011680" cy="457200"/>
-          </a:xfrm>
-          <a:prstGeom prst="rect">
-            <a:avLst/>
-          </a:prstGeom>
-          <a:noFill/>
-          <a:ln/>
-        </p:spPr>
-        <p:txBody>
-          <a:bodyPr wrap="square" lIns="0" tIns="0" rIns="0" bIns="0" rtlCol="0" anchor="ctr"/>
-          <a:lstStyle/>
-          <a:p>
-            <a:pPr algn="ctr" indent="0" marL="0">
-              <a:buNone/>
-            </a:pPr>
-            <a:r>
-              <a:rPr lang="en-US" sz="1200" b="1" dirty="0">
-                <a:solidFill>
-                  <a:srgbClr val="4338CA"/>
-                </a:solidFill>
-                <a:latin typeface="Trebuchet MS" pitchFamily="34" charset="0"/>
-                <a:ea typeface="Trebuchet MS" pitchFamily="34" charset="-122"/>
-                <a:cs typeface="Trebuchet MS" pitchFamily="34" charset="-120"/>
-              </a:rPr>
-              <a:t>likelihood</a:t>
-            </a:r>
-            <a:endParaRPr lang="en-US" sz="1200" dirty="0"/>
-          </a:p>
-        </p:txBody>
-      </p:sp>
-      <p:sp>
-        <p:nvSpPr>
-          <p:cNvPr id="33" name="Shape 31"/>
-          <p:cNvSpPr/>
-          <p:nvPr/>
-        </p:nvSpPr>
-        <p:spPr>
-          <a:xfrm>
-            <a:off x="2514600" y="3840480"/>
-            <a:ext cx="6263640" cy="457200"/>
-          </a:xfrm>
-          <a:prstGeom prst="rect">
-            <a:avLst>
-              <a:gd name="adj" fmla="val 12000"/>
-            </a:avLst>
-          </a:prstGeom>
-          <a:solidFill>
-            <a:srgbClr val="F8FAFC"/>
-          </a:solidFill>
-          <a:ln w="12700">
-            <a:solidFill>
-              <a:srgbClr val="E2E8F0"/>
-            </a:solidFill>
-            <a:prstDash val="solid"/>
-          </a:ln>
-        </p:spPr>
-      </p:sp>
-      <p:sp>
-        <p:nvSpPr>
-          <p:cNvPr id="34" name="Text 32"/>
-          <p:cNvSpPr/>
-          <p:nvPr/>
-        </p:nvSpPr>
-        <p:spPr>
-          <a:xfrm>
-            <a:off x="2651760" y="3840480"/>
-            <a:ext cx="6035040" cy="457200"/>
-          </a:xfrm>
-          <a:prstGeom prst="rect">
-            <a:avLst/>
-          </a:prstGeom>
-          <a:noFill/>
-          <a:ln/>
-        </p:spPr>
-        <p:txBody>
-          <a:bodyPr wrap="square" rtlCol="0" anchor="ctr"/>
-          <a:lstStyle/>
-          <a:p>
-            <a:pPr algn="l" indent="0" marL="0">
-              <a:buNone/>
-            </a:pPr>
-            <a:r>
-              <a:rPr lang="en-US" sz="1200" dirty="0">
-                <a:solidFill>
-                  <a:srgbClr val="0F172A"/>
-                </a:solidFill>
-                <a:latin typeface="Calibri" pitchFamily="34" charset="0"/>
-                <a:ea typeface="Calibri" pitchFamily="34" charset="-122"/>
-                <a:cs typeface="Calibri" pitchFamily="34" charset="-120"/>
-              </a:rPr>
-              <a:t>Something that is not true; a lie.</a:t>
-            </a:r>
-            <a:endParaRPr lang="en-US" sz="1200" dirty="0"/>
-          </a:p>
-        </p:txBody>
-      </p:sp>
-      <p:sp>
-        <p:nvSpPr>
-          <p:cNvPr id="35" name="Shape 33"/>
-          <p:cNvSpPr/>
-          <p:nvPr/>
-        </p:nvSpPr>
-        <p:spPr>
-          <a:xfrm>
-            <a:off x="365760" y="4370832"/>
-            <a:ext cx="2011680" cy="457200"/>
-          </a:xfrm>
-          <a:prstGeom prst="rect">
-            <a:avLst>
-              <a:gd name="adj" fmla="val 12000"/>
-            </a:avLst>
-          </a:prstGeom>
-          <a:solidFill>
-            <a:srgbClr val="EEF2FF"/>
-          </a:solidFill>
-          <a:ln w="12700">
-            <a:solidFill>
-              <a:srgbClr val="6366F1"/>
-            </a:solidFill>
-            <a:prstDash val="solid"/>
-          </a:ln>
-          <a:effectLst>
-            <a:outerShdw sx="100000" sy="100000" kx="0" ky="0" algn="bl" rotWithShape="0" blurRad="101600" dist="38100" dir="8100000">
-              <a:srgbClr val="000000">
-                <a:alpha val="12000"/>
-              </a:srgbClr>
-            </a:outerShdw>
-          </a:effectLst>
-        </p:spPr>
-      </p:sp>
-      <p:sp>
-        <p:nvSpPr>
-          <p:cNvPr id="36" name="Text 34"/>
-          <p:cNvSpPr/>
-          <p:nvPr/>
-        </p:nvSpPr>
-        <p:spPr>
-          <a:xfrm>
-            <a:off x="365760" y="4370832"/>
-            <a:ext cx="2011680" cy="457200"/>
-          </a:xfrm>
-          <a:prstGeom prst="rect">
-            <a:avLst/>
-          </a:prstGeom>
-          <a:noFill/>
-          <a:ln/>
-        </p:spPr>
-        <p:txBody>
-          <a:bodyPr wrap="square" lIns="0" tIns="0" rIns="0" bIns="0" rtlCol="0" anchor="ctr"/>
-          <a:lstStyle/>
-          <a:p>
-            <a:pPr algn="ctr" indent="0" marL="0">
-              <a:buNone/>
-            </a:pPr>
-            <a:r>
-              <a:rPr lang="en-US" sz="1200" b="1" dirty="0">
-                <a:solidFill>
-                  <a:srgbClr val="4338CA"/>
-                </a:solidFill>
-                <a:latin typeface="Trebuchet MS" pitchFamily="34" charset="0"/>
-                <a:ea typeface="Trebuchet MS" pitchFamily="34" charset="-122"/>
-                <a:cs typeface="Trebuchet MS" pitchFamily="34" charset="-120"/>
-              </a:rPr>
-              <a:t>falsehood</a:t>
-            </a:r>
-            <a:endParaRPr lang="en-US" sz="1200" dirty="0"/>
-          </a:p>
-        </p:txBody>
-      </p:sp>
-      <p:sp>
-        <p:nvSpPr>
-          <p:cNvPr id="37" name="Shape 35"/>
-          <p:cNvSpPr/>
-          <p:nvPr/>
-        </p:nvSpPr>
-        <p:spPr>
-          <a:xfrm>
-            <a:off x="2514600" y="4370832"/>
-            <a:ext cx="6263640" cy="457200"/>
-          </a:xfrm>
-          <a:prstGeom prst="rect">
-            <a:avLst>
-              <a:gd name="adj" fmla="val 12000"/>
-            </a:avLst>
-          </a:prstGeom>
-          <a:solidFill>
-            <a:srgbClr val="F8FAFC"/>
-          </a:solidFill>
-          <a:ln w="12700">
-            <a:solidFill>
-              <a:srgbClr val="E2E8F0"/>
-            </a:solidFill>
-            <a:prstDash val="solid"/>
-          </a:ln>
-        </p:spPr>
-      </p:sp>
-      <p:sp>
-        <p:nvSpPr>
-          <p:cNvPr id="38" name="Text 36"/>
-          <p:cNvSpPr/>
-          <p:nvPr/>
-        </p:nvSpPr>
-        <p:spPr>
-          <a:xfrm>
-            <a:off x="2651760" y="4370832"/>
-            <a:ext cx="6035040" cy="457200"/>
-          </a:xfrm>
-          <a:prstGeom prst="rect">
-            <a:avLst/>
-          </a:prstGeom>
-          <a:noFill/>
-          <a:ln/>
-        </p:spPr>
-        <p:txBody>
-          <a:bodyPr wrap="square" rtlCol="0" anchor="ctr"/>
-          <a:lstStyle/>
-          <a:p>
-            <a:pPr algn="l" indent="0" marL="0">
-              <a:buNone/>
-            </a:pPr>
-            <a:r>
-              <a:rPr lang="en-US" sz="1200" dirty="0">
-                <a:solidFill>
-                  <a:srgbClr val="0F172A"/>
-                </a:solidFill>
-                <a:latin typeface="Calibri" pitchFamily="34" charset="0"/>
-                <a:ea typeface="Calibri" pitchFamily="34" charset="-122"/>
-                <a:cs typeface="Calibri" pitchFamily="34" charset="-120"/>
-              </a:rPr>
-              <a:t>The area around where you live and the people who live there.</a:t>
+              <a:t>the chance that something will happen</a:t>
             </a:r>
             <a:endParaRPr lang="en-US" sz="1200" dirty="0"/>
           </a:p>
@@ -41890,7 +40506,7 @@
                 <a:ea typeface="Calibri" pitchFamily="34" charset="-122"/>
                 <a:cs typeface="Calibri" pitchFamily="34" charset="-120"/>
               </a:rPr>
-              <a:t>Word Labs  •  wordlabs.app  •  Suffix: '-hood' = state, condition, or group</a:t>
+              <a:t>Word Labs  •  wordlabs.app  •  Suffix: '-hood' = state of</a:t>
             </a:r>
             <a:endParaRPr lang="en-US" sz="800" dirty="0"/>
           </a:p>
@@ -42093,7 +40709,7 @@
                 <a:ea typeface="Calibri" pitchFamily="34" charset="-122"/>
                 <a:cs typeface="Calibri" pitchFamily="34" charset="-120"/>
               </a:rPr>
-              <a:t>She looked back on her childhood with happy memories of playing in the park.</a:t>
+              <a:t>She spent her childhood exploring the woods near her grandparents' house.</a:t>
             </a:r>
             <a:endParaRPr lang="en-US" sz="1500" dirty="0"/>
           </a:p>
@@ -42257,7 +40873,7 @@
                 <a:ea typeface="Calibri" pitchFamily="34" charset="-122"/>
                 <a:cs typeface="Calibri" pitchFamily="34" charset="-120"/>
               </a:rPr>
-              <a:t>The neighbourhood came together to plant trees along the street.</a:t>
+              <a:t>There's a strong likelihood of rain this afternoon.</a:t>
             </a:r>
             <a:endParaRPr lang="en-US" sz="1500" dirty="0"/>
           </a:p>
@@ -42421,7 +41037,7 @@
                 <a:ea typeface="Calibri" pitchFamily="34" charset="-122"/>
                 <a:cs typeface="Calibri" pitchFamily="34" charset="-120"/>
               </a:rPr>
-              <a:t>Receiving a knighthood is one of the greatest honours in Australia and Britain.</a:t>
+              <a:t>By adulthood, most people have finished school and started work.</a:t>
             </a:r>
             <a:endParaRPr lang="en-US" sz="1500" dirty="0"/>
           </a:p>
